--- a/pitch/BeHistorical-AndersonLogic-AI.pptx
+++ b/pitch/BeHistorical-AndersonLogic-AI.pptx
@@ -15,9 +15,14 @@
     <p:sldId id="263" r:id="rId9"/>
     <p:sldId id="264" r:id="rId10"/>
     <p:sldId id="265" r:id="rId11"/>
+    <p:sldId id="266" r:id="rId12"/>
+    <p:sldId id="267" r:id="rId13"/>
+    <p:sldId id="268" r:id="rId14"/>
+    <p:sldId id="269" r:id="rId15"/>
+    <p:sldId id="270" r:id="rId16"/>
   </p:sldIdLst>
   <p:notesMasterIdLst>
-    <p:notesMasterId r:id="rId12"/>
+    <p:notesMasterId r:id="rId17"/>
   </p:notesMasterIdLst>
   <p:sldSz cx="12192000" cy="6858000"/>
   <p:notesSz cx="6858000" cy="12192000"/>
@@ -623,6 +628,446 @@
             <a:fld id="{F7021451-1387-4CA6-816F-3879F97B5CBC}" type="slidenum">
               <a:rPr lang="en-US"/>
               <a:t>10</a:t>
+            </a:fld>
+            <a:endParaRPr lang="en-US"/>
+          </a:p>
+        </p:txBody>
+      </p:sp>
+    </p:spTree>
+    <p:extLst>
+      <p:ext uri="{BB962C8B-B14F-4D97-AF65-F5344CB8AC3E}">
+        <p14:creationId xmlns:p14="http://schemas.microsoft.com/office/powerpoint/2010/main" val="1024086991"/>
+      </p:ext>
+    </p:extLst>
+  </p:cSld>
+  <p:clrMapOvr>
+    <a:masterClrMapping/>
+  </p:clrMapOvr>
+</p:notes>
+</file>
+
+<file path=ppt/notesSlides/notesSlide11.xml><?xml version="1.0" encoding="utf-8"?>
+<p:notes xmlns:a="http://schemas.openxmlformats.org/drawingml/2006/main" xmlns:r="http://schemas.openxmlformats.org/officeDocument/2006/relationships" xmlns:p="http://schemas.openxmlformats.org/presentationml/2006/main">
+  <p:cSld>
+    <p:spTree>
+      <p:nvGrpSpPr>
+        <p:cNvPr id="1" name=""/>
+        <p:cNvGrpSpPr/>
+        <p:nvPr/>
+      </p:nvGrpSpPr>
+      <p:grpSpPr>
+        <a:xfrm>
+          <a:off x="0" y="0"/>
+          <a:ext cx="0" cy="0"/>
+          <a:chOff x="0" y="0"/>
+          <a:chExt cx="0" cy="0"/>
+        </a:xfrm>
+      </p:grpSpPr>
+      <p:sp>
+        <p:nvSpPr>
+          <p:cNvPr id="2" name="Slide Image Placeholder 1"/>
+          <p:cNvSpPr>
+            <a:spLocks noGrp="1" noRot="1" noChangeAspect="1"/>
+          </p:cNvSpPr>
+          <p:nvPr>
+            <p:ph type="sldImg"/>
+          </p:nvPr>
+        </p:nvSpPr>
+        <p:spPr/>
+      </p:sp>
+      <p:sp>
+        <p:nvSpPr>
+          <p:cNvPr id="3" name="Notes Placeholder 2"/>
+          <p:cNvSpPr>
+            <a:spLocks noGrp="1"/>
+          </p:cNvSpPr>
+          <p:nvPr>
+            <p:ph type="body" idx="1"/>
+          </p:nvPr>
+        </p:nvSpPr>
+        <p:spPr/>
+        <p:txBody>
+          <a:bodyPr/>
+          <a:lstStyle/>
+          <a:p>
+            <a:r>
+              <a:rPr lang="en-US" dirty="0"/>
+              <a:t/>
+            </a:r>
+            <a:endParaRPr lang="en-US" dirty="0"/>
+          </a:p>
+        </p:txBody>
+      </p:sp>
+      <p:sp>
+        <p:nvSpPr>
+          <p:cNvPr id="4" name="Slide Number Placeholder 3"/>
+          <p:cNvSpPr>
+            <a:spLocks noGrp="1"/>
+          </p:cNvSpPr>
+          <p:nvPr>
+            <p:ph type="sldNum" sz="quarter" idx="10"/>
+          </p:nvPr>
+        </p:nvSpPr>
+        <p:spPr/>
+        <p:txBody>
+          <a:bodyPr/>
+          <a:lstStyle/>
+          <a:p>
+            <a:fld id="{F7021451-1387-4CA6-816F-3879F97B5CBC}" type="slidenum">
+              <a:rPr lang="en-US"/>
+              <a:t>11</a:t>
+            </a:fld>
+            <a:endParaRPr lang="en-US"/>
+          </a:p>
+        </p:txBody>
+      </p:sp>
+    </p:spTree>
+    <p:extLst>
+      <p:ext uri="{BB962C8B-B14F-4D97-AF65-F5344CB8AC3E}">
+        <p14:creationId xmlns:p14="http://schemas.microsoft.com/office/powerpoint/2010/main" val="1024086991"/>
+      </p:ext>
+    </p:extLst>
+  </p:cSld>
+  <p:clrMapOvr>
+    <a:masterClrMapping/>
+  </p:clrMapOvr>
+</p:notes>
+</file>
+
+<file path=ppt/notesSlides/notesSlide12.xml><?xml version="1.0" encoding="utf-8"?>
+<p:notes xmlns:a="http://schemas.openxmlformats.org/drawingml/2006/main" xmlns:r="http://schemas.openxmlformats.org/officeDocument/2006/relationships" xmlns:p="http://schemas.openxmlformats.org/presentationml/2006/main">
+  <p:cSld>
+    <p:spTree>
+      <p:nvGrpSpPr>
+        <p:cNvPr id="1" name=""/>
+        <p:cNvGrpSpPr/>
+        <p:nvPr/>
+      </p:nvGrpSpPr>
+      <p:grpSpPr>
+        <a:xfrm>
+          <a:off x="0" y="0"/>
+          <a:ext cx="0" cy="0"/>
+          <a:chOff x="0" y="0"/>
+          <a:chExt cx="0" cy="0"/>
+        </a:xfrm>
+      </p:grpSpPr>
+      <p:sp>
+        <p:nvSpPr>
+          <p:cNvPr id="2" name="Slide Image Placeholder 1"/>
+          <p:cNvSpPr>
+            <a:spLocks noGrp="1" noRot="1" noChangeAspect="1"/>
+          </p:cNvSpPr>
+          <p:nvPr>
+            <p:ph type="sldImg"/>
+          </p:nvPr>
+        </p:nvSpPr>
+        <p:spPr/>
+      </p:sp>
+      <p:sp>
+        <p:nvSpPr>
+          <p:cNvPr id="3" name="Notes Placeholder 2"/>
+          <p:cNvSpPr>
+            <a:spLocks noGrp="1"/>
+          </p:cNvSpPr>
+          <p:nvPr>
+            <p:ph type="body" idx="1"/>
+          </p:nvPr>
+        </p:nvSpPr>
+        <p:spPr/>
+        <p:txBody>
+          <a:bodyPr/>
+          <a:lstStyle/>
+          <a:p>
+            <a:r>
+              <a:rPr lang="en-US" dirty="0"/>
+              <a:t/>
+            </a:r>
+            <a:endParaRPr lang="en-US" dirty="0"/>
+          </a:p>
+        </p:txBody>
+      </p:sp>
+      <p:sp>
+        <p:nvSpPr>
+          <p:cNvPr id="4" name="Slide Number Placeholder 3"/>
+          <p:cNvSpPr>
+            <a:spLocks noGrp="1"/>
+          </p:cNvSpPr>
+          <p:nvPr>
+            <p:ph type="sldNum" sz="quarter" idx="10"/>
+          </p:nvPr>
+        </p:nvSpPr>
+        <p:spPr/>
+        <p:txBody>
+          <a:bodyPr/>
+          <a:lstStyle/>
+          <a:p>
+            <a:fld id="{F7021451-1387-4CA6-816F-3879F97B5CBC}" type="slidenum">
+              <a:rPr lang="en-US"/>
+              <a:t>12</a:t>
+            </a:fld>
+            <a:endParaRPr lang="en-US"/>
+          </a:p>
+        </p:txBody>
+      </p:sp>
+    </p:spTree>
+    <p:extLst>
+      <p:ext uri="{BB962C8B-B14F-4D97-AF65-F5344CB8AC3E}">
+        <p14:creationId xmlns:p14="http://schemas.microsoft.com/office/powerpoint/2010/main" val="1024086991"/>
+      </p:ext>
+    </p:extLst>
+  </p:cSld>
+  <p:clrMapOvr>
+    <a:masterClrMapping/>
+  </p:clrMapOvr>
+</p:notes>
+</file>
+
+<file path=ppt/notesSlides/notesSlide13.xml><?xml version="1.0" encoding="utf-8"?>
+<p:notes xmlns:a="http://schemas.openxmlformats.org/drawingml/2006/main" xmlns:r="http://schemas.openxmlformats.org/officeDocument/2006/relationships" xmlns:p="http://schemas.openxmlformats.org/presentationml/2006/main">
+  <p:cSld>
+    <p:spTree>
+      <p:nvGrpSpPr>
+        <p:cNvPr id="1" name=""/>
+        <p:cNvGrpSpPr/>
+        <p:nvPr/>
+      </p:nvGrpSpPr>
+      <p:grpSpPr>
+        <a:xfrm>
+          <a:off x="0" y="0"/>
+          <a:ext cx="0" cy="0"/>
+          <a:chOff x="0" y="0"/>
+          <a:chExt cx="0" cy="0"/>
+        </a:xfrm>
+      </p:grpSpPr>
+      <p:sp>
+        <p:nvSpPr>
+          <p:cNvPr id="2" name="Slide Image Placeholder 1"/>
+          <p:cNvSpPr>
+            <a:spLocks noGrp="1" noRot="1" noChangeAspect="1"/>
+          </p:cNvSpPr>
+          <p:nvPr>
+            <p:ph type="sldImg"/>
+          </p:nvPr>
+        </p:nvSpPr>
+        <p:spPr/>
+      </p:sp>
+      <p:sp>
+        <p:nvSpPr>
+          <p:cNvPr id="3" name="Notes Placeholder 2"/>
+          <p:cNvSpPr>
+            <a:spLocks noGrp="1"/>
+          </p:cNvSpPr>
+          <p:nvPr>
+            <p:ph type="body" idx="1"/>
+          </p:nvPr>
+        </p:nvSpPr>
+        <p:spPr/>
+        <p:txBody>
+          <a:bodyPr/>
+          <a:lstStyle/>
+          <a:p>
+            <a:r>
+              <a:rPr lang="en-US" dirty="0"/>
+              <a:t/>
+            </a:r>
+            <a:endParaRPr lang="en-US" dirty="0"/>
+          </a:p>
+        </p:txBody>
+      </p:sp>
+      <p:sp>
+        <p:nvSpPr>
+          <p:cNvPr id="4" name="Slide Number Placeholder 3"/>
+          <p:cNvSpPr>
+            <a:spLocks noGrp="1"/>
+          </p:cNvSpPr>
+          <p:nvPr>
+            <p:ph type="sldNum" sz="quarter" idx="10"/>
+          </p:nvPr>
+        </p:nvSpPr>
+        <p:spPr/>
+        <p:txBody>
+          <a:bodyPr/>
+          <a:lstStyle/>
+          <a:p>
+            <a:fld id="{F7021451-1387-4CA6-816F-3879F97B5CBC}" type="slidenum">
+              <a:rPr lang="en-US"/>
+              <a:t>13</a:t>
+            </a:fld>
+            <a:endParaRPr lang="en-US"/>
+          </a:p>
+        </p:txBody>
+      </p:sp>
+    </p:spTree>
+    <p:extLst>
+      <p:ext uri="{BB962C8B-B14F-4D97-AF65-F5344CB8AC3E}">
+        <p14:creationId xmlns:p14="http://schemas.microsoft.com/office/powerpoint/2010/main" val="1024086991"/>
+      </p:ext>
+    </p:extLst>
+  </p:cSld>
+  <p:clrMapOvr>
+    <a:masterClrMapping/>
+  </p:clrMapOvr>
+</p:notes>
+</file>
+
+<file path=ppt/notesSlides/notesSlide14.xml><?xml version="1.0" encoding="utf-8"?>
+<p:notes xmlns:a="http://schemas.openxmlformats.org/drawingml/2006/main" xmlns:r="http://schemas.openxmlformats.org/officeDocument/2006/relationships" xmlns:p="http://schemas.openxmlformats.org/presentationml/2006/main">
+  <p:cSld>
+    <p:spTree>
+      <p:nvGrpSpPr>
+        <p:cNvPr id="1" name=""/>
+        <p:cNvGrpSpPr/>
+        <p:nvPr/>
+      </p:nvGrpSpPr>
+      <p:grpSpPr>
+        <a:xfrm>
+          <a:off x="0" y="0"/>
+          <a:ext cx="0" cy="0"/>
+          <a:chOff x="0" y="0"/>
+          <a:chExt cx="0" cy="0"/>
+        </a:xfrm>
+      </p:grpSpPr>
+      <p:sp>
+        <p:nvSpPr>
+          <p:cNvPr id="2" name="Slide Image Placeholder 1"/>
+          <p:cNvSpPr>
+            <a:spLocks noGrp="1" noRot="1" noChangeAspect="1"/>
+          </p:cNvSpPr>
+          <p:nvPr>
+            <p:ph type="sldImg"/>
+          </p:nvPr>
+        </p:nvSpPr>
+        <p:spPr/>
+      </p:sp>
+      <p:sp>
+        <p:nvSpPr>
+          <p:cNvPr id="3" name="Notes Placeholder 2"/>
+          <p:cNvSpPr>
+            <a:spLocks noGrp="1"/>
+          </p:cNvSpPr>
+          <p:nvPr>
+            <p:ph type="body" idx="1"/>
+          </p:nvPr>
+        </p:nvSpPr>
+        <p:spPr/>
+        <p:txBody>
+          <a:bodyPr/>
+          <a:lstStyle/>
+          <a:p>
+            <a:r>
+              <a:rPr lang="en-US" dirty="0"/>
+              <a:t/>
+            </a:r>
+            <a:endParaRPr lang="en-US" dirty="0"/>
+          </a:p>
+        </p:txBody>
+      </p:sp>
+      <p:sp>
+        <p:nvSpPr>
+          <p:cNvPr id="4" name="Slide Number Placeholder 3"/>
+          <p:cNvSpPr>
+            <a:spLocks noGrp="1"/>
+          </p:cNvSpPr>
+          <p:nvPr>
+            <p:ph type="sldNum" sz="quarter" idx="10"/>
+          </p:nvPr>
+        </p:nvSpPr>
+        <p:spPr/>
+        <p:txBody>
+          <a:bodyPr/>
+          <a:lstStyle/>
+          <a:p>
+            <a:fld id="{F7021451-1387-4CA6-816F-3879F97B5CBC}" type="slidenum">
+              <a:rPr lang="en-US"/>
+              <a:t>14</a:t>
+            </a:fld>
+            <a:endParaRPr lang="en-US"/>
+          </a:p>
+        </p:txBody>
+      </p:sp>
+    </p:spTree>
+    <p:extLst>
+      <p:ext uri="{BB962C8B-B14F-4D97-AF65-F5344CB8AC3E}">
+        <p14:creationId xmlns:p14="http://schemas.microsoft.com/office/powerpoint/2010/main" val="1024086991"/>
+      </p:ext>
+    </p:extLst>
+  </p:cSld>
+  <p:clrMapOvr>
+    <a:masterClrMapping/>
+  </p:clrMapOvr>
+</p:notes>
+</file>
+
+<file path=ppt/notesSlides/notesSlide15.xml><?xml version="1.0" encoding="utf-8"?>
+<p:notes xmlns:a="http://schemas.openxmlformats.org/drawingml/2006/main" xmlns:r="http://schemas.openxmlformats.org/officeDocument/2006/relationships" xmlns:p="http://schemas.openxmlformats.org/presentationml/2006/main">
+  <p:cSld>
+    <p:spTree>
+      <p:nvGrpSpPr>
+        <p:cNvPr id="1" name=""/>
+        <p:cNvGrpSpPr/>
+        <p:nvPr/>
+      </p:nvGrpSpPr>
+      <p:grpSpPr>
+        <a:xfrm>
+          <a:off x="0" y="0"/>
+          <a:ext cx="0" cy="0"/>
+          <a:chOff x="0" y="0"/>
+          <a:chExt cx="0" cy="0"/>
+        </a:xfrm>
+      </p:grpSpPr>
+      <p:sp>
+        <p:nvSpPr>
+          <p:cNvPr id="2" name="Slide Image Placeholder 1"/>
+          <p:cNvSpPr>
+            <a:spLocks noGrp="1" noRot="1" noChangeAspect="1"/>
+          </p:cNvSpPr>
+          <p:nvPr>
+            <p:ph type="sldImg"/>
+          </p:nvPr>
+        </p:nvSpPr>
+        <p:spPr/>
+      </p:sp>
+      <p:sp>
+        <p:nvSpPr>
+          <p:cNvPr id="3" name="Notes Placeholder 2"/>
+          <p:cNvSpPr>
+            <a:spLocks noGrp="1"/>
+          </p:cNvSpPr>
+          <p:nvPr>
+            <p:ph type="body" idx="1"/>
+          </p:nvPr>
+        </p:nvSpPr>
+        <p:spPr/>
+        <p:txBody>
+          <a:bodyPr/>
+          <a:lstStyle/>
+          <a:p>
+            <a:r>
+              <a:rPr lang="en-US" dirty="0"/>
+              <a:t/>
+            </a:r>
+            <a:endParaRPr lang="en-US" dirty="0"/>
+          </a:p>
+        </p:txBody>
+      </p:sp>
+      <p:sp>
+        <p:nvSpPr>
+          <p:cNvPr id="4" name="Slide Number Placeholder 3"/>
+          <p:cNvSpPr>
+            <a:spLocks noGrp="1"/>
+          </p:cNvSpPr>
+          <p:nvPr>
+            <p:ph type="sldNum" sz="quarter" idx="10"/>
+          </p:nvPr>
+        </p:nvSpPr>
+        <p:spPr/>
+        <p:txBody>
+          <a:bodyPr/>
+          <a:lstStyle/>
+          <a:p>
+            <a:fld id="{F7021451-1387-4CA6-816F-3879F97B5CBC}" type="slidenum">
+              <a:rPr lang="en-US"/>
+              <a:t>15</a:t>
             </a:fld>
             <a:endParaRPr lang="en-US"/>
           </a:p>
@@ -1737,7 +2182,7 @@
         </p:nvSpPr>
         <p:spPr>
           <a:xfrm>
-            <a:off x="640080" y="1417320"/>
+            <a:off x="640080" y="1371600"/>
             <a:ext cx="7315200" cy="365760"/>
           </a:xfrm>
           <a:prstGeom prst="rect">
@@ -1776,7 +2221,7 @@
         </p:nvSpPr>
         <p:spPr>
           <a:xfrm>
-            <a:off x="566928" y="1874520"/>
+            <a:off x="566928" y="1828800"/>
             <a:ext cx="8229600" cy="1371600"/>
           </a:xfrm>
           <a:prstGeom prst="rect">
@@ -1793,7 +2238,7 @@
               <a:buNone/>
             </a:pPr>
             <a:r>
-              <a:rPr lang="en-US" sz="7200" b="1" dirty="0">
+              <a:rPr lang="en-US" sz="7000" b="1" dirty="0">
                 <a:solidFill>
                   <a:srgbClr val="FFFFFF"/>
                 </a:solidFill>
@@ -1807,7 +2252,7 @@
               <a:buNone/>
             </a:pPr>
             <a:r>
-              <a:rPr lang="en-US" sz="7200" b="1" dirty="0">
+              <a:rPr lang="en-US" sz="7000" b="1" dirty="0">
                 <a:solidFill>
                   <a:srgbClr val="C9A24B"/>
                 </a:solidFill>
@@ -1817,7 +2262,7 @@
               </a:rPr>
               <a:t>Historical</a:t>
             </a:r>
-            <a:endParaRPr lang="en-US" sz="7200" dirty="0"/>
+            <a:endParaRPr lang="en-US" sz="7000" dirty="0"/>
           </a:p>
         </p:txBody>
       </p:sp>
@@ -1829,7 +2274,7 @@
         </p:nvSpPr>
         <p:spPr>
           <a:xfrm>
-            <a:off x="640080" y="3429000"/>
+            <a:off x="640080" y="3383280"/>
             <a:ext cx="7223760" cy="822960"/>
           </a:xfrm>
           <a:prstGeom prst="rect">
@@ -1846,7 +2291,7 @@
               <a:buNone/>
             </a:pPr>
             <a:r>
-              <a:rPr lang="en-US" sz="2100" dirty="0">
+              <a:rPr lang="en-US" sz="2000" dirty="0">
                 <a:solidFill>
                   <a:srgbClr val="F4EEE2"/>
                 </a:solidFill>
@@ -1856,7 +2301,7 @@
               </a:rPr>
               <a:t>A complete, AI-integrated platform for teaching AP World History.</a:t>
             </a:r>
-            <a:endParaRPr lang="en-US" sz="2100" dirty="0"/>
+            <a:endParaRPr lang="en-US" sz="2000" dirty="0"/>
           </a:p>
         </p:txBody>
       </p:sp>
@@ -1868,8 +2313,8 @@
         </p:nvSpPr>
         <p:spPr>
           <a:xfrm>
-            <a:off x="640080" y="4224528"/>
-            <a:ext cx="7040880" cy="731520"/>
+            <a:off x="640080" y="4160520"/>
+            <a:ext cx="7040880" cy="822960"/>
           </a:xfrm>
           <a:prstGeom prst="rect">
             <a:avLst/>
@@ -1885,7 +2330,7 @@
               <a:buNone/>
             </a:pPr>
             <a:r>
-              <a:rPr lang="en-US" sz="1400" i="1" dirty="0">
+              <a:rPr lang="en-US" sz="1350" i="1" dirty="0">
                 <a:solidFill>
                   <a:srgbClr val="9AA0A6"/>
                 </a:solidFill>
@@ -1893,9 +2338,9 @@
                 <a:ea typeface="Calibri" pitchFamily="34" charset="-122"/>
                 <a:cs typeface="Calibri" pitchFamily="34" charset="-120"/>
               </a:rPr>
-              <a:t>One consistent learning path. Ten modules. Every topic. Powered by AI that coaches — never completes.</a:t>
-            </a:r>
-            <a:endParaRPr lang="en-US" sz="1400" dirty="0"/>
+              <a:t>One learning path. Ten modules. Personalized study guides, a family newsletter, and a teacher command center — all from one system.</a:t>
+            </a:r>
+            <a:endParaRPr lang="en-US" sz="1350" dirty="0"/>
           </a:p>
         </p:txBody>
       </p:sp>
@@ -1907,7 +2352,7 @@
         </p:nvSpPr>
         <p:spPr>
           <a:xfrm>
-            <a:off x="640080" y="5230368"/>
+            <a:off x="640080" y="5257800"/>
             <a:ext cx="164592" cy="164592"/>
           </a:xfrm>
           <a:prstGeom prst="ellipse">
@@ -1927,7 +2372,7 @@
         </p:nvSpPr>
         <p:spPr>
           <a:xfrm>
-            <a:off x="914400" y="5120640"/>
+            <a:off x="914400" y="5148072"/>
             <a:ext cx="7315200" cy="365760"/>
           </a:xfrm>
           <a:prstGeom prst="rect">
@@ -1991,7 +2436,7 @@
                 <a:ea typeface="Consolas" pitchFamily="34" charset="-122"/>
                 <a:cs typeface="Consolas" pitchFamily="34" charset="-120"/>
               </a:rPr>
-              <a:t>01 / 10</a:t>
+              <a:t>01 / 15</a:t>
             </a:r>
             <a:endParaRPr lang="en-US" sz="1100" dirty="0"/>
           </a:p>
@@ -2037,188 +2482,828 @@
         </p:nvSpPr>
         <p:spPr>
           <a:xfrm>
-            <a:off x="8138160" y="1005840"/>
-            <a:ext cx="3840480" cy="822960"/>
-          </a:xfrm>
-          <a:prstGeom prst="rect">
-            <a:avLst/>
-          </a:prstGeom>
-          <a:noFill/>
-          <a:ln/>
-        </p:spPr>
-        <p:txBody>
-          <a:bodyPr wrap="square" lIns="0" tIns="0" rIns="0" bIns="0" rtlCol="0" anchor="ctr"/>
-          <a:lstStyle/>
-          <a:p>
-            <a:pPr algn="r" indent="0" marL="0">
-              <a:buNone/>
-            </a:pPr>
-            <a:r>
-              <a:rPr lang="en-US" sz="2000" i="1" dirty="0">
-                <a:solidFill>
-                  <a:srgbClr val="2E3236"/>
+            <a:off x="640080" y="502920"/>
+            <a:ext cx="8229600" cy="274320"/>
+          </a:xfrm>
+          <a:prstGeom prst="rect">
+            <a:avLst/>
+          </a:prstGeom>
+          <a:noFill/>
+          <a:ln/>
+        </p:spPr>
+        <p:txBody>
+          <a:bodyPr wrap="square" lIns="0" tIns="0" rIns="0" bIns="0" rtlCol="0" anchor="ctr"/>
+          <a:lstStyle/>
+          <a:p>
+            <a:pPr algn="l" indent="0" marL="0">
+              <a:buNone/>
+            </a:pPr>
+            <a:r>
+              <a:rPr lang="en-US" sz="1200" b="1" spc="300" kern="0" dirty="0">
+                <a:solidFill>
+                  <a:srgbClr val="C9A24B"/>
+                </a:solidFill>
+                <a:latin typeface="Consolas" pitchFamily="34" charset="0"/>
+                <a:ea typeface="Consolas" pitchFamily="34" charset="-122"/>
+                <a:cs typeface="Consolas" pitchFamily="34" charset="-120"/>
+              </a:rPr>
+              <a:t>FOR THE TEACHER</a:t>
+            </a:r>
+            <a:endParaRPr lang="en-US" sz="1200" dirty="0"/>
+          </a:p>
+        </p:txBody>
+      </p:sp>
+      <p:sp>
+        <p:nvSpPr>
+          <p:cNvPr id="3" name="Shape 1"/>
+          <p:cNvSpPr/>
+          <p:nvPr/>
+        </p:nvSpPr>
+        <p:spPr>
+          <a:xfrm>
+            <a:off x="10093147" y="475488"/>
+            <a:ext cx="1519733" cy="310896"/>
+          </a:xfrm>
+          <a:prstGeom prst="roundRect">
+            <a:avLst>
+              <a:gd name="adj" fmla="val 50000"/>
+            </a:avLst>
+          </a:prstGeom>
+          <a:solidFill>
+            <a:srgbClr val="21301F"/>
+          </a:solidFill>
+          <a:ln w="12700">
+            <a:solidFill>
+              <a:srgbClr val="5AA668"/>
+            </a:solidFill>
+            <a:prstDash val="solid"/>
+          </a:ln>
+        </p:spPr>
+      </p:sp>
+      <p:sp>
+        <p:nvSpPr>
+          <p:cNvPr id="4" name="Text 2"/>
+          <p:cNvSpPr/>
+          <p:nvPr/>
+        </p:nvSpPr>
+        <p:spPr>
+          <a:xfrm>
+            <a:off x="10093147" y="475488"/>
+            <a:ext cx="1519733" cy="310896"/>
+          </a:xfrm>
+          <a:prstGeom prst="rect">
+            <a:avLst/>
+          </a:prstGeom>
+          <a:noFill/>
+          <a:ln/>
+        </p:spPr>
+        <p:txBody>
+          <a:bodyPr wrap="square" lIns="0" tIns="0" rIns="0" bIns="0" rtlCol="0" anchor="ctr"/>
+          <a:lstStyle/>
+          <a:p>
+            <a:pPr algn="ctr" indent="0" marL="0">
+              <a:buNone/>
+            </a:pPr>
+            <a:r>
+              <a:rPr lang="en-US" sz="1000" b="1" spc="150" kern="0" dirty="0">
+                <a:solidFill>
+                  <a:srgbClr val="7CC98A"/>
+                </a:solidFill>
+                <a:latin typeface="Consolas" pitchFamily="34" charset="0"/>
+                <a:ea typeface="Consolas" pitchFamily="34" charset="-122"/>
+                <a:cs typeface="Consolas" pitchFamily="34" charset="-120"/>
+              </a:rPr>
+              <a:t>LIVE PROTOTYPE</a:t>
+            </a:r>
+            <a:endParaRPr lang="en-US" sz="1000" dirty="0"/>
+          </a:p>
+        </p:txBody>
+      </p:sp>
+      <p:sp>
+        <p:nvSpPr>
+          <p:cNvPr id="5" name="Text 3"/>
+          <p:cNvSpPr/>
+          <p:nvPr/>
+        </p:nvSpPr>
+        <p:spPr>
+          <a:xfrm>
+            <a:off x="603504" y="896112"/>
+            <a:ext cx="10972800" cy="640080"/>
+          </a:xfrm>
+          <a:prstGeom prst="rect">
+            <a:avLst/>
+          </a:prstGeom>
+          <a:noFill/>
+          <a:ln/>
+        </p:spPr>
+        <p:txBody>
+          <a:bodyPr wrap="square" lIns="0" tIns="0" rIns="0" bIns="0" rtlCol="0" anchor="ctr"/>
+          <a:lstStyle/>
+          <a:p>
+            <a:pPr indent="0" marL="0">
+              <a:buNone/>
+            </a:pPr>
+            <a:r>
+              <a:rPr lang="en-US" sz="2800" b="1" dirty="0">
+                <a:solidFill>
+                  <a:srgbClr val="FFFFFF"/>
                 </a:solidFill>
                 <a:latin typeface="Bookman Old Style" pitchFamily="34" charset="0"/>
                 <a:ea typeface="Bookman Old Style" pitchFamily="34" charset="-122"/>
                 <a:cs typeface="Bookman Old Style" pitchFamily="34" charset="-120"/>
               </a:rPr>
-              <a:t>BeReady</a:t>
-            </a:r>
-            <a:endParaRPr lang="en-US" sz="2000" dirty="0"/>
-          </a:p>
-        </p:txBody>
-      </p:sp>
-      <p:sp>
-        <p:nvSpPr>
-          <p:cNvPr id="3" name="Text 1"/>
-          <p:cNvSpPr/>
-          <p:nvPr/>
-        </p:nvSpPr>
-        <p:spPr>
-          <a:xfrm>
-            <a:off x="8138160" y="2194560"/>
-            <a:ext cx="3840480" cy="822960"/>
-          </a:xfrm>
-          <a:prstGeom prst="rect">
-            <a:avLst/>
-          </a:prstGeom>
-          <a:noFill/>
-          <a:ln/>
-        </p:spPr>
-        <p:txBody>
-          <a:bodyPr wrap="square" lIns="0" tIns="0" rIns="0" bIns="0" rtlCol="0" anchor="ctr"/>
-          <a:lstStyle/>
-          <a:p>
-            <a:pPr algn="r" indent="0" marL="0">
-              <a:buNone/>
-            </a:pPr>
-            <a:r>
-              <a:rPr lang="en-US" sz="2000" i="1" dirty="0">
-                <a:solidFill>
-                  <a:srgbClr val="2E3236"/>
+              <a:t>The Teacher Hub — a live read on the class</a:t>
+            </a:r>
+            <a:endParaRPr lang="en-US" sz="2800" dirty="0"/>
+          </a:p>
+        </p:txBody>
+      </p:sp>
+      <p:sp>
+        <p:nvSpPr>
+          <p:cNvPr id="6" name="Shape 4"/>
+          <p:cNvSpPr/>
+          <p:nvPr/>
+        </p:nvSpPr>
+        <p:spPr>
+          <a:xfrm>
+            <a:off x="594360" y="1645920"/>
+            <a:ext cx="5577840" cy="3590642"/>
+          </a:xfrm>
+          <a:prstGeom prst="roundRect">
+            <a:avLst>
+              <a:gd name="adj" fmla="val 1528"/>
+            </a:avLst>
+          </a:prstGeom>
+          <a:solidFill>
+            <a:srgbClr val="0E0F10"/>
+          </a:solidFill>
+          <a:ln w="9525">
+            <a:solidFill>
+              <a:srgbClr val="3A3F45"/>
+            </a:solidFill>
+            <a:prstDash val="solid"/>
+          </a:ln>
+          <a:effectLst>
+            <a:outerShdw sx="100000" sy="100000" kx="0" ky="0" algn="bl" rotWithShape="0" blurRad="152400" dist="76200" dir="5400000">
+              <a:srgbClr val="000000">
+                <a:alpha val="45000"/>
+              </a:srgbClr>
+            </a:outerShdw>
+          </a:effectLst>
+        </p:spPr>
+      </p:sp>
+      <p:sp>
+        <p:nvSpPr>
+          <p:cNvPr id="7" name="Shape 5"/>
+          <p:cNvSpPr/>
+          <p:nvPr/>
+        </p:nvSpPr>
+        <p:spPr>
+          <a:xfrm>
+            <a:off x="640080" y="1691640"/>
+            <a:ext cx="5486400" cy="256032"/>
+          </a:xfrm>
+          <a:prstGeom prst="rect">
+            <a:avLst/>
+          </a:prstGeom>
+          <a:solidFill>
+            <a:srgbClr val="191C1F"/>
+          </a:solidFill>
+          <a:ln/>
+        </p:spPr>
+      </p:sp>
+      <p:sp>
+        <p:nvSpPr>
+          <p:cNvPr id="8" name="Shape 6"/>
+          <p:cNvSpPr/>
+          <p:nvPr/>
+        </p:nvSpPr>
+        <p:spPr>
+          <a:xfrm>
+            <a:off x="768096" y="1778508"/>
+            <a:ext cx="82296" cy="82296"/>
+          </a:xfrm>
+          <a:prstGeom prst="ellipse">
+            <a:avLst/>
+          </a:prstGeom>
+          <a:solidFill>
+            <a:srgbClr val="C9564E"/>
+          </a:solidFill>
+          <a:ln/>
+        </p:spPr>
+      </p:sp>
+      <p:sp>
+        <p:nvSpPr>
+          <p:cNvPr id="9" name="Shape 7"/>
+          <p:cNvSpPr/>
+          <p:nvPr/>
+        </p:nvSpPr>
+        <p:spPr>
+          <a:xfrm>
+            <a:off x="896112" y="1778508"/>
+            <a:ext cx="82296" cy="82296"/>
+          </a:xfrm>
+          <a:prstGeom prst="ellipse">
+            <a:avLst/>
+          </a:prstGeom>
+          <a:solidFill>
+            <a:srgbClr val="D8A441"/>
+          </a:solidFill>
+          <a:ln/>
+        </p:spPr>
+      </p:sp>
+      <p:sp>
+        <p:nvSpPr>
+          <p:cNvPr id="10" name="Shape 8"/>
+          <p:cNvSpPr/>
+          <p:nvPr/>
+        </p:nvSpPr>
+        <p:spPr>
+          <a:xfrm>
+            <a:off x="1024128" y="1778508"/>
+            <a:ext cx="82296" cy="82296"/>
+          </a:xfrm>
+          <a:prstGeom prst="ellipse">
+            <a:avLst/>
+          </a:prstGeom>
+          <a:solidFill>
+            <a:srgbClr val="5AA668"/>
+          </a:solidFill>
+          <a:ln/>
+        </p:spPr>
+      </p:sp>
+      <p:sp>
+        <p:nvSpPr>
+          <p:cNvPr id="11" name="Text 9"/>
+          <p:cNvSpPr/>
+          <p:nvPr/>
+        </p:nvSpPr>
+        <p:spPr>
+          <a:xfrm>
+            <a:off x="1207008" y="1691640"/>
+            <a:ext cx="4846320" cy="256032"/>
+          </a:xfrm>
+          <a:prstGeom prst="rect">
+            <a:avLst/>
+          </a:prstGeom>
+          <a:noFill/>
+          <a:ln/>
+        </p:spPr>
+        <p:txBody>
+          <a:bodyPr wrap="square" lIns="0" tIns="0" rIns="0" bIns="0" rtlCol="0" anchor="ctr"/>
+          <a:lstStyle/>
+          <a:p>
+            <a:pPr algn="l" indent="0" marL="0">
+              <a:buNone/>
+            </a:pPr>
+            <a:r>
+              <a:rPr lang="en-US" sz="850" dirty="0">
+                <a:solidFill>
+                  <a:srgbClr val="8B9199"/>
+                </a:solidFill>
+                <a:latin typeface="Consolas" pitchFamily="34" charset="0"/>
+                <a:ea typeface="Consolas" pitchFamily="34" charset="-122"/>
+                <a:cs typeface="Consolas" pitchFamily="34" charset="-120"/>
+              </a:rPr>
+              <a:t>behistorical · teacher hub · topic 1.1</a:t>
+            </a:r>
+            <a:endParaRPr lang="en-US" sz="850" dirty="0"/>
+          </a:p>
+        </p:txBody>
+      </p:sp>
+      <p:pic>
+        <p:nvPicPr>
+          <p:cNvPr id="12" name="Image 0" descr="preencoded.png">    </p:cNvPr>
+          <p:cNvPicPr>
+            <a:picLocks noChangeAspect="1"/>
+          </p:cNvPicPr>
+          <p:nvPr/>
+        </p:nvPicPr>
+        <p:blipFill>
+          <a:blip r:embed="rId1"/>
+          <a:stretch>
+            <a:fillRect/>
+          </a:stretch>
+        </p:blipFill>
+        <p:spPr>
+          <a:xfrm>
+            <a:off x="640080" y="1947672"/>
+            <a:ext cx="5486400" cy="3243170"/>
+          </a:xfrm>
+          <a:prstGeom prst="rect">
+            <a:avLst/>
+          </a:prstGeom>
+        </p:spPr>
+      </p:pic>
+      <p:sp>
+        <p:nvSpPr>
+          <p:cNvPr id="13" name="Text 10"/>
+          <p:cNvSpPr/>
+          <p:nvPr/>
+        </p:nvSpPr>
+        <p:spPr>
+          <a:xfrm>
+            <a:off x="640080" y="5300570"/>
+            <a:ext cx="5577840" cy="274320"/>
+          </a:xfrm>
+          <a:prstGeom prst="rect">
+            <a:avLst/>
+          </a:prstGeom>
+          <a:noFill/>
+          <a:ln/>
+        </p:spPr>
+        <p:txBody>
+          <a:bodyPr wrap="square" lIns="0" tIns="0" rIns="0" bIns="0" rtlCol="0" anchor="ctr"/>
+          <a:lstStyle/>
+          <a:p>
+            <a:pPr indent="0" marL="0">
+              <a:buNone/>
+            </a:pPr>
+            <a:r>
+              <a:rPr lang="en-US" sz="950" dirty="0">
+                <a:solidFill>
+                  <a:srgbClr val="9AA0A6"/>
+                </a:solidFill>
+                <a:latin typeface="Consolas" pitchFamily="34" charset="0"/>
+                <a:ea typeface="Consolas" pitchFamily="34" charset="-122"/>
+                <a:cs typeface="Consolas" pitchFamily="34" charset="-120"/>
+              </a:rPr>
+              <a:t>Working prototype · Topic 1.1 · rule-based Apps Script backend</a:t>
+            </a:r>
+            <a:endParaRPr lang="en-US" sz="950" dirty="0"/>
+          </a:p>
+        </p:txBody>
+      </p:sp>
+      <p:sp>
+        <p:nvSpPr>
+          <p:cNvPr id="14" name="Text 11"/>
+          <p:cNvSpPr/>
+          <p:nvPr/>
+        </p:nvSpPr>
+        <p:spPr>
+          <a:xfrm>
+            <a:off x="6492240" y="1737360"/>
+            <a:ext cx="5029200" cy="292608"/>
+          </a:xfrm>
+          <a:prstGeom prst="rect">
+            <a:avLst/>
+          </a:prstGeom>
+          <a:noFill/>
+          <a:ln/>
+        </p:spPr>
+        <p:txBody>
+          <a:bodyPr wrap="square" lIns="0" tIns="0" rIns="0" bIns="0" rtlCol="0" anchor="ctr"/>
+          <a:lstStyle/>
+          <a:p>
+            <a:pPr indent="0" marL="0">
+              <a:buNone/>
+            </a:pPr>
+            <a:r>
+              <a:rPr lang="en-US" sz="1600" b="1" dirty="0">
+                <a:solidFill>
+                  <a:srgbClr val="E4C878"/>
                 </a:solidFill>
                 <a:latin typeface="Bookman Old Style" pitchFamily="34" charset="0"/>
                 <a:ea typeface="Bookman Old Style" pitchFamily="34" charset="-122"/>
                 <a:cs typeface="Bookman Old Style" pitchFamily="34" charset="-120"/>
               </a:rPr>
-              <a:t>BeSurreal</a:t>
-            </a:r>
-            <a:endParaRPr lang="en-US" sz="2000" dirty="0"/>
-          </a:p>
-        </p:txBody>
-      </p:sp>
-      <p:sp>
-        <p:nvSpPr>
-          <p:cNvPr id="4" name="Text 2"/>
-          <p:cNvSpPr/>
-          <p:nvPr/>
-        </p:nvSpPr>
-        <p:spPr>
-          <a:xfrm>
-            <a:off x="8138160" y="3383280"/>
-            <a:ext cx="3840480" cy="822960"/>
-          </a:xfrm>
-          <a:prstGeom prst="rect">
-            <a:avLst/>
-          </a:prstGeom>
-          <a:noFill/>
-          <a:ln/>
-        </p:spPr>
-        <p:txBody>
-          <a:bodyPr wrap="square" lIns="0" tIns="0" rIns="0" bIns="0" rtlCol="0" anchor="ctr"/>
-          <a:lstStyle/>
-          <a:p>
-            <a:pPr algn="r" indent="0" marL="0">
-              <a:buNone/>
-            </a:pPr>
-            <a:r>
-              <a:rPr lang="en-US" sz="2000" i="1" dirty="0">
-                <a:solidFill>
-                  <a:srgbClr val="2E3236"/>
+              <a:t>Class Pulse</a:t>
+            </a:r>
+            <a:endParaRPr lang="en-US" sz="1600" dirty="0"/>
+          </a:p>
+        </p:txBody>
+      </p:sp>
+      <p:sp>
+        <p:nvSpPr>
+          <p:cNvPr id="15" name="Text 12"/>
+          <p:cNvSpPr/>
+          <p:nvPr/>
+        </p:nvSpPr>
+        <p:spPr>
+          <a:xfrm>
+            <a:off x="6492240" y="2020824"/>
+            <a:ext cx="5029200" cy="548640"/>
+          </a:xfrm>
+          <a:prstGeom prst="rect">
+            <a:avLst/>
+          </a:prstGeom>
+          <a:noFill/>
+          <a:ln/>
+        </p:spPr>
+        <p:txBody>
+          <a:bodyPr wrap="square" lIns="0" tIns="0" rIns="0" bIns="0" rtlCol="0" anchor="t"/>
+          <a:lstStyle/>
+          <a:p>
+            <a:pPr indent="0" marL="0">
+              <a:buNone/>
+            </a:pPr>
+            <a:r>
+              <a:rPr lang="en-US" sz="1250" dirty="0">
+                <a:solidFill>
+                  <a:srgbClr val="E9E2D2"/>
+                </a:solidFill>
+                <a:latin typeface="Calibri" pitchFamily="34" charset="0"/>
+                <a:ea typeface="Calibri" pitchFamily="34" charset="-122"/>
+                <a:cs typeface="Calibri" pitchFamily="34" charset="-120"/>
+              </a:rPr>
+              <a:t>Response count, average confidence, and how many students need support — at a glance.</a:t>
+            </a:r>
+            <a:endParaRPr lang="en-US" sz="1250" dirty="0"/>
+          </a:p>
+        </p:txBody>
+      </p:sp>
+      <p:sp>
+        <p:nvSpPr>
+          <p:cNvPr id="16" name="Text 13"/>
+          <p:cNvSpPr/>
+          <p:nvPr/>
+        </p:nvSpPr>
+        <p:spPr>
+          <a:xfrm>
+            <a:off x="6492240" y="2651760"/>
+            <a:ext cx="5029200" cy="292608"/>
+          </a:xfrm>
+          <a:prstGeom prst="rect">
+            <a:avLst/>
+          </a:prstGeom>
+          <a:noFill/>
+          <a:ln/>
+        </p:spPr>
+        <p:txBody>
+          <a:bodyPr wrap="square" lIns="0" tIns="0" rIns="0" bIns="0" rtlCol="0" anchor="ctr"/>
+          <a:lstStyle/>
+          <a:p>
+            <a:pPr indent="0" marL="0">
+              <a:buNone/>
+            </a:pPr>
+            <a:r>
+              <a:rPr lang="en-US" sz="1600" b="1" dirty="0">
+                <a:solidFill>
+                  <a:srgbClr val="E4C878"/>
                 </a:solidFill>
                 <a:latin typeface="Bookman Old Style" pitchFamily="34" charset="0"/>
                 <a:ea typeface="Bookman Old Style" pitchFamily="34" charset="-122"/>
                 <a:cs typeface="Bookman Old Style" pitchFamily="34" charset="-120"/>
               </a:rPr>
-              <a:t>BeInTheRoom</a:t>
-            </a:r>
-            <a:endParaRPr lang="en-US" sz="2000" dirty="0"/>
-          </a:p>
-        </p:txBody>
-      </p:sp>
-      <p:sp>
-        <p:nvSpPr>
-          <p:cNvPr id="5" name="Text 3"/>
-          <p:cNvSpPr/>
-          <p:nvPr/>
-        </p:nvSpPr>
-        <p:spPr>
-          <a:xfrm>
-            <a:off x="8138160" y="4572000"/>
-            <a:ext cx="3840480" cy="822960"/>
-          </a:xfrm>
-          <a:prstGeom prst="rect">
-            <a:avLst/>
-          </a:prstGeom>
-          <a:noFill/>
-          <a:ln/>
-        </p:spPr>
-        <p:txBody>
-          <a:bodyPr wrap="square" lIns="0" tIns="0" rIns="0" bIns="0" rtlCol="0" anchor="ctr"/>
-          <a:lstStyle/>
-          <a:p>
-            <a:pPr algn="r" indent="0" marL="0">
-              <a:buNone/>
-            </a:pPr>
-            <a:r>
-              <a:rPr lang="en-US" sz="2000" i="1" dirty="0">
-                <a:solidFill>
-                  <a:srgbClr val="2E3236"/>
+              <a:t>Students needing follow-up</a:t>
+            </a:r>
+            <a:endParaRPr lang="en-US" sz="1600" dirty="0"/>
+          </a:p>
+        </p:txBody>
+      </p:sp>
+      <p:sp>
+        <p:nvSpPr>
+          <p:cNvPr id="17" name="Text 14"/>
+          <p:cNvSpPr/>
+          <p:nvPr/>
+        </p:nvSpPr>
+        <p:spPr>
+          <a:xfrm>
+            <a:off x="6492240" y="2935224"/>
+            <a:ext cx="5029200" cy="548640"/>
+          </a:xfrm>
+          <a:prstGeom prst="rect">
+            <a:avLst/>
+          </a:prstGeom>
+          <a:noFill/>
+          <a:ln/>
+        </p:spPr>
+        <p:txBody>
+          <a:bodyPr wrap="square" lIns="0" tIns="0" rIns="0" bIns="0" rtlCol="0" anchor="t"/>
+          <a:lstStyle/>
+          <a:p>
+            <a:pPr indent="0" marL="0">
+              <a:buNone/>
+            </a:pPr>
+            <a:r>
+              <a:rPr lang="en-US" sz="1250" dirty="0">
+                <a:solidFill>
+                  <a:srgbClr val="E9E2D2"/>
+                </a:solidFill>
+                <a:latin typeface="Calibri" pitchFamily="34" charset="0"/>
+                <a:ea typeface="Calibri" pitchFamily="34" charset="-122"/>
+                <a:cs typeface="Calibri" pitchFamily="34" charset="-120"/>
+              </a:rPr>
+              <a:t>Per-student cards with the issue, next step, and a High / Medium / Low risk badge.</a:t>
+            </a:r>
+            <a:endParaRPr lang="en-US" sz="1250" dirty="0"/>
+          </a:p>
+        </p:txBody>
+      </p:sp>
+      <p:sp>
+        <p:nvSpPr>
+          <p:cNvPr id="18" name="Text 15"/>
+          <p:cNvSpPr/>
+          <p:nvPr/>
+        </p:nvSpPr>
+        <p:spPr>
+          <a:xfrm>
+            <a:off x="6492240" y="3566160"/>
+            <a:ext cx="5029200" cy="292608"/>
+          </a:xfrm>
+          <a:prstGeom prst="rect">
+            <a:avLst/>
+          </a:prstGeom>
+          <a:noFill/>
+          <a:ln/>
+        </p:spPr>
+        <p:txBody>
+          <a:bodyPr wrap="square" lIns="0" tIns="0" rIns="0" bIns="0" rtlCol="0" anchor="ctr"/>
+          <a:lstStyle/>
+          <a:p>
+            <a:pPr indent="0" marL="0">
+              <a:buNone/>
+            </a:pPr>
+            <a:r>
+              <a:rPr lang="en-US" sz="1600" b="1" dirty="0">
+                <a:solidFill>
+                  <a:srgbClr val="E4C878"/>
                 </a:solidFill>
                 <a:latin typeface="Bookman Old Style" pitchFamily="34" charset="0"/>
                 <a:ea typeface="Bookman Old Style" pitchFamily="34" charset="-122"/>
                 <a:cs typeface="Bookman Old Style" pitchFamily="34" charset="-120"/>
               </a:rPr>
-              <a:t>BeHistorical</a:t>
-            </a:r>
-            <a:endParaRPr lang="en-US" sz="2000" dirty="0"/>
-          </a:p>
-        </p:txBody>
-      </p:sp>
-      <p:sp>
-        <p:nvSpPr>
-          <p:cNvPr id="6" name="Text 4"/>
-          <p:cNvSpPr/>
-          <p:nvPr/>
-        </p:nvSpPr>
-        <p:spPr>
-          <a:xfrm>
-            <a:off x="640080" y="685800"/>
-            <a:ext cx="8229600" cy="365760"/>
-          </a:xfrm>
-          <a:prstGeom prst="rect">
-            <a:avLst/>
-          </a:prstGeom>
-          <a:noFill/>
-          <a:ln/>
-        </p:spPr>
-        <p:txBody>
-          <a:bodyPr wrap="square" lIns="0" tIns="0" rIns="0" bIns="0" rtlCol="0" anchor="ctr"/>
+              <a:t>Reteach recommendations</a:t>
+            </a:r>
+            <a:endParaRPr lang="en-US" sz="1600" dirty="0"/>
+          </a:p>
+        </p:txBody>
+      </p:sp>
+      <p:sp>
+        <p:nvSpPr>
+          <p:cNvPr id="19" name="Text 16"/>
+          <p:cNvSpPr/>
+          <p:nvPr/>
+        </p:nvSpPr>
+        <p:spPr>
+          <a:xfrm>
+            <a:off x="6492240" y="3849624"/>
+            <a:ext cx="5029200" cy="548640"/>
+          </a:xfrm>
+          <a:prstGeom prst="rect">
+            <a:avLst/>
+          </a:prstGeom>
+          <a:noFill/>
+          <a:ln/>
+        </p:spPr>
+        <p:txBody>
+          <a:bodyPr wrap="square" lIns="0" tIns="0" rIns="0" bIns="0" rtlCol="0" anchor="t"/>
           <a:lstStyle/>
           <a:p>
             <a:pPr indent="0" marL="0">
               <a:buNone/>
             </a:pPr>
             <a:r>
-              <a:rPr lang="en-US" sz="1200" b="1" spc="400" kern="0" dirty="0">
+              <a:rPr lang="en-US" sz="1250" dirty="0">
+                <a:solidFill>
+                  <a:srgbClr val="E9E2D2"/>
+                </a:solidFill>
+                <a:latin typeface="Calibri" pitchFamily="34" charset="0"/>
+                <a:ea typeface="Calibri" pitchFamily="34" charset="-122"/>
+                <a:cs typeface="Calibri" pitchFamily="34" charset="-120"/>
+              </a:rPr>
+              <a:t>Common misconceptions and skill gaps turned into prioritized, actionable focus.</a:t>
+            </a:r>
+            <a:endParaRPr lang="en-US" sz="1250" dirty="0"/>
+          </a:p>
+        </p:txBody>
+      </p:sp>
+      <p:sp>
+        <p:nvSpPr>
+          <p:cNvPr id="20" name="Text 17"/>
+          <p:cNvSpPr/>
+          <p:nvPr/>
+        </p:nvSpPr>
+        <p:spPr>
+          <a:xfrm>
+            <a:off x="6492240" y="4480560"/>
+            <a:ext cx="5029200" cy="292608"/>
+          </a:xfrm>
+          <a:prstGeom prst="rect">
+            <a:avLst/>
+          </a:prstGeom>
+          <a:noFill/>
+          <a:ln/>
+        </p:spPr>
+        <p:txBody>
+          <a:bodyPr wrap="square" lIns="0" tIns="0" rIns="0" bIns="0" rtlCol="0" anchor="ctr"/>
+          <a:lstStyle/>
+          <a:p>
+            <a:pPr indent="0" marL="0">
+              <a:buNone/>
+            </a:pPr>
+            <a:r>
+              <a:rPr lang="en-US" sz="1600" b="1" dirty="0">
+                <a:solidFill>
+                  <a:srgbClr val="E4C878"/>
+                </a:solidFill>
+                <a:latin typeface="Bookman Old Style" pitchFamily="34" charset="0"/>
+                <a:ea typeface="Bookman Old Style" pitchFamily="34" charset="-122"/>
+                <a:cs typeface="Bookman Old Style" pitchFamily="34" charset="-120"/>
+              </a:rPr>
+              <a:t>Lesson delivery tools</a:t>
+            </a:r>
+            <a:endParaRPr lang="en-US" sz="1600" dirty="0"/>
+          </a:p>
+        </p:txBody>
+      </p:sp>
+      <p:sp>
+        <p:nvSpPr>
+          <p:cNvPr id="21" name="Text 18"/>
+          <p:cNvSpPr/>
+          <p:nvPr/>
+        </p:nvSpPr>
+        <p:spPr>
+          <a:xfrm>
+            <a:off x="6492240" y="4764024"/>
+            <a:ext cx="5029200" cy="548640"/>
+          </a:xfrm>
+          <a:prstGeom prst="rect">
+            <a:avLst/>
+          </a:prstGeom>
+          <a:noFill/>
+          <a:ln/>
+        </p:spPr>
+        <p:txBody>
+          <a:bodyPr wrap="square" lIns="0" tIns="0" rIns="0" bIns="0" rtlCol="0" anchor="t"/>
+          <a:lstStyle/>
+          <a:p>
+            <a:pPr indent="0" marL="0">
+              <a:buNone/>
+            </a:pPr>
+            <a:r>
+              <a:rPr lang="en-US" sz="1250" dirty="0">
+                <a:solidFill>
+                  <a:srgbClr val="E9E2D2"/>
+                </a:solidFill>
+                <a:latin typeface="Calibri" pitchFamily="34" charset="0"/>
+                <a:ea typeface="Calibri" pitchFamily="34" charset="-122"/>
+                <a:cs typeface="Calibri" pitchFamily="34" charset="-120"/>
+              </a:rPr>
+              <a:t>Pacing guide, answer keys, KC-coded objectives, and copy-ready AI analysis prompts.</a:t>
+            </a:r>
+            <a:endParaRPr lang="en-US" sz="1250" dirty="0"/>
+          </a:p>
+        </p:txBody>
+      </p:sp>
+      <p:sp>
+        <p:nvSpPr>
+          <p:cNvPr id="22" name="Text 19"/>
+          <p:cNvSpPr/>
+          <p:nvPr/>
+        </p:nvSpPr>
+        <p:spPr>
+          <a:xfrm>
+            <a:off x="502920" y="6400800"/>
+            <a:ext cx="7315200" cy="274320"/>
+          </a:xfrm>
+          <a:prstGeom prst="rect">
+            <a:avLst/>
+          </a:prstGeom>
+          <a:noFill/>
+          <a:ln/>
+        </p:spPr>
+        <p:txBody>
+          <a:bodyPr wrap="square" lIns="0" tIns="0" rIns="0" bIns="0" rtlCol="0" anchor="ctr"/>
+          <a:lstStyle/>
+          <a:p>
+            <a:pPr algn="l" indent="0" marL="0">
+              <a:buNone/>
+            </a:pPr>
+            <a:r>
+              <a:rPr lang="en-US" sz="1000" b="1" dirty="0">
                 <a:solidFill>
                   <a:srgbClr val="C9A24B"/>
+                </a:solidFill>
+                <a:latin typeface="Calibri" pitchFamily="34" charset="0"/>
+                <a:ea typeface="Calibri" pitchFamily="34" charset="-122"/>
+                <a:cs typeface="Calibri" pitchFamily="34" charset="-120"/>
+              </a:rPr>
+              <a:t>AndersonLogic AI</a:t>
+            </a:r>
+            <a:pPr algn="l" indent="0" marL="0">
+              <a:buNone/>
+            </a:pPr>
+            <a:r>
+              <a:rPr lang="en-US" sz="1000" dirty="0">
+                <a:solidFill>
+                  <a:srgbClr val="9AA0A6"/>
+                </a:solidFill>
+                <a:latin typeface="Calibri" pitchFamily="34" charset="0"/>
+                <a:ea typeface="Calibri" pitchFamily="34" charset="-122"/>
+                <a:cs typeface="Calibri" pitchFamily="34" charset="-120"/>
+              </a:rPr>
+              <a:t>   ·   BeHistorical</a:t>
+            </a:r>
+            <a:endParaRPr lang="en-US" sz="1000" dirty="0"/>
+          </a:p>
+        </p:txBody>
+      </p:sp>
+      <p:sp>
+        <p:nvSpPr>
+          <p:cNvPr id="23" name="Text 20"/>
+          <p:cNvSpPr/>
+          <p:nvPr/>
+        </p:nvSpPr>
+        <p:spPr>
+          <a:xfrm>
+            <a:off x="10607040" y="6355080"/>
+            <a:ext cx="1097280" cy="320040"/>
+          </a:xfrm>
+          <a:prstGeom prst="rect">
+            <a:avLst/>
+          </a:prstGeom>
+          <a:noFill/>
+          <a:ln/>
+        </p:spPr>
+        <p:txBody>
+          <a:bodyPr wrap="square" lIns="0" tIns="0" rIns="0" bIns="0" rtlCol="0" anchor="ctr"/>
+          <a:lstStyle/>
+          <a:p>
+            <a:pPr algn="r" indent="0" marL="0">
+              <a:buNone/>
+            </a:pPr>
+            <a:r>
+              <a:rPr lang="en-US" sz="1100" b="1" dirty="0">
+                <a:solidFill>
+                  <a:srgbClr val="9AA0A6"/>
                 </a:solidFill>
                 <a:latin typeface="Consolas" pitchFamily="34" charset="0"/>
                 <a:ea typeface="Consolas" pitchFamily="34" charset="-122"/>
                 <a:cs typeface="Consolas" pitchFamily="34" charset="-120"/>
               </a:rPr>
-              <a:t>WHERE THIS GOES</a:t>
+              <a:t>10 / 15</a:t>
+            </a:r>
+            <a:endParaRPr lang="en-US" sz="1100" dirty="0"/>
+          </a:p>
+        </p:txBody>
+      </p:sp>
+    </p:spTree>
+  </p:cSld>
+  <p:clrMapOvr>
+    <a:masterClrMapping/>
+  </p:clrMapOvr>
+</p:sld>
+</file>
+
+<file path=ppt/slides/slide11.xml><?xml version="1.0" encoding="utf-8"?>
+<p:sld xmlns:a="http://schemas.openxmlformats.org/drawingml/2006/main" xmlns:r="http://schemas.openxmlformats.org/officeDocument/2006/relationships" xmlns:p="http://schemas.openxmlformats.org/presentationml/2006/main">
+  <p:cSld name="Slide 11">
+    <p:bg>
+      <p:bgPr>
+        <a:solidFill>
+          <a:srgbClr val="F4EEE2"/>
+        </a:solidFill>
+      </p:bgPr>
+    </p:bg>
+    <p:spTree>
+      <p:nvGrpSpPr>
+        <p:cNvPr id="1" name=""/>
+        <p:cNvGrpSpPr/>
+        <p:nvPr/>
+      </p:nvGrpSpPr>
+      <p:grpSpPr>
+        <a:xfrm>
+          <a:off x="0" y="0"/>
+          <a:ext cx="0" cy="0"/>
+          <a:chOff x="0" y="0"/>
+          <a:chExt cx="0" cy="0"/>
+        </a:xfrm>
+      </p:grpSpPr>
+      <p:sp>
+        <p:nvSpPr>
+          <p:cNvPr id="2" name="Text 0"/>
+          <p:cNvSpPr/>
+          <p:nvPr/>
+        </p:nvSpPr>
+        <p:spPr>
+          <a:xfrm>
+            <a:off x="640080" y="502920"/>
+            <a:ext cx="8229600" cy="274320"/>
+          </a:xfrm>
+          <a:prstGeom prst="rect">
+            <a:avLst/>
+          </a:prstGeom>
+          <a:noFill/>
+          <a:ln/>
+        </p:spPr>
+        <p:txBody>
+          <a:bodyPr wrap="square" lIns="0" tIns="0" rIns="0" bIns="0" rtlCol="0" anchor="ctr"/>
+          <a:lstStyle/>
+          <a:p>
+            <a:pPr algn="l" indent="0" marL="0">
+              <a:buNone/>
+            </a:pPr>
+            <a:r>
+              <a:rPr lang="en-US" sz="1200" b="1" spc="300" kern="0" dirty="0">
+                <a:solidFill>
+                  <a:srgbClr val="9A7A28"/>
+                </a:solidFill>
+                <a:latin typeface="Consolas" pitchFamily="34" charset="0"/>
+                <a:ea typeface="Consolas" pitchFamily="34" charset="-122"/>
+                <a:cs typeface="Consolas" pitchFamily="34" charset="-120"/>
+              </a:rPr>
+              <a:t>THE ENGINE UNDERNEATH</a:t>
             </a:r>
             <a:endParaRPr lang="en-US" sz="1200" dirty="0"/>
           </a:p>
@@ -2226,14 +3311,14 @@
       </p:sp>
       <p:sp>
         <p:nvSpPr>
-          <p:cNvPr id="7" name="Text 5"/>
-          <p:cNvSpPr/>
-          <p:nvPr/>
-        </p:nvSpPr>
-        <p:spPr>
-          <a:xfrm>
-            <a:off x="566928" y="1143000"/>
-            <a:ext cx="7772400" cy="1280160"/>
+          <p:cNvPr id="3" name="Text 1"/>
+          <p:cNvSpPr/>
+          <p:nvPr/>
+        </p:nvSpPr>
+        <p:spPr>
+          <a:xfrm>
+            <a:off x="603504" y="822960"/>
+            <a:ext cx="10972800" cy="731520"/>
           </a:xfrm>
           <a:prstGeom prst="rect">
             <a:avLst/>
@@ -2249,14 +3334,3898 @@
               <a:buNone/>
             </a:pPr>
             <a:r>
-              <a:rPr lang="en-US" sz="4400" b="1" dirty="0">
-                <a:solidFill>
-                  <a:srgbClr val="FFFFFF"/>
+              <a:rPr lang="en-US" sz="3200" b="1" dirty="0">
+                <a:solidFill>
+                  <a:srgbClr val="2B2723"/>
                 </a:solidFill>
                 <a:latin typeface="Bookman Old Style" pitchFamily="34" charset="0"/>
                 <a:ea typeface="Bookman Old Style" pitchFamily="34" charset="-122"/>
                 <a:cs typeface="Bookman Old Style" pitchFamily="34" charset="-120"/>
               </a:rPr>
+              <a:t>From raw answers to teaching decisions</a:t>
+            </a:r>
+            <a:endParaRPr lang="en-US" sz="3200" dirty="0"/>
+          </a:p>
+        </p:txBody>
+      </p:sp>
+      <p:sp>
+        <p:nvSpPr>
+          <p:cNvPr id="4" name="Text 2"/>
+          <p:cNvSpPr/>
+          <p:nvPr/>
+        </p:nvSpPr>
+        <p:spPr>
+          <a:xfrm>
+            <a:off x="640080" y="1645920"/>
+            <a:ext cx="10972800" cy="548640"/>
+          </a:xfrm>
+          <a:prstGeom prst="rect">
+            <a:avLst/>
+          </a:prstGeom>
+          <a:noFill/>
+          <a:ln/>
+        </p:spPr>
+        <p:txBody>
+          <a:bodyPr wrap="square" lIns="0" tIns="0" rIns="0" bIns="0" rtlCol="0" anchor="ctr"/>
+          <a:lstStyle/>
+          <a:p>
+            <a:pPr indent="0" marL="0">
+              <a:buNone/>
+            </a:pPr>
+            <a:r>
+              <a:rPr lang="en-US" sz="1500" dirty="0">
+                <a:solidFill>
+                  <a:srgbClr val="6E675C"/>
+                </a:solidFill>
+                <a:latin typeface="Calibri" pitchFamily="34" charset="0"/>
+                <a:ea typeface="Calibri" pitchFamily="34" charset="-122"/>
+                <a:cs typeface="Calibri" pitchFamily="34" charset="-120"/>
+              </a:rPr>
+              <a:t>One analysis engine reads every student response and turns it into insight — and it's what powers the Teacher Hub, the study guides, and The Dispatch alike.</a:t>
+            </a:r>
+            <a:endParaRPr lang="en-US" sz="1500" dirty="0"/>
+          </a:p>
+        </p:txBody>
+      </p:sp>
+      <p:sp>
+        <p:nvSpPr>
+          <p:cNvPr id="5" name="Shape 3"/>
+          <p:cNvSpPr/>
+          <p:nvPr/>
+        </p:nvSpPr>
+        <p:spPr>
+          <a:xfrm>
+            <a:off x="640080" y="2514600"/>
+            <a:ext cx="3319272" cy="2834640"/>
+          </a:xfrm>
+          <a:prstGeom prst="roundRect">
+            <a:avLst>
+              <a:gd name="adj" fmla="val 3871"/>
+            </a:avLst>
+          </a:prstGeom>
+          <a:solidFill>
+            <a:srgbClr val="FCF8F0"/>
+          </a:solidFill>
+          <a:ln w="12700">
+            <a:solidFill>
+              <a:srgbClr val="E4DBC9"/>
+            </a:solidFill>
+            <a:prstDash val="solid"/>
+          </a:ln>
+        </p:spPr>
+      </p:sp>
+      <p:sp>
+        <p:nvSpPr>
+          <p:cNvPr id="6" name="Text 4"/>
+          <p:cNvSpPr/>
+          <p:nvPr/>
+        </p:nvSpPr>
+        <p:spPr>
+          <a:xfrm>
+            <a:off x="914400" y="2788920"/>
+            <a:ext cx="2770632" cy="274320"/>
+          </a:xfrm>
+          <a:prstGeom prst="rect">
+            <a:avLst/>
+          </a:prstGeom>
+          <a:noFill/>
+          <a:ln/>
+        </p:spPr>
+        <p:txBody>
+          <a:bodyPr wrap="square" lIns="0" tIns="0" rIns="0" bIns="0" rtlCol="0" anchor="ctr"/>
+          <a:lstStyle/>
+          <a:p>
+            <a:pPr indent="0" marL="0">
+              <a:buNone/>
+            </a:pPr>
+            <a:r>
+              <a:rPr lang="en-US" sz="1100" b="1" spc="100" kern="0" dirty="0">
+                <a:solidFill>
+                  <a:srgbClr val="9A7A28"/>
+                </a:solidFill>
+                <a:latin typeface="Consolas" pitchFamily="34" charset="0"/>
+                <a:ea typeface="Consolas" pitchFamily="34" charset="-122"/>
+                <a:cs typeface="Consolas" pitchFamily="34" charset="-120"/>
+              </a:rPr>
+              <a:t>01 · CAPTURE</a:t>
+            </a:r>
+            <a:endParaRPr lang="en-US" sz="1100" dirty="0"/>
+          </a:p>
+        </p:txBody>
+      </p:sp>
+      <p:sp>
+        <p:nvSpPr>
+          <p:cNvPr id="7" name="Text 5"/>
+          <p:cNvSpPr/>
+          <p:nvPr/>
+        </p:nvSpPr>
+        <p:spPr>
+          <a:xfrm>
+            <a:off x="914400" y="3081528"/>
+            <a:ext cx="2770632" cy="548640"/>
+          </a:xfrm>
+          <a:prstGeom prst="rect">
+            <a:avLst/>
+          </a:prstGeom>
+          <a:noFill/>
+          <a:ln/>
+        </p:spPr>
+        <p:txBody>
+          <a:bodyPr wrap="square" lIns="0" tIns="0" rIns="0" bIns="0" rtlCol="0" anchor="ctr"/>
+          <a:lstStyle/>
+          <a:p>
+            <a:pPr indent="0" marL="0">
+              <a:buNone/>
+            </a:pPr>
+            <a:r>
+              <a:rPr lang="en-US" sz="2100" b="1" dirty="0">
+                <a:solidFill>
+                  <a:srgbClr val="2B2723"/>
+                </a:solidFill>
+                <a:latin typeface="Bookman Old Style" pitchFamily="34" charset="0"/>
+                <a:ea typeface="Bookman Old Style" pitchFamily="34" charset="-122"/>
+                <a:cs typeface="Bookman Old Style" pitchFamily="34" charset="-120"/>
+              </a:rPr>
+              <a:t>Every response, structured</a:t>
+            </a:r>
+            <a:endParaRPr lang="en-US" sz="2100" dirty="0"/>
+          </a:p>
+        </p:txBody>
+      </p:sp>
+      <p:sp>
+        <p:nvSpPr>
+          <p:cNvPr id="8" name="Text 6"/>
+          <p:cNvSpPr/>
+          <p:nvPr/>
+        </p:nvSpPr>
+        <p:spPr>
+          <a:xfrm>
+            <a:off x="932688" y="3749040"/>
+            <a:ext cx="2752344" cy="1463040"/>
+          </a:xfrm>
+          <a:prstGeom prst="rect">
+            <a:avLst/>
+          </a:prstGeom>
+          <a:noFill/>
+          <a:ln/>
+        </p:spPr>
+        <p:txBody>
+          <a:bodyPr wrap="square" lIns="0" tIns="0" rIns="0" bIns="0" rtlCol="0" anchor="t"/>
+          <a:lstStyle/>
+          <a:p>
+            <a:pPr marL="177800" indent="-177800">
+              <a:spcAft>
+                <a:spcPts val="800"/>
+              </a:spcAft>
+              <a:buSzPct val="100000"/>
+              <a:buChar char="•"/>
+            </a:pPr>
+            <a:r>
+              <a:rPr lang="en-US" sz="1300" dirty="0">
+                <a:solidFill>
+                  <a:srgbClr val="6E675C"/>
+                </a:solidFill>
+                <a:latin typeface="Calibri" pitchFamily="34" charset="0"/>
+                <a:ea typeface="Calibri" pitchFamily="34" charset="-122"/>
+                <a:cs typeface="Calibri" pitchFamily="34" charset="-120"/>
+              </a:rPr>
+              <a:t>Prefilled Google Form → Sheet</a:t>
+            </a:r>
+            <a:endParaRPr lang="en-US" sz="1300" dirty="0"/>
+          </a:p>
+          <a:p>
+            <a:pPr marL="177800" indent="-177800">
+              <a:spcAft>
+                <a:spcPts val="800"/>
+              </a:spcAft>
+              <a:buSzPct val="100000"/>
+              <a:buChar char="•"/>
+            </a:pPr>
+            <a:r>
+              <a:rPr lang="en-US" sz="1300" dirty="0">
+                <a:solidFill>
+                  <a:srgbClr val="6E675C"/>
+                </a:solidFill>
+                <a:latin typeface="Calibri" pitchFamily="34" charset="0"/>
+                <a:ea typeface="Calibri" pitchFamily="34" charset="-122"/>
+                <a:cs typeface="Calibri" pitchFamily="34" charset="-120"/>
+              </a:rPr>
+              <a:t>Tagged by unit, topic &amp; AP skill</a:t>
+            </a:r>
+            <a:endParaRPr lang="en-US" sz="1300" dirty="0"/>
+          </a:p>
+          <a:p>
+            <a:pPr marL="177800" indent="-177800">
+              <a:spcAft>
+                <a:spcPts val="800"/>
+              </a:spcAft>
+              <a:buSzPct val="100000"/>
+              <a:buChar char="•"/>
+            </a:pPr>
+            <a:r>
+              <a:rPr lang="en-US" sz="1300" dirty="0">
+                <a:solidFill>
+                  <a:srgbClr val="6E675C"/>
+                </a:solidFill>
+                <a:latin typeface="Calibri" pitchFamily="34" charset="0"/>
+                <a:ea typeface="Calibri" pitchFamily="34" charset="-122"/>
+                <a:cs typeface="Calibri" pitchFamily="34" charset="-120"/>
+              </a:rPr>
+              <a:t>Confidence rating on every answer</a:t>
+            </a:r>
+            <a:endParaRPr lang="en-US" sz="1300" dirty="0"/>
+          </a:p>
+        </p:txBody>
+      </p:sp>
+      <p:sp>
+        <p:nvSpPr>
+          <p:cNvPr id="9" name="Text 7"/>
+          <p:cNvSpPr/>
+          <p:nvPr/>
+        </p:nvSpPr>
+        <p:spPr>
+          <a:xfrm>
+            <a:off x="3959352" y="2514600"/>
+            <a:ext cx="457200" cy="2834640"/>
+          </a:xfrm>
+          <a:prstGeom prst="rect">
+            <a:avLst/>
+          </a:prstGeom>
+          <a:noFill/>
+          <a:ln/>
+        </p:spPr>
+        <p:txBody>
+          <a:bodyPr wrap="square" lIns="0" tIns="0" rIns="0" bIns="0" rtlCol="0" anchor="ctr"/>
+          <a:lstStyle/>
+          <a:p>
+            <a:pPr algn="ctr" indent="0" marL="0">
+              <a:buNone/>
+            </a:pPr>
+            <a:r>
+              <a:rPr lang="en-US" sz="2600" b="1" dirty="0">
+                <a:solidFill>
+                  <a:srgbClr val="C9A24B"/>
+                </a:solidFill>
+                <a:latin typeface="Calibri" pitchFamily="34" charset="0"/>
+                <a:ea typeface="Calibri" pitchFamily="34" charset="-122"/>
+                <a:cs typeface="Calibri" pitchFamily="34" charset="-120"/>
+              </a:rPr>
+              <a:t>→</a:t>
+            </a:r>
+            <a:endParaRPr lang="en-US" sz="2600" dirty="0"/>
+          </a:p>
+        </p:txBody>
+      </p:sp>
+      <p:sp>
+        <p:nvSpPr>
+          <p:cNvPr id="10" name="Shape 8"/>
+          <p:cNvSpPr/>
+          <p:nvPr/>
+        </p:nvSpPr>
+        <p:spPr>
+          <a:xfrm>
+            <a:off x="4416552" y="2514600"/>
+            <a:ext cx="3319272" cy="2834640"/>
+          </a:xfrm>
+          <a:prstGeom prst="roundRect">
+            <a:avLst>
+              <a:gd name="adj" fmla="val 3871"/>
+            </a:avLst>
+          </a:prstGeom>
+          <a:solidFill>
+            <a:srgbClr val="FCF8F0"/>
+          </a:solidFill>
+          <a:ln w="12700">
+            <a:solidFill>
+              <a:srgbClr val="E4DBC9"/>
+            </a:solidFill>
+            <a:prstDash val="solid"/>
+          </a:ln>
+        </p:spPr>
+      </p:sp>
+      <p:sp>
+        <p:nvSpPr>
+          <p:cNvPr id="11" name="Text 9"/>
+          <p:cNvSpPr/>
+          <p:nvPr/>
+        </p:nvSpPr>
+        <p:spPr>
+          <a:xfrm>
+            <a:off x="4690872" y="2788920"/>
+            <a:ext cx="2770632" cy="274320"/>
+          </a:xfrm>
+          <a:prstGeom prst="rect">
+            <a:avLst/>
+          </a:prstGeom>
+          <a:noFill/>
+          <a:ln/>
+        </p:spPr>
+        <p:txBody>
+          <a:bodyPr wrap="square" lIns="0" tIns="0" rIns="0" bIns="0" rtlCol="0" anchor="ctr"/>
+          <a:lstStyle/>
+          <a:p>
+            <a:pPr indent="0" marL="0">
+              <a:buNone/>
+            </a:pPr>
+            <a:r>
+              <a:rPr lang="en-US" sz="1100" b="1" spc="100" kern="0" dirty="0">
+                <a:solidFill>
+                  <a:srgbClr val="9A7A28"/>
+                </a:solidFill>
+                <a:latin typeface="Consolas" pitchFamily="34" charset="0"/>
+                <a:ea typeface="Consolas" pitchFamily="34" charset="-122"/>
+                <a:cs typeface="Consolas" pitchFamily="34" charset="-120"/>
+              </a:rPr>
+              <a:t>02 · ANALYZE</a:t>
+            </a:r>
+            <a:endParaRPr lang="en-US" sz="1100" dirty="0"/>
+          </a:p>
+        </p:txBody>
+      </p:sp>
+      <p:sp>
+        <p:nvSpPr>
+          <p:cNvPr id="12" name="Text 10"/>
+          <p:cNvSpPr/>
+          <p:nvPr/>
+        </p:nvSpPr>
+        <p:spPr>
+          <a:xfrm>
+            <a:off x="4690872" y="3081528"/>
+            <a:ext cx="2770632" cy="548640"/>
+          </a:xfrm>
+          <a:prstGeom prst="rect">
+            <a:avLst/>
+          </a:prstGeom>
+          <a:noFill/>
+          <a:ln/>
+        </p:spPr>
+        <p:txBody>
+          <a:bodyPr wrap="square" lIns="0" tIns="0" rIns="0" bIns="0" rtlCol="0" anchor="ctr"/>
+          <a:lstStyle/>
+          <a:p>
+            <a:pPr indent="0" marL="0">
+              <a:buNone/>
+            </a:pPr>
+            <a:r>
+              <a:rPr lang="en-US" sz="2100" b="1" dirty="0">
+                <a:solidFill>
+                  <a:srgbClr val="2B2723"/>
+                </a:solidFill>
+                <a:latin typeface="Bookman Old Style" pitchFamily="34" charset="0"/>
+                <a:ea typeface="Bookman Old Style" pitchFamily="34" charset="-122"/>
+                <a:cs typeface="Bookman Old Style" pitchFamily="34" charset="-120"/>
+              </a:rPr>
+              <a:t>Rule-based, transparent</a:t>
+            </a:r>
+            <a:endParaRPr lang="en-US" sz="2100" dirty="0"/>
+          </a:p>
+        </p:txBody>
+      </p:sp>
+      <p:sp>
+        <p:nvSpPr>
+          <p:cNvPr id="13" name="Text 11"/>
+          <p:cNvSpPr/>
+          <p:nvPr/>
+        </p:nvSpPr>
+        <p:spPr>
+          <a:xfrm>
+            <a:off x="4709160" y="3749040"/>
+            <a:ext cx="2752344" cy="1463040"/>
+          </a:xfrm>
+          <a:prstGeom prst="rect">
+            <a:avLst/>
+          </a:prstGeom>
+          <a:noFill/>
+          <a:ln/>
+        </p:spPr>
+        <p:txBody>
+          <a:bodyPr wrap="square" lIns="0" tIns="0" rIns="0" bIns="0" rtlCol="0" anchor="t"/>
+          <a:lstStyle/>
+          <a:p>
+            <a:pPr marL="177800" indent="-177800">
+              <a:spcAft>
+                <a:spcPts val="800"/>
+              </a:spcAft>
+              <a:buSzPct val="100000"/>
+              <a:buChar char="•"/>
+            </a:pPr>
+            <a:r>
+              <a:rPr lang="en-US" sz="1300" dirty="0">
+                <a:solidFill>
+                  <a:srgbClr val="6E675C"/>
+                </a:solidFill>
+                <a:latin typeface="Calibri" pitchFamily="34" charset="0"/>
+                <a:ea typeface="Calibri" pitchFamily="34" charset="-122"/>
+                <a:cs typeface="Calibri" pitchFamily="34" charset="-120"/>
+              </a:rPr>
+              <a:t>Flags blank, short &amp; low-confidence work</a:t>
+            </a:r>
+            <a:endParaRPr lang="en-US" sz="1300" dirty="0"/>
+          </a:p>
+          <a:p>
+            <a:pPr marL="177800" indent="-177800">
+              <a:spcAft>
+                <a:spcPts val="800"/>
+              </a:spcAft>
+              <a:buSzPct val="100000"/>
+              <a:buChar char="•"/>
+            </a:pPr>
+            <a:r>
+              <a:rPr lang="en-US" sz="1300" dirty="0">
+                <a:solidFill>
+                  <a:srgbClr val="6E675C"/>
+                </a:solidFill>
+                <a:latin typeface="Calibri" pitchFamily="34" charset="0"/>
+                <a:ea typeface="Calibri" pitchFamily="34" charset="-122"/>
+                <a:cs typeface="Calibri" pitchFamily="34" charset="-120"/>
+              </a:rPr>
+              <a:t>Detects evidence use &amp; misconceptions</a:t>
+            </a:r>
+            <a:endParaRPr lang="en-US" sz="1300" dirty="0"/>
+          </a:p>
+          <a:p>
+            <a:pPr marL="177800" indent="-177800">
+              <a:spcAft>
+                <a:spcPts val="800"/>
+              </a:spcAft>
+              <a:buSzPct val="100000"/>
+              <a:buChar char="•"/>
+            </a:pPr>
+            <a:r>
+              <a:rPr lang="en-US" sz="1300" dirty="0">
+                <a:solidFill>
+                  <a:srgbClr val="6E675C"/>
+                </a:solidFill>
+                <a:latin typeface="Calibri" pitchFamily="34" charset="0"/>
+                <a:ea typeface="Calibri" pitchFamily="34" charset="-122"/>
+                <a:cs typeface="Calibri" pitchFamily="34" charset="-120"/>
+              </a:rPr>
+              <a:t>Spots missing reasoning (skill gaps)</a:t>
+            </a:r>
+            <a:endParaRPr lang="en-US" sz="1300" dirty="0"/>
+          </a:p>
+        </p:txBody>
+      </p:sp>
+      <p:sp>
+        <p:nvSpPr>
+          <p:cNvPr id="14" name="Text 12"/>
+          <p:cNvSpPr/>
+          <p:nvPr/>
+        </p:nvSpPr>
+        <p:spPr>
+          <a:xfrm>
+            <a:off x="7735824" y="2514600"/>
+            <a:ext cx="457200" cy="2834640"/>
+          </a:xfrm>
+          <a:prstGeom prst="rect">
+            <a:avLst/>
+          </a:prstGeom>
+          <a:noFill/>
+          <a:ln/>
+        </p:spPr>
+        <p:txBody>
+          <a:bodyPr wrap="square" lIns="0" tIns="0" rIns="0" bIns="0" rtlCol="0" anchor="ctr"/>
+          <a:lstStyle/>
+          <a:p>
+            <a:pPr algn="ctr" indent="0" marL="0">
+              <a:buNone/>
+            </a:pPr>
+            <a:r>
+              <a:rPr lang="en-US" sz="2600" b="1" dirty="0">
+                <a:solidFill>
+                  <a:srgbClr val="C9A24B"/>
+                </a:solidFill>
+                <a:latin typeface="Calibri" pitchFamily="34" charset="0"/>
+                <a:ea typeface="Calibri" pitchFamily="34" charset="-122"/>
+                <a:cs typeface="Calibri" pitchFamily="34" charset="-120"/>
+              </a:rPr>
+              <a:t>→</a:t>
+            </a:r>
+            <a:endParaRPr lang="en-US" sz="2600" dirty="0"/>
+          </a:p>
+        </p:txBody>
+      </p:sp>
+      <p:sp>
+        <p:nvSpPr>
+          <p:cNvPr id="15" name="Shape 13"/>
+          <p:cNvSpPr/>
+          <p:nvPr/>
+        </p:nvSpPr>
+        <p:spPr>
+          <a:xfrm>
+            <a:off x="8193024" y="2514600"/>
+            <a:ext cx="3319272" cy="2834640"/>
+          </a:xfrm>
+          <a:prstGeom prst="roundRect">
+            <a:avLst>
+              <a:gd name="adj" fmla="val 3871"/>
+            </a:avLst>
+          </a:prstGeom>
+          <a:solidFill>
+            <a:srgbClr val="FCF8F0"/>
+          </a:solidFill>
+          <a:ln w="12700">
+            <a:solidFill>
+              <a:srgbClr val="E4DBC9"/>
+            </a:solidFill>
+            <a:prstDash val="solid"/>
+          </a:ln>
+        </p:spPr>
+      </p:sp>
+      <p:sp>
+        <p:nvSpPr>
+          <p:cNvPr id="16" name="Text 14"/>
+          <p:cNvSpPr/>
+          <p:nvPr/>
+        </p:nvSpPr>
+        <p:spPr>
+          <a:xfrm>
+            <a:off x="8467344" y="2788920"/>
+            <a:ext cx="2770632" cy="274320"/>
+          </a:xfrm>
+          <a:prstGeom prst="rect">
+            <a:avLst/>
+          </a:prstGeom>
+          <a:noFill/>
+          <a:ln/>
+        </p:spPr>
+        <p:txBody>
+          <a:bodyPr wrap="square" lIns="0" tIns="0" rIns="0" bIns="0" rtlCol="0" anchor="ctr"/>
+          <a:lstStyle/>
+          <a:p>
+            <a:pPr indent="0" marL="0">
+              <a:buNone/>
+            </a:pPr>
+            <a:r>
+              <a:rPr lang="en-US" sz="1100" b="1" spc="100" kern="0" dirty="0">
+                <a:solidFill>
+                  <a:srgbClr val="9A7A28"/>
+                </a:solidFill>
+                <a:latin typeface="Consolas" pitchFamily="34" charset="0"/>
+                <a:ea typeface="Consolas" pitchFamily="34" charset="-122"/>
+                <a:cs typeface="Consolas" pitchFamily="34" charset="-120"/>
+              </a:rPr>
+              <a:t>03 · ACT</a:t>
+            </a:r>
+            <a:endParaRPr lang="en-US" sz="1100" dirty="0"/>
+          </a:p>
+        </p:txBody>
+      </p:sp>
+      <p:sp>
+        <p:nvSpPr>
+          <p:cNvPr id="17" name="Text 15"/>
+          <p:cNvSpPr/>
+          <p:nvPr/>
+        </p:nvSpPr>
+        <p:spPr>
+          <a:xfrm>
+            <a:off x="8467344" y="3081528"/>
+            <a:ext cx="2770632" cy="548640"/>
+          </a:xfrm>
+          <a:prstGeom prst="rect">
+            <a:avLst/>
+          </a:prstGeom>
+          <a:noFill/>
+          <a:ln/>
+        </p:spPr>
+        <p:txBody>
+          <a:bodyPr wrap="square" lIns="0" tIns="0" rIns="0" bIns="0" rtlCol="0" anchor="ctr"/>
+          <a:lstStyle/>
+          <a:p>
+            <a:pPr indent="0" marL="0">
+              <a:buNone/>
+            </a:pPr>
+            <a:r>
+              <a:rPr lang="en-US" sz="2100" b="1" dirty="0">
+                <a:solidFill>
+                  <a:srgbClr val="2B2723"/>
+                </a:solidFill>
+                <a:latin typeface="Bookman Old Style" pitchFamily="34" charset="0"/>
+                <a:ea typeface="Bookman Old Style" pitchFamily="34" charset="-122"/>
+                <a:cs typeface="Bookman Old Style" pitchFamily="34" charset="-120"/>
+              </a:rPr>
+              <a:t>One engine, three outputs</a:t>
+            </a:r>
+            <a:endParaRPr lang="en-US" sz="2100" dirty="0"/>
+          </a:p>
+        </p:txBody>
+      </p:sp>
+      <p:sp>
+        <p:nvSpPr>
+          <p:cNvPr id="18" name="Text 16"/>
+          <p:cNvSpPr/>
+          <p:nvPr/>
+        </p:nvSpPr>
+        <p:spPr>
+          <a:xfrm>
+            <a:off x="8485632" y="3749040"/>
+            <a:ext cx="2752344" cy="1463040"/>
+          </a:xfrm>
+          <a:prstGeom prst="rect">
+            <a:avLst/>
+          </a:prstGeom>
+          <a:noFill/>
+          <a:ln/>
+        </p:spPr>
+        <p:txBody>
+          <a:bodyPr wrap="square" lIns="0" tIns="0" rIns="0" bIns="0" rtlCol="0" anchor="t"/>
+          <a:lstStyle/>
+          <a:p>
+            <a:pPr marL="177800" indent="-177800">
+              <a:spcAft>
+                <a:spcPts val="800"/>
+              </a:spcAft>
+              <a:buSzPct val="100000"/>
+              <a:buChar char="•"/>
+            </a:pPr>
+            <a:r>
+              <a:rPr lang="en-US" sz="1300" dirty="0">
+                <a:solidFill>
+                  <a:srgbClr val="6E675C"/>
+                </a:solidFill>
+                <a:latin typeface="Calibri" pitchFamily="34" charset="0"/>
+                <a:ea typeface="Calibri" pitchFamily="34" charset="-122"/>
+                <a:cs typeface="Calibri" pitchFamily="34" charset="-120"/>
+              </a:rPr>
+              <a:t>Teacher Hub — class &amp; per-student</a:t>
+            </a:r>
+            <a:endParaRPr lang="en-US" sz="1300" dirty="0"/>
+          </a:p>
+          <a:p>
+            <a:pPr marL="177800" indent="-177800">
+              <a:spcAft>
+                <a:spcPts val="800"/>
+              </a:spcAft>
+              <a:buSzPct val="100000"/>
+              <a:buChar char="•"/>
+            </a:pPr>
+            <a:r>
+              <a:rPr lang="en-US" sz="1300" dirty="0">
+                <a:solidFill>
+                  <a:srgbClr val="6E675C"/>
+                </a:solidFill>
+                <a:latin typeface="Calibri" pitchFamily="34" charset="0"/>
+                <a:ea typeface="Calibri" pitchFamily="34" charset="-122"/>
+                <a:cs typeface="Calibri" pitchFamily="34" charset="-120"/>
+              </a:rPr>
+              <a:t>Study guides — personalized</a:t>
+            </a:r>
+            <a:endParaRPr lang="en-US" sz="1300" dirty="0"/>
+          </a:p>
+          <a:p>
+            <a:pPr marL="177800" indent="-177800">
+              <a:spcAft>
+                <a:spcPts val="800"/>
+              </a:spcAft>
+              <a:buSzPct val="100000"/>
+              <a:buChar char="•"/>
+            </a:pPr>
+            <a:r>
+              <a:rPr lang="en-US" sz="1300" dirty="0">
+                <a:solidFill>
+                  <a:srgbClr val="6E675C"/>
+                </a:solidFill>
+                <a:latin typeface="Calibri" pitchFamily="34" charset="0"/>
+                <a:ea typeface="Calibri" pitchFamily="34" charset="-122"/>
+                <a:cs typeface="Calibri" pitchFamily="34" charset="-120"/>
+              </a:rPr>
+              <a:t>The Dispatch — family-facing</a:t>
+            </a:r>
+            <a:endParaRPr lang="en-US" sz="1300" dirty="0"/>
+          </a:p>
+        </p:txBody>
+      </p:sp>
+      <p:sp>
+        <p:nvSpPr>
+          <p:cNvPr id="19" name="Text 17"/>
+          <p:cNvSpPr/>
+          <p:nvPr/>
+        </p:nvSpPr>
+        <p:spPr>
+          <a:xfrm>
+            <a:off x="502920" y="6400800"/>
+            <a:ext cx="7315200" cy="274320"/>
+          </a:xfrm>
+          <a:prstGeom prst="rect">
+            <a:avLst/>
+          </a:prstGeom>
+          <a:noFill/>
+          <a:ln/>
+        </p:spPr>
+        <p:txBody>
+          <a:bodyPr wrap="square" lIns="0" tIns="0" rIns="0" bIns="0" rtlCol="0" anchor="ctr"/>
+          <a:lstStyle/>
+          <a:p>
+            <a:pPr algn="l" indent="0" marL="0">
+              <a:buNone/>
+            </a:pPr>
+            <a:r>
+              <a:rPr lang="en-US" sz="1000" b="1" dirty="0">
+                <a:solidFill>
+                  <a:srgbClr val="C9A24B"/>
+                </a:solidFill>
+                <a:latin typeface="Calibri" pitchFamily="34" charset="0"/>
+                <a:ea typeface="Calibri" pitchFamily="34" charset="-122"/>
+                <a:cs typeface="Calibri" pitchFamily="34" charset="-120"/>
+              </a:rPr>
+              <a:t>AndersonLogic AI</a:t>
+            </a:r>
+            <a:pPr algn="l" indent="0" marL="0">
+              <a:buNone/>
+            </a:pPr>
+            <a:r>
+              <a:rPr lang="en-US" sz="1000" dirty="0">
+                <a:solidFill>
+                  <a:srgbClr val="6E675C"/>
+                </a:solidFill>
+                <a:latin typeface="Calibri" pitchFamily="34" charset="0"/>
+                <a:ea typeface="Calibri" pitchFamily="34" charset="-122"/>
+                <a:cs typeface="Calibri" pitchFamily="34" charset="-120"/>
+              </a:rPr>
+              <a:t>   ·   BeHistorical</a:t>
+            </a:r>
+            <a:endParaRPr lang="en-US" sz="1000" dirty="0"/>
+          </a:p>
+        </p:txBody>
+      </p:sp>
+      <p:sp>
+        <p:nvSpPr>
+          <p:cNvPr id="20" name="Text 18"/>
+          <p:cNvSpPr/>
+          <p:nvPr/>
+        </p:nvSpPr>
+        <p:spPr>
+          <a:xfrm>
+            <a:off x="10607040" y="6355080"/>
+            <a:ext cx="1097280" cy="320040"/>
+          </a:xfrm>
+          <a:prstGeom prst="rect">
+            <a:avLst/>
+          </a:prstGeom>
+          <a:noFill/>
+          <a:ln/>
+        </p:spPr>
+        <p:txBody>
+          <a:bodyPr wrap="square" lIns="0" tIns="0" rIns="0" bIns="0" rtlCol="0" anchor="ctr"/>
+          <a:lstStyle/>
+          <a:p>
+            <a:pPr algn="r" indent="0" marL="0">
+              <a:buNone/>
+            </a:pPr>
+            <a:r>
+              <a:rPr lang="en-US" sz="1100" b="1" dirty="0">
+                <a:solidFill>
+                  <a:srgbClr val="6E675C"/>
+                </a:solidFill>
+                <a:latin typeface="Consolas" pitchFamily="34" charset="0"/>
+                <a:ea typeface="Consolas" pitchFamily="34" charset="-122"/>
+                <a:cs typeface="Consolas" pitchFamily="34" charset="-120"/>
+              </a:rPr>
+              <a:t>11 / 15</a:t>
+            </a:r>
+            <a:endParaRPr lang="en-US" sz="1100" dirty="0"/>
+          </a:p>
+        </p:txBody>
+      </p:sp>
+    </p:spTree>
+  </p:cSld>
+  <p:clrMapOvr>
+    <a:masterClrMapping/>
+  </p:clrMapOvr>
+</p:sld>
+</file>
+
+<file path=ppt/slides/slide12.xml><?xml version="1.0" encoding="utf-8"?>
+<p:sld xmlns:a="http://schemas.openxmlformats.org/drawingml/2006/main" xmlns:r="http://schemas.openxmlformats.org/officeDocument/2006/relationships" xmlns:p="http://schemas.openxmlformats.org/presentationml/2006/main">
+  <p:cSld name="Slide 12">
+    <p:bg>
+      <p:bgPr>
+        <a:solidFill>
+          <a:srgbClr val="1A1C1D"/>
+        </a:solidFill>
+      </p:bgPr>
+    </p:bg>
+    <p:spTree>
+      <p:nvGrpSpPr>
+        <p:cNvPr id="1" name=""/>
+        <p:cNvGrpSpPr/>
+        <p:nvPr/>
+      </p:nvGrpSpPr>
+      <p:grpSpPr>
+        <a:xfrm>
+          <a:off x="0" y="0"/>
+          <a:ext cx="0" cy="0"/>
+          <a:chOff x="0" y="0"/>
+          <a:chExt cx="0" cy="0"/>
+        </a:xfrm>
+      </p:grpSpPr>
+      <p:sp>
+        <p:nvSpPr>
+          <p:cNvPr id="2" name="Text 0"/>
+          <p:cNvSpPr/>
+          <p:nvPr/>
+        </p:nvSpPr>
+        <p:spPr>
+          <a:xfrm>
+            <a:off x="640080" y="457200"/>
+            <a:ext cx="8229600" cy="274320"/>
+          </a:xfrm>
+          <a:prstGeom prst="rect">
+            <a:avLst/>
+          </a:prstGeom>
+          <a:noFill/>
+          <a:ln/>
+        </p:spPr>
+        <p:txBody>
+          <a:bodyPr wrap="square" lIns="0" tIns="0" rIns="0" bIns="0" rtlCol="0" anchor="ctr"/>
+          <a:lstStyle/>
+          <a:p>
+            <a:pPr algn="l" indent="0" marL="0">
+              <a:buNone/>
+            </a:pPr>
+            <a:r>
+              <a:rPr lang="en-US" sz="1200" b="1" spc="300" kern="0" dirty="0">
+                <a:solidFill>
+                  <a:srgbClr val="C9A24B"/>
+                </a:solidFill>
+                <a:latin typeface="Consolas" pitchFamily="34" charset="0"/>
+                <a:ea typeface="Consolas" pitchFamily="34" charset="-122"/>
+                <a:cs typeface="Consolas" pitchFamily="34" charset="-120"/>
+              </a:rPr>
+              <a:t>WHY IT SCALES</a:t>
+            </a:r>
+            <a:endParaRPr lang="en-US" sz="1200" dirty="0"/>
+          </a:p>
+        </p:txBody>
+      </p:sp>
+      <p:sp>
+        <p:nvSpPr>
+          <p:cNvPr id="3" name="Text 1"/>
+          <p:cNvSpPr/>
+          <p:nvPr/>
+        </p:nvSpPr>
+        <p:spPr>
+          <a:xfrm>
+            <a:off x="603504" y="777240"/>
+            <a:ext cx="10972800" cy="640080"/>
+          </a:xfrm>
+          <a:prstGeom prst="rect">
+            <a:avLst/>
+          </a:prstGeom>
+          <a:noFill/>
+          <a:ln/>
+        </p:spPr>
+        <p:txBody>
+          <a:bodyPr wrap="square" lIns="0" tIns="0" rIns="0" bIns="0" rtlCol="0" anchor="ctr"/>
+          <a:lstStyle/>
+          <a:p>
+            <a:pPr indent="0" marL="0">
+              <a:buNone/>
+            </a:pPr>
+            <a:r>
+              <a:rPr lang="en-US" sz="2800" b="1" dirty="0">
+                <a:solidFill>
+                  <a:srgbClr val="FFFFFF"/>
+                </a:solidFill>
+                <a:latin typeface="Bookman Old Style" pitchFamily="34" charset="0"/>
+                <a:ea typeface="Bookman Old Style" pitchFamily="34" charset="-122"/>
+                <a:cs typeface="Bookman Old Style" pitchFamily="34" charset="-120"/>
+              </a:rPr>
+              <a:t>Built like software, not a slide folder</a:t>
+            </a:r>
+            <a:endParaRPr lang="en-US" sz="2800" dirty="0"/>
+          </a:p>
+        </p:txBody>
+      </p:sp>
+      <p:sp>
+        <p:nvSpPr>
+          <p:cNvPr id="4" name="Shape 2"/>
+          <p:cNvSpPr/>
+          <p:nvPr/>
+        </p:nvSpPr>
+        <p:spPr>
+          <a:xfrm>
+            <a:off x="594360" y="1554480"/>
+            <a:ext cx="5623560" cy="3805047"/>
+          </a:xfrm>
+          <a:prstGeom prst="roundRect">
+            <a:avLst>
+              <a:gd name="adj" fmla="val 1442"/>
+            </a:avLst>
+          </a:prstGeom>
+          <a:solidFill>
+            <a:srgbClr val="0E0F10"/>
+          </a:solidFill>
+          <a:ln w="9525">
+            <a:solidFill>
+              <a:srgbClr val="3A3F45"/>
+            </a:solidFill>
+            <a:prstDash val="solid"/>
+          </a:ln>
+          <a:effectLst>
+            <a:outerShdw sx="100000" sy="100000" kx="0" ky="0" algn="bl" rotWithShape="0" blurRad="152400" dist="76200" dir="5400000">
+              <a:srgbClr val="000000">
+                <a:alpha val="45000"/>
+              </a:srgbClr>
+            </a:outerShdw>
+          </a:effectLst>
+        </p:spPr>
+      </p:sp>
+      <p:sp>
+        <p:nvSpPr>
+          <p:cNvPr id="5" name="Shape 3"/>
+          <p:cNvSpPr/>
+          <p:nvPr/>
+        </p:nvSpPr>
+        <p:spPr>
+          <a:xfrm>
+            <a:off x="640080" y="1600200"/>
+            <a:ext cx="5532120" cy="256032"/>
+          </a:xfrm>
+          <a:prstGeom prst="rect">
+            <a:avLst/>
+          </a:prstGeom>
+          <a:solidFill>
+            <a:srgbClr val="191C1F"/>
+          </a:solidFill>
+          <a:ln/>
+        </p:spPr>
+      </p:sp>
+      <p:sp>
+        <p:nvSpPr>
+          <p:cNvPr id="6" name="Shape 4"/>
+          <p:cNvSpPr/>
+          <p:nvPr/>
+        </p:nvSpPr>
+        <p:spPr>
+          <a:xfrm>
+            <a:off x="768096" y="1687068"/>
+            <a:ext cx="82296" cy="82296"/>
+          </a:xfrm>
+          <a:prstGeom prst="ellipse">
+            <a:avLst/>
+          </a:prstGeom>
+          <a:solidFill>
+            <a:srgbClr val="C9564E"/>
+          </a:solidFill>
+          <a:ln/>
+        </p:spPr>
+      </p:sp>
+      <p:sp>
+        <p:nvSpPr>
+          <p:cNvPr id="7" name="Shape 5"/>
+          <p:cNvSpPr/>
+          <p:nvPr/>
+        </p:nvSpPr>
+        <p:spPr>
+          <a:xfrm>
+            <a:off x="896112" y="1687068"/>
+            <a:ext cx="82296" cy="82296"/>
+          </a:xfrm>
+          <a:prstGeom prst="ellipse">
+            <a:avLst/>
+          </a:prstGeom>
+          <a:solidFill>
+            <a:srgbClr val="D8A441"/>
+          </a:solidFill>
+          <a:ln/>
+        </p:spPr>
+      </p:sp>
+      <p:sp>
+        <p:nvSpPr>
+          <p:cNvPr id="8" name="Shape 6"/>
+          <p:cNvSpPr/>
+          <p:nvPr/>
+        </p:nvSpPr>
+        <p:spPr>
+          <a:xfrm>
+            <a:off x="1024128" y="1687068"/>
+            <a:ext cx="82296" cy="82296"/>
+          </a:xfrm>
+          <a:prstGeom prst="ellipse">
+            <a:avLst/>
+          </a:prstGeom>
+          <a:solidFill>
+            <a:srgbClr val="5AA668"/>
+          </a:solidFill>
+          <a:ln/>
+        </p:spPr>
+      </p:sp>
+      <p:sp>
+        <p:nvSpPr>
+          <p:cNvPr id="9" name="Text 7"/>
+          <p:cNvSpPr/>
+          <p:nvPr/>
+        </p:nvSpPr>
+        <p:spPr>
+          <a:xfrm>
+            <a:off x="1207008" y="1600200"/>
+            <a:ext cx="4892040" cy="256032"/>
+          </a:xfrm>
+          <a:prstGeom prst="rect">
+            <a:avLst/>
+          </a:prstGeom>
+          <a:noFill/>
+          <a:ln/>
+        </p:spPr>
+        <p:txBody>
+          <a:bodyPr wrap="square" lIns="0" tIns="0" rIns="0" bIns="0" rtlCol="0" anchor="ctr"/>
+          <a:lstStyle/>
+          <a:p>
+            <a:pPr algn="l" indent="0" marL="0">
+              <a:buNone/>
+            </a:pPr>
+            <a:r>
+              <a:rPr lang="en-US" sz="850" dirty="0">
+                <a:solidFill>
+                  <a:srgbClr val="8B9199"/>
+                </a:solidFill>
+                <a:latin typeface="Consolas" pitchFamily="34" charset="0"/>
+                <a:ea typeface="Consolas" pitchFamily="34" charset="-122"/>
+                <a:cs typeface="Consolas" pitchFamily="34" charset="-120"/>
+              </a:rPr>
+              <a:t>behistorical · repository command center</a:t>
+            </a:r>
+            <a:endParaRPr lang="en-US" sz="850" dirty="0"/>
+          </a:p>
+        </p:txBody>
+      </p:sp>
+      <p:pic>
+        <p:nvPicPr>
+          <p:cNvPr id="10" name="Image 0" descr="preencoded.png">    </p:cNvPr>
+          <p:cNvPicPr>
+            <a:picLocks noChangeAspect="1"/>
+          </p:cNvPicPr>
+          <p:nvPr/>
+        </p:nvPicPr>
+        <p:blipFill>
+          <a:blip r:embed="rId1"/>
+          <a:stretch>
+            <a:fillRect/>
+          </a:stretch>
+        </p:blipFill>
+        <p:spPr>
+          <a:xfrm>
+            <a:off x="640080" y="1856232"/>
+            <a:ext cx="5532120" cy="3457575"/>
+          </a:xfrm>
+          <a:prstGeom prst="rect">
+            <a:avLst/>
+          </a:prstGeom>
+        </p:spPr>
+      </p:pic>
+      <p:sp>
+        <p:nvSpPr>
+          <p:cNvPr id="11" name="Text 8"/>
+          <p:cNvSpPr/>
+          <p:nvPr/>
+        </p:nvSpPr>
+        <p:spPr>
+          <a:xfrm>
+            <a:off x="640080" y="5423535"/>
+            <a:ext cx="5577840" cy="274320"/>
+          </a:xfrm>
+          <a:prstGeom prst="rect">
+            <a:avLst/>
+          </a:prstGeom>
+          <a:noFill/>
+          <a:ln/>
+        </p:spPr>
+        <p:txBody>
+          <a:bodyPr wrap="square" lIns="0" tIns="0" rIns="0" bIns="0" rtlCol="0" anchor="ctr"/>
+          <a:lstStyle/>
+          <a:p>
+            <a:pPr indent="0" marL="0">
+              <a:buNone/>
+            </a:pPr>
+            <a:r>
+              <a:rPr lang="en-US" sz="950" dirty="0">
+                <a:solidFill>
+                  <a:srgbClr val="9AA0A6"/>
+                </a:solidFill>
+                <a:latin typeface="Consolas" pitchFamily="34" charset="0"/>
+                <a:ea typeface="Consolas" pitchFamily="34" charset="-122"/>
+                <a:cs typeface="Consolas" pitchFamily="34" charset="-120"/>
+              </a:rPr>
+              <a:t>The Command Center — audited against what's actually on disk</a:t>
+            </a:r>
+            <a:endParaRPr lang="en-US" sz="950" dirty="0"/>
+          </a:p>
+        </p:txBody>
+      </p:sp>
+      <p:sp>
+        <p:nvSpPr>
+          <p:cNvPr id="12" name="Text 9"/>
+          <p:cNvSpPr/>
+          <p:nvPr/>
+        </p:nvSpPr>
+        <p:spPr>
+          <a:xfrm>
+            <a:off x="6492240" y="1691640"/>
+            <a:ext cx="5029200" cy="310896"/>
+          </a:xfrm>
+          <a:prstGeom prst="rect">
+            <a:avLst/>
+          </a:prstGeom>
+          <a:noFill/>
+          <a:ln/>
+        </p:spPr>
+        <p:txBody>
+          <a:bodyPr wrap="square" lIns="0" tIns="0" rIns="0" bIns="0" rtlCol="0" anchor="ctr"/>
+          <a:lstStyle/>
+          <a:p>
+            <a:pPr indent="0" marL="0">
+              <a:buNone/>
+            </a:pPr>
+            <a:r>
+              <a:rPr lang="en-US" sz="1700" b="1" dirty="0">
+                <a:solidFill>
+                  <a:srgbClr val="E4C878"/>
+                </a:solidFill>
+                <a:latin typeface="Bookman Old Style" pitchFamily="34" charset="0"/>
+                <a:ea typeface="Bookman Old Style" pitchFamily="34" charset="-122"/>
+                <a:cs typeface="Bookman Old Style" pitchFamily="34" charset="-120"/>
+              </a:rPr>
+              <a:t>Automated validation</a:t>
+            </a:r>
+            <a:endParaRPr lang="en-US" sz="1700" dirty="0"/>
+          </a:p>
+        </p:txBody>
+      </p:sp>
+      <p:sp>
+        <p:nvSpPr>
+          <p:cNvPr id="13" name="Text 10"/>
+          <p:cNvSpPr/>
+          <p:nvPr/>
+        </p:nvSpPr>
+        <p:spPr>
+          <a:xfrm>
+            <a:off x="6492240" y="2002536"/>
+            <a:ext cx="5029200" cy="685800"/>
+          </a:xfrm>
+          <a:prstGeom prst="rect">
+            <a:avLst/>
+          </a:prstGeom>
+          <a:noFill/>
+          <a:ln/>
+        </p:spPr>
+        <p:txBody>
+          <a:bodyPr wrap="square" lIns="0" tIns="0" rIns="0" bIns="0" rtlCol="0" anchor="t"/>
+          <a:lstStyle/>
+          <a:p>
+            <a:pPr indent="0" marL="0">
+              <a:buNone/>
+            </a:pPr>
+            <a:r>
+              <a:rPr lang="en-US" sz="1300" dirty="0">
+                <a:solidFill>
+                  <a:srgbClr val="F4EEE2"/>
+                </a:solidFill>
+                <a:latin typeface="Calibri" pitchFamily="34" charset="0"/>
+                <a:ea typeface="Calibri" pitchFamily="34" charset="-122"/>
+                <a:cs typeface="Calibri" pitchFamily="34" charset="-120"/>
+              </a:rPr>
+              <a:t>A 547-file audit runs on every change — module order, form wiring, and simulation quality gates. Zero-error deploys.</a:t>
+            </a:r>
+            <a:endParaRPr lang="en-US" sz="1300" dirty="0"/>
+          </a:p>
+        </p:txBody>
+      </p:sp>
+      <p:sp>
+        <p:nvSpPr>
+          <p:cNvPr id="14" name="Text 11"/>
+          <p:cNvSpPr/>
+          <p:nvPr/>
+        </p:nvSpPr>
+        <p:spPr>
+          <a:xfrm>
+            <a:off x="6492240" y="2788920"/>
+            <a:ext cx="5029200" cy="310896"/>
+          </a:xfrm>
+          <a:prstGeom prst="rect">
+            <a:avLst/>
+          </a:prstGeom>
+          <a:noFill/>
+          <a:ln/>
+        </p:spPr>
+        <p:txBody>
+          <a:bodyPr wrap="square" lIns="0" tIns="0" rIns="0" bIns="0" rtlCol="0" anchor="ctr"/>
+          <a:lstStyle/>
+          <a:p>
+            <a:pPr indent="0" marL="0">
+              <a:buNone/>
+            </a:pPr>
+            <a:r>
+              <a:rPr lang="en-US" sz="1700" b="1" dirty="0">
+                <a:solidFill>
+                  <a:srgbClr val="E4C878"/>
+                </a:solidFill>
+                <a:latin typeface="Bookman Old Style" pitchFamily="34" charset="0"/>
+                <a:ea typeface="Bookman Old Style" pitchFamily="34" charset="-122"/>
+                <a:cs typeface="Bookman Old Style" pitchFamily="34" charset="-120"/>
+              </a:rPr>
+              <a:t>Deterministic builders</a:t>
+            </a:r>
+            <a:endParaRPr lang="en-US" sz="1700" dirty="0"/>
+          </a:p>
+        </p:txBody>
+      </p:sp>
+      <p:sp>
+        <p:nvSpPr>
+          <p:cNvPr id="15" name="Text 12"/>
+          <p:cNvSpPr/>
+          <p:nvPr/>
+        </p:nvSpPr>
+        <p:spPr>
+          <a:xfrm>
+            <a:off x="6492240" y="3099816"/>
+            <a:ext cx="5029200" cy="685800"/>
+          </a:xfrm>
+          <a:prstGeom prst="rect">
+            <a:avLst/>
+          </a:prstGeom>
+          <a:noFill/>
+          <a:ln/>
+        </p:spPr>
+        <p:txBody>
+          <a:bodyPr wrap="square" lIns="0" tIns="0" rIns="0" bIns="0" rtlCol="0" anchor="t"/>
+          <a:lstStyle/>
+          <a:p>
+            <a:pPr indent="0" marL="0">
+              <a:buNone/>
+            </a:pPr>
+            <a:r>
+              <a:rPr lang="en-US" sz="1300" dirty="0">
+                <a:solidFill>
+                  <a:srgbClr val="F4EEE2"/>
+                </a:solidFill>
+                <a:latin typeface="Calibri" pitchFamily="34" charset="0"/>
+                <a:ea typeface="Calibri" pitchFamily="34" charset="-122"/>
+                <a:cs typeface="Calibri" pitchFamily="34" charset="-120"/>
+              </a:rPr>
+              <a:t>Whole units are generated from data by scripts — so a fix rolls out everywhere, consistently, at once.</a:t>
+            </a:r>
+            <a:endParaRPr lang="en-US" sz="1300" dirty="0"/>
+          </a:p>
+        </p:txBody>
+      </p:sp>
+      <p:sp>
+        <p:nvSpPr>
+          <p:cNvPr id="16" name="Text 13"/>
+          <p:cNvSpPr/>
+          <p:nvPr/>
+        </p:nvSpPr>
+        <p:spPr>
+          <a:xfrm>
+            <a:off x="6492240" y="3886200"/>
+            <a:ext cx="5029200" cy="310896"/>
+          </a:xfrm>
+          <a:prstGeom prst="rect">
+            <a:avLst/>
+          </a:prstGeom>
+          <a:noFill/>
+          <a:ln/>
+        </p:spPr>
+        <p:txBody>
+          <a:bodyPr wrap="square" lIns="0" tIns="0" rIns="0" bIns="0" rtlCol="0" anchor="ctr"/>
+          <a:lstStyle/>
+          <a:p>
+            <a:pPr indent="0" marL="0">
+              <a:buNone/>
+            </a:pPr>
+            <a:r>
+              <a:rPr lang="en-US" sz="1700" b="1" dirty="0">
+                <a:solidFill>
+                  <a:srgbClr val="E4C878"/>
+                </a:solidFill>
+                <a:latin typeface="Bookman Old Style" pitchFamily="34" charset="0"/>
+                <a:ea typeface="Bookman Old Style" pitchFamily="34" charset="-122"/>
+                <a:cs typeface="Bookman Old Style" pitchFamily="34" charset="-120"/>
+              </a:rPr>
+              <a:t>Codified quality gates</a:t>
+            </a:r>
+            <a:endParaRPr lang="en-US" sz="1700" dirty="0"/>
+          </a:p>
+        </p:txBody>
+      </p:sp>
+      <p:sp>
+        <p:nvSpPr>
+          <p:cNvPr id="17" name="Text 14"/>
+          <p:cNvSpPr/>
+          <p:nvPr/>
+        </p:nvSpPr>
+        <p:spPr>
+          <a:xfrm>
+            <a:off x="6492240" y="4197096"/>
+            <a:ext cx="5029200" cy="685800"/>
+          </a:xfrm>
+          <a:prstGeom prst="rect">
+            <a:avLst/>
+          </a:prstGeom>
+          <a:noFill/>
+          <a:ln/>
+        </p:spPr>
+        <p:txBody>
+          <a:bodyPr wrap="square" lIns="0" tIns="0" rIns="0" bIns="0" rtlCol="0" anchor="t"/>
+          <a:lstStyle/>
+          <a:p>
+            <a:pPr indent="0" marL="0">
+              <a:buNone/>
+            </a:pPr>
+            <a:r>
+              <a:rPr lang="en-US" sz="1300" dirty="0">
+                <a:solidFill>
+                  <a:srgbClr val="F4EEE2"/>
+                </a:solidFill>
+                <a:latin typeface="Calibri" pitchFamily="34" charset="0"/>
+                <a:ea typeface="Calibri" pitchFamily="34" charset="-122"/>
+                <a:cs typeface="Calibri" pitchFamily="34" charset="-120"/>
+              </a:rPr>
+              <a:t>Design rules live in blueprints and are enforced by machine before anything ships.</a:t>
+            </a:r>
+            <a:endParaRPr lang="en-US" sz="1300" dirty="0"/>
+          </a:p>
+        </p:txBody>
+      </p:sp>
+      <p:sp>
+        <p:nvSpPr>
+          <p:cNvPr id="18" name="Text 15"/>
+          <p:cNvSpPr/>
+          <p:nvPr/>
+        </p:nvSpPr>
+        <p:spPr>
+          <a:xfrm>
+            <a:off x="6492240" y="5029200"/>
+            <a:ext cx="5029200" cy="548640"/>
+          </a:xfrm>
+          <a:prstGeom prst="rect">
+            <a:avLst/>
+          </a:prstGeom>
+          <a:noFill/>
+          <a:ln/>
+        </p:spPr>
+        <p:txBody>
+          <a:bodyPr wrap="square" lIns="0" tIns="0" rIns="0" bIns="0" rtlCol="0" anchor="ctr"/>
+          <a:lstStyle/>
+          <a:p>
+            <a:pPr indent="0" marL="0">
+              <a:buNone/>
+            </a:pPr>
+            <a:r>
+              <a:rPr lang="en-US" sz="1500" b="1" i="1" dirty="0">
+                <a:solidFill>
+                  <a:srgbClr val="C9A24B"/>
+                </a:solidFill>
+                <a:latin typeface="Bookman Old Style" pitchFamily="34" charset="0"/>
+                <a:ea typeface="Bookman Old Style" pitchFamily="34" charset="-122"/>
+                <a:cs typeface="Bookman Old Style" pitchFamily="34" charset="-120"/>
+              </a:rPr>
+              <a:t>The difference between a teacher's materials and a product a district can adopt.</a:t>
+            </a:r>
+            <a:endParaRPr lang="en-US" sz="1500" dirty="0"/>
+          </a:p>
+        </p:txBody>
+      </p:sp>
+      <p:sp>
+        <p:nvSpPr>
+          <p:cNvPr id="19" name="Text 16"/>
+          <p:cNvSpPr/>
+          <p:nvPr/>
+        </p:nvSpPr>
+        <p:spPr>
+          <a:xfrm>
+            <a:off x="502920" y="6400800"/>
+            <a:ext cx="7315200" cy="274320"/>
+          </a:xfrm>
+          <a:prstGeom prst="rect">
+            <a:avLst/>
+          </a:prstGeom>
+          <a:noFill/>
+          <a:ln/>
+        </p:spPr>
+        <p:txBody>
+          <a:bodyPr wrap="square" lIns="0" tIns="0" rIns="0" bIns="0" rtlCol="0" anchor="ctr"/>
+          <a:lstStyle/>
+          <a:p>
+            <a:pPr algn="l" indent="0" marL="0">
+              <a:buNone/>
+            </a:pPr>
+            <a:r>
+              <a:rPr lang="en-US" sz="1000" b="1" dirty="0">
+                <a:solidFill>
+                  <a:srgbClr val="C9A24B"/>
+                </a:solidFill>
+                <a:latin typeface="Calibri" pitchFamily="34" charset="0"/>
+                <a:ea typeface="Calibri" pitchFamily="34" charset="-122"/>
+                <a:cs typeface="Calibri" pitchFamily="34" charset="-120"/>
+              </a:rPr>
+              <a:t>AndersonLogic AI</a:t>
+            </a:r>
+            <a:pPr algn="l" indent="0" marL="0">
+              <a:buNone/>
+            </a:pPr>
+            <a:r>
+              <a:rPr lang="en-US" sz="1000" dirty="0">
+                <a:solidFill>
+                  <a:srgbClr val="9AA0A6"/>
+                </a:solidFill>
+                <a:latin typeface="Calibri" pitchFamily="34" charset="0"/>
+                <a:ea typeface="Calibri" pitchFamily="34" charset="-122"/>
+                <a:cs typeface="Calibri" pitchFamily="34" charset="-120"/>
+              </a:rPr>
+              <a:t>   ·   BeHistorical</a:t>
+            </a:r>
+            <a:endParaRPr lang="en-US" sz="1000" dirty="0"/>
+          </a:p>
+        </p:txBody>
+      </p:sp>
+      <p:sp>
+        <p:nvSpPr>
+          <p:cNvPr id="20" name="Text 17"/>
+          <p:cNvSpPr/>
+          <p:nvPr/>
+        </p:nvSpPr>
+        <p:spPr>
+          <a:xfrm>
+            <a:off x="10607040" y="6355080"/>
+            <a:ext cx="1097280" cy="320040"/>
+          </a:xfrm>
+          <a:prstGeom prst="rect">
+            <a:avLst/>
+          </a:prstGeom>
+          <a:noFill/>
+          <a:ln/>
+        </p:spPr>
+        <p:txBody>
+          <a:bodyPr wrap="square" lIns="0" tIns="0" rIns="0" bIns="0" rtlCol="0" anchor="ctr"/>
+          <a:lstStyle/>
+          <a:p>
+            <a:pPr algn="r" indent="0" marL="0">
+              <a:buNone/>
+            </a:pPr>
+            <a:r>
+              <a:rPr lang="en-US" sz="1100" b="1" dirty="0">
+                <a:solidFill>
+                  <a:srgbClr val="9AA0A6"/>
+                </a:solidFill>
+                <a:latin typeface="Consolas" pitchFamily="34" charset="0"/>
+                <a:ea typeface="Consolas" pitchFamily="34" charset="-122"/>
+                <a:cs typeface="Consolas" pitchFamily="34" charset="-120"/>
+              </a:rPr>
+              <a:t>12 / 15</a:t>
+            </a:r>
+            <a:endParaRPr lang="en-US" sz="1100" dirty="0"/>
+          </a:p>
+        </p:txBody>
+      </p:sp>
+    </p:spTree>
+  </p:cSld>
+  <p:clrMapOvr>
+    <a:masterClrMapping/>
+  </p:clrMapOvr>
+</p:sld>
+</file>
+
+<file path=ppt/slides/slide13.xml><?xml version="1.0" encoding="utf-8"?>
+<p:sld xmlns:a="http://schemas.openxmlformats.org/drawingml/2006/main" xmlns:r="http://schemas.openxmlformats.org/officeDocument/2006/relationships" xmlns:p="http://schemas.openxmlformats.org/presentationml/2006/main">
+  <p:cSld name="Slide 13">
+    <p:bg>
+      <p:bgPr>
+        <a:solidFill>
+          <a:srgbClr val="1A1C1D"/>
+        </a:solidFill>
+      </p:bgPr>
+    </p:bg>
+    <p:spTree>
+      <p:nvGrpSpPr>
+        <p:cNvPr id="1" name=""/>
+        <p:cNvGrpSpPr/>
+        <p:nvPr/>
+      </p:nvGrpSpPr>
+      <p:grpSpPr>
+        <a:xfrm>
+          <a:off x="0" y="0"/>
+          <a:ext cx="0" cy="0"/>
+          <a:chOff x="0" y="0"/>
+          <a:chExt cx="0" cy="0"/>
+        </a:xfrm>
+      </p:grpSpPr>
+      <p:sp>
+        <p:nvSpPr>
+          <p:cNvPr id="2" name="Text 0"/>
+          <p:cNvSpPr/>
+          <p:nvPr/>
+        </p:nvSpPr>
+        <p:spPr>
+          <a:xfrm>
+            <a:off x="640080" y="502920"/>
+            <a:ext cx="8229600" cy="274320"/>
+          </a:xfrm>
+          <a:prstGeom prst="rect">
+            <a:avLst/>
+          </a:prstGeom>
+          <a:noFill/>
+          <a:ln/>
+        </p:spPr>
+        <p:txBody>
+          <a:bodyPr wrap="square" lIns="0" tIns="0" rIns="0" bIns="0" rtlCol="0" anchor="ctr"/>
+          <a:lstStyle/>
+          <a:p>
+            <a:pPr algn="l" indent="0" marL="0">
+              <a:buNone/>
+            </a:pPr>
+            <a:r>
+              <a:rPr lang="en-US" sz="1200" b="1" spc="300" kern="0" dirty="0">
+                <a:solidFill>
+                  <a:srgbClr val="C9A24B"/>
+                </a:solidFill>
+                <a:latin typeface="Consolas" pitchFamily="34" charset="0"/>
+                <a:ea typeface="Consolas" pitchFamily="34" charset="-122"/>
+                <a:cs typeface="Consolas" pitchFamily="34" charset="-120"/>
+              </a:rPr>
+              <a:t>HOW IT ALL CONNECTS</a:t>
+            </a:r>
+            <a:endParaRPr lang="en-US" sz="1200" dirty="0"/>
+          </a:p>
+        </p:txBody>
+      </p:sp>
+      <p:sp>
+        <p:nvSpPr>
+          <p:cNvPr id="3" name="Text 1"/>
+          <p:cNvSpPr/>
+          <p:nvPr/>
+        </p:nvSpPr>
+        <p:spPr>
+          <a:xfrm>
+            <a:off x="603504" y="822960"/>
+            <a:ext cx="10972800" cy="731520"/>
+          </a:xfrm>
+          <a:prstGeom prst="rect">
+            <a:avLst/>
+          </a:prstGeom>
+          <a:noFill/>
+          <a:ln/>
+        </p:spPr>
+        <p:txBody>
+          <a:bodyPr wrap="square" lIns="0" tIns="0" rIns="0" bIns="0" rtlCol="0" anchor="ctr"/>
+          <a:lstStyle/>
+          <a:p>
+            <a:pPr indent="0" marL="0">
+              <a:buNone/>
+            </a:pPr>
+            <a:r>
+              <a:rPr lang="en-US" sz="3100" b="1" dirty="0">
+                <a:solidFill>
+                  <a:srgbClr val="FFFFFF"/>
+                </a:solidFill>
+                <a:latin typeface="Bookman Old Style" pitchFamily="34" charset="0"/>
+                <a:ea typeface="Bookman Old Style" pitchFamily="34" charset="-122"/>
+                <a:cs typeface="Bookman Old Style" pitchFamily="34" charset="-120"/>
+              </a:rPr>
+              <a:t>One platform, one data layer, three audiences</a:t>
+            </a:r>
+            <a:endParaRPr lang="en-US" sz="3100" dirty="0"/>
+          </a:p>
+        </p:txBody>
+      </p:sp>
+      <p:sp>
+        <p:nvSpPr>
+          <p:cNvPr id="4" name="Shape 2"/>
+          <p:cNvSpPr/>
+          <p:nvPr/>
+        </p:nvSpPr>
+        <p:spPr>
+          <a:xfrm>
+            <a:off x="640080" y="2377440"/>
+            <a:ext cx="3063240" cy="2468880"/>
+          </a:xfrm>
+          <a:prstGeom prst="roundRect">
+            <a:avLst>
+              <a:gd name="adj" fmla="val 4444"/>
+            </a:avLst>
+          </a:prstGeom>
+          <a:solidFill>
+            <a:srgbClr val="24272A"/>
+          </a:solidFill>
+          <a:ln w="12700">
+            <a:solidFill>
+              <a:srgbClr val="2E3236"/>
+            </a:solidFill>
+            <a:prstDash val="solid"/>
+          </a:ln>
+        </p:spPr>
+      </p:sp>
+      <p:sp>
+        <p:nvSpPr>
+          <p:cNvPr id="5" name="Text 3"/>
+          <p:cNvSpPr/>
+          <p:nvPr/>
+        </p:nvSpPr>
+        <p:spPr>
+          <a:xfrm>
+            <a:off x="896112" y="2633472"/>
+            <a:ext cx="2606040" cy="274320"/>
+          </a:xfrm>
+          <a:prstGeom prst="rect">
+            <a:avLst/>
+          </a:prstGeom>
+          <a:noFill/>
+          <a:ln/>
+        </p:spPr>
+        <p:txBody>
+          <a:bodyPr wrap="square" lIns="0" tIns="0" rIns="0" bIns="0" rtlCol="0" anchor="ctr"/>
+          <a:lstStyle/>
+          <a:p>
+            <a:pPr indent="0" marL="0">
+              <a:buNone/>
+            </a:pPr>
+            <a:r>
+              <a:rPr lang="en-US" sz="1050" b="1" spc="150" kern="0" dirty="0">
+                <a:solidFill>
+                  <a:srgbClr val="C9A24B"/>
+                </a:solidFill>
+                <a:latin typeface="Consolas" pitchFamily="34" charset="0"/>
+                <a:ea typeface="Consolas" pitchFamily="34" charset="-122"/>
+                <a:cs typeface="Consolas" pitchFamily="34" charset="-120"/>
+              </a:rPr>
+              <a:t>STUDENTS LEARN</a:t>
+            </a:r>
+            <a:endParaRPr lang="en-US" sz="1050" dirty="0"/>
+          </a:p>
+        </p:txBody>
+      </p:sp>
+      <p:sp>
+        <p:nvSpPr>
+          <p:cNvPr id="6" name="Text 4"/>
+          <p:cNvSpPr/>
+          <p:nvPr/>
+        </p:nvSpPr>
+        <p:spPr>
+          <a:xfrm>
+            <a:off x="896112" y="2944368"/>
+            <a:ext cx="2606040" cy="457200"/>
+          </a:xfrm>
+          <a:prstGeom prst="rect">
+            <a:avLst/>
+          </a:prstGeom>
+          <a:noFill/>
+          <a:ln/>
+        </p:spPr>
+        <p:txBody>
+          <a:bodyPr wrap="square" lIns="0" tIns="0" rIns="0" bIns="0" rtlCol="0" anchor="ctr"/>
+          <a:lstStyle/>
+          <a:p>
+            <a:pPr indent="0" marL="0">
+              <a:buNone/>
+            </a:pPr>
+            <a:r>
+              <a:rPr lang="en-US" sz="1900" b="1" dirty="0">
+                <a:solidFill>
+                  <a:srgbClr val="FFFFFF"/>
+                </a:solidFill>
+                <a:latin typeface="Bookman Old Style" pitchFamily="34" charset="0"/>
+                <a:ea typeface="Bookman Old Style" pitchFamily="34" charset="-122"/>
+                <a:cs typeface="Bookman Old Style" pitchFamily="34" charset="-120"/>
+              </a:rPr>
+              <a:t>The lesson platform</a:t>
+            </a:r>
+            <a:endParaRPr lang="en-US" sz="1900" dirty="0"/>
+          </a:p>
+        </p:txBody>
+      </p:sp>
+      <p:sp>
+        <p:nvSpPr>
+          <p:cNvPr id="7" name="Text 5"/>
+          <p:cNvSpPr/>
+          <p:nvPr/>
+        </p:nvSpPr>
+        <p:spPr>
+          <a:xfrm>
+            <a:off x="896112" y="3474720"/>
+            <a:ext cx="2606040" cy="1280160"/>
+          </a:xfrm>
+          <a:prstGeom prst="rect">
+            <a:avLst/>
+          </a:prstGeom>
+          <a:noFill/>
+          <a:ln/>
+        </p:spPr>
+        <p:txBody>
+          <a:bodyPr wrap="square" lIns="0" tIns="0" rIns="0" bIns="0" rtlCol="0" anchor="t"/>
+          <a:lstStyle/>
+          <a:p>
+            <a:pPr indent="0" marL="0">
+              <a:buNone/>
+            </a:pPr>
+            <a:r>
+              <a:rPr lang="en-US" sz="1300" dirty="0">
+                <a:solidFill>
+                  <a:srgbClr val="9AA0A6"/>
+                </a:solidFill>
+                <a:latin typeface="Calibri" pitchFamily="34" charset="0"/>
+                <a:ea typeface="Calibri" pitchFamily="34" charset="-122"/>
+                <a:cs typeface="Calibri" pitchFamily="34" charset="-120"/>
+              </a:rPr>
+              <a:t>10-module lessons, First &amp; 10 readings, BeInTheRoom simulations, and an AI coach that questions rather than answers.</a:t>
+            </a:r>
+            <a:endParaRPr lang="en-US" sz="1300" dirty="0"/>
+          </a:p>
+        </p:txBody>
+      </p:sp>
+      <p:sp>
+        <p:nvSpPr>
+          <p:cNvPr id="8" name="Text 6"/>
+          <p:cNvSpPr/>
+          <p:nvPr/>
+        </p:nvSpPr>
+        <p:spPr>
+          <a:xfrm>
+            <a:off x="3703320" y="2377440"/>
+            <a:ext cx="457200" cy="2468880"/>
+          </a:xfrm>
+          <a:prstGeom prst="rect">
+            <a:avLst/>
+          </a:prstGeom>
+          <a:noFill/>
+          <a:ln/>
+        </p:spPr>
+        <p:txBody>
+          <a:bodyPr wrap="square" lIns="0" tIns="0" rIns="0" bIns="0" rtlCol="0" anchor="ctr"/>
+          <a:lstStyle/>
+          <a:p>
+            <a:pPr algn="ctr" indent="0" marL="0">
+              <a:buNone/>
+            </a:pPr>
+            <a:r>
+              <a:rPr lang="en-US" sz="2600" b="1" dirty="0">
+                <a:solidFill>
+                  <a:srgbClr val="C9A24B"/>
+                </a:solidFill>
+                <a:latin typeface="Calibri" pitchFamily="34" charset="0"/>
+                <a:ea typeface="Calibri" pitchFamily="34" charset="-122"/>
+                <a:cs typeface="Calibri" pitchFamily="34" charset="-120"/>
+              </a:rPr>
+              <a:t>→</a:t>
+            </a:r>
+            <a:endParaRPr lang="en-US" sz="2600" dirty="0"/>
+          </a:p>
+        </p:txBody>
+      </p:sp>
+      <p:sp>
+        <p:nvSpPr>
+          <p:cNvPr id="9" name="Shape 7"/>
+          <p:cNvSpPr/>
+          <p:nvPr/>
+        </p:nvSpPr>
+        <p:spPr>
+          <a:xfrm>
+            <a:off x="4160520" y="2377440"/>
+            <a:ext cx="2926080" cy="2468880"/>
+          </a:xfrm>
+          <a:prstGeom prst="roundRect">
+            <a:avLst>
+              <a:gd name="adj" fmla="val 4444"/>
+            </a:avLst>
+          </a:prstGeom>
+          <a:solidFill>
+            <a:srgbClr val="24272A"/>
+          </a:solidFill>
+          <a:ln w="12700">
+            <a:solidFill>
+              <a:srgbClr val="2E3236"/>
+            </a:solidFill>
+            <a:prstDash val="solid"/>
+          </a:ln>
+        </p:spPr>
+      </p:sp>
+      <p:sp>
+        <p:nvSpPr>
+          <p:cNvPr id="10" name="Text 8"/>
+          <p:cNvSpPr/>
+          <p:nvPr/>
+        </p:nvSpPr>
+        <p:spPr>
+          <a:xfrm>
+            <a:off x="4416552" y="2633472"/>
+            <a:ext cx="2468880" cy="274320"/>
+          </a:xfrm>
+          <a:prstGeom prst="rect">
+            <a:avLst/>
+          </a:prstGeom>
+          <a:noFill/>
+          <a:ln/>
+        </p:spPr>
+        <p:txBody>
+          <a:bodyPr wrap="square" lIns="0" tIns="0" rIns="0" bIns="0" rtlCol="0" anchor="ctr"/>
+          <a:lstStyle/>
+          <a:p>
+            <a:pPr indent="0" marL="0">
+              <a:buNone/>
+            </a:pPr>
+            <a:r>
+              <a:rPr lang="en-US" sz="1050" b="1" spc="150" kern="0" dirty="0">
+                <a:solidFill>
+                  <a:srgbClr val="C9A24B"/>
+                </a:solidFill>
+                <a:latin typeface="Consolas" pitchFamily="34" charset="0"/>
+                <a:ea typeface="Consolas" pitchFamily="34" charset="-122"/>
+                <a:cs typeface="Consolas" pitchFamily="34" charset="-120"/>
+              </a:rPr>
+              <a:t>ONE DATA LAYER</a:t>
+            </a:r>
+            <a:endParaRPr lang="en-US" sz="1050" dirty="0"/>
+          </a:p>
+        </p:txBody>
+      </p:sp>
+      <p:sp>
+        <p:nvSpPr>
+          <p:cNvPr id="11" name="Text 9"/>
+          <p:cNvSpPr/>
+          <p:nvPr/>
+        </p:nvSpPr>
+        <p:spPr>
+          <a:xfrm>
+            <a:off x="4416552" y="2944368"/>
+            <a:ext cx="2468880" cy="457200"/>
+          </a:xfrm>
+          <a:prstGeom prst="rect">
+            <a:avLst/>
+          </a:prstGeom>
+          <a:noFill/>
+          <a:ln/>
+        </p:spPr>
+        <p:txBody>
+          <a:bodyPr wrap="square" lIns="0" tIns="0" rIns="0" bIns="0" rtlCol="0" anchor="ctr"/>
+          <a:lstStyle/>
+          <a:p>
+            <a:pPr indent="0" marL="0">
+              <a:buNone/>
+            </a:pPr>
+            <a:r>
+              <a:rPr lang="en-US" sz="1900" b="1" dirty="0">
+                <a:solidFill>
+                  <a:srgbClr val="FFFFFF"/>
+                </a:solidFill>
+                <a:latin typeface="Bookman Old Style" pitchFamily="34" charset="0"/>
+                <a:ea typeface="Bookman Old Style" pitchFamily="34" charset="-122"/>
+                <a:cs typeface="Bookman Old Style" pitchFamily="34" charset="-120"/>
+              </a:rPr>
+              <a:t>Every response, analyzed</a:t>
+            </a:r>
+            <a:endParaRPr lang="en-US" sz="1900" dirty="0"/>
+          </a:p>
+        </p:txBody>
+      </p:sp>
+      <p:sp>
+        <p:nvSpPr>
+          <p:cNvPr id="12" name="Text 10"/>
+          <p:cNvSpPr/>
+          <p:nvPr/>
+        </p:nvSpPr>
+        <p:spPr>
+          <a:xfrm>
+            <a:off x="4416552" y="3474720"/>
+            <a:ext cx="2468880" cy="1280160"/>
+          </a:xfrm>
+          <a:prstGeom prst="rect">
+            <a:avLst/>
+          </a:prstGeom>
+          <a:noFill/>
+          <a:ln/>
+        </p:spPr>
+        <p:txBody>
+          <a:bodyPr wrap="square" lIns="0" tIns="0" rIns="0" bIns="0" rtlCol="0" anchor="t"/>
+          <a:lstStyle/>
+          <a:p>
+            <a:pPr indent="0" marL="0">
+              <a:buNone/>
+            </a:pPr>
+            <a:r>
+              <a:rPr lang="en-US" sz="1300" dirty="0">
+                <a:solidFill>
+                  <a:srgbClr val="9AA0A6"/>
+                </a:solidFill>
+                <a:latin typeface="Calibri" pitchFamily="34" charset="0"/>
+                <a:ea typeface="Calibri" pitchFamily="34" charset="-122"/>
+                <a:cs typeface="Calibri" pitchFamily="34" charset="-120"/>
+              </a:rPr>
+              <a:t>Answers, confidence, evidence, misconceptions, and skill gaps — captured and read by a single engine.</a:t>
+            </a:r>
+            <a:endParaRPr lang="en-US" sz="1300" dirty="0"/>
+          </a:p>
+        </p:txBody>
+      </p:sp>
+      <p:sp>
+        <p:nvSpPr>
+          <p:cNvPr id="13" name="Text 11"/>
+          <p:cNvSpPr/>
+          <p:nvPr/>
+        </p:nvSpPr>
+        <p:spPr>
+          <a:xfrm>
+            <a:off x="7086600" y="2377440"/>
+            <a:ext cx="457200" cy="2468880"/>
+          </a:xfrm>
+          <a:prstGeom prst="rect">
+            <a:avLst/>
+          </a:prstGeom>
+          <a:noFill/>
+          <a:ln/>
+        </p:spPr>
+        <p:txBody>
+          <a:bodyPr wrap="square" lIns="0" tIns="0" rIns="0" bIns="0" rtlCol="0" anchor="ctr"/>
+          <a:lstStyle/>
+          <a:p>
+            <a:pPr algn="ctr" indent="0" marL="0">
+              <a:buNone/>
+            </a:pPr>
+            <a:r>
+              <a:rPr lang="en-US" sz="2600" b="1" dirty="0">
+                <a:solidFill>
+                  <a:srgbClr val="C9A24B"/>
+                </a:solidFill>
+                <a:latin typeface="Calibri" pitchFamily="34" charset="0"/>
+                <a:ea typeface="Calibri" pitchFamily="34" charset="-122"/>
+                <a:cs typeface="Calibri" pitchFamily="34" charset="-120"/>
+              </a:rPr>
+              <a:t>→</a:t>
+            </a:r>
+            <a:endParaRPr lang="en-US" sz="2600" dirty="0"/>
+          </a:p>
+        </p:txBody>
+      </p:sp>
+      <p:sp>
+        <p:nvSpPr>
+          <p:cNvPr id="14" name="Shape 12"/>
+          <p:cNvSpPr/>
+          <p:nvPr/>
+        </p:nvSpPr>
+        <p:spPr>
+          <a:xfrm>
+            <a:off x="7543800" y="2377440"/>
+            <a:ext cx="4069080" cy="713232"/>
+          </a:xfrm>
+          <a:prstGeom prst="roundRect">
+            <a:avLst>
+              <a:gd name="adj" fmla="val 12821"/>
+            </a:avLst>
+          </a:prstGeom>
+          <a:solidFill>
+            <a:srgbClr val="24272A"/>
+          </a:solidFill>
+          <a:ln w="12700">
+            <a:solidFill>
+              <a:srgbClr val="2E3236"/>
+            </a:solidFill>
+            <a:prstDash val="solid"/>
+          </a:ln>
+        </p:spPr>
+      </p:sp>
+      <p:sp>
+        <p:nvSpPr>
+          <p:cNvPr id="15" name="Text 13"/>
+          <p:cNvSpPr/>
+          <p:nvPr/>
+        </p:nvSpPr>
+        <p:spPr>
+          <a:xfrm>
+            <a:off x="7763256" y="2505456"/>
+            <a:ext cx="3703320" cy="292608"/>
+          </a:xfrm>
+          <a:prstGeom prst="rect">
+            <a:avLst/>
+          </a:prstGeom>
+          <a:noFill/>
+          <a:ln/>
+        </p:spPr>
+        <p:txBody>
+          <a:bodyPr wrap="square" lIns="0" tIns="0" rIns="0" bIns="0" rtlCol="0" anchor="ctr"/>
+          <a:lstStyle/>
+          <a:p>
+            <a:pPr indent="0" marL="0">
+              <a:buNone/>
+            </a:pPr>
+            <a:r>
+              <a:rPr lang="en-US" sz="1600" b="1" dirty="0">
+                <a:solidFill>
+                  <a:srgbClr val="E4C878"/>
+                </a:solidFill>
+                <a:latin typeface="Bookman Old Style" pitchFamily="34" charset="0"/>
+                <a:ea typeface="Bookman Old Style" pitchFamily="34" charset="-122"/>
+                <a:cs typeface="Bookman Old Style" pitchFamily="34" charset="-120"/>
+              </a:rPr>
+              <a:t>Teacher Hub</a:t>
+            </a:r>
+            <a:endParaRPr lang="en-US" sz="1600" dirty="0"/>
+          </a:p>
+        </p:txBody>
+      </p:sp>
+      <p:sp>
+        <p:nvSpPr>
+          <p:cNvPr id="16" name="Text 14"/>
+          <p:cNvSpPr/>
+          <p:nvPr/>
+        </p:nvSpPr>
+        <p:spPr>
+          <a:xfrm>
+            <a:off x="7763256" y="2788920"/>
+            <a:ext cx="3703320" cy="256032"/>
+          </a:xfrm>
+          <a:prstGeom prst="rect">
+            <a:avLst/>
+          </a:prstGeom>
+          <a:noFill/>
+          <a:ln/>
+        </p:spPr>
+        <p:txBody>
+          <a:bodyPr wrap="square" lIns="0" tIns="0" rIns="0" bIns="0" rtlCol="0" anchor="ctr"/>
+          <a:lstStyle/>
+          <a:p>
+            <a:pPr indent="0" marL="0">
+              <a:buNone/>
+            </a:pPr>
+            <a:r>
+              <a:rPr lang="en-US" sz="1200" dirty="0">
+                <a:solidFill>
+                  <a:srgbClr val="9AA0A6"/>
+                </a:solidFill>
+                <a:latin typeface="Calibri" pitchFamily="34" charset="0"/>
+                <a:ea typeface="Calibri" pitchFamily="34" charset="-122"/>
+                <a:cs typeface="Calibri" pitchFamily="34" charset="-120"/>
+              </a:rPr>
+              <a:t>→ teachers act in real time</a:t>
+            </a:r>
+            <a:endParaRPr lang="en-US" sz="1200" dirty="0"/>
+          </a:p>
+        </p:txBody>
+      </p:sp>
+      <p:sp>
+        <p:nvSpPr>
+          <p:cNvPr id="17" name="Shape 15"/>
+          <p:cNvSpPr/>
+          <p:nvPr/>
+        </p:nvSpPr>
+        <p:spPr>
+          <a:xfrm>
+            <a:off x="7543800" y="3255264"/>
+            <a:ext cx="4069080" cy="713232"/>
+          </a:xfrm>
+          <a:prstGeom prst="roundRect">
+            <a:avLst>
+              <a:gd name="adj" fmla="val 12821"/>
+            </a:avLst>
+          </a:prstGeom>
+          <a:solidFill>
+            <a:srgbClr val="24272A"/>
+          </a:solidFill>
+          <a:ln w="12700">
+            <a:solidFill>
+              <a:srgbClr val="2E3236"/>
+            </a:solidFill>
+            <a:prstDash val="solid"/>
+          </a:ln>
+        </p:spPr>
+      </p:sp>
+      <p:sp>
+        <p:nvSpPr>
+          <p:cNvPr id="18" name="Text 16"/>
+          <p:cNvSpPr/>
+          <p:nvPr/>
+        </p:nvSpPr>
+        <p:spPr>
+          <a:xfrm>
+            <a:off x="7763256" y="3383280"/>
+            <a:ext cx="3703320" cy="292608"/>
+          </a:xfrm>
+          <a:prstGeom prst="rect">
+            <a:avLst/>
+          </a:prstGeom>
+          <a:noFill/>
+          <a:ln/>
+        </p:spPr>
+        <p:txBody>
+          <a:bodyPr wrap="square" lIns="0" tIns="0" rIns="0" bIns="0" rtlCol="0" anchor="ctr"/>
+          <a:lstStyle/>
+          <a:p>
+            <a:pPr indent="0" marL="0">
+              <a:buNone/>
+            </a:pPr>
+            <a:r>
+              <a:rPr lang="en-US" sz="1600" b="1" dirty="0">
+                <a:solidFill>
+                  <a:srgbClr val="E4C878"/>
+                </a:solidFill>
+                <a:latin typeface="Bookman Old Style" pitchFamily="34" charset="0"/>
+                <a:ea typeface="Bookman Old Style" pitchFamily="34" charset="-122"/>
+                <a:cs typeface="Bookman Old Style" pitchFamily="34" charset="-120"/>
+              </a:rPr>
+              <a:t>Study Guides</a:t>
+            </a:r>
+            <a:endParaRPr lang="en-US" sz="1600" dirty="0"/>
+          </a:p>
+        </p:txBody>
+      </p:sp>
+      <p:sp>
+        <p:nvSpPr>
+          <p:cNvPr id="19" name="Text 17"/>
+          <p:cNvSpPr/>
+          <p:nvPr/>
+        </p:nvSpPr>
+        <p:spPr>
+          <a:xfrm>
+            <a:off x="7763256" y="3666744"/>
+            <a:ext cx="3703320" cy="256032"/>
+          </a:xfrm>
+          <a:prstGeom prst="rect">
+            <a:avLst/>
+          </a:prstGeom>
+          <a:noFill/>
+          <a:ln/>
+        </p:spPr>
+        <p:txBody>
+          <a:bodyPr wrap="square" lIns="0" tIns="0" rIns="0" bIns="0" rtlCol="0" anchor="ctr"/>
+          <a:lstStyle/>
+          <a:p>
+            <a:pPr indent="0" marL="0">
+              <a:buNone/>
+            </a:pPr>
+            <a:r>
+              <a:rPr lang="en-US" sz="1200" dirty="0">
+                <a:solidFill>
+                  <a:srgbClr val="9AA0A6"/>
+                </a:solidFill>
+                <a:latin typeface="Calibri" pitchFamily="34" charset="0"/>
+                <a:ea typeface="Calibri" pitchFamily="34" charset="-122"/>
+                <a:cs typeface="Calibri" pitchFamily="34" charset="-120"/>
+              </a:rPr>
+              <a:t>→ students get a targeted plan</a:t>
+            </a:r>
+            <a:endParaRPr lang="en-US" sz="1200" dirty="0"/>
+          </a:p>
+        </p:txBody>
+      </p:sp>
+      <p:sp>
+        <p:nvSpPr>
+          <p:cNvPr id="20" name="Shape 18"/>
+          <p:cNvSpPr/>
+          <p:nvPr/>
+        </p:nvSpPr>
+        <p:spPr>
+          <a:xfrm>
+            <a:off x="7543800" y="4133088"/>
+            <a:ext cx="4069080" cy="713232"/>
+          </a:xfrm>
+          <a:prstGeom prst="roundRect">
+            <a:avLst>
+              <a:gd name="adj" fmla="val 12821"/>
+            </a:avLst>
+          </a:prstGeom>
+          <a:solidFill>
+            <a:srgbClr val="24272A"/>
+          </a:solidFill>
+          <a:ln w="12700">
+            <a:solidFill>
+              <a:srgbClr val="2E3236"/>
+            </a:solidFill>
+            <a:prstDash val="solid"/>
+          </a:ln>
+        </p:spPr>
+      </p:sp>
+      <p:sp>
+        <p:nvSpPr>
+          <p:cNvPr id="21" name="Text 19"/>
+          <p:cNvSpPr/>
+          <p:nvPr/>
+        </p:nvSpPr>
+        <p:spPr>
+          <a:xfrm>
+            <a:off x="7763256" y="4261104"/>
+            <a:ext cx="3703320" cy="292608"/>
+          </a:xfrm>
+          <a:prstGeom prst="rect">
+            <a:avLst/>
+          </a:prstGeom>
+          <a:noFill/>
+          <a:ln/>
+        </p:spPr>
+        <p:txBody>
+          <a:bodyPr wrap="square" lIns="0" tIns="0" rIns="0" bIns="0" rtlCol="0" anchor="ctr"/>
+          <a:lstStyle/>
+          <a:p>
+            <a:pPr indent="0" marL="0">
+              <a:buNone/>
+            </a:pPr>
+            <a:r>
+              <a:rPr lang="en-US" sz="1600" b="1" dirty="0">
+                <a:solidFill>
+                  <a:srgbClr val="E4C878"/>
+                </a:solidFill>
+                <a:latin typeface="Bookman Old Style" pitchFamily="34" charset="0"/>
+                <a:ea typeface="Bookman Old Style" pitchFamily="34" charset="-122"/>
+                <a:cs typeface="Bookman Old Style" pitchFamily="34" charset="-120"/>
+              </a:rPr>
+              <a:t>The Dispatch</a:t>
+            </a:r>
+            <a:endParaRPr lang="en-US" sz="1600" dirty="0"/>
+          </a:p>
+        </p:txBody>
+      </p:sp>
+      <p:sp>
+        <p:nvSpPr>
+          <p:cNvPr id="22" name="Text 20"/>
+          <p:cNvSpPr/>
+          <p:nvPr/>
+        </p:nvSpPr>
+        <p:spPr>
+          <a:xfrm>
+            <a:off x="7763256" y="4544568"/>
+            <a:ext cx="3703320" cy="256032"/>
+          </a:xfrm>
+          <a:prstGeom prst="rect">
+            <a:avLst/>
+          </a:prstGeom>
+          <a:noFill/>
+          <a:ln/>
+        </p:spPr>
+        <p:txBody>
+          <a:bodyPr wrap="square" lIns="0" tIns="0" rIns="0" bIns="0" rtlCol="0" anchor="ctr"/>
+          <a:lstStyle/>
+          <a:p>
+            <a:pPr indent="0" marL="0">
+              <a:buNone/>
+            </a:pPr>
+            <a:r>
+              <a:rPr lang="en-US" sz="1200" dirty="0">
+                <a:solidFill>
+                  <a:srgbClr val="9AA0A6"/>
+                </a:solidFill>
+                <a:latin typeface="Calibri" pitchFamily="34" charset="0"/>
+                <a:ea typeface="Calibri" pitchFamily="34" charset="-122"/>
+                <a:cs typeface="Calibri" pitchFamily="34" charset="-120"/>
+              </a:rPr>
+              <a:t>→ families stay in the loop</a:t>
+            </a:r>
+            <a:endParaRPr lang="en-US" sz="1200" dirty="0"/>
+          </a:p>
+        </p:txBody>
+      </p:sp>
+      <p:sp>
+        <p:nvSpPr>
+          <p:cNvPr id="23" name="Text 21"/>
+          <p:cNvSpPr/>
+          <p:nvPr/>
+        </p:nvSpPr>
+        <p:spPr>
+          <a:xfrm>
+            <a:off x="640080" y="5212080"/>
+            <a:ext cx="10972800" cy="457200"/>
+          </a:xfrm>
+          <a:prstGeom prst="rect">
+            <a:avLst/>
+          </a:prstGeom>
+          <a:noFill/>
+          <a:ln/>
+        </p:spPr>
+        <p:txBody>
+          <a:bodyPr wrap="square" lIns="0" tIns="0" rIns="0" bIns="0" rtlCol="0" anchor="ctr"/>
+          <a:lstStyle/>
+          <a:p>
+            <a:pPr indent="0" marL="0">
+              <a:buNone/>
+            </a:pPr>
+            <a:r>
+              <a:rPr lang="en-US" sz="1600" b="1" i="1" dirty="0">
+                <a:solidFill>
+                  <a:srgbClr val="C9A24B"/>
+                </a:solidFill>
+                <a:latin typeface="Bookman Old Style" pitchFamily="34" charset="0"/>
+                <a:ea typeface="Bookman Old Style" pitchFamily="34" charset="-122"/>
+                <a:cs typeface="Bookman Old Style" pitchFamily="34" charset="-120"/>
+              </a:rPr>
+              <a:t>Build the lesson once — and everyone around the student is served automatically.</a:t>
+            </a:r>
+            <a:endParaRPr lang="en-US" sz="1600" dirty="0"/>
+          </a:p>
+        </p:txBody>
+      </p:sp>
+      <p:sp>
+        <p:nvSpPr>
+          <p:cNvPr id="24" name="Text 22"/>
+          <p:cNvSpPr/>
+          <p:nvPr/>
+        </p:nvSpPr>
+        <p:spPr>
+          <a:xfrm>
+            <a:off x="502920" y="6400800"/>
+            <a:ext cx="7315200" cy="274320"/>
+          </a:xfrm>
+          <a:prstGeom prst="rect">
+            <a:avLst/>
+          </a:prstGeom>
+          <a:noFill/>
+          <a:ln/>
+        </p:spPr>
+        <p:txBody>
+          <a:bodyPr wrap="square" lIns="0" tIns="0" rIns="0" bIns="0" rtlCol="0" anchor="ctr"/>
+          <a:lstStyle/>
+          <a:p>
+            <a:pPr algn="l" indent="0" marL="0">
+              <a:buNone/>
+            </a:pPr>
+            <a:r>
+              <a:rPr lang="en-US" sz="1000" b="1" dirty="0">
+                <a:solidFill>
+                  <a:srgbClr val="C9A24B"/>
+                </a:solidFill>
+                <a:latin typeface="Calibri" pitchFamily="34" charset="0"/>
+                <a:ea typeface="Calibri" pitchFamily="34" charset="-122"/>
+                <a:cs typeface="Calibri" pitchFamily="34" charset="-120"/>
+              </a:rPr>
+              <a:t>AndersonLogic AI</a:t>
+            </a:r>
+            <a:pPr algn="l" indent="0" marL="0">
+              <a:buNone/>
+            </a:pPr>
+            <a:r>
+              <a:rPr lang="en-US" sz="1000" dirty="0">
+                <a:solidFill>
+                  <a:srgbClr val="9AA0A6"/>
+                </a:solidFill>
+                <a:latin typeface="Calibri" pitchFamily="34" charset="0"/>
+                <a:ea typeface="Calibri" pitchFamily="34" charset="-122"/>
+                <a:cs typeface="Calibri" pitchFamily="34" charset="-120"/>
+              </a:rPr>
+              <a:t>   ·   BeHistorical</a:t>
+            </a:r>
+            <a:endParaRPr lang="en-US" sz="1000" dirty="0"/>
+          </a:p>
+        </p:txBody>
+      </p:sp>
+      <p:sp>
+        <p:nvSpPr>
+          <p:cNvPr id="25" name="Text 23"/>
+          <p:cNvSpPr/>
+          <p:nvPr/>
+        </p:nvSpPr>
+        <p:spPr>
+          <a:xfrm>
+            <a:off x="10607040" y="6355080"/>
+            <a:ext cx="1097280" cy="320040"/>
+          </a:xfrm>
+          <a:prstGeom prst="rect">
+            <a:avLst/>
+          </a:prstGeom>
+          <a:noFill/>
+          <a:ln/>
+        </p:spPr>
+        <p:txBody>
+          <a:bodyPr wrap="square" lIns="0" tIns="0" rIns="0" bIns="0" rtlCol="0" anchor="ctr"/>
+          <a:lstStyle/>
+          <a:p>
+            <a:pPr algn="r" indent="0" marL="0">
+              <a:buNone/>
+            </a:pPr>
+            <a:r>
+              <a:rPr lang="en-US" sz="1100" b="1" dirty="0">
+                <a:solidFill>
+                  <a:srgbClr val="9AA0A6"/>
+                </a:solidFill>
+                <a:latin typeface="Consolas" pitchFamily="34" charset="0"/>
+                <a:ea typeface="Consolas" pitchFamily="34" charset="-122"/>
+                <a:cs typeface="Consolas" pitchFamily="34" charset="-120"/>
+              </a:rPr>
+              <a:t>13 / 15</a:t>
+            </a:r>
+            <a:endParaRPr lang="en-US" sz="1100" dirty="0"/>
+          </a:p>
+        </p:txBody>
+      </p:sp>
+    </p:spTree>
+  </p:cSld>
+  <p:clrMapOvr>
+    <a:masterClrMapping/>
+  </p:clrMapOvr>
+</p:sld>
+</file>
+
+<file path=ppt/slides/slide14.xml><?xml version="1.0" encoding="utf-8"?>
+<p:sld xmlns:a="http://schemas.openxmlformats.org/drawingml/2006/main" xmlns:r="http://schemas.openxmlformats.org/officeDocument/2006/relationships" xmlns:p="http://schemas.openxmlformats.org/presentationml/2006/main">
+  <p:cSld name="Slide 14">
+    <p:bg>
+      <p:bgPr>
+        <a:solidFill>
+          <a:srgbClr val="F4EEE2"/>
+        </a:solidFill>
+      </p:bgPr>
+    </p:bg>
+    <p:spTree>
+      <p:nvGrpSpPr>
+        <p:cNvPr id="1" name=""/>
+        <p:cNvGrpSpPr/>
+        <p:nvPr/>
+      </p:nvGrpSpPr>
+      <p:grpSpPr>
+        <a:xfrm>
+          <a:off x="0" y="0"/>
+          <a:ext cx="0" cy="0"/>
+          <a:chOff x="0" y="0"/>
+          <a:chExt cx="0" cy="0"/>
+        </a:xfrm>
+      </p:grpSpPr>
+      <p:sp>
+        <p:nvSpPr>
+          <p:cNvPr id="2" name="Text 0"/>
+          <p:cNvSpPr/>
+          <p:nvPr/>
+        </p:nvSpPr>
+        <p:spPr>
+          <a:xfrm>
+            <a:off x="640080" y="548640"/>
+            <a:ext cx="8229600" cy="274320"/>
+          </a:xfrm>
+          <a:prstGeom prst="rect">
+            <a:avLst/>
+          </a:prstGeom>
+          <a:noFill/>
+          <a:ln/>
+        </p:spPr>
+        <p:txBody>
+          <a:bodyPr wrap="square" lIns="0" tIns="0" rIns="0" bIns="0" rtlCol="0" anchor="ctr"/>
+          <a:lstStyle/>
+          <a:p>
+            <a:pPr algn="l" indent="0" marL="0">
+              <a:buNone/>
+            </a:pPr>
+            <a:r>
+              <a:rPr lang="en-US" sz="1200" b="1" spc="300" kern="0" dirty="0">
+                <a:solidFill>
+                  <a:srgbClr val="9A7A28"/>
+                </a:solidFill>
+                <a:latin typeface="Consolas" pitchFamily="34" charset="0"/>
+                <a:ea typeface="Consolas" pitchFamily="34" charset="-122"/>
+                <a:cs typeface="Consolas" pitchFamily="34" charset="-120"/>
+              </a:rPr>
+              <a:t>WHERE THE BUILD STANDS</a:t>
+            </a:r>
+            <a:endParaRPr lang="en-US" sz="1200" dirty="0"/>
+          </a:p>
+        </p:txBody>
+      </p:sp>
+      <p:sp>
+        <p:nvSpPr>
+          <p:cNvPr id="3" name="Text 1"/>
+          <p:cNvSpPr/>
+          <p:nvPr/>
+        </p:nvSpPr>
+        <p:spPr>
+          <a:xfrm>
+            <a:off x="603504" y="868680"/>
+            <a:ext cx="10972800" cy="731520"/>
+          </a:xfrm>
+          <a:prstGeom prst="rect">
+            <a:avLst/>
+          </a:prstGeom>
+          <a:noFill/>
+          <a:ln/>
+        </p:spPr>
+        <p:txBody>
+          <a:bodyPr wrap="square" lIns="0" tIns="0" rIns="0" bIns="0" rtlCol="0" anchor="ctr"/>
+          <a:lstStyle/>
+          <a:p>
+            <a:pPr indent="0" marL="0">
+              <a:buNone/>
+            </a:pPr>
+            <a:r>
+              <a:rPr lang="en-US" sz="3200" b="1" dirty="0">
+                <a:solidFill>
+                  <a:srgbClr val="2B2723"/>
+                </a:solidFill>
+                <a:latin typeface="Bookman Old Style" pitchFamily="34" charset="0"/>
+                <a:ea typeface="Bookman Old Style" pitchFamily="34" charset="-122"/>
+                <a:cs typeface="Bookman Old Style" pitchFamily="34" charset="-120"/>
+              </a:rPr>
+              <a:t>What's live, and what's next</a:t>
+            </a:r>
+            <a:endParaRPr lang="en-US" sz="3200" dirty="0"/>
+          </a:p>
+        </p:txBody>
+      </p:sp>
+      <p:sp>
+        <p:nvSpPr>
+          <p:cNvPr id="4" name="Shape 2"/>
+          <p:cNvSpPr/>
+          <p:nvPr/>
+        </p:nvSpPr>
+        <p:spPr>
+          <a:xfrm>
+            <a:off x="640080" y="2103120"/>
+            <a:ext cx="3520440" cy="3383280"/>
+          </a:xfrm>
+          <a:prstGeom prst="roundRect">
+            <a:avLst>
+              <a:gd name="adj" fmla="val 3243"/>
+            </a:avLst>
+          </a:prstGeom>
+          <a:solidFill>
+            <a:srgbClr val="FCF8F0"/>
+          </a:solidFill>
+          <a:ln w="12700">
+            <a:solidFill>
+              <a:srgbClr val="E4DBC9"/>
+            </a:solidFill>
+            <a:prstDash val="solid"/>
+          </a:ln>
+        </p:spPr>
+      </p:sp>
+      <p:sp>
+        <p:nvSpPr>
+          <p:cNvPr id="5" name="Shape 3"/>
+          <p:cNvSpPr/>
+          <p:nvPr/>
+        </p:nvSpPr>
+        <p:spPr>
+          <a:xfrm>
+            <a:off x="914400" y="2377440"/>
+            <a:ext cx="1188720" cy="310896"/>
+          </a:xfrm>
+          <a:prstGeom prst="roundRect">
+            <a:avLst>
+              <a:gd name="adj" fmla="val 50000"/>
+            </a:avLst>
+          </a:prstGeom>
+          <a:solidFill>
+            <a:srgbClr val="DDECE0"/>
+          </a:solidFill>
+          <a:ln w="12700">
+            <a:solidFill>
+              <a:srgbClr val="5AA668"/>
+            </a:solidFill>
+            <a:prstDash val="solid"/>
+          </a:ln>
+        </p:spPr>
+      </p:sp>
+      <p:sp>
+        <p:nvSpPr>
+          <p:cNvPr id="6" name="Text 4"/>
+          <p:cNvSpPr/>
+          <p:nvPr/>
+        </p:nvSpPr>
+        <p:spPr>
+          <a:xfrm>
+            <a:off x="914400" y="2377440"/>
+            <a:ext cx="1188720" cy="310896"/>
+          </a:xfrm>
+          <a:prstGeom prst="rect">
+            <a:avLst/>
+          </a:prstGeom>
+          <a:noFill/>
+          <a:ln/>
+        </p:spPr>
+        <p:txBody>
+          <a:bodyPr wrap="square" lIns="0" tIns="0" rIns="0" bIns="0" rtlCol="0" anchor="ctr"/>
+          <a:lstStyle/>
+          <a:p>
+            <a:pPr algn="ctr" indent="0" marL="0">
+              <a:buNone/>
+            </a:pPr>
+            <a:r>
+              <a:rPr lang="en-US" sz="950" b="1" spc="100" kern="0" dirty="0">
+                <a:solidFill>
+                  <a:srgbClr val="3D7A4D"/>
+                </a:solidFill>
+                <a:latin typeface="Consolas" pitchFamily="34" charset="0"/>
+                <a:ea typeface="Consolas" pitchFamily="34" charset="-122"/>
+                <a:cs typeface="Consolas" pitchFamily="34" charset="-120"/>
+              </a:rPr>
+              <a:t>LIVE NOW</a:t>
+            </a:r>
+            <a:endParaRPr lang="en-US" sz="950" dirty="0"/>
+          </a:p>
+        </p:txBody>
+      </p:sp>
+      <p:sp>
+        <p:nvSpPr>
+          <p:cNvPr id="7" name="Text 5"/>
+          <p:cNvSpPr/>
+          <p:nvPr/>
+        </p:nvSpPr>
+        <p:spPr>
+          <a:xfrm>
+            <a:off x="914400" y="2971800"/>
+            <a:ext cx="3017520" cy="457200"/>
+          </a:xfrm>
+          <a:prstGeom prst="rect">
+            <a:avLst/>
+          </a:prstGeom>
+          <a:noFill/>
+          <a:ln/>
+        </p:spPr>
+        <p:txBody>
+          <a:bodyPr wrap="square" lIns="0" tIns="0" rIns="0" bIns="0" rtlCol="0" anchor="t"/>
+          <a:lstStyle/>
+          <a:p>
+            <a:pPr indent="0" marL="0">
+              <a:buNone/>
+            </a:pPr>
+            <a:r>
+              <a:rPr lang="en-US" sz="1350" b="1" dirty="0">
+                <a:solidFill>
+                  <a:srgbClr val="9A7A28"/>
+                </a:solidFill>
+                <a:latin typeface="Calibri" pitchFamily="34" charset="0"/>
+                <a:ea typeface="Calibri" pitchFamily="34" charset="-122"/>
+                <a:cs typeface="Calibri" pitchFamily="34" charset="-120"/>
+              </a:rPr>
+              <a:t>› </a:t>
+            </a:r>
+            <a:pPr indent="0" marL="0">
+              <a:buNone/>
+            </a:pPr>
+            <a:r>
+              <a:rPr lang="en-US" sz="1350" dirty="0">
+                <a:solidFill>
+                  <a:srgbClr val="2B2723"/>
+                </a:solidFill>
+                <a:latin typeface="Calibri" pitchFamily="34" charset="0"/>
+                <a:ea typeface="Calibri" pitchFamily="34" charset="-122"/>
+                <a:cs typeface="Calibri" pitchFamily="34" charset="-120"/>
+              </a:rPr>
+              <a:t>77 complete lessons</a:t>
+            </a:r>
+            <a:pPr indent="0" marL="0">
+              <a:buNone/>
+            </a:pPr>
+            <a:r>
+              <a:rPr lang="en-US" sz="1150" i="1" dirty="0">
+                <a:solidFill>
+                  <a:srgbClr val="6E675C"/>
+                </a:solidFill>
+                <a:latin typeface="Calibri" pitchFamily="34" charset="0"/>
+                <a:ea typeface="Calibri" pitchFamily="34" charset="-122"/>
+                <a:cs typeface="Calibri" pitchFamily="34" charset="-120"/>
+              </a:rPr>
+              <a:t>  · all 9 units + Foundations</a:t>
+            </a:r>
+            <a:endParaRPr lang="en-US" sz="1350" dirty="0"/>
+          </a:p>
+        </p:txBody>
+      </p:sp>
+      <p:sp>
+        <p:nvSpPr>
+          <p:cNvPr id="8" name="Text 6"/>
+          <p:cNvSpPr/>
+          <p:nvPr/>
+        </p:nvSpPr>
+        <p:spPr>
+          <a:xfrm>
+            <a:off x="914400" y="3483864"/>
+            <a:ext cx="3017520" cy="457200"/>
+          </a:xfrm>
+          <a:prstGeom prst="rect">
+            <a:avLst/>
+          </a:prstGeom>
+          <a:noFill/>
+          <a:ln/>
+        </p:spPr>
+        <p:txBody>
+          <a:bodyPr wrap="square" lIns="0" tIns="0" rIns="0" bIns="0" rtlCol="0" anchor="t"/>
+          <a:lstStyle/>
+          <a:p>
+            <a:pPr indent="0" marL="0">
+              <a:buNone/>
+            </a:pPr>
+            <a:r>
+              <a:rPr lang="en-US" sz="1350" b="1" dirty="0">
+                <a:solidFill>
+                  <a:srgbClr val="9A7A28"/>
+                </a:solidFill>
+                <a:latin typeface="Calibri" pitchFamily="34" charset="0"/>
+                <a:ea typeface="Calibri" pitchFamily="34" charset="-122"/>
+                <a:cs typeface="Calibri" pitchFamily="34" charset="-120"/>
+              </a:rPr>
+              <a:t>› </a:t>
+            </a:r>
+            <a:pPr indent="0" marL="0">
+              <a:buNone/>
+            </a:pPr>
+            <a:r>
+              <a:rPr lang="en-US" sz="1350" dirty="0">
+                <a:solidFill>
+                  <a:srgbClr val="2B2723"/>
+                </a:solidFill>
+                <a:latin typeface="Calibri" pitchFamily="34" charset="0"/>
+                <a:ea typeface="Calibri" pitchFamily="34" charset="-122"/>
+                <a:cs typeface="Calibri" pitchFamily="34" charset="-120"/>
+              </a:rPr>
+              <a:t>61 BeInTheRoom simulations</a:t>
+            </a:r>
+            <a:endParaRPr lang="en-US" sz="1350" dirty="0"/>
+          </a:p>
+        </p:txBody>
+      </p:sp>
+      <p:sp>
+        <p:nvSpPr>
+          <p:cNvPr id="9" name="Text 7"/>
+          <p:cNvSpPr/>
+          <p:nvPr/>
+        </p:nvSpPr>
+        <p:spPr>
+          <a:xfrm>
+            <a:off x="914400" y="3995928"/>
+            <a:ext cx="3017520" cy="457200"/>
+          </a:xfrm>
+          <a:prstGeom prst="rect">
+            <a:avLst/>
+          </a:prstGeom>
+          <a:noFill/>
+          <a:ln/>
+        </p:spPr>
+        <p:txBody>
+          <a:bodyPr wrap="square" lIns="0" tIns="0" rIns="0" bIns="0" rtlCol="0" anchor="t"/>
+          <a:lstStyle/>
+          <a:p>
+            <a:pPr indent="0" marL="0">
+              <a:buNone/>
+            </a:pPr>
+            <a:r>
+              <a:rPr lang="en-US" sz="1350" b="1" dirty="0">
+                <a:solidFill>
+                  <a:srgbClr val="9A7A28"/>
+                </a:solidFill>
+                <a:latin typeface="Calibri" pitchFamily="34" charset="0"/>
+                <a:ea typeface="Calibri" pitchFamily="34" charset="-122"/>
+                <a:cs typeface="Calibri" pitchFamily="34" charset="-120"/>
+              </a:rPr>
+              <a:t>› </a:t>
+            </a:r>
+            <a:pPr indent="0" marL="0">
+              <a:buNone/>
+            </a:pPr>
+            <a:r>
+              <a:rPr lang="en-US" sz="1350" dirty="0">
+                <a:solidFill>
+                  <a:srgbClr val="2B2723"/>
+                </a:solidFill>
+                <a:latin typeface="Calibri" pitchFamily="34" charset="0"/>
+                <a:ea typeface="Calibri" pitchFamily="34" charset="-122"/>
+                <a:cs typeface="Calibri" pitchFamily="34" charset="-120"/>
+              </a:rPr>
+              <a:t>AI coach + MagicSchool workflow</a:t>
+            </a:r>
+            <a:endParaRPr lang="en-US" sz="1350" dirty="0"/>
+          </a:p>
+        </p:txBody>
+      </p:sp>
+      <p:sp>
+        <p:nvSpPr>
+          <p:cNvPr id="10" name="Text 8"/>
+          <p:cNvSpPr/>
+          <p:nvPr/>
+        </p:nvSpPr>
+        <p:spPr>
+          <a:xfrm>
+            <a:off x="914400" y="4507992"/>
+            <a:ext cx="3017520" cy="457200"/>
+          </a:xfrm>
+          <a:prstGeom prst="rect">
+            <a:avLst/>
+          </a:prstGeom>
+          <a:noFill/>
+          <a:ln/>
+        </p:spPr>
+        <p:txBody>
+          <a:bodyPr wrap="square" lIns="0" tIns="0" rIns="0" bIns="0" rtlCol="0" anchor="t"/>
+          <a:lstStyle/>
+          <a:p>
+            <a:pPr indent="0" marL="0">
+              <a:buNone/>
+            </a:pPr>
+            <a:r>
+              <a:rPr lang="en-US" sz="1350" b="1" dirty="0">
+                <a:solidFill>
+                  <a:srgbClr val="9A7A28"/>
+                </a:solidFill>
+                <a:latin typeface="Calibri" pitchFamily="34" charset="0"/>
+                <a:ea typeface="Calibri" pitchFamily="34" charset="-122"/>
+                <a:cs typeface="Calibri" pitchFamily="34" charset="-120"/>
+              </a:rPr>
+              <a:t>› </a:t>
+            </a:r>
+            <a:pPr indent="0" marL="0">
+              <a:buNone/>
+            </a:pPr>
+            <a:r>
+              <a:rPr lang="en-US" sz="1350" dirty="0">
+                <a:solidFill>
+                  <a:srgbClr val="2B2723"/>
+                </a:solidFill>
+                <a:latin typeface="Calibri" pitchFamily="34" charset="0"/>
+                <a:ea typeface="Calibri" pitchFamily="34" charset="-122"/>
+                <a:cs typeface="Calibri" pitchFamily="34" charset="-120"/>
+              </a:rPr>
+              <a:t>Command Center &amp; validation</a:t>
+            </a:r>
+            <a:endParaRPr lang="en-US" sz="1350" dirty="0"/>
+          </a:p>
+        </p:txBody>
+      </p:sp>
+      <p:sp>
+        <p:nvSpPr>
+          <p:cNvPr id="11" name="Text 9"/>
+          <p:cNvSpPr/>
+          <p:nvPr/>
+        </p:nvSpPr>
+        <p:spPr>
+          <a:xfrm>
+            <a:off x="914400" y="5020056"/>
+            <a:ext cx="3017520" cy="457200"/>
+          </a:xfrm>
+          <a:prstGeom prst="rect">
+            <a:avLst/>
+          </a:prstGeom>
+          <a:noFill/>
+          <a:ln/>
+        </p:spPr>
+        <p:txBody>
+          <a:bodyPr wrap="square" lIns="0" tIns="0" rIns="0" bIns="0" rtlCol="0" anchor="t"/>
+          <a:lstStyle/>
+          <a:p>
+            <a:pPr indent="0" marL="0">
+              <a:buNone/>
+            </a:pPr>
+            <a:r>
+              <a:rPr lang="en-US" sz="1350" b="1" dirty="0">
+                <a:solidFill>
+                  <a:srgbClr val="9A7A28"/>
+                </a:solidFill>
+                <a:latin typeface="Calibri" pitchFamily="34" charset="0"/>
+                <a:ea typeface="Calibri" pitchFamily="34" charset="-122"/>
+                <a:cs typeface="Calibri" pitchFamily="34" charset="-120"/>
+              </a:rPr>
+              <a:t>› </a:t>
+            </a:r>
+            <a:pPr indent="0" marL="0">
+              <a:buNone/>
+            </a:pPr>
+            <a:r>
+              <a:rPr lang="en-US" sz="1350" dirty="0">
+                <a:solidFill>
+                  <a:srgbClr val="2B2723"/>
+                </a:solidFill>
+                <a:latin typeface="Calibri" pitchFamily="34" charset="0"/>
+                <a:ea typeface="Calibri" pitchFamily="34" charset="-122"/>
+                <a:cs typeface="Calibri" pitchFamily="34" charset="-120"/>
+              </a:rPr>
+              <a:t>Teacher Hub</a:t>
+            </a:r>
+            <a:pPr indent="0" marL="0">
+              <a:buNone/>
+            </a:pPr>
+            <a:r>
+              <a:rPr lang="en-US" sz="1150" i="1" dirty="0">
+                <a:solidFill>
+                  <a:srgbClr val="6E675C"/>
+                </a:solidFill>
+                <a:latin typeface="Calibri" pitchFamily="34" charset="0"/>
+                <a:ea typeface="Calibri" pitchFamily="34" charset="-122"/>
+                <a:cs typeface="Calibri" pitchFamily="34" charset="-120"/>
+              </a:rPr>
+              <a:t>  · Topic 1.1 prototype</a:t>
+            </a:r>
+            <a:endParaRPr lang="en-US" sz="1350" dirty="0"/>
+          </a:p>
+        </p:txBody>
+      </p:sp>
+      <p:sp>
+        <p:nvSpPr>
+          <p:cNvPr id="12" name="Shape 10"/>
+          <p:cNvSpPr/>
+          <p:nvPr/>
+        </p:nvSpPr>
+        <p:spPr>
+          <a:xfrm>
+            <a:off x="4434840" y="2103120"/>
+            <a:ext cx="3520440" cy="3383280"/>
+          </a:xfrm>
+          <a:prstGeom prst="roundRect">
+            <a:avLst>
+              <a:gd name="adj" fmla="val 3243"/>
+            </a:avLst>
+          </a:prstGeom>
+          <a:solidFill>
+            <a:srgbClr val="FCF8F0"/>
+          </a:solidFill>
+          <a:ln w="12700">
+            <a:solidFill>
+              <a:srgbClr val="E4DBC9"/>
+            </a:solidFill>
+            <a:prstDash val="solid"/>
+          </a:ln>
+        </p:spPr>
+      </p:sp>
+      <p:sp>
+        <p:nvSpPr>
+          <p:cNvPr id="13" name="Shape 11"/>
+          <p:cNvSpPr/>
+          <p:nvPr/>
+        </p:nvSpPr>
+        <p:spPr>
+          <a:xfrm>
+            <a:off x="4709160" y="2377440"/>
+            <a:ext cx="1737360" cy="310896"/>
+          </a:xfrm>
+          <a:prstGeom prst="roundRect">
+            <a:avLst>
+              <a:gd name="adj" fmla="val 50000"/>
+            </a:avLst>
+          </a:prstGeom>
+          <a:solidFill>
+            <a:srgbClr val="F2E6C9"/>
+          </a:solidFill>
+          <a:ln w="12700">
+            <a:solidFill>
+              <a:srgbClr val="C9A24B"/>
+            </a:solidFill>
+            <a:prstDash val="solid"/>
+          </a:ln>
+        </p:spPr>
+      </p:sp>
+      <p:sp>
+        <p:nvSpPr>
+          <p:cNvPr id="14" name="Text 12"/>
+          <p:cNvSpPr/>
+          <p:nvPr/>
+        </p:nvSpPr>
+        <p:spPr>
+          <a:xfrm>
+            <a:off x="4709160" y="2377440"/>
+            <a:ext cx="1737360" cy="310896"/>
+          </a:xfrm>
+          <a:prstGeom prst="rect">
+            <a:avLst/>
+          </a:prstGeom>
+          <a:noFill/>
+          <a:ln/>
+        </p:spPr>
+        <p:txBody>
+          <a:bodyPr wrap="square" lIns="0" tIns="0" rIns="0" bIns="0" rtlCol="0" anchor="ctr"/>
+          <a:lstStyle/>
+          <a:p>
+            <a:pPr algn="ctr" indent="0" marL="0">
+              <a:buNone/>
+            </a:pPr>
+            <a:r>
+              <a:rPr lang="en-US" sz="950" b="1" spc="100" kern="0" dirty="0">
+                <a:solidFill>
+                  <a:srgbClr val="9A7A28"/>
+                </a:solidFill>
+                <a:latin typeface="Consolas" pitchFamily="34" charset="0"/>
+                <a:ea typeface="Consolas" pitchFamily="34" charset="-122"/>
+                <a:cs typeface="Consolas" pitchFamily="34" charset="-120"/>
+              </a:rPr>
+              <a:t>IN DEVELOPMENT</a:t>
+            </a:r>
+            <a:endParaRPr lang="en-US" sz="950" dirty="0"/>
+          </a:p>
+        </p:txBody>
+      </p:sp>
+      <p:sp>
+        <p:nvSpPr>
+          <p:cNvPr id="15" name="Text 13"/>
+          <p:cNvSpPr/>
+          <p:nvPr/>
+        </p:nvSpPr>
+        <p:spPr>
+          <a:xfrm>
+            <a:off x="4709160" y="2971800"/>
+            <a:ext cx="3017520" cy="457200"/>
+          </a:xfrm>
+          <a:prstGeom prst="rect">
+            <a:avLst/>
+          </a:prstGeom>
+          <a:noFill/>
+          <a:ln/>
+        </p:spPr>
+        <p:txBody>
+          <a:bodyPr wrap="square" lIns="0" tIns="0" rIns="0" bIns="0" rtlCol="0" anchor="t"/>
+          <a:lstStyle/>
+          <a:p>
+            <a:pPr indent="0" marL="0">
+              <a:buNone/>
+            </a:pPr>
+            <a:r>
+              <a:rPr lang="en-US" sz="1350" b="1" dirty="0">
+                <a:solidFill>
+                  <a:srgbClr val="9A7A28"/>
+                </a:solidFill>
+                <a:latin typeface="Calibri" pitchFamily="34" charset="0"/>
+                <a:ea typeface="Calibri" pitchFamily="34" charset="-122"/>
+                <a:cs typeface="Calibri" pitchFamily="34" charset="-120"/>
+              </a:rPr>
+              <a:t>› </a:t>
+            </a:r>
+            <a:pPr indent="0" marL="0">
+              <a:buNone/>
+            </a:pPr>
+            <a:r>
+              <a:rPr lang="en-US" sz="1350" dirty="0">
+                <a:solidFill>
+                  <a:srgbClr val="2B2723"/>
+                </a:solidFill>
+                <a:latin typeface="Calibri" pitchFamily="34" charset="0"/>
+                <a:ea typeface="Calibri" pitchFamily="34" charset="-122"/>
+                <a:cs typeface="Calibri" pitchFamily="34" charset="-120"/>
+              </a:rPr>
+              <a:t>Personalized study guides</a:t>
+            </a:r>
+            <a:endParaRPr lang="en-US" sz="1350" dirty="0"/>
+          </a:p>
+        </p:txBody>
+      </p:sp>
+      <p:sp>
+        <p:nvSpPr>
+          <p:cNvPr id="16" name="Text 14"/>
+          <p:cNvSpPr/>
+          <p:nvPr/>
+        </p:nvSpPr>
+        <p:spPr>
+          <a:xfrm>
+            <a:off x="4709160" y="3483864"/>
+            <a:ext cx="3017520" cy="457200"/>
+          </a:xfrm>
+          <a:prstGeom prst="rect">
+            <a:avLst/>
+          </a:prstGeom>
+          <a:noFill/>
+          <a:ln/>
+        </p:spPr>
+        <p:txBody>
+          <a:bodyPr wrap="square" lIns="0" tIns="0" rIns="0" bIns="0" rtlCol="0" anchor="t"/>
+          <a:lstStyle/>
+          <a:p>
+            <a:pPr indent="0" marL="0">
+              <a:buNone/>
+            </a:pPr>
+            <a:r>
+              <a:rPr lang="en-US" sz="1350" b="1" dirty="0">
+                <a:solidFill>
+                  <a:srgbClr val="9A7A28"/>
+                </a:solidFill>
+                <a:latin typeface="Calibri" pitchFamily="34" charset="0"/>
+                <a:ea typeface="Calibri" pitchFamily="34" charset="-122"/>
+                <a:cs typeface="Calibri" pitchFamily="34" charset="-120"/>
+              </a:rPr>
+              <a:t>› </a:t>
+            </a:r>
+            <a:pPr indent="0" marL="0">
+              <a:buNone/>
+            </a:pPr>
+            <a:r>
+              <a:rPr lang="en-US" sz="1350" dirty="0">
+                <a:solidFill>
+                  <a:srgbClr val="2B2723"/>
+                </a:solidFill>
+                <a:latin typeface="Calibri" pitchFamily="34" charset="0"/>
+                <a:ea typeface="Calibri" pitchFamily="34" charset="-122"/>
+                <a:cs typeface="Calibri" pitchFamily="34" charset="-120"/>
+              </a:rPr>
+              <a:t>The Dispatch</a:t>
+            </a:r>
+            <a:pPr indent="0" marL="0">
+              <a:buNone/>
+            </a:pPr>
+            <a:r>
+              <a:rPr lang="en-US" sz="1150" i="1" dirty="0">
+                <a:solidFill>
+                  <a:srgbClr val="6E675C"/>
+                </a:solidFill>
+                <a:latin typeface="Calibri" pitchFamily="34" charset="0"/>
+                <a:ea typeface="Calibri" pitchFamily="34" charset="-122"/>
+                <a:cs typeface="Calibri" pitchFamily="34" charset="-120"/>
+              </a:rPr>
+              <a:t>  · template + Issue 01 built</a:t>
+            </a:r>
+            <a:endParaRPr lang="en-US" sz="1350" dirty="0"/>
+          </a:p>
+        </p:txBody>
+      </p:sp>
+      <p:sp>
+        <p:nvSpPr>
+          <p:cNvPr id="17" name="Text 15"/>
+          <p:cNvSpPr/>
+          <p:nvPr/>
+        </p:nvSpPr>
+        <p:spPr>
+          <a:xfrm>
+            <a:off x="4709160" y="3995928"/>
+            <a:ext cx="3017520" cy="457200"/>
+          </a:xfrm>
+          <a:prstGeom prst="rect">
+            <a:avLst/>
+          </a:prstGeom>
+          <a:noFill/>
+          <a:ln/>
+        </p:spPr>
+        <p:txBody>
+          <a:bodyPr wrap="square" lIns="0" tIns="0" rIns="0" bIns="0" rtlCol="0" anchor="t"/>
+          <a:lstStyle/>
+          <a:p>
+            <a:pPr indent="0" marL="0">
+              <a:buNone/>
+            </a:pPr>
+            <a:r>
+              <a:rPr lang="en-US" sz="1350" b="1" dirty="0">
+                <a:solidFill>
+                  <a:srgbClr val="9A7A28"/>
+                </a:solidFill>
+                <a:latin typeface="Calibri" pitchFamily="34" charset="0"/>
+                <a:ea typeface="Calibri" pitchFamily="34" charset="-122"/>
+                <a:cs typeface="Calibri" pitchFamily="34" charset="-120"/>
+              </a:rPr>
+              <a:t>› </a:t>
+            </a:r>
+            <a:pPr indent="0" marL="0">
+              <a:buNone/>
+            </a:pPr>
+            <a:r>
+              <a:rPr lang="en-US" sz="1350" dirty="0">
+                <a:solidFill>
+                  <a:srgbClr val="2B2723"/>
+                </a:solidFill>
+                <a:latin typeface="Calibri" pitchFamily="34" charset="0"/>
+                <a:ea typeface="Calibri" pitchFamily="34" charset="-122"/>
+                <a:cs typeface="Calibri" pitchFamily="34" charset="-120"/>
+              </a:rPr>
+              <a:t>Teacher Hub across all units</a:t>
+            </a:r>
+            <a:endParaRPr lang="en-US" sz="1350" dirty="0"/>
+          </a:p>
+        </p:txBody>
+      </p:sp>
+      <p:sp>
+        <p:nvSpPr>
+          <p:cNvPr id="18" name="Text 16"/>
+          <p:cNvSpPr/>
+          <p:nvPr/>
+        </p:nvSpPr>
+        <p:spPr>
+          <a:xfrm>
+            <a:off x="4709160" y="4507992"/>
+            <a:ext cx="3017520" cy="457200"/>
+          </a:xfrm>
+          <a:prstGeom prst="rect">
+            <a:avLst/>
+          </a:prstGeom>
+          <a:noFill/>
+          <a:ln/>
+        </p:spPr>
+        <p:txBody>
+          <a:bodyPr wrap="square" lIns="0" tIns="0" rIns="0" bIns="0" rtlCol="0" anchor="t"/>
+          <a:lstStyle/>
+          <a:p>
+            <a:pPr indent="0" marL="0">
+              <a:buNone/>
+            </a:pPr>
+            <a:r>
+              <a:rPr lang="en-US" sz="1350" b="1" dirty="0">
+                <a:solidFill>
+                  <a:srgbClr val="9A7A28"/>
+                </a:solidFill>
+                <a:latin typeface="Calibri" pitchFamily="34" charset="0"/>
+                <a:ea typeface="Calibri" pitchFamily="34" charset="-122"/>
+                <a:cs typeface="Calibri" pitchFamily="34" charset="-120"/>
+              </a:rPr>
+              <a:t>› </a:t>
+            </a:r>
+            <a:pPr indent="0" marL="0">
+              <a:buNone/>
+            </a:pPr>
+            <a:r>
+              <a:rPr lang="en-US" sz="1350" dirty="0">
+                <a:solidFill>
+                  <a:srgbClr val="2B2723"/>
+                </a:solidFill>
+                <a:latin typeface="Calibri" pitchFamily="34" charset="0"/>
+                <a:ea typeface="Calibri" pitchFamily="34" charset="-122"/>
+                <a:cs typeface="Calibri" pitchFamily="34" charset="-120"/>
+              </a:rPr>
+              <a:t>Live data pipeline</a:t>
+            </a:r>
+            <a:pPr indent="0" marL="0">
+              <a:buNone/>
+            </a:pPr>
+            <a:r>
+              <a:rPr lang="en-US" sz="1150" i="1" dirty="0">
+                <a:solidFill>
+                  <a:srgbClr val="6E675C"/>
+                </a:solidFill>
+                <a:latin typeface="Calibri" pitchFamily="34" charset="0"/>
+                <a:ea typeface="Calibri" pitchFamily="34" charset="-122"/>
+                <a:cs typeface="Calibri" pitchFamily="34" charset="-120"/>
+              </a:rPr>
+              <a:t>  · Form → Sheet → Hub</a:t>
+            </a:r>
+            <a:endParaRPr lang="en-US" sz="1350" dirty="0"/>
+          </a:p>
+        </p:txBody>
+      </p:sp>
+      <p:sp>
+        <p:nvSpPr>
+          <p:cNvPr id="19" name="Shape 17"/>
+          <p:cNvSpPr/>
+          <p:nvPr/>
+        </p:nvSpPr>
+        <p:spPr>
+          <a:xfrm>
+            <a:off x="8229600" y="2103120"/>
+            <a:ext cx="3520440" cy="3383280"/>
+          </a:xfrm>
+          <a:prstGeom prst="roundRect">
+            <a:avLst>
+              <a:gd name="adj" fmla="val 3243"/>
+            </a:avLst>
+          </a:prstGeom>
+          <a:solidFill>
+            <a:srgbClr val="FCF8F0"/>
+          </a:solidFill>
+          <a:ln w="12700">
+            <a:solidFill>
+              <a:srgbClr val="E4DBC9"/>
+            </a:solidFill>
+            <a:prstDash val="solid"/>
+          </a:ln>
+        </p:spPr>
+      </p:sp>
+      <p:sp>
+        <p:nvSpPr>
+          <p:cNvPr id="20" name="Shape 18"/>
+          <p:cNvSpPr/>
+          <p:nvPr/>
+        </p:nvSpPr>
+        <p:spPr>
+          <a:xfrm>
+            <a:off x="8503920" y="2377440"/>
+            <a:ext cx="1280160" cy="310896"/>
+          </a:xfrm>
+          <a:prstGeom prst="roundRect">
+            <a:avLst>
+              <a:gd name="adj" fmla="val 50000"/>
+            </a:avLst>
+          </a:prstGeom>
+          <a:solidFill>
+            <a:srgbClr val="DCE9EA"/>
+          </a:solidFill>
+          <a:ln w="12700">
+            <a:solidFill>
+              <a:srgbClr val="3E8E96"/>
+            </a:solidFill>
+            <a:prstDash val="solid"/>
+          </a:ln>
+        </p:spPr>
+      </p:sp>
+      <p:sp>
+        <p:nvSpPr>
+          <p:cNvPr id="21" name="Text 19"/>
+          <p:cNvSpPr/>
+          <p:nvPr/>
+        </p:nvSpPr>
+        <p:spPr>
+          <a:xfrm>
+            <a:off x="8503920" y="2377440"/>
+            <a:ext cx="1280160" cy="310896"/>
+          </a:xfrm>
+          <a:prstGeom prst="rect">
+            <a:avLst/>
+          </a:prstGeom>
+          <a:noFill/>
+          <a:ln/>
+        </p:spPr>
+        <p:txBody>
+          <a:bodyPr wrap="square" lIns="0" tIns="0" rIns="0" bIns="0" rtlCol="0" anchor="ctr"/>
+          <a:lstStyle/>
+          <a:p>
+            <a:pPr algn="ctr" indent="0" marL="0">
+              <a:buNone/>
+            </a:pPr>
+            <a:r>
+              <a:rPr lang="en-US" sz="950" b="1" spc="100" kern="0" dirty="0">
+                <a:solidFill>
+                  <a:srgbClr val="2F6B71"/>
+                </a:solidFill>
+                <a:latin typeface="Consolas" pitchFamily="34" charset="0"/>
+                <a:ea typeface="Consolas" pitchFamily="34" charset="-122"/>
+                <a:cs typeface="Consolas" pitchFamily="34" charset="-120"/>
+              </a:rPr>
+              <a:t>EXPLORING</a:t>
+            </a:r>
+            <a:endParaRPr lang="en-US" sz="950" dirty="0"/>
+          </a:p>
+        </p:txBody>
+      </p:sp>
+      <p:sp>
+        <p:nvSpPr>
+          <p:cNvPr id="22" name="Text 20"/>
+          <p:cNvSpPr/>
+          <p:nvPr/>
+        </p:nvSpPr>
+        <p:spPr>
+          <a:xfrm>
+            <a:off x="8503920" y="2971800"/>
+            <a:ext cx="3017520" cy="457200"/>
+          </a:xfrm>
+          <a:prstGeom prst="rect">
+            <a:avLst/>
+          </a:prstGeom>
+          <a:noFill/>
+          <a:ln/>
+        </p:spPr>
+        <p:txBody>
+          <a:bodyPr wrap="square" lIns="0" tIns="0" rIns="0" bIns="0" rtlCol="0" anchor="t"/>
+          <a:lstStyle/>
+          <a:p>
+            <a:pPr indent="0" marL="0">
+              <a:buNone/>
+            </a:pPr>
+            <a:r>
+              <a:rPr lang="en-US" sz="1350" b="1" dirty="0">
+                <a:solidFill>
+                  <a:srgbClr val="9A7A28"/>
+                </a:solidFill>
+                <a:latin typeface="Calibri" pitchFamily="34" charset="0"/>
+                <a:ea typeface="Calibri" pitchFamily="34" charset="-122"/>
+                <a:cs typeface="Calibri" pitchFamily="34" charset="-120"/>
+              </a:rPr>
+              <a:t>› </a:t>
+            </a:r>
+            <a:pPr indent="0" marL="0">
+              <a:buNone/>
+            </a:pPr>
+            <a:r>
+              <a:rPr lang="en-US" sz="1350" dirty="0">
+                <a:solidFill>
+                  <a:srgbClr val="2B2723"/>
+                </a:solidFill>
+                <a:latin typeface="Calibri" pitchFamily="34" charset="0"/>
+                <a:ea typeface="Calibri" pitchFamily="34" charset="-122"/>
+                <a:cs typeface="Calibri" pitchFamily="34" charset="-120"/>
+              </a:rPr>
+              <a:t>Auto-sent study guides</a:t>
+            </a:r>
+            <a:endParaRPr lang="en-US" sz="1350" dirty="0"/>
+          </a:p>
+        </p:txBody>
+      </p:sp>
+      <p:sp>
+        <p:nvSpPr>
+          <p:cNvPr id="23" name="Text 21"/>
+          <p:cNvSpPr/>
+          <p:nvPr/>
+        </p:nvSpPr>
+        <p:spPr>
+          <a:xfrm>
+            <a:off x="8503920" y="3483864"/>
+            <a:ext cx="3017520" cy="457200"/>
+          </a:xfrm>
+          <a:prstGeom prst="rect">
+            <a:avLst/>
+          </a:prstGeom>
+          <a:noFill/>
+          <a:ln/>
+        </p:spPr>
+        <p:txBody>
+          <a:bodyPr wrap="square" lIns="0" tIns="0" rIns="0" bIns="0" rtlCol="0" anchor="t"/>
+          <a:lstStyle/>
+          <a:p>
+            <a:pPr indent="0" marL="0">
+              <a:buNone/>
+            </a:pPr>
+            <a:r>
+              <a:rPr lang="en-US" sz="1350" b="1" dirty="0">
+                <a:solidFill>
+                  <a:srgbClr val="9A7A28"/>
+                </a:solidFill>
+                <a:latin typeface="Calibri" pitchFamily="34" charset="0"/>
+                <a:ea typeface="Calibri" pitchFamily="34" charset="-122"/>
+                <a:cs typeface="Calibri" pitchFamily="34" charset="-120"/>
+              </a:rPr>
+              <a:t>› </a:t>
+            </a:r>
+            <a:pPr indent="0" marL="0">
+              <a:buNone/>
+            </a:pPr>
+            <a:r>
+              <a:rPr lang="en-US" sz="1350" dirty="0">
+                <a:solidFill>
+                  <a:srgbClr val="2B2723"/>
+                </a:solidFill>
+                <a:latin typeface="Calibri" pitchFamily="34" charset="0"/>
+                <a:ea typeface="Calibri" pitchFamily="34" charset="-122"/>
+                <a:cs typeface="Calibri" pitchFamily="34" charset="-120"/>
+              </a:rPr>
+              <a:t>Other AP courses &amp; subjects</a:t>
+            </a:r>
+            <a:endParaRPr lang="en-US" sz="1350" dirty="0"/>
+          </a:p>
+        </p:txBody>
+      </p:sp>
+      <p:sp>
+        <p:nvSpPr>
+          <p:cNvPr id="24" name="Text 22"/>
+          <p:cNvSpPr/>
+          <p:nvPr/>
+        </p:nvSpPr>
+        <p:spPr>
+          <a:xfrm>
+            <a:off x="8503920" y="3995928"/>
+            <a:ext cx="3017520" cy="457200"/>
+          </a:xfrm>
+          <a:prstGeom prst="rect">
+            <a:avLst/>
+          </a:prstGeom>
+          <a:noFill/>
+          <a:ln/>
+        </p:spPr>
+        <p:txBody>
+          <a:bodyPr wrap="square" lIns="0" tIns="0" rIns="0" bIns="0" rtlCol="0" anchor="t"/>
+          <a:lstStyle/>
+          <a:p>
+            <a:pPr indent="0" marL="0">
+              <a:buNone/>
+            </a:pPr>
+            <a:r>
+              <a:rPr lang="en-US" sz="1350" b="1" dirty="0">
+                <a:solidFill>
+                  <a:srgbClr val="9A7A28"/>
+                </a:solidFill>
+                <a:latin typeface="Calibri" pitchFamily="34" charset="0"/>
+                <a:ea typeface="Calibri" pitchFamily="34" charset="-122"/>
+                <a:cs typeface="Calibri" pitchFamily="34" charset="-120"/>
+              </a:rPr>
+              <a:t>› </a:t>
+            </a:r>
+            <a:pPr indent="0" marL="0">
+              <a:buNone/>
+            </a:pPr>
+            <a:r>
+              <a:rPr lang="en-US" sz="1350" dirty="0">
+                <a:solidFill>
+                  <a:srgbClr val="2B2723"/>
+                </a:solidFill>
+                <a:latin typeface="Calibri" pitchFamily="34" charset="0"/>
+                <a:ea typeface="Calibri" pitchFamily="34" charset="-122"/>
+                <a:cs typeface="Calibri" pitchFamily="34" charset="-120"/>
+              </a:rPr>
+              <a:t>District rollout &amp; PD</a:t>
+            </a:r>
+            <a:endParaRPr lang="en-US" sz="1350" dirty="0"/>
+          </a:p>
+        </p:txBody>
+      </p:sp>
+      <p:sp>
+        <p:nvSpPr>
+          <p:cNvPr id="25" name="Text 23"/>
+          <p:cNvSpPr/>
+          <p:nvPr/>
+        </p:nvSpPr>
+        <p:spPr>
+          <a:xfrm>
+            <a:off x="8503920" y="4507992"/>
+            <a:ext cx="3017520" cy="457200"/>
+          </a:xfrm>
+          <a:prstGeom prst="rect">
+            <a:avLst/>
+          </a:prstGeom>
+          <a:noFill/>
+          <a:ln/>
+        </p:spPr>
+        <p:txBody>
+          <a:bodyPr wrap="square" lIns="0" tIns="0" rIns="0" bIns="0" rtlCol="0" anchor="t"/>
+          <a:lstStyle/>
+          <a:p>
+            <a:pPr indent="0" marL="0">
+              <a:buNone/>
+            </a:pPr>
+            <a:r>
+              <a:rPr lang="en-US" sz="1350" b="1" dirty="0">
+                <a:solidFill>
+                  <a:srgbClr val="9A7A28"/>
+                </a:solidFill>
+                <a:latin typeface="Calibri" pitchFamily="34" charset="0"/>
+                <a:ea typeface="Calibri" pitchFamily="34" charset="-122"/>
+                <a:cs typeface="Calibri" pitchFamily="34" charset="-120"/>
+              </a:rPr>
+              <a:t>› </a:t>
+            </a:r>
+            <a:pPr indent="0" marL="0">
+              <a:buNone/>
+            </a:pPr>
+            <a:r>
+              <a:rPr lang="en-US" sz="1350" dirty="0">
+                <a:solidFill>
+                  <a:srgbClr val="2B2723"/>
+                </a:solidFill>
+                <a:latin typeface="Calibri" pitchFamily="34" charset="0"/>
+                <a:ea typeface="Calibri" pitchFamily="34" charset="-122"/>
+                <a:cs typeface="Calibri" pitchFamily="34" charset="-120"/>
+              </a:rPr>
+              <a:t>Consulting &amp; licensing</a:t>
+            </a:r>
+            <a:endParaRPr lang="en-US" sz="1350" dirty="0"/>
+          </a:p>
+        </p:txBody>
+      </p:sp>
+      <p:sp>
+        <p:nvSpPr>
+          <p:cNvPr id="26" name="Text 24"/>
+          <p:cNvSpPr/>
+          <p:nvPr/>
+        </p:nvSpPr>
+        <p:spPr>
+          <a:xfrm>
+            <a:off x="502920" y="6400800"/>
+            <a:ext cx="7315200" cy="274320"/>
+          </a:xfrm>
+          <a:prstGeom prst="rect">
+            <a:avLst/>
+          </a:prstGeom>
+          <a:noFill/>
+          <a:ln/>
+        </p:spPr>
+        <p:txBody>
+          <a:bodyPr wrap="square" lIns="0" tIns="0" rIns="0" bIns="0" rtlCol="0" anchor="ctr"/>
+          <a:lstStyle/>
+          <a:p>
+            <a:pPr algn="l" indent="0" marL="0">
+              <a:buNone/>
+            </a:pPr>
+            <a:r>
+              <a:rPr lang="en-US" sz="1000" b="1" dirty="0">
+                <a:solidFill>
+                  <a:srgbClr val="C9A24B"/>
+                </a:solidFill>
+                <a:latin typeface="Calibri" pitchFamily="34" charset="0"/>
+                <a:ea typeface="Calibri" pitchFamily="34" charset="-122"/>
+                <a:cs typeface="Calibri" pitchFamily="34" charset="-120"/>
+              </a:rPr>
+              <a:t>AndersonLogic AI</a:t>
+            </a:r>
+            <a:pPr algn="l" indent="0" marL="0">
+              <a:buNone/>
+            </a:pPr>
+            <a:r>
+              <a:rPr lang="en-US" sz="1000" dirty="0">
+                <a:solidFill>
+                  <a:srgbClr val="6E675C"/>
+                </a:solidFill>
+                <a:latin typeface="Calibri" pitchFamily="34" charset="0"/>
+                <a:ea typeface="Calibri" pitchFamily="34" charset="-122"/>
+                <a:cs typeface="Calibri" pitchFamily="34" charset="-120"/>
+              </a:rPr>
+              <a:t>   ·   BeHistorical</a:t>
+            </a:r>
+            <a:endParaRPr lang="en-US" sz="1000" dirty="0"/>
+          </a:p>
+        </p:txBody>
+      </p:sp>
+      <p:sp>
+        <p:nvSpPr>
+          <p:cNvPr id="27" name="Text 25"/>
+          <p:cNvSpPr/>
+          <p:nvPr/>
+        </p:nvSpPr>
+        <p:spPr>
+          <a:xfrm>
+            <a:off x="10607040" y="6355080"/>
+            <a:ext cx="1097280" cy="320040"/>
+          </a:xfrm>
+          <a:prstGeom prst="rect">
+            <a:avLst/>
+          </a:prstGeom>
+          <a:noFill/>
+          <a:ln/>
+        </p:spPr>
+        <p:txBody>
+          <a:bodyPr wrap="square" lIns="0" tIns="0" rIns="0" bIns="0" rtlCol="0" anchor="ctr"/>
+          <a:lstStyle/>
+          <a:p>
+            <a:pPr algn="r" indent="0" marL="0">
+              <a:buNone/>
+            </a:pPr>
+            <a:r>
+              <a:rPr lang="en-US" sz="1100" b="1" dirty="0">
+                <a:solidFill>
+                  <a:srgbClr val="6E675C"/>
+                </a:solidFill>
+                <a:latin typeface="Consolas" pitchFamily="34" charset="0"/>
+                <a:ea typeface="Consolas" pitchFamily="34" charset="-122"/>
+                <a:cs typeface="Consolas" pitchFamily="34" charset="-120"/>
+              </a:rPr>
+              <a:t>14 / 15</a:t>
+            </a:r>
+            <a:endParaRPr lang="en-US" sz="1100" dirty="0"/>
+          </a:p>
+        </p:txBody>
+      </p:sp>
+    </p:spTree>
+  </p:cSld>
+  <p:clrMapOvr>
+    <a:masterClrMapping/>
+  </p:clrMapOvr>
+</p:sld>
+</file>
+
+<file path=ppt/slides/slide15.xml><?xml version="1.0" encoding="utf-8"?>
+<p:sld xmlns:a="http://schemas.openxmlformats.org/drawingml/2006/main" xmlns:r="http://schemas.openxmlformats.org/officeDocument/2006/relationships" xmlns:p="http://schemas.openxmlformats.org/presentationml/2006/main">
+  <p:cSld name="Slide 15">
+    <p:bg>
+      <p:bgPr>
+        <a:solidFill>
+          <a:srgbClr val="1A1C1D"/>
+        </a:solidFill>
+      </p:bgPr>
+    </p:bg>
+    <p:spTree>
+      <p:nvGrpSpPr>
+        <p:cNvPr id="1" name=""/>
+        <p:cNvGrpSpPr/>
+        <p:nvPr/>
+      </p:nvGrpSpPr>
+      <p:grpSpPr>
+        <a:xfrm>
+          <a:off x="0" y="0"/>
+          <a:ext cx="0" cy="0"/>
+          <a:chOff x="0" y="0"/>
+          <a:chExt cx="0" cy="0"/>
+        </a:xfrm>
+      </p:grpSpPr>
+      <p:sp>
+        <p:nvSpPr>
+          <p:cNvPr id="2" name="Text 0"/>
+          <p:cNvSpPr/>
+          <p:nvPr/>
+        </p:nvSpPr>
+        <p:spPr>
+          <a:xfrm>
+            <a:off x="8138160" y="1005840"/>
+            <a:ext cx="3840480" cy="822960"/>
+          </a:xfrm>
+          <a:prstGeom prst="rect">
+            <a:avLst/>
+          </a:prstGeom>
+          <a:noFill/>
+          <a:ln/>
+        </p:spPr>
+        <p:txBody>
+          <a:bodyPr wrap="square" lIns="0" tIns="0" rIns="0" bIns="0" rtlCol="0" anchor="ctr"/>
+          <a:lstStyle/>
+          <a:p>
+            <a:pPr algn="r" indent="0" marL="0">
+              <a:buNone/>
+            </a:pPr>
+            <a:r>
+              <a:rPr lang="en-US" sz="2000" i="1" dirty="0">
+                <a:solidFill>
+                  <a:srgbClr val="2E3236"/>
+                </a:solidFill>
+                <a:latin typeface="Bookman Old Style" pitchFamily="34" charset="0"/>
+                <a:ea typeface="Bookman Old Style" pitchFamily="34" charset="-122"/>
+                <a:cs typeface="Bookman Old Style" pitchFamily="34" charset="-120"/>
+              </a:rPr>
+              <a:t>BeReady</a:t>
+            </a:r>
+            <a:endParaRPr lang="en-US" sz="2000" dirty="0"/>
+          </a:p>
+        </p:txBody>
+      </p:sp>
+      <p:sp>
+        <p:nvSpPr>
+          <p:cNvPr id="3" name="Text 1"/>
+          <p:cNvSpPr/>
+          <p:nvPr/>
+        </p:nvSpPr>
+        <p:spPr>
+          <a:xfrm>
+            <a:off x="8138160" y="2194560"/>
+            <a:ext cx="3840480" cy="822960"/>
+          </a:xfrm>
+          <a:prstGeom prst="rect">
+            <a:avLst/>
+          </a:prstGeom>
+          <a:noFill/>
+          <a:ln/>
+        </p:spPr>
+        <p:txBody>
+          <a:bodyPr wrap="square" lIns="0" tIns="0" rIns="0" bIns="0" rtlCol="0" anchor="ctr"/>
+          <a:lstStyle/>
+          <a:p>
+            <a:pPr algn="r" indent="0" marL="0">
+              <a:buNone/>
+            </a:pPr>
+            <a:r>
+              <a:rPr lang="en-US" sz="2000" i="1" dirty="0">
+                <a:solidFill>
+                  <a:srgbClr val="2E3236"/>
+                </a:solidFill>
+                <a:latin typeface="Bookman Old Style" pitchFamily="34" charset="0"/>
+                <a:ea typeface="Bookman Old Style" pitchFamily="34" charset="-122"/>
+                <a:cs typeface="Bookman Old Style" pitchFamily="34" charset="-120"/>
+              </a:rPr>
+              <a:t>BeSurreal</a:t>
+            </a:r>
+            <a:endParaRPr lang="en-US" sz="2000" dirty="0"/>
+          </a:p>
+        </p:txBody>
+      </p:sp>
+      <p:sp>
+        <p:nvSpPr>
+          <p:cNvPr id="4" name="Text 2"/>
+          <p:cNvSpPr/>
+          <p:nvPr/>
+        </p:nvSpPr>
+        <p:spPr>
+          <a:xfrm>
+            <a:off x="8138160" y="3383280"/>
+            <a:ext cx="3840480" cy="822960"/>
+          </a:xfrm>
+          <a:prstGeom prst="rect">
+            <a:avLst/>
+          </a:prstGeom>
+          <a:noFill/>
+          <a:ln/>
+        </p:spPr>
+        <p:txBody>
+          <a:bodyPr wrap="square" lIns="0" tIns="0" rIns="0" bIns="0" rtlCol="0" anchor="ctr"/>
+          <a:lstStyle/>
+          <a:p>
+            <a:pPr algn="r" indent="0" marL="0">
+              <a:buNone/>
+            </a:pPr>
+            <a:r>
+              <a:rPr lang="en-US" sz="2000" i="1" dirty="0">
+                <a:solidFill>
+                  <a:srgbClr val="2E3236"/>
+                </a:solidFill>
+                <a:latin typeface="Bookman Old Style" pitchFamily="34" charset="0"/>
+                <a:ea typeface="Bookman Old Style" pitchFamily="34" charset="-122"/>
+                <a:cs typeface="Bookman Old Style" pitchFamily="34" charset="-120"/>
+              </a:rPr>
+              <a:t>BeInTheRoom</a:t>
+            </a:r>
+            <a:endParaRPr lang="en-US" sz="2000" dirty="0"/>
+          </a:p>
+        </p:txBody>
+      </p:sp>
+      <p:sp>
+        <p:nvSpPr>
+          <p:cNvPr id="5" name="Text 3"/>
+          <p:cNvSpPr/>
+          <p:nvPr/>
+        </p:nvSpPr>
+        <p:spPr>
+          <a:xfrm>
+            <a:off x="8138160" y="4572000"/>
+            <a:ext cx="3840480" cy="822960"/>
+          </a:xfrm>
+          <a:prstGeom prst="rect">
+            <a:avLst/>
+          </a:prstGeom>
+          <a:noFill/>
+          <a:ln/>
+        </p:spPr>
+        <p:txBody>
+          <a:bodyPr wrap="square" lIns="0" tIns="0" rIns="0" bIns="0" rtlCol="0" anchor="ctr"/>
+          <a:lstStyle/>
+          <a:p>
+            <a:pPr algn="r" indent="0" marL="0">
+              <a:buNone/>
+            </a:pPr>
+            <a:r>
+              <a:rPr lang="en-US" sz="2000" i="1" dirty="0">
+                <a:solidFill>
+                  <a:srgbClr val="2E3236"/>
+                </a:solidFill>
+                <a:latin typeface="Bookman Old Style" pitchFamily="34" charset="0"/>
+                <a:ea typeface="Bookman Old Style" pitchFamily="34" charset="-122"/>
+                <a:cs typeface="Bookman Old Style" pitchFamily="34" charset="-120"/>
+              </a:rPr>
+              <a:t>BeHistorical</a:t>
+            </a:r>
+            <a:endParaRPr lang="en-US" sz="2000" dirty="0"/>
+          </a:p>
+        </p:txBody>
+      </p:sp>
+      <p:sp>
+        <p:nvSpPr>
+          <p:cNvPr id="6" name="Text 4"/>
+          <p:cNvSpPr/>
+          <p:nvPr/>
+        </p:nvSpPr>
+        <p:spPr>
+          <a:xfrm>
+            <a:off x="640080" y="685800"/>
+            <a:ext cx="8229600" cy="365760"/>
+          </a:xfrm>
+          <a:prstGeom prst="rect">
+            <a:avLst/>
+          </a:prstGeom>
+          <a:noFill/>
+          <a:ln/>
+        </p:spPr>
+        <p:txBody>
+          <a:bodyPr wrap="square" lIns="0" tIns="0" rIns="0" bIns="0" rtlCol="0" anchor="ctr"/>
+          <a:lstStyle/>
+          <a:p>
+            <a:pPr indent="0" marL="0">
+              <a:buNone/>
+            </a:pPr>
+            <a:r>
+              <a:rPr lang="en-US" sz="1200" b="1" spc="400" kern="0" dirty="0">
+                <a:solidFill>
+                  <a:srgbClr val="C9A24B"/>
+                </a:solidFill>
+                <a:latin typeface="Consolas" pitchFamily="34" charset="0"/>
+                <a:ea typeface="Consolas" pitchFamily="34" charset="-122"/>
+                <a:cs typeface="Consolas" pitchFamily="34" charset="-120"/>
+              </a:rPr>
+              <a:t>WHERE THIS GOES</a:t>
+            </a:r>
+            <a:endParaRPr lang="en-US" sz="1200" dirty="0"/>
+          </a:p>
+        </p:txBody>
+      </p:sp>
+      <p:sp>
+        <p:nvSpPr>
+          <p:cNvPr id="7" name="Text 5"/>
+          <p:cNvSpPr/>
+          <p:nvPr/>
+        </p:nvSpPr>
+        <p:spPr>
+          <a:xfrm>
+            <a:off x="566928" y="1143000"/>
+            <a:ext cx="7772400" cy="1280160"/>
+          </a:xfrm>
+          <a:prstGeom prst="rect">
+            <a:avLst/>
+          </a:prstGeom>
+          <a:noFill/>
+          <a:ln/>
+        </p:spPr>
+        <p:txBody>
+          <a:bodyPr wrap="square" lIns="0" tIns="0" rIns="0" bIns="0" rtlCol="0" anchor="ctr"/>
+          <a:lstStyle/>
+          <a:p>
+            <a:pPr indent="0" marL="0">
+              <a:buNone/>
+            </a:pPr>
+            <a:r>
+              <a:rPr lang="en-US" sz="4400" b="1" dirty="0">
+                <a:solidFill>
+                  <a:srgbClr val="FFFFFF"/>
+                </a:solidFill>
+                <a:latin typeface="Bookman Old Style" pitchFamily="34" charset="0"/>
+                <a:ea typeface="Bookman Old Style" pitchFamily="34" charset="-122"/>
+                <a:cs typeface="Bookman Old Style" pitchFamily="34" charset="-120"/>
+              </a:rPr>
               <a:t>A method — not just a course</a:t>
             </a:r>
             <a:endParaRPr lang="en-US" sz="4400" dirty="0"/>
@@ -2355,7 +7324,7 @@
                 <a:ea typeface="Calibri" pitchFamily="34" charset="-122"/>
                 <a:cs typeface="Calibri" pitchFamily="34" charset="-120"/>
               </a:rPr>
-              <a:t>The 10-module path, the AI guardrails, and the build system are subject-agnostic — ready to lift into any AP or core course.</a:t>
+              <a:t>The 10-module path, the AI guardrails, the analytics engine, and the build system are subject-agnostic — ready to lift into any AP or core course.</a:t>
             </a:r>
             <a:endParaRPr lang="en-US" sz="1400" dirty="0"/>
           </a:p>
@@ -2643,7 +7612,7 @@
                 <a:ea typeface="Consolas" pitchFamily="34" charset="-122"/>
                 <a:cs typeface="Consolas" pitchFamily="34" charset="-120"/>
               </a:rPr>
-              <a:t>10 / 10</a:t>
+              <a:t>15 / 15</a:t>
             </a:r>
             <a:endParaRPr lang="en-US" sz="1100" dirty="0"/>
           </a:p>
@@ -2690,7 +7659,7 @@
         <p:spPr>
           <a:xfrm>
             <a:off x="640080" y="548640"/>
-            <a:ext cx="10058400" cy="274320"/>
+            <a:ext cx="8229600" cy="274320"/>
           </a:xfrm>
           <a:prstGeom prst="rect">
             <a:avLst/>
@@ -3125,7 +8094,7 @@
                 <a:ea typeface="Bookman Old Style" pitchFamily="34" charset="-122"/>
                 <a:cs typeface="Bookman Old Style" pitchFamily="34" charset="-120"/>
               </a:rPr>
-              <a:t>Teachers fly blind</a:t>
+              <a:t>Home is out of the loop</a:t>
             </a:r>
             <a:endParaRPr lang="en-US" sz="2100" dirty="0"/>
           </a:p>
@@ -3164,7 +8133,7 @@
                 <a:ea typeface="Calibri" pitchFamily="34" charset="-122"/>
                 <a:cs typeface="Calibri" pitchFamily="34" charset="-120"/>
               </a:rPr>
-              <a:t>By the time a unit test reveals a gap, it's too late to reteach. There's rarely a fast, honest read on what students actually understand.</a:t>
+              <a:t>Families rarely know what's being studied, and by the time a unit test reveals a gap, it's too late to reteach or step in.</a:t>
             </a:r>
             <a:endParaRPr lang="en-US" sz="1500" dirty="0"/>
           </a:p>
@@ -3295,7 +8264,7 @@
                 <a:ea typeface="Consolas" pitchFamily="34" charset="-122"/>
                 <a:cs typeface="Consolas" pitchFamily="34" charset="-120"/>
               </a:rPr>
-              <a:t>02 / 10</a:t>
+              <a:t>02 / 15</a:t>
             </a:r>
             <a:endParaRPr lang="en-US" sz="1100" dirty="0"/>
           </a:p>
@@ -3342,7 +8311,7 @@
         <p:spPr>
           <a:xfrm>
             <a:off x="640080" y="548640"/>
-            <a:ext cx="10058400" cy="274320"/>
+            <a:ext cx="8229600" cy="274320"/>
           </a:xfrm>
           <a:prstGeom prst="rect">
             <a:avLst/>
@@ -4151,7 +9120,7 @@
                 <a:ea typeface="Consolas" pitchFamily="34" charset="-122"/>
                 <a:cs typeface="Consolas" pitchFamily="34" charset="-120"/>
               </a:rPr>
-              <a:t>03 / 10</a:t>
+              <a:t>03 / 15</a:t>
             </a:r>
             <a:endParaRPr lang="en-US" sz="1100" dirty="0"/>
           </a:p>
@@ -4198,7 +9167,7 @@
         <p:spPr>
           <a:xfrm>
             <a:off x="640080" y="457200"/>
-            <a:ext cx="10058400" cy="274320"/>
+            <a:ext cx="8229600" cy="274320"/>
           </a:xfrm>
           <a:prstGeom prst="rect">
             <a:avLst/>
@@ -4845,7 +9814,7 @@
                 <a:ea typeface="Consolas" pitchFamily="34" charset="-122"/>
                 <a:cs typeface="Consolas" pitchFamily="34" charset="-120"/>
               </a:rPr>
-              <a:t>04 / 10</a:t>
+              <a:t>04 / 15</a:t>
             </a:r>
             <a:endParaRPr lang="en-US" sz="1100" dirty="0"/>
           </a:p>
@@ -4892,7 +9861,7 @@
         <p:spPr>
           <a:xfrm>
             <a:off x="640080" y="457200"/>
-            <a:ext cx="10058400" cy="274320"/>
+            <a:ext cx="8229600" cy="274320"/>
           </a:xfrm>
           <a:prstGeom prst="rect">
             <a:avLst/>
@@ -5731,7 +10700,7 @@
                 <a:ea typeface="Consolas" pitchFamily="34" charset="-122"/>
                 <a:cs typeface="Consolas" pitchFamily="34" charset="-120"/>
               </a:rPr>
-              <a:t>05 / 10</a:t>
+              <a:t>05 / 15</a:t>
             </a:r>
             <a:endParaRPr lang="en-US" sz="1100" dirty="0"/>
           </a:p>
@@ -5778,7 +10747,7 @@
         <p:spPr>
           <a:xfrm>
             <a:off x="640080" y="457200"/>
-            <a:ext cx="10058400" cy="274320"/>
+            <a:ext cx="8229600" cy="274320"/>
           </a:xfrm>
           <a:prstGeom prst="rect">
             <a:avLst/>
@@ -6973,7 +11942,7 @@
                 <a:ea typeface="Consolas" pitchFamily="34" charset="-122"/>
                 <a:cs typeface="Consolas" pitchFamily="34" charset="-120"/>
               </a:rPr>
-              <a:t>06 / 10</a:t>
+              <a:t>06 / 15</a:t>
             </a:r>
             <a:endParaRPr lang="en-US" sz="1100" dirty="0"/>
           </a:p>
@@ -7020,7 +11989,7 @@
         <p:spPr>
           <a:xfrm>
             <a:off x="640080" y="502920"/>
-            <a:ext cx="10058400" cy="274320"/>
+            <a:ext cx="8229600" cy="274320"/>
           </a:xfrm>
           <a:prstGeom prst="rect">
             <a:avLst/>
@@ -8302,7 +13271,7 @@
                 <a:ea typeface="Consolas" pitchFamily="34" charset="-122"/>
                 <a:cs typeface="Consolas" pitchFamily="34" charset="-120"/>
               </a:rPr>
-              <a:t>07 / 10</a:t>
+              <a:t>07 / 15</a:t>
             </a:r>
             <a:endParaRPr lang="en-US" sz="1100" dirty="0"/>
           </a:p>
@@ -8349,7 +13318,7 @@
         <p:spPr>
           <a:xfrm>
             <a:off x="640080" y="502920"/>
-            <a:ext cx="10058400" cy="274320"/>
+            <a:ext cx="8229600" cy="274320"/>
           </a:xfrm>
           <a:prstGeom prst="rect">
             <a:avLst/>
@@ -8373,7 +13342,7 @@
                 <a:ea typeface="Consolas" pitchFamily="34" charset="-122"/>
                 <a:cs typeface="Consolas" pitchFamily="34" charset="-120"/>
               </a:rPr>
-              <a:t>FOR THE TEACHER</a:t>
+              <a:t>PERSONALIZED STUDY GUIDES</a:t>
             </a:r>
             <a:endParaRPr lang="en-US" sz="1200" dirty="0"/>
           </a:p>
@@ -8381,14 +13350,80 @@
       </p:sp>
       <p:sp>
         <p:nvSpPr>
-          <p:cNvPr id="3" name="Text 1"/>
-          <p:cNvSpPr/>
-          <p:nvPr/>
-        </p:nvSpPr>
-        <p:spPr>
-          <a:xfrm>
-            <a:off x="603504" y="822960"/>
-            <a:ext cx="10972800" cy="822960"/>
+          <p:cNvPr id="3" name="Shape 1"/>
+          <p:cNvSpPr/>
+          <p:nvPr/>
+        </p:nvSpPr>
+        <p:spPr>
+          <a:xfrm>
+            <a:off x="10093147" y="475488"/>
+            <a:ext cx="1519733" cy="310896"/>
+          </a:xfrm>
+          <a:prstGeom prst="roundRect">
+            <a:avLst>
+              <a:gd name="adj" fmla="val 50000"/>
+            </a:avLst>
+          </a:prstGeom>
+          <a:solidFill>
+            <a:srgbClr val="2E2A20"/>
+          </a:solidFill>
+          <a:ln w="12700">
+            <a:solidFill>
+              <a:srgbClr val="C9A24B"/>
+            </a:solidFill>
+            <a:prstDash val="solid"/>
+          </a:ln>
+        </p:spPr>
+      </p:sp>
+      <p:sp>
+        <p:nvSpPr>
+          <p:cNvPr id="4" name="Text 2"/>
+          <p:cNvSpPr/>
+          <p:nvPr/>
+        </p:nvSpPr>
+        <p:spPr>
+          <a:xfrm>
+            <a:off x="10093147" y="475488"/>
+            <a:ext cx="1519733" cy="310896"/>
+          </a:xfrm>
+          <a:prstGeom prst="rect">
+            <a:avLst/>
+          </a:prstGeom>
+          <a:noFill/>
+          <a:ln/>
+        </p:spPr>
+        <p:txBody>
+          <a:bodyPr wrap="square" lIns="0" tIns="0" rIns="0" bIns="0" rtlCol="0" anchor="ctr"/>
+          <a:lstStyle/>
+          <a:p>
+            <a:pPr algn="ctr" indent="0" marL="0">
+              <a:buNone/>
+            </a:pPr>
+            <a:r>
+              <a:rPr lang="en-US" sz="1000" b="1" spc="150" kern="0" dirty="0">
+                <a:solidFill>
+                  <a:srgbClr val="E4C878"/>
+                </a:solidFill>
+                <a:latin typeface="Consolas" pitchFamily="34" charset="0"/>
+                <a:ea typeface="Consolas" pitchFamily="34" charset="-122"/>
+                <a:cs typeface="Consolas" pitchFamily="34" charset="-120"/>
+              </a:rPr>
+              <a:t>IN DEVELOPMENT</a:t>
+            </a:r>
+            <a:endParaRPr lang="en-US" sz="1000" dirty="0"/>
+          </a:p>
+        </p:txBody>
+      </p:sp>
+      <p:sp>
+        <p:nvSpPr>
+          <p:cNvPr id="5" name="Text 3"/>
+          <p:cNvSpPr/>
+          <p:nvPr/>
+        </p:nvSpPr>
+        <p:spPr>
+          <a:xfrm>
+            <a:off x="603504" y="896112"/>
+            <a:ext cx="10972800" cy="640080"/>
           </a:xfrm>
           <a:prstGeom prst="rect">
             <a:avLst/>
@@ -8404,7 +13439,7 @@
               <a:buNone/>
             </a:pPr>
             <a:r>
-              <a:rPr lang="en-US" sz="3200" b="1" dirty="0">
+              <a:rPr lang="en-US" sz="2800" b="1" dirty="0">
                 <a:solidFill>
                   <a:srgbClr val="2B2723"/>
                 </a:solidFill>
@@ -8412,31 +13447,247 @@
                 <a:ea typeface="Bookman Old Style" pitchFamily="34" charset="-122"/>
                 <a:cs typeface="Bookman Old Style" pitchFamily="34" charset="-120"/>
               </a:rPr>
-              <a:t>A live read on what students understand</a:t>
-            </a:r>
-            <a:endParaRPr lang="en-US" sz="3200" dirty="0"/>
-          </a:p>
-        </p:txBody>
-      </p:sp>
-      <p:sp>
-        <p:nvSpPr>
-          <p:cNvPr id="4" name="Text 2"/>
-          <p:cNvSpPr/>
-          <p:nvPr/>
-        </p:nvSpPr>
-        <p:spPr>
-          <a:xfrm>
-            <a:off x="640080" y="1645920"/>
-            <a:ext cx="10972800" cy="548640"/>
-          </a:xfrm>
-          <a:prstGeom prst="rect">
-            <a:avLst/>
-          </a:prstGeom>
-          <a:noFill/>
-          <a:ln/>
-        </p:spPr>
-        <p:txBody>
-          <a:bodyPr wrap="square" lIns="0" tIns="0" rIns="0" bIns="0" rtlCol="0" anchor="ctr"/>
+              <a:t>A study guide built from each student's own work</a:t>
+            </a:r>
+            <a:endParaRPr lang="en-US" sz="2800" dirty="0"/>
+          </a:p>
+        </p:txBody>
+      </p:sp>
+      <p:sp>
+        <p:nvSpPr>
+          <p:cNvPr id="6" name="Shape 4"/>
+          <p:cNvSpPr/>
+          <p:nvPr/>
+        </p:nvSpPr>
+        <p:spPr>
+          <a:xfrm>
+            <a:off x="594360" y="1645920"/>
+            <a:ext cx="3154680" cy="4011107"/>
+          </a:xfrm>
+          <a:prstGeom prst="roundRect">
+            <a:avLst>
+              <a:gd name="adj" fmla="val 1739"/>
+            </a:avLst>
+          </a:prstGeom>
+          <a:solidFill>
+            <a:srgbClr val="0E0F10"/>
+          </a:solidFill>
+          <a:ln w="9525">
+            <a:solidFill>
+              <a:srgbClr val="3A3F45"/>
+            </a:solidFill>
+            <a:prstDash val="solid"/>
+          </a:ln>
+          <a:effectLst>
+            <a:outerShdw sx="100000" sy="100000" kx="0" ky="0" algn="bl" rotWithShape="0" blurRad="152400" dist="76200" dir="5400000">
+              <a:srgbClr val="000000">
+                <a:alpha val="45000"/>
+              </a:srgbClr>
+            </a:outerShdw>
+          </a:effectLst>
+        </p:spPr>
+      </p:sp>
+      <p:sp>
+        <p:nvSpPr>
+          <p:cNvPr id="7" name="Shape 5"/>
+          <p:cNvSpPr/>
+          <p:nvPr/>
+        </p:nvSpPr>
+        <p:spPr>
+          <a:xfrm>
+            <a:off x="640080" y="1691640"/>
+            <a:ext cx="3063240" cy="256032"/>
+          </a:xfrm>
+          <a:prstGeom prst="rect">
+            <a:avLst/>
+          </a:prstGeom>
+          <a:solidFill>
+            <a:srgbClr val="191C1F"/>
+          </a:solidFill>
+          <a:ln/>
+        </p:spPr>
+      </p:sp>
+      <p:sp>
+        <p:nvSpPr>
+          <p:cNvPr id="8" name="Shape 6"/>
+          <p:cNvSpPr/>
+          <p:nvPr/>
+        </p:nvSpPr>
+        <p:spPr>
+          <a:xfrm>
+            <a:off x="768096" y="1778508"/>
+            <a:ext cx="82296" cy="82296"/>
+          </a:xfrm>
+          <a:prstGeom prst="ellipse">
+            <a:avLst/>
+          </a:prstGeom>
+          <a:solidFill>
+            <a:srgbClr val="C9564E"/>
+          </a:solidFill>
+          <a:ln/>
+        </p:spPr>
+      </p:sp>
+      <p:sp>
+        <p:nvSpPr>
+          <p:cNvPr id="9" name="Shape 7"/>
+          <p:cNvSpPr/>
+          <p:nvPr/>
+        </p:nvSpPr>
+        <p:spPr>
+          <a:xfrm>
+            <a:off x="896112" y="1778508"/>
+            <a:ext cx="82296" cy="82296"/>
+          </a:xfrm>
+          <a:prstGeom prst="ellipse">
+            <a:avLst/>
+          </a:prstGeom>
+          <a:solidFill>
+            <a:srgbClr val="D8A441"/>
+          </a:solidFill>
+          <a:ln/>
+        </p:spPr>
+      </p:sp>
+      <p:sp>
+        <p:nvSpPr>
+          <p:cNvPr id="10" name="Shape 8"/>
+          <p:cNvSpPr/>
+          <p:nvPr/>
+        </p:nvSpPr>
+        <p:spPr>
+          <a:xfrm>
+            <a:off x="1024128" y="1778508"/>
+            <a:ext cx="82296" cy="82296"/>
+          </a:xfrm>
+          <a:prstGeom prst="ellipse">
+            <a:avLst/>
+          </a:prstGeom>
+          <a:solidFill>
+            <a:srgbClr val="5AA668"/>
+          </a:solidFill>
+          <a:ln/>
+        </p:spPr>
+      </p:sp>
+      <p:sp>
+        <p:nvSpPr>
+          <p:cNvPr id="11" name="Text 9"/>
+          <p:cNvSpPr/>
+          <p:nvPr/>
+        </p:nvSpPr>
+        <p:spPr>
+          <a:xfrm>
+            <a:off x="1207008" y="1691640"/>
+            <a:ext cx="2423160" cy="256032"/>
+          </a:xfrm>
+          <a:prstGeom prst="rect">
+            <a:avLst/>
+          </a:prstGeom>
+          <a:noFill/>
+          <a:ln/>
+        </p:spPr>
+        <p:txBody>
+          <a:bodyPr wrap="square" lIns="0" tIns="0" rIns="0" bIns="0" rtlCol="0" anchor="ctr"/>
+          <a:lstStyle/>
+          <a:p>
+            <a:pPr algn="l" indent="0" marL="0">
+              <a:buNone/>
+            </a:pPr>
+            <a:r>
+              <a:rPr lang="en-US" sz="850" dirty="0">
+                <a:solidFill>
+                  <a:srgbClr val="8B9199"/>
+                </a:solidFill>
+                <a:latin typeface="Consolas" pitchFamily="34" charset="0"/>
+                <a:ea typeface="Consolas" pitchFamily="34" charset="-122"/>
+                <a:cs typeface="Consolas" pitchFamily="34" charset="-120"/>
+              </a:rPr>
+              <a:t>behistorical · study-guide · auto-generated · PDF</a:t>
+            </a:r>
+            <a:endParaRPr lang="en-US" sz="850" dirty="0"/>
+          </a:p>
+        </p:txBody>
+      </p:sp>
+      <p:pic>
+        <p:nvPicPr>
+          <p:cNvPr id="12" name="Image 0" descr="preencoded.png">    </p:cNvPr>
+          <p:cNvPicPr>
+            <a:picLocks noChangeAspect="1"/>
+          </p:cNvPicPr>
+          <p:nvPr/>
+        </p:nvPicPr>
+        <p:blipFill>
+          <a:blip r:embed="rId1"/>
+          <a:stretch>
+            <a:fillRect/>
+          </a:stretch>
+        </p:blipFill>
+        <p:spPr>
+          <a:xfrm>
+            <a:off x="640080" y="1947672"/>
+            <a:ext cx="3063240" cy="3663635"/>
+          </a:xfrm>
+          <a:prstGeom prst="rect">
+            <a:avLst/>
+          </a:prstGeom>
+        </p:spPr>
+      </p:pic>
+      <p:sp>
+        <p:nvSpPr>
+          <p:cNvPr id="13" name="Text 10"/>
+          <p:cNvSpPr/>
+          <p:nvPr/>
+        </p:nvSpPr>
+        <p:spPr>
+          <a:xfrm>
+            <a:off x="640080" y="5721035"/>
+            <a:ext cx="3291840" cy="274320"/>
+          </a:xfrm>
+          <a:prstGeom prst="rect">
+            <a:avLst/>
+          </a:prstGeom>
+          <a:noFill/>
+          <a:ln/>
+        </p:spPr>
+        <p:txBody>
+          <a:bodyPr wrap="square" lIns="0" tIns="0" rIns="0" bIns="0" rtlCol="0" anchor="ctr"/>
+          <a:lstStyle/>
+          <a:p>
+            <a:pPr indent="0" marL="0">
+              <a:buNone/>
+            </a:pPr>
+            <a:r>
+              <a:rPr lang="en-US" sz="900" dirty="0">
+                <a:solidFill>
+                  <a:srgbClr val="6E675C"/>
+                </a:solidFill>
+                <a:latin typeface="Consolas" pitchFamily="34" charset="0"/>
+                <a:ea typeface="Consolas" pitchFamily="34" charset="-122"/>
+                <a:cs typeface="Consolas" pitchFamily="34" charset="-120"/>
+              </a:rPr>
+              <a:t>Design concept · generated per student, per topic</a:t>
+            </a:r>
+            <a:endParaRPr lang="en-US" sz="900" dirty="0"/>
+          </a:p>
+        </p:txBody>
+      </p:sp>
+      <p:sp>
+        <p:nvSpPr>
+          <p:cNvPr id="14" name="Text 11"/>
+          <p:cNvSpPr/>
+          <p:nvPr/>
+        </p:nvSpPr>
+        <p:spPr>
+          <a:xfrm>
+            <a:off x="4160520" y="1737360"/>
+            <a:ext cx="7315200" cy="1005840"/>
+          </a:xfrm>
+          <a:prstGeom prst="rect">
+            <a:avLst/>
+          </a:prstGeom>
+          <a:noFill/>
+          <a:ln/>
+        </p:spPr>
+        <p:txBody>
+          <a:bodyPr wrap="square" lIns="0" tIns="0" rIns="0" bIns="0" rtlCol="0" anchor="t"/>
           <a:lstStyle/>
           <a:p>
             <a:pPr indent="0" marL="0">
@@ -8451,7 +13702,7 @@
                 <a:ea typeface="Calibri" pitchFamily="34" charset="-122"/>
                 <a:cs typeface="Calibri" pitchFamily="34" charset="-120"/>
               </a:rPr>
-              <a:t>Student responses flow into an analytics layer that turns raw answers into teaching decisions — before the unit test, not after.</a:t>
+              <a:t>No two guides are the same. Each one reads a student's own responses and confidence ratings, then targets exactly what they need next — using the same analysis engine that powers the Teacher Hub.</a:t>
             </a:r>
             <a:endParaRPr lang="en-US" sz="1500" dirty="0"/>
           </a:p>
@@ -8459,139 +13710,131 @@
       </p:sp>
       <p:sp>
         <p:nvSpPr>
-          <p:cNvPr id="5" name="Shape 3"/>
-          <p:cNvSpPr/>
-          <p:nvPr/>
-        </p:nvSpPr>
-        <p:spPr>
-          <a:xfrm>
-            <a:off x="640080" y="2286000"/>
-            <a:ext cx="5349240" cy="1691640"/>
-          </a:xfrm>
-          <a:prstGeom prst="roundRect">
-            <a:avLst>
-              <a:gd name="adj" fmla="val 5405"/>
-            </a:avLst>
-          </a:prstGeom>
-          <a:solidFill>
-            <a:srgbClr val="FBF7EF"/>
-          </a:solidFill>
-          <a:ln w="12700">
-            <a:solidFill>
-              <a:srgbClr val="E4DBC9"/>
-            </a:solidFill>
-            <a:prstDash val="solid"/>
-          </a:ln>
-        </p:spPr>
-      </p:sp>
-      <p:sp>
-        <p:nvSpPr>
-          <p:cNvPr id="6" name="Shape 4"/>
-          <p:cNvSpPr/>
-          <p:nvPr/>
-        </p:nvSpPr>
-        <p:spPr>
-          <a:xfrm>
-            <a:off x="914400" y="2578608"/>
-            <a:ext cx="457200" cy="457200"/>
-          </a:xfrm>
-          <a:prstGeom prst="ellipse">
-            <a:avLst/>
-          </a:prstGeom>
-          <a:solidFill>
-            <a:srgbClr val="C9A24B"/>
-          </a:solidFill>
-          <a:ln/>
-        </p:spPr>
-      </p:sp>
-      <p:sp>
-        <p:nvSpPr>
-          <p:cNvPr id="7" name="Text 5"/>
-          <p:cNvSpPr/>
-          <p:nvPr/>
-        </p:nvSpPr>
-        <p:spPr>
-          <a:xfrm>
-            <a:off x="914400" y="2578608"/>
-            <a:ext cx="457200" cy="457200"/>
-          </a:xfrm>
-          <a:prstGeom prst="rect">
-            <a:avLst/>
-          </a:prstGeom>
-          <a:noFill/>
-          <a:ln/>
-        </p:spPr>
-        <p:txBody>
-          <a:bodyPr wrap="square" lIns="0" tIns="0" rIns="0" bIns="0" rtlCol="0" anchor="ctr"/>
-          <a:lstStyle/>
-          <a:p>
-            <a:pPr algn="ctr" indent="0" marL="0">
-              <a:buNone/>
-            </a:pPr>
-            <a:r>
-              <a:rPr lang="en-US" sz="1800" b="1" dirty="0">
-                <a:solidFill>
-                  <a:srgbClr val="1A1C1D"/>
+          <p:cNvPr id="15" name="Text 12"/>
+          <p:cNvSpPr/>
+          <p:nvPr/>
+        </p:nvSpPr>
+        <p:spPr>
+          <a:xfrm>
+            <a:off x="4160520" y="2880360"/>
+            <a:ext cx="7315200" cy="292608"/>
+          </a:xfrm>
+          <a:prstGeom prst="rect">
+            <a:avLst/>
+          </a:prstGeom>
+          <a:noFill/>
+          <a:ln/>
+        </p:spPr>
+        <p:txBody>
+          <a:bodyPr wrap="square" lIns="0" tIns="0" rIns="0" bIns="0" rtlCol="0" anchor="ctr"/>
+          <a:lstStyle/>
+          <a:p>
+            <a:pPr indent="0" marL="0">
+              <a:buNone/>
+            </a:pPr>
+            <a:r>
+              <a:rPr lang="en-US" sz="1600" b="1" dirty="0">
+                <a:solidFill>
+                  <a:srgbClr val="9A7A28"/>
                 </a:solidFill>
                 <a:latin typeface="Bookman Old Style" pitchFamily="34" charset="0"/>
                 <a:ea typeface="Bookman Old Style" pitchFamily="34" charset="-122"/>
                 <a:cs typeface="Bookman Old Style" pitchFamily="34" charset="-120"/>
               </a:rPr>
-              <a:t>1</a:t>
-            </a:r>
-            <a:endParaRPr lang="en-US" sz="1800" dirty="0"/>
-          </a:p>
-        </p:txBody>
-      </p:sp>
-      <p:sp>
-        <p:nvSpPr>
-          <p:cNvPr id="8" name="Text 6"/>
-          <p:cNvSpPr/>
-          <p:nvPr/>
-        </p:nvSpPr>
-        <p:spPr>
-          <a:xfrm>
-            <a:off x="1554480" y="2542032"/>
-            <a:ext cx="4206240" cy="411480"/>
-          </a:xfrm>
-          <a:prstGeom prst="rect">
-            <a:avLst/>
-          </a:prstGeom>
-          <a:noFill/>
-          <a:ln/>
-        </p:spPr>
-        <p:txBody>
-          <a:bodyPr wrap="square" lIns="0" tIns="0" rIns="0" bIns="0" rtlCol="0" anchor="ctr"/>
+              <a:t>Your three weakest spots</a:t>
+            </a:r>
+            <a:endParaRPr lang="en-US" sz="1600" dirty="0"/>
+          </a:p>
+        </p:txBody>
+      </p:sp>
+      <p:sp>
+        <p:nvSpPr>
+          <p:cNvPr id="16" name="Text 13"/>
+          <p:cNvSpPr/>
+          <p:nvPr/>
+        </p:nvSpPr>
+        <p:spPr>
+          <a:xfrm>
+            <a:off x="4160520" y="3163824"/>
+            <a:ext cx="7315200" cy="548640"/>
+          </a:xfrm>
+          <a:prstGeom prst="rect">
+            <a:avLst/>
+          </a:prstGeom>
+          <a:noFill/>
+          <a:ln/>
+        </p:spPr>
+        <p:txBody>
+          <a:bodyPr wrap="square" lIns="0" tIns="0" rIns="0" bIns="0" rtlCol="0" anchor="t"/>
           <a:lstStyle/>
           <a:p>
             <a:pPr indent="0" marL="0">
               <a:buNone/>
             </a:pPr>
             <a:r>
-              <a:rPr lang="en-US" sz="1800" b="1" dirty="0">
-                <a:solidFill>
-                  <a:srgbClr val="2B2723"/>
+              <a:rPr lang="en-US" sz="1250" dirty="0">
+                <a:solidFill>
+                  <a:srgbClr val="6E675C"/>
+                </a:solidFill>
+                <a:latin typeface="Calibri" pitchFamily="34" charset="0"/>
+                <a:ea typeface="Calibri" pitchFamily="34" charset="-122"/>
+                <a:cs typeface="Calibri" pitchFamily="34" charset="-120"/>
+              </a:rPr>
+              <a:t>Pulled from detected skill gaps, low-confidence answers, and flagged misconceptions.</a:t>
+            </a:r>
+            <a:endParaRPr lang="en-US" sz="1250" dirty="0"/>
+          </a:p>
+        </p:txBody>
+      </p:sp>
+      <p:sp>
+        <p:nvSpPr>
+          <p:cNvPr id="17" name="Text 14"/>
+          <p:cNvSpPr/>
+          <p:nvPr/>
+        </p:nvSpPr>
+        <p:spPr>
+          <a:xfrm>
+            <a:off x="4160520" y="3794760"/>
+            <a:ext cx="7315200" cy="292608"/>
+          </a:xfrm>
+          <a:prstGeom prst="rect">
+            <a:avLst/>
+          </a:prstGeom>
+          <a:noFill/>
+          <a:ln/>
+        </p:spPr>
+        <p:txBody>
+          <a:bodyPr wrap="square" lIns="0" tIns="0" rIns="0" bIns="0" rtlCol="0" anchor="ctr"/>
+          <a:lstStyle/>
+          <a:p>
+            <a:pPr indent="0" marL="0">
+              <a:buNone/>
+            </a:pPr>
+            <a:r>
+              <a:rPr lang="en-US" sz="1600" b="1" dirty="0">
+                <a:solidFill>
+                  <a:srgbClr val="9A7A28"/>
                 </a:solidFill>
                 <a:latin typeface="Bookman Old Style" pitchFamily="34" charset="0"/>
                 <a:ea typeface="Bookman Old Style" pitchFamily="34" charset="-122"/>
                 <a:cs typeface="Bookman Old Style" pitchFamily="34" charset="-120"/>
               </a:rPr>
-              <a:t>Command Center</a:t>
-            </a:r>
-            <a:endParaRPr lang="en-US" sz="1800" dirty="0"/>
-          </a:p>
-        </p:txBody>
-      </p:sp>
-      <p:sp>
-        <p:nvSpPr>
-          <p:cNvPr id="9" name="Text 7"/>
-          <p:cNvSpPr/>
-          <p:nvPr/>
-        </p:nvSpPr>
-        <p:spPr>
-          <a:xfrm>
-            <a:off x="1554480" y="2999232"/>
-            <a:ext cx="4206240" cy="868680"/>
+              <a:t>Targeted practice</a:t>
+            </a:r>
+            <a:endParaRPr lang="en-US" sz="1600" dirty="0"/>
+          </a:p>
+        </p:txBody>
+      </p:sp>
+      <p:sp>
+        <p:nvSpPr>
+          <p:cNvPr id="18" name="Text 15"/>
+          <p:cNvSpPr/>
+          <p:nvPr/>
+        </p:nvSpPr>
+        <p:spPr>
+          <a:xfrm>
+            <a:off x="4160520" y="4078224"/>
+            <a:ext cx="7315200" cy="548640"/>
           </a:xfrm>
           <a:prstGeom prst="rect">
             <a:avLst/>
@@ -8615,7 +13858,7 @@
                 <a:ea typeface="Calibri" pitchFamily="34" charset="-122"/>
                 <a:cs typeface="Calibri" pitchFamily="34" charset="-120"/>
               </a:rPr>
-              <a:t>A build dashboard that reads the live repository — every deliverable, unit by unit, tracked in real time.</a:t>
+              <a:t>Questions tuned to the exact AP skill the student is missing — not generic review.</a:t>
             </a:r>
             <a:endParaRPr lang="en-US" sz="1250" dirty="0"/>
           </a:p>
@@ -8623,139 +13866,53 @@
       </p:sp>
       <p:sp>
         <p:nvSpPr>
-          <p:cNvPr id="10" name="Shape 8"/>
-          <p:cNvSpPr/>
-          <p:nvPr/>
-        </p:nvSpPr>
-        <p:spPr>
-          <a:xfrm>
-            <a:off x="6263640" y="2286000"/>
-            <a:ext cx="5349240" cy="1691640"/>
-          </a:xfrm>
-          <a:prstGeom prst="roundRect">
-            <a:avLst>
-              <a:gd name="adj" fmla="val 5405"/>
-            </a:avLst>
-          </a:prstGeom>
-          <a:solidFill>
-            <a:srgbClr val="FBF7EF"/>
-          </a:solidFill>
-          <a:ln w="12700">
-            <a:solidFill>
-              <a:srgbClr val="E4DBC9"/>
-            </a:solidFill>
-            <a:prstDash val="solid"/>
-          </a:ln>
-        </p:spPr>
-      </p:sp>
-      <p:sp>
-        <p:nvSpPr>
-          <p:cNvPr id="11" name="Shape 9"/>
-          <p:cNvSpPr/>
-          <p:nvPr/>
-        </p:nvSpPr>
-        <p:spPr>
-          <a:xfrm>
-            <a:off x="6537960" y="2578608"/>
-            <a:ext cx="457200" cy="457200"/>
-          </a:xfrm>
-          <a:prstGeom prst="ellipse">
-            <a:avLst/>
-          </a:prstGeom>
-          <a:solidFill>
-            <a:srgbClr val="C9A24B"/>
-          </a:solidFill>
-          <a:ln/>
-        </p:spPr>
-      </p:sp>
-      <p:sp>
-        <p:nvSpPr>
-          <p:cNvPr id="12" name="Text 10"/>
-          <p:cNvSpPr/>
-          <p:nvPr/>
-        </p:nvSpPr>
-        <p:spPr>
-          <a:xfrm>
-            <a:off x="6537960" y="2578608"/>
-            <a:ext cx="457200" cy="457200"/>
-          </a:xfrm>
-          <a:prstGeom prst="rect">
-            <a:avLst/>
-          </a:prstGeom>
-          <a:noFill/>
-          <a:ln/>
-        </p:spPr>
-        <p:txBody>
-          <a:bodyPr wrap="square" lIns="0" tIns="0" rIns="0" bIns="0" rtlCol="0" anchor="ctr"/>
-          <a:lstStyle/>
-          <a:p>
-            <a:pPr algn="ctr" indent="0" marL="0">
-              <a:buNone/>
-            </a:pPr>
-            <a:r>
-              <a:rPr lang="en-US" sz="1800" b="1" dirty="0">
-                <a:solidFill>
-                  <a:srgbClr val="1A1C1D"/>
+          <p:cNvPr id="19" name="Text 16"/>
+          <p:cNvSpPr/>
+          <p:nvPr/>
+        </p:nvSpPr>
+        <p:spPr>
+          <a:xfrm>
+            <a:off x="4160520" y="4709160"/>
+            <a:ext cx="7315200" cy="292608"/>
+          </a:xfrm>
+          <a:prstGeom prst="rect">
+            <a:avLst/>
+          </a:prstGeom>
+          <a:noFill/>
+          <a:ln/>
+        </p:spPr>
+        <p:txBody>
+          <a:bodyPr wrap="square" lIns="0" tIns="0" rIns="0" bIns="0" rtlCol="0" anchor="ctr"/>
+          <a:lstStyle/>
+          <a:p>
+            <a:pPr indent="0" marL="0">
+              <a:buNone/>
+            </a:pPr>
+            <a:r>
+              <a:rPr lang="en-US" sz="1600" b="1" dirty="0">
+                <a:solidFill>
+                  <a:srgbClr val="9A7A28"/>
                 </a:solidFill>
                 <a:latin typeface="Bookman Old Style" pitchFamily="34" charset="0"/>
                 <a:ea typeface="Bookman Old Style" pitchFamily="34" charset="-122"/>
                 <a:cs typeface="Bookman Old Style" pitchFamily="34" charset="-120"/>
               </a:rPr>
-              <a:t>2</a:t>
-            </a:r>
-            <a:endParaRPr lang="en-US" sz="1800" dirty="0"/>
-          </a:p>
-        </p:txBody>
-      </p:sp>
-      <p:sp>
-        <p:nvSpPr>
-          <p:cNvPr id="13" name="Text 11"/>
-          <p:cNvSpPr/>
-          <p:nvPr/>
-        </p:nvSpPr>
-        <p:spPr>
-          <a:xfrm>
-            <a:off x="7178040" y="2542032"/>
-            <a:ext cx="4206240" cy="411480"/>
-          </a:xfrm>
-          <a:prstGeom prst="rect">
-            <a:avLst/>
-          </a:prstGeom>
-          <a:noFill/>
-          <a:ln/>
-        </p:spPr>
-        <p:txBody>
-          <a:bodyPr wrap="square" lIns="0" tIns="0" rIns="0" bIns="0" rtlCol="0" anchor="ctr"/>
-          <a:lstStyle/>
-          <a:p>
-            <a:pPr indent="0" marL="0">
-              <a:buNone/>
-            </a:pPr>
-            <a:r>
-              <a:rPr lang="en-US" sz="1800" b="1" dirty="0">
-                <a:solidFill>
-                  <a:srgbClr val="2B2723"/>
-                </a:solidFill>
-                <a:latin typeface="Bookman Old Style" pitchFamily="34" charset="0"/>
-                <a:ea typeface="Bookman Old Style" pitchFamily="34" charset="-122"/>
-                <a:cs typeface="Bookman Old Style" pitchFamily="34" charset="-120"/>
-              </a:rPr>
-              <a:t>Response analytics</a:t>
-            </a:r>
-            <a:endParaRPr lang="en-US" sz="1800" dirty="0"/>
-          </a:p>
-        </p:txBody>
-      </p:sp>
-      <p:sp>
-        <p:nvSpPr>
-          <p:cNvPr id="14" name="Text 12"/>
-          <p:cNvSpPr/>
-          <p:nvPr/>
-        </p:nvSpPr>
-        <p:spPr>
-          <a:xfrm>
-            <a:off x="7178040" y="2999232"/>
-            <a:ext cx="4206240" cy="868680"/>
+              <a:t>One clear next step</a:t>
+            </a:r>
+            <a:endParaRPr lang="en-US" sz="1600" dirty="0"/>
+          </a:p>
+        </p:txBody>
+      </p:sp>
+      <p:sp>
+        <p:nvSpPr>
+          <p:cNvPr id="20" name="Text 17"/>
+          <p:cNvSpPr/>
+          <p:nvPr/>
+        </p:nvSpPr>
+        <p:spPr>
+          <a:xfrm>
+            <a:off x="4160520" y="4992624"/>
+            <a:ext cx="7315200" cy="548640"/>
           </a:xfrm>
           <a:prstGeom prst="rect">
             <a:avLst/>
@@ -8779,7 +13936,7 @@
                 <a:ea typeface="Calibri" pitchFamily="34" charset="-122"/>
                 <a:cs typeface="Calibri" pitchFamily="34" charset="-120"/>
               </a:rPr>
-              <a:t>Counts responses, averages confidence, and flags blank, short, or low-confidence answers automatically.</a:t>
+              <a:t>A single, doable action — then a round with the AI Coach. Augment, never replace.</a:t>
             </a:r>
             <a:endParaRPr lang="en-US" sz="1250" dirty="0"/>
           </a:p>
@@ -8787,100 +13944,14 @@
       </p:sp>
       <p:sp>
         <p:nvSpPr>
-          <p:cNvPr id="15" name="Shape 13"/>
-          <p:cNvSpPr/>
-          <p:nvPr/>
-        </p:nvSpPr>
-        <p:spPr>
-          <a:xfrm>
-            <a:off x="640080" y="4251960"/>
-            <a:ext cx="5349240" cy="1691640"/>
-          </a:xfrm>
-          <a:prstGeom prst="roundRect">
-            <a:avLst>
-              <a:gd name="adj" fmla="val 5405"/>
-            </a:avLst>
-          </a:prstGeom>
-          <a:solidFill>
-            <a:srgbClr val="FBF7EF"/>
-          </a:solidFill>
-          <a:ln w="12700">
-            <a:solidFill>
-              <a:srgbClr val="E4DBC9"/>
-            </a:solidFill>
-            <a:prstDash val="solid"/>
-          </a:ln>
-        </p:spPr>
-      </p:sp>
-      <p:sp>
-        <p:nvSpPr>
-          <p:cNvPr id="16" name="Shape 14"/>
-          <p:cNvSpPr/>
-          <p:nvPr/>
-        </p:nvSpPr>
-        <p:spPr>
-          <a:xfrm>
-            <a:off x="914400" y="4544568"/>
-            <a:ext cx="457200" cy="457200"/>
-          </a:xfrm>
-          <a:prstGeom prst="ellipse">
-            <a:avLst/>
-          </a:prstGeom>
-          <a:solidFill>
-            <a:srgbClr val="C9A24B"/>
-          </a:solidFill>
-          <a:ln/>
-        </p:spPr>
-      </p:sp>
-      <p:sp>
-        <p:nvSpPr>
-          <p:cNvPr id="17" name="Text 15"/>
-          <p:cNvSpPr/>
-          <p:nvPr/>
-        </p:nvSpPr>
-        <p:spPr>
-          <a:xfrm>
-            <a:off x="914400" y="4544568"/>
-            <a:ext cx="457200" cy="457200"/>
-          </a:xfrm>
-          <a:prstGeom prst="rect">
-            <a:avLst/>
-          </a:prstGeom>
-          <a:noFill/>
-          <a:ln/>
-        </p:spPr>
-        <p:txBody>
-          <a:bodyPr wrap="square" lIns="0" tIns="0" rIns="0" bIns="0" rtlCol="0" anchor="ctr"/>
-          <a:lstStyle/>
-          <a:p>
-            <a:pPr algn="ctr" indent="0" marL="0">
-              <a:buNone/>
-            </a:pPr>
-            <a:r>
-              <a:rPr lang="en-US" sz="1800" b="1" dirty="0">
-                <a:solidFill>
-                  <a:srgbClr val="1A1C1D"/>
-                </a:solidFill>
-                <a:latin typeface="Bookman Old Style" pitchFamily="34" charset="0"/>
-                <a:ea typeface="Bookman Old Style" pitchFamily="34" charset="-122"/>
-                <a:cs typeface="Bookman Old Style" pitchFamily="34" charset="-120"/>
-              </a:rPr>
-              <a:t>3</a:t>
-            </a:r>
-            <a:endParaRPr lang="en-US" sz="1800" dirty="0"/>
-          </a:p>
-        </p:txBody>
-      </p:sp>
-      <p:sp>
-        <p:nvSpPr>
-          <p:cNvPr id="18" name="Text 16"/>
-          <p:cNvSpPr/>
-          <p:nvPr/>
-        </p:nvSpPr>
-        <p:spPr>
-          <a:xfrm>
-            <a:off x="1554480" y="4507992"/>
-            <a:ext cx="4206240" cy="411480"/>
+          <p:cNvPr id="21" name="Text 18"/>
+          <p:cNvSpPr/>
+          <p:nvPr/>
+        </p:nvSpPr>
+        <p:spPr>
+          <a:xfrm>
+            <a:off x="4160520" y="5669280"/>
+            <a:ext cx="7315200" cy="274320"/>
           </a:xfrm>
           <a:prstGeom prst="rect">
             <a:avLst/>
@@ -8896,210 +13967,60 @@
               <a:buNone/>
             </a:pPr>
             <a:r>
-              <a:rPr lang="en-US" sz="1800" b="1" dirty="0">
-                <a:solidFill>
-                  <a:srgbClr val="2B2723"/>
-                </a:solidFill>
-                <a:latin typeface="Bookman Old Style" pitchFamily="34" charset="0"/>
-                <a:ea typeface="Bookman Old Style" pitchFamily="34" charset="-122"/>
-                <a:cs typeface="Bookman Old Style" pitchFamily="34" charset="-120"/>
-              </a:rPr>
-              <a:t>Misconception detection</a:t>
-            </a:r>
-            <a:endParaRPr lang="en-US" sz="1800" dirty="0"/>
-          </a:p>
-        </p:txBody>
-      </p:sp>
-      <p:sp>
-        <p:nvSpPr>
-          <p:cNvPr id="19" name="Text 17"/>
-          <p:cNvSpPr/>
-          <p:nvPr/>
-        </p:nvSpPr>
-        <p:spPr>
-          <a:xfrm>
-            <a:off x="1554480" y="4965192"/>
-            <a:ext cx="4206240" cy="868680"/>
-          </a:xfrm>
-          <a:prstGeom prst="rect">
-            <a:avLst/>
-          </a:prstGeom>
-          <a:noFill/>
-          <a:ln/>
-        </p:spPr>
-        <p:txBody>
-          <a:bodyPr wrap="square" lIns="0" tIns="0" rIns="0" bIns="0" rtlCol="0" anchor="t"/>
-          <a:lstStyle/>
-          <a:p>
-            <a:pPr indent="0" marL="0">
-              <a:buNone/>
-            </a:pPr>
-            <a:r>
-              <a:rPr lang="en-US" sz="1250" dirty="0">
-                <a:solidFill>
-                  <a:srgbClr val="6E675C"/>
+              <a:rPr lang="en-US" sz="1100" dirty="0">
+                <a:solidFill>
+                  <a:srgbClr val="9A7A28"/>
+                </a:solidFill>
+                <a:latin typeface="Consolas" pitchFamily="34" charset="0"/>
+                <a:ea typeface="Consolas" pitchFamily="34" charset="-122"/>
+                <a:cs typeface="Consolas" pitchFamily="34" charset="-120"/>
+              </a:rPr>
+              <a:t>◆ Same data → personalized for every student</a:t>
+            </a:r>
+            <a:endParaRPr lang="en-US" sz="1100" dirty="0"/>
+          </a:p>
+        </p:txBody>
+      </p:sp>
+      <p:sp>
+        <p:nvSpPr>
+          <p:cNvPr id="22" name="Text 19"/>
+          <p:cNvSpPr/>
+          <p:nvPr/>
+        </p:nvSpPr>
+        <p:spPr>
+          <a:xfrm>
+            <a:off x="502920" y="6400800"/>
+            <a:ext cx="7315200" cy="274320"/>
+          </a:xfrm>
+          <a:prstGeom prst="rect">
+            <a:avLst/>
+          </a:prstGeom>
+          <a:noFill/>
+          <a:ln/>
+        </p:spPr>
+        <p:txBody>
+          <a:bodyPr wrap="square" lIns="0" tIns="0" rIns="0" bIns="0" rtlCol="0" anchor="ctr"/>
+          <a:lstStyle/>
+          <a:p>
+            <a:pPr algn="l" indent="0" marL="0">
+              <a:buNone/>
+            </a:pPr>
+            <a:r>
+              <a:rPr lang="en-US" sz="1000" b="1" dirty="0">
+                <a:solidFill>
+                  <a:srgbClr val="C9A24B"/>
                 </a:solidFill>
                 <a:latin typeface="Calibri" pitchFamily="34" charset="0"/>
                 <a:ea typeface="Calibri" pitchFamily="34" charset="-122"/>
                 <a:cs typeface="Calibri" pitchFamily="34" charset="-120"/>
               </a:rPr>
-              <a:t>Surfaces recurring error patterns and gaps in AP writing — missing reasoning, weak evidence use.</a:t>
-            </a:r>
-            <a:endParaRPr lang="en-US" sz="1250" dirty="0"/>
-          </a:p>
-        </p:txBody>
-      </p:sp>
-      <p:sp>
-        <p:nvSpPr>
-          <p:cNvPr id="20" name="Shape 18"/>
-          <p:cNvSpPr/>
-          <p:nvPr/>
-        </p:nvSpPr>
-        <p:spPr>
-          <a:xfrm>
-            <a:off x="6263640" y="4251960"/>
-            <a:ext cx="5349240" cy="1691640"/>
-          </a:xfrm>
-          <a:prstGeom prst="roundRect">
-            <a:avLst>
-              <a:gd name="adj" fmla="val 5405"/>
-            </a:avLst>
-          </a:prstGeom>
-          <a:solidFill>
-            <a:srgbClr val="FBF7EF"/>
-          </a:solidFill>
-          <a:ln w="12700">
-            <a:solidFill>
-              <a:srgbClr val="E4DBC9"/>
-            </a:solidFill>
-            <a:prstDash val="solid"/>
-          </a:ln>
-        </p:spPr>
-      </p:sp>
-      <p:sp>
-        <p:nvSpPr>
-          <p:cNvPr id="21" name="Shape 19"/>
-          <p:cNvSpPr/>
-          <p:nvPr/>
-        </p:nvSpPr>
-        <p:spPr>
-          <a:xfrm>
-            <a:off x="6537960" y="4544568"/>
-            <a:ext cx="457200" cy="457200"/>
-          </a:xfrm>
-          <a:prstGeom prst="ellipse">
-            <a:avLst/>
-          </a:prstGeom>
-          <a:solidFill>
-            <a:srgbClr val="C9A24B"/>
-          </a:solidFill>
-          <a:ln/>
-        </p:spPr>
-      </p:sp>
-      <p:sp>
-        <p:nvSpPr>
-          <p:cNvPr id="22" name="Text 20"/>
-          <p:cNvSpPr/>
-          <p:nvPr/>
-        </p:nvSpPr>
-        <p:spPr>
-          <a:xfrm>
-            <a:off x="6537960" y="4544568"/>
-            <a:ext cx="457200" cy="457200"/>
-          </a:xfrm>
-          <a:prstGeom prst="rect">
-            <a:avLst/>
-          </a:prstGeom>
-          <a:noFill/>
-          <a:ln/>
-        </p:spPr>
-        <p:txBody>
-          <a:bodyPr wrap="square" lIns="0" tIns="0" rIns="0" bIns="0" rtlCol="0" anchor="ctr"/>
-          <a:lstStyle/>
-          <a:p>
-            <a:pPr algn="ctr" indent="0" marL="0">
-              <a:buNone/>
-            </a:pPr>
-            <a:r>
-              <a:rPr lang="en-US" sz="1800" b="1" dirty="0">
-                <a:solidFill>
-                  <a:srgbClr val="1A1C1D"/>
-                </a:solidFill>
-                <a:latin typeface="Bookman Old Style" pitchFamily="34" charset="0"/>
-                <a:ea typeface="Bookman Old Style" pitchFamily="34" charset="-122"/>
-                <a:cs typeface="Bookman Old Style" pitchFamily="34" charset="-120"/>
-              </a:rPr>
-              <a:t>4</a:t>
-            </a:r>
-            <a:endParaRPr lang="en-US" sz="1800" dirty="0"/>
-          </a:p>
-        </p:txBody>
-      </p:sp>
-      <p:sp>
-        <p:nvSpPr>
-          <p:cNvPr id="23" name="Text 21"/>
-          <p:cNvSpPr/>
-          <p:nvPr/>
-        </p:nvSpPr>
-        <p:spPr>
-          <a:xfrm>
-            <a:off x="7178040" y="4507992"/>
-            <a:ext cx="4206240" cy="411480"/>
-          </a:xfrm>
-          <a:prstGeom prst="rect">
-            <a:avLst/>
-          </a:prstGeom>
-          <a:noFill/>
-          <a:ln/>
-        </p:spPr>
-        <p:txBody>
-          <a:bodyPr wrap="square" lIns="0" tIns="0" rIns="0" bIns="0" rtlCol="0" anchor="ctr"/>
-          <a:lstStyle/>
-          <a:p>
-            <a:pPr indent="0" marL="0">
-              <a:buNone/>
-            </a:pPr>
-            <a:r>
-              <a:rPr lang="en-US" sz="1800" b="1" dirty="0">
-                <a:solidFill>
-                  <a:srgbClr val="2B2723"/>
-                </a:solidFill>
-                <a:latin typeface="Bookman Old Style" pitchFamily="34" charset="0"/>
-                <a:ea typeface="Bookman Old Style" pitchFamily="34" charset="-122"/>
-                <a:cs typeface="Bookman Old Style" pitchFamily="34" charset="-120"/>
-              </a:rPr>
-              <a:t>Reteach suggestions</a:t>
-            </a:r>
-            <a:endParaRPr lang="en-US" sz="1800" dirty="0"/>
-          </a:p>
-        </p:txBody>
-      </p:sp>
-      <p:sp>
-        <p:nvSpPr>
-          <p:cNvPr id="24" name="Text 22"/>
-          <p:cNvSpPr/>
-          <p:nvPr/>
-        </p:nvSpPr>
-        <p:spPr>
-          <a:xfrm>
-            <a:off x="7178040" y="4965192"/>
-            <a:ext cx="4206240" cy="868680"/>
-          </a:xfrm>
-          <a:prstGeom prst="rect">
-            <a:avLst/>
-          </a:prstGeom>
-          <a:noFill/>
-          <a:ln/>
-        </p:spPr>
-        <p:txBody>
-          <a:bodyPr wrap="square" lIns="0" tIns="0" rIns="0" bIns="0" rtlCol="0" anchor="t"/>
-          <a:lstStyle/>
-          <a:p>
-            <a:pPr indent="0" marL="0">
-              <a:buNone/>
-            </a:pPr>
-            <a:r>
-              <a:rPr lang="en-US" sz="1250" dirty="0">
+              <a:t>AndersonLogic AI</a:t>
+            </a:r>
+            <a:pPr algn="l" indent="0" marL="0">
+              <a:buNone/>
+            </a:pPr>
+            <a:r>
+              <a:rPr lang="en-US" sz="1000" dirty="0">
                 <a:solidFill>
                   <a:srgbClr val="6E675C"/>
                 </a:solidFill>
@@ -9107,59 +14028,6 @@
                 <a:ea typeface="Calibri" pitchFamily="34" charset="-122"/>
                 <a:cs typeface="Calibri" pitchFamily="34" charset="-120"/>
               </a:rPr>
-              <a:t>Turns those patterns into concrete, targeted reteach recommendations, filterable by class period.</a:t>
-            </a:r>
-            <a:endParaRPr lang="en-US" sz="1250" dirty="0"/>
-          </a:p>
-        </p:txBody>
-      </p:sp>
-      <p:sp>
-        <p:nvSpPr>
-          <p:cNvPr id="25" name="Text 23"/>
-          <p:cNvSpPr/>
-          <p:nvPr/>
-        </p:nvSpPr>
-        <p:spPr>
-          <a:xfrm>
-            <a:off x="502920" y="6400800"/>
-            <a:ext cx="7315200" cy="274320"/>
-          </a:xfrm>
-          <a:prstGeom prst="rect">
-            <a:avLst/>
-          </a:prstGeom>
-          <a:noFill/>
-          <a:ln/>
-        </p:spPr>
-        <p:txBody>
-          <a:bodyPr wrap="square" lIns="0" tIns="0" rIns="0" bIns="0" rtlCol="0" anchor="ctr"/>
-          <a:lstStyle/>
-          <a:p>
-            <a:pPr algn="l" indent="0" marL="0">
-              <a:buNone/>
-            </a:pPr>
-            <a:r>
-              <a:rPr lang="en-US" sz="1000" b="1" dirty="0">
-                <a:solidFill>
-                  <a:srgbClr val="C9A24B"/>
-                </a:solidFill>
-                <a:latin typeface="Calibri" pitchFamily="34" charset="0"/>
-                <a:ea typeface="Calibri" pitchFamily="34" charset="-122"/>
-                <a:cs typeface="Calibri" pitchFamily="34" charset="-120"/>
-              </a:rPr>
-              <a:t>AndersonLogic AI</a:t>
-            </a:r>
-            <a:pPr algn="l" indent="0" marL="0">
-              <a:buNone/>
-            </a:pPr>
-            <a:r>
-              <a:rPr lang="en-US" sz="1000" dirty="0">
-                <a:solidFill>
-                  <a:srgbClr val="6E675C"/>
-                </a:solidFill>
-                <a:latin typeface="Calibri" pitchFamily="34" charset="0"/>
-                <a:ea typeface="Calibri" pitchFamily="34" charset="-122"/>
-                <a:cs typeface="Calibri" pitchFamily="34" charset="-120"/>
-              </a:rPr>
               <a:t>   ·   BeHistorical</a:t>
             </a:r>
             <a:endParaRPr lang="en-US" sz="1000" dirty="0"/>
@@ -9168,7 +14036,7 @@
       </p:sp>
       <p:sp>
         <p:nvSpPr>
-          <p:cNvPr id="26" name="Text 24"/>
+          <p:cNvPr id="23" name="Text 20"/>
           <p:cNvSpPr/>
           <p:nvPr/>
         </p:nvSpPr>
@@ -9199,7 +14067,7 @@
                 <a:ea typeface="Consolas" pitchFamily="34" charset="-122"/>
                 <a:cs typeface="Consolas" pitchFamily="34" charset="-120"/>
               </a:rPr>
-              <a:t>08 / 10</a:t>
+              <a:t>08 / 15</a:t>
             </a:r>
             <a:endParaRPr lang="en-US" sz="1100" dirty="0"/>
           </a:p>
@@ -9245,8 +14113,8 @@
         </p:nvSpPr>
         <p:spPr>
           <a:xfrm>
-            <a:off x="640080" y="457200"/>
-            <a:ext cx="10058400" cy="274320"/>
+            <a:off x="640080" y="502920"/>
+            <a:ext cx="8229600" cy="274320"/>
           </a:xfrm>
           <a:prstGeom prst="rect">
             <a:avLst/>
@@ -9270,7 +14138,7 @@
                 <a:ea typeface="Consolas" pitchFamily="34" charset="-122"/>
                 <a:cs typeface="Consolas" pitchFamily="34" charset="-120"/>
               </a:rPr>
-              <a:t>WHY IT SCALES</a:t>
+              <a:t>THE DISPATCH — FAMILY NEWSLETTER</a:t>
             </a:r>
             <a:endParaRPr lang="en-US" sz="1200" dirty="0"/>
           </a:p>
@@ -9278,13 +14146,79 @@
       </p:sp>
       <p:sp>
         <p:nvSpPr>
-          <p:cNvPr id="3" name="Text 1"/>
-          <p:cNvSpPr/>
-          <p:nvPr/>
-        </p:nvSpPr>
-        <p:spPr>
-          <a:xfrm>
-            <a:off x="603504" y="777240"/>
+          <p:cNvPr id="3" name="Shape 1"/>
+          <p:cNvSpPr/>
+          <p:nvPr/>
+        </p:nvSpPr>
+        <p:spPr>
+          <a:xfrm>
+            <a:off x="10093147" y="475488"/>
+            <a:ext cx="1519733" cy="310896"/>
+          </a:xfrm>
+          <a:prstGeom prst="roundRect">
+            <a:avLst>
+              <a:gd name="adj" fmla="val 50000"/>
+            </a:avLst>
+          </a:prstGeom>
+          <a:solidFill>
+            <a:srgbClr val="2E2A20"/>
+          </a:solidFill>
+          <a:ln w="12700">
+            <a:solidFill>
+              <a:srgbClr val="C9A24B"/>
+            </a:solidFill>
+            <a:prstDash val="solid"/>
+          </a:ln>
+        </p:spPr>
+      </p:sp>
+      <p:sp>
+        <p:nvSpPr>
+          <p:cNvPr id="4" name="Text 2"/>
+          <p:cNvSpPr/>
+          <p:nvPr/>
+        </p:nvSpPr>
+        <p:spPr>
+          <a:xfrm>
+            <a:off x="10093147" y="475488"/>
+            <a:ext cx="1519733" cy="310896"/>
+          </a:xfrm>
+          <a:prstGeom prst="rect">
+            <a:avLst/>
+          </a:prstGeom>
+          <a:noFill/>
+          <a:ln/>
+        </p:spPr>
+        <p:txBody>
+          <a:bodyPr wrap="square" lIns="0" tIns="0" rIns="0" bIns="0" rtlCol="0" anchor="ctr"/>
+          <a:lstStyle/>
+          <a:p>
+            <a:pPr algn="ctr" indent="0" marL="0">
+              <a:buNone/>
+            </a:pPr>
+            <a:r>
+              <a:rPr lang="en-US" sz="1000" b="1" spc="150" kern="0" dirty="0">
+                <a:solidFill>
+                  <a:srgbClr val="E4C878"/>
+                </a:solidFill>
+                <a:latin typeface="Consolas" pitchFamily="34" charset="0"/>
+                <a:ea typeface="Consolas" pitchFamily="34" charset="-122"/>
+                <a:cs typeface="Consolas" pitchFamily="34" charset="-120"/>
+              </a:rPr>
+              <a:t>IN DEVELOPMENT</a:t>
+            </a:r>
+            <a:endParaRPr lang="en-US" sz="1000" dirty="0"/>
+          </a:p>
+        </p:txBody>
+      </p:sp>
+      <p:sp>
+        <p:nvSpPr>
+          <p:cNvPr id="5" name="Text 3"/>
+          <p:cNvSpPr/>
+          <p:nvPr/>
+        </p:nvSpPr>
+        <p:spPr>
+          <a:xfrm>
+            <a:off x="603504" y="896112"/>
             <a:ext cx="10972800" cy="640080"/>
           </a:xfrm>
           <a:prstGeom prst="rect">
@@ -9309,7 +14243,7 @@
                 <a:ea typeface="Bookman Old Style" pitchFamily="34" charset="-122"/>
                 <a:cs typeface="Bookman Old Style" pitchFamily="34" charset="-120"/>
               </a:rPr>
-              <a:t>Built like software, not a slide folder</a:t>
+              <a:t>Every family, in the loop — automatically</a:t>
             </a:r>
             <a:endParaRPr lang="en-US" sz="2800" dirty="0"/>
           </a:p>
@@ -9317,18 +14251,18 @@
       </p:sp>
       <p:sp>
         <p:nvSpPr>
-          <p:cNvPr id="4" name="Shape 2"/>
-          <p:cNvSpPr/>
-          <p:nvPr/>
-        </p:nvSpPr>
-        <p:spPr>
-          <a:xfrm>
-            <a:off x="594360" y="1554480"/>
-            <a:ext cx="5623560" cy="3805047"/>
+          <p:cNvPr id="6" name="Shape 4"/>
+          <p:cNvSpPr/>
+          <p:nvPr/>
+        </p:nvSpPr>
+        <p:spPr>
+          <a:xfrm>
+            <a:off x="594360" y="1645920"/>
+            <a:ext cx="2103120" cy="4241132"/>
           </a:xfrm>
           <a:prstGeom prst="roundRect">
             <a:avLst>
-              <a:gd name="adj" fmla="val 1442"/>
+              <a:gd name="adj" fmla="val 2609"/>
             </a:avLst>
           </a:prstGeom>
           <a:solidFill>
@@ -9351,14 +14285,14 @@
       </p:sp>
       <p:sp>
         <p:nvSpPr>
-          <p:cNvPr id="5" name="Shape 3"/>
-          <p:cNvSpPr/>
-          <p:nvPr/>
-        </p:nvSpPr>
-        <p:spPr>
-          <a:xfrm>
-            <a:off x="640080" y="1600200"/>
-            <a:ext cx="5532120" cy="256032"/>
+          <p:cNvPr id="7" name="Shape 5"/>
+          <p:cNvSpPr/>
+          <p:nvPr/>
+        </p:nvSpPr>
+        <p:spPr>
+          <a:xfrm>
+            <a:off x="640080" y="1691640"/>
+            <a:ext cx="2011680" cy="256032"/>
           </a:xfrm>
           <a:prstGeom prst="rect">
             <a:avLst/>
@@ -9371,13 +14305,13 @@
       </p:sp>
       <p:sp>
         <p:nvSpPr>
-          <p:cNvPr id="6" name="Shape 4"/>
-          <p:cNvSpPr/>
-          <p:nvPr/>
-        </p:nvSpPr>
-        <p:spPr>
-          <a:xfrm>
-            <a:off x="768096" y="1687068"/>
+          <p:cNvPr id="8" name="Shape 6"/>
+          <p:cNvSpPr/>
+          <p:nvPr/>
+        </p:nvSpPr>
+        <p:spPr>
+          <a:xfrm>
+            <a:off x="768096" y="1778508"/>
             <a:ext cx="82296" cy="82296"/>
           </a:xfrm>
           <a:prstGeom prst="ellipse">
@@ -9391,13 +14325,13 @@
       </p:sp>
       <p:sp>
         <p:nvSpPr>
-          <p:cNvPr id="7" name="Shape 5"/>
-          <p:cNvSpPr/>
-          <p:nvPr/>
-        </p:nvSpPr>
-        <p:spPr>
-          <a:xfrm>
-            <a:off x="896112" y="1687068"/>
+          <p:cNvPr id="9" name="Shape 7"/>
+          <p:cNvSpPr/>
+          <p:nvPr/>
+        </p:nvSpPr>
+        <p:spPr>
+          <a:xfrm>
+            <a:off x="896112" y="1778508"/>
             <a:ext cx="82296" cy="82296"/>
           </a:xfrm>
           <a:prstGeom prst="ellipse">
@@ -9411,13 +14345,13 @@
       </p:sp>
       <p:sp>
         <p:nvSpPr>
-          <p:cNvPr id="8" name="Shape 6"/>
-          <p:cNvSpPr/>
-          <p:nvPr/>
-        </p:nvSpPr>
-        <p:spPr>
-          <a:xfrm>
-            <a:off x="1024128" y="1687068"/>
+          <p:cNvPr id="10" name="Shape 8"/>
+          <p:cNvSpPr/>
+          <p:nvPr/>
+        </p:nvSpPr>
+        <p:spPr>
+          <a:xfrm>
+            <a:off x="1024128" y="1778508"/>
             <a:ext cx="82296" cy="82296"/>
           </a:xfrm>
           <a:prstGeom prst="ellipse">
@@ -9431,14 +14365,14 @@
       </p:sp>
       <p:sp>
         <p:nvSpPr>
-          <p:cNvPr id="9" name="Text 7"/>
-          <p:cNvSpPr/>
-          <p:nvPr/>
-        </p:nvSpPr>
-        <p:spPr>
-          <a:xfrm>
-            <a:off x="1207008" y="1600200"/>
-            <a:ext cx="4892040" cy="256032"/>
+          <p:cNvPr id="11" name="Text 9"/>
+          <p:cNvSpPr/>
+          <p:nvPr/>
+        </p:nvSpPr>
+        <p:spPr>
+          <a:xfrm>
+            <a:off x="1207008" y="1691640"/>
+            <a:ext cx="1371600" cy="256032"/>
           </a:xfrm>
           <a:prstGeom prst="rect">
             <a:avLst/>
@@ -9462,7 +14396,7 @@
                 <a:ea typeface="Consolas" pitchFamily="34" charset="-122"/>
                 <a:cs typeface="Consolas" pitchFamily="34" charset="-120"/>
               </a:rPr>
-              <a:t>behistorical · repository command center</a:t>
+              <a:t>the dispatch · issue 01</a:t>
             </a:r>
             <a:endParaRPr lang="en-US" sz="850" dirty="0"/>
           </a:p>
@@ -9470,7 +14404,7 @@
       </p:sp>
       <p:pic>
         <p:nvPicPr>
-          <p:cNvPr id="10" name="Image 0" descr="preencoded.png">    </p:cNvPr>
+          <p:cNvPr id="12" name="Image 0" descr="preencoded.png">    </p:cNvPr>
           <p:cNvPicPr>
             <a:picLocks noChangeAspect="1"/>
           </p:cNvPicPr>
@@ -9484,8 +14418,8 @@
         </p:blipFill>
         <p:spPr>
           <a:xfrm>
-            <a:off x="640080" y="1856232"/>
-            <a:ext cx="5532120" cy="3457575"/>
+            <a:off x="640080" y="1947672"/>
+            <a:ext cx="2011680" cy="3893660"/>
           </a:xfrm>
           <a:prstGeom prst="rect">
             <a:avLst/>
@@ -9494,14 +14428,14 @@
       </p:pic>
       <p:sp>
         <p:nvSpPr>
-          <p:cNvPr id="11" name="Text 8"/>
-          <p:cNvSpPr/>
-          <p:nvPr/>
-        </p:nvSpPr>
-        <p:spPr>
-          <a:xfrm>
-            <a:off x="640080" y="5423535"/>
-            <a:ext cx="5577840" cy="274320"/>
+          <p:cNvPr id="13" name="Text 10"/>
+          <p:cNvSpPr/>
+          <p:nvPr/>
+        </p:nvSpPr>
+        <p:spPr>
+          <a:xfrm>
+            <a:off x="640080" y="5951060"/>
+            <a:ext cx="2743200" cy="365760"/>
           </a:xfrm>
           <a:prstGeom prst="rect">
             <a:avLst/>
@@ -9517,7 +14451,7 @@
               <a:buNone/>
             </a:pPr>
             <a:r>
-              <a:rPr lang="en-US" sz="950" dirty="0">
+              <a:rPr lang="en-US" sz="900" dirty="0">
                 <a:solidFill>
                   <a:srgbClr val="9AA0A6"/>
                 </a:solidFill>
@@ -9525,38 +14459,77 @@
                 <a:ea typeface="Consolas" pitchFamily="34" charset="-122"/>
                 <a:cs typeface="Consolas" pitchFamily="34" charset="-120"/>
               </a:rPr>
-              <a:t>The Command Center — audited against what's actually on disk</a:t>
-            </a:r>
-            <a:endParaRPr lang="en-US" sz="950" dirty="0"/>
-          </a:p>
-        </p:txBody>
-      </p:sp>
-      <p:sp>
-        <p:nvSpPr>
-          <p:cNvPr id="12" name="Text 9"/>
-          <p:cNvSpPr/>
-          <p:nvPr/>
-        </p:nvSpPr>
-        <p:spPr>
-          <a:xfrm>
-            <a:off x="6492240" y="1691640"/>
-            <a:ext cx="5029200" cy="310896"/>
-          </a:xfrm>
-          <a:prstGeom prst="rect">
-            <a:avLst/>
-          </a:prstGeom>
-          <a:noFill/>
-          <a:ln/>
-        </p:spPr>
-        <p:txBody>
-          <a:bodyPr wrap="square" lIns="0" tIns="0" rIns="0" bIns="0" rtlCol="0" anchor="ctr"/>
+              <a:t>Issue 01 mockup · template &amp; content library built</a:t>
+            </a:r>
+            <a:endParaRPr lang="en-US" sz="900" dirty="0"/>
+          </a:p>
+        </p:txBody>
+      </p:sp>
+      <p:sp>
+        <p:nvSpPr>
+          <p:cNvPr id="14" name="Text 11"/>
+          <p:cNvSpPr/>
+          <p:nvPr/>
+        </p:nvSpPr>
+        <p:spPr>
+          <a:xfrm>
+            <a:off x="3200400" y="1737360"/>
+            <a:ext cx="8321040" cy="1005840"/>
+          </a:xfrm>
+          <a:prstGeom prst="rect">
+            <a:avLst/>
+          </a:prstGeom>
+          <a:noFill/>
+          <a:ln/>
+        </p:spPr>
+        <p:txBody>
+          <a:bodyPr wrap="square" lIns="0" tIns="0" rIns="0" bIns="0" rtlCol="0" anchor="t"/>
           <a:lstStyle/>
           <a:p>
             <a:pPr indent="0" marL="0">
               <a:buNone/>
             </a:pPr>
             <a:r>
-              <a:rPr lang="en-US" sz="1700" b="1" dirty="0">
+              <a:rPr lang="en-US" sz="1500" dirty="0">
+                <a:solidFill>
+                  <a:srgbClr val="F4EEE2"/>
+                </a:solidFill>
+                <a:latin typeface="Calibri" pitchFamily="34" charset="0"/>
+                <a:ea typeface="Calibri" pitchFamily="34" charset="-122"/>
+                <a:cs typeface="Calibri" pitchFamily="34" charset="-120"/>
+              </a:rPr>
+              <a:t>A biweekly email that forecasts the next five class days and pairs each topic with one "Tip of the Day" — a study-science move or an AP exam skill. For students and their families, in plain language.</a:t>
+            </a:r>
+            <a:endParaRPr lang="en-US" sz="1500" dirty="0"/>
+          </a:p>
+        </p:txBody>
+      </p:sp>
+      <p:sp>
+        <p:nvSpPr>
+          <p:cNvPr id="15" name="Text 12"/>
+          <p:cNvSpPr/>
+          <p:nvPr/>
+        </p:nvSpPr>
+        <p:spPr>
+          <a:xfrm>
+            <a:off x="3200400" y="2880360"/>
+            <a:ext cx="8321040" cy="292608"/>
+          </a:xfrm>
+          <a:prstGeom prst="rect">
+            <a:avLst/>
+          </a:prstGeom>
+          <a:noFill/>
+          <a:ln/>
+        </p:spPr>
+        <p:txBody>
+          <a:bodyPr wrap="square" lIns="0" tIns="0" rIns="0" bIns="0" rtlCol="0" anchor="ctr"/>
+          <a:lstStyle/>
+          <a:p>
+            <a:pPr indent="0" marL="0">
+              <a:buNone/>
+            </a:pPr>
+            <a:r>
+              <a:rPr lang="en-US" sz="1600" b="1" dirty="0">
                 <a:solidFill>
                   <a:srgbClr val="E4C878"/>
                 </a:solidFill>
@@ -9564,22 +14537,22 @@
                 <a:ea typeface="Bookman Old Style" pitchFamily="34" charset="-122"/>
                 <a:cs typeface="Bookman Old Style" pitchFamily="34" charset="-120"/>
               </a:rPr>
-              <a:t>Automated validation</a:t>
-            </a:r>
-            <a:endParaRPr lang="en-US" sz="1700" dirty="0"/>
-          </a:p>
-        </p:txBody>
-      </p:sp>
-      <p:sp>
-        <p:nvSpPr>
-          <p:cNvPr id="13" name="Text 10"/>
-          <p:cNvSpPr/>
-          <p:nvPr/>
-        </p:nvSpPr>
-        <p:spPr>
-          <a:xfrm>
-            <a:off x="6492240" y="2002536"/>
-            <a:ext cx="5029200" cy="685800"/>
+              <a:t>Auto-generated from the course</a:t>
+            </a:r>
+            <a:endParaRPr lang="en-US" sz="1600" dirty="0"/>
+          </a:p>
+        </p:txBody>
+      </p:sp>
+      <p:sp>
+        <p:nvSpPr>
+          <p:cNvPr id="16" name="Text 13"/>
+          <p:cNvSpPr/>
+          <p:nvPr/>
+        </p:nvSpPr>
+        <p:spPr>
+          <a:xfrm>
+            <a:off x="3200400" y="3163824"/>
+            <a:ext cx="8321040" cy="548640"/>
           </a:xfrm>
           <a:prstGeom prst="rect">
             <a:avLst/>
@@ -9595,30 +14568,30 @@
               <a:buNone/>
             </a:pPr>
             <a:r>
-              <a:rPr lang="en-US" sz="1300" dirty="0">
-                <a:solidFill>
-                  <a:srgbClr val="F4EEE2"/>
+              <a:rPr lang="en-US" sz="1250" dirty="0">
+                <a:solidFill>
+                  <a:srgbClr val="E9E2D2"/>
                 </a:solidFill>
                 <a:latin typeface="Calibri" pitchFamily="34" charset="0"/>
                 <a:ea typeface="Calibri" pitchFamily="34" charset="-122"/>
                 <a:cs typeface="Calibri" pitchFamily="34" charset="-120"/>
               </a:rPr>
-              <a:t>A 547-file audit runs on every change — module order, form wiring, and simulation quality gates. Zero-error deploys.</a:t>
-            </a:r>
-            <a:endParaRPr lang="en-US" sz="1300" dirty="0"/>
-          </a:p>
-        </p:txBody>
-      </p:sp>
-      <p:sp>
-        <p:nvSpPr>
-          <p:cNvPr id="14" name="Text 11"/>
-          <p:cNvSpPr/>
-          <p:nvPr/>
-        </p:nvSpPr>
-        <p:spPr>
-          <a:xfrm>
-            <a:off x="6492240" y="2788920"/>
-            <a:ext cx="5029200" cy="310896"/>
+              <a:t>Topics, tips, and Family Corner prompts merge from a Google Sheet into a branded HTML email.</a:t>
+            </a:r>
+            <a:endParaRPr lang="en-US" sz="1250" dirty="0"/>
+          </a:p>
+        </p:txBody>
+      </p:sp>
+      <p:sp>
+        <p:nvSpPr>
+          <p:cNvPr id="17" name="Text 14"/>
+          <p:cNvSpPr/>
+          <p:nvPr/>
+        </p:nvSpPr>
+        <p:spPr>
+          <a:xfrm>
+            <a:off x="3200400" y="3794760"/>
+            <a:ext cx="8321040" cy="292608"/>
           </a:xfrm>
           <a:prstGeom prst="rect">
             <a:avLst/>
@@ -9634,7 +14607,7 @@
               <a:buNone/>
             </a:pPr>
             <a:r>
-              <a:rPr lang="en-US" sz="1700" b="1" dirty="0">
+              <a:rPr lang="en-US" sz="1600" b="1" dirty="0">
                 <a:solidFill>
                   <a:srgbClr val="E4C878"/>
                 </a:solidFill>
@@ -9642,22 +14615,22 @@
                 <a:ea typeface="Bookman Old Style" pitchFamily="34" charset="-122"/>
                 <a:cs typeface="Bookman Old Style" pitchFamily="34" charset="-120"/>
               </a:rPr>
-              <a:t>Deterministic builders</a:t>
-            </a:r>
-            <a:endParaRPr lang="en-US" sz="1700" dirty="0"/>
-          </a:p>
-        </p:txBody>
-      </p:sp>
-      <p:sp>
-        <p:nvSpPr>
-          <p:cNvPr id="15" name="Text 12"/>
-          <p:cNvSpPr/>
-          <p:nvPr/>
-        </p:nvSpPr>
-        <p:spPr>
-          <a:xfrm>
-            <a:off x="6492240" y="3099816"/>
-            <a:ext cx="5029200" cy="685800"/>
+              <a:t>A rotating coaching library</a:t>
+            </a:r>
+            <a:endParaRPr lang="en-US" sz="1600" dirty="0"/>
+          </a:p>
+        </p:txBody>
+      </p:sp>
+      <p:sp>
+        <p:nvSpPr>
+          <p:cNvPr id="18" name="Text 15"/>
+          <p:cNvSpPr/>
+          <p:nvPr/>
+        </p:nvSpPr>
+        <p:spPr>
+          <a:xfrm>
+            <a:off x="3200400" y="4078224"/>
+            <a:ext cx="8321040" cy="548640"/>
           </a:xfrm>
           <a:prstGeom prst="rect">
             <a:avLst/>
@@ -9673,30 +14646,30 @@
               <a:buNone/>
             </a:pPr>
             <a:r>
-              <a:rPr lang="en-US" sz="1300" dirty="0">
-                <a:solidFill>
-                  <a:srgbClr val="F4EEE2"/>
+              <a:rPr lang="en-US" sz="1250" dirty="0">
+                <a:solidFill>
+                  <a:srgbClr val="E9E2D2"/>
                 </a:solidFill>
                 <a:latin typeface="Calibri" pitchFamily="34" charset="0"/>
                 <a:ea typeface="Calibri" pitchFamily="34" charset="-122"/>
                 <a:cs typeface="Calibri" pitchFamily="34" charset="-120"/>
               </a:rPr>
-              <a:t>Whole units are generated from data by scripts — so a fix rolls out everywhere, consistently, at once.</a:t>
-            </a:r>
-            <a:endParaRPr lang="en-US" sz="1300" dirty="0"/>
-          </a:p>
-        </p:txBody>
-      </p:sp>
-      <p:sp>
-        <p:nvSpPr>
-          <p:cNvPr id="16" name="Text 13"/>
-          <p:cNvSpPr/>
-          <p:nvPr/>
-        </p:nvSpPr>
-        <p:spPr>
-          <a:xfrm>
-            <a:off x="6492240" y="3886200"/>
-            <a:ext cx="5029200" cy="310896"/>
+              <a:t>6 learning-science Study Moves + 8 AP Skill Spotlights cycle so tips never go stale.</a:t>
+            </a:r>
+            <a:endParaRPr lang="en-US" sz="1250" dirty="0"/>
+          </a:p>
+        </p:txBody>
+      </p:sp>
+      <p:sp>
+        <p:nvSpPr>
+          <p:cNvPr id="19" name="Text 16"/>
+          <p:cNvSpPr/>
+          <p:nvPr/>
+        </p:nvSpPr>
+        <p:spPr>
+          <a:xfrm>
+            <a:off x="3200400" y="4709160"/>
+            <a:ext cx="8321040" cy="292608"/>
           </a:xfrm>
           <a:prstGeom prst="rect">
             <a:avLst/>
@@ -9712,7 +14685,7 @@
               <a:buNone/>
             </a:pPr>
             <a:r>
-              <a:rPr lang="en-US" sz="1700" b="1" dirty="0">
+              <a:rPr lang="en-US" sz="1600" b="1" dirty="0">
                 <a:solidFill>
                   <a:srgbClr val="E4C878"/>
                 </a:solidFill>
@@ -9720,22 +14693,22 @@
                 <a:ea typeface="Bookman Old Style" pitchFamily="34" charset="-122"/>
                 <a:cs typeface="Bookman Old Style" pitchFamily="34" charset="-120"/>
               </a:rPr>
-              <a:t>Codified quality gates</a:t>
-            </a:r>
-            <a:endParaRPr lang="en-US" sz="1700" dirty="0"/>
-          </a:p>
-        </p:txBody>
-      </p:sp>
-      <p:sp>
-        <p:nvSpPr>
-          <p:cNvPr id="17" name="Text 14"/>
-          <p:cNvSpPr/>
-          <p:nvPr/>
-        </p:nvSpPr>
-        <p:spPr>
-          <a:xfrm>
-            <a:off x="6492240" y="4197096"/>
-            <a:ext cx="5029200" cy="685800"/>
+              <a:t>Delivered where families already are</a:t>
+            </a:r>
+            <a:endParaRPr lang="en-US" sz="1600" dirty="0"/>
+          </a:p>
+        </p:txBody>
+      </p:sp>
+      <p:sp>
+        <p:nvSpPr>
+          <p:cNvPr id="20" name="Text 17"/>
+          <p:cNvSpPr/>
+          <p:nvPr/>
+        </p:nvSpPr>
+        <p:spPr>
+          <a:xfrm>
+            <a:off x="3200400" y="4992624"/>
+            <a:ext cx="8321040" cy="548640"/>
           </a:xfrm>
           <a:prstGeom prst="rect">
             <a:avLst/>
@@ -9751,30 +14724,30 @@
               <a:buNone/>
             </a:pPr>
             <a:r>
-              <a:rPr lang="en-US" sz="1300" dirty="0">
-                <a:solidFill>
-                  <a:srgbClr val="F4EEE2"/>
+              <a:rPr lang="en-US" sz="1250" dirty="0">
+                <a:solidFill>
+                  <a:srgbClr val="E9E2D2"/>
                 </a:solidFill>
                 <a:latin typeface="Calibri" pitchFamily="34" charset="0"/>
                 <a:ea typeface="Calibri" pitchFamily="34" charset="-122"/>
                 <a:cs typeface="Calibri" pitchFamily="34" charset="-120"/>
               </a:rPr>
-              <a:t>Design rules live in blueprints and are enforced by machine before anything ships.</a:t>
-            </a:r>
-            <a:endParaRPr lang="en-US" sz="1300" dirty="0"/>
-          </a:p>
-        </p:txBody>
-      </p:sp>
-      <p:sp>
-        <p:nvSpPr>
-          <p:cNvPr id="18" name="Text 15"/>
-          <p:cNvSpPr/>
-          <p:nvPr/>
-        </p:nvSpPr>
-        <p:spPr>
-          <a:xfrm>
-            <a:off x="6492240" y="5029200"/>
-            <a:ext cx="5029200" cy="548640"/>
+              <a:t>Sent biweekly through the school's ParentSquare platform — no new app, no logins.</a:t>
+            </a:r>
+            <a:endParaRPr lang="en-US" sz="1250" dirty="0"/>
+          </a:p>
+        </p:txBody>
+      </p:sp>
+      <p:sp>
+        <p:nvSpPr>
+          <p:cNvPr id="21" name="Text 18"/>
+          <p:cNvSpPr/>
+          <p:nvPr/>
+        </p:nvSpPr>
+        <p:spPr>
+          <a:xfrm>
+            <a:off x="3200400" y="5669280"/>
+            <a:ext cx="8321040" cy="274320"/>
           </a:xfrm>
           <a:prstGeom prst="rect">
             <a:avLst/>
@@ -9790,23 +14763,23 @@
               <a:buNone/>
             </a:pPr>
             <a:r>
-              <a:rPr lang="en-US" sz="1500" b="1" i="1" dirty="0">
-                <a:solidFill>
-                  <a:srgbClr val="C9A24B"/>
-                </a:solidFill>
-                <a:latin typeface="Bookman Old Style" pitchFamily="34" charset="0"/>
-                <a:ea typeface="Bookman Old Style" pitchFamily="34" charset="-122"/>
-                <a:cs typeface="Bookman Old Style" pitchFamily="34" charset="-120"/>
-              </a:rPr>
-              <a:t>The difference between a teacher's materials and a product a district can adopt.</a:t>
-            </a:r>
-            <a:endParaRPr lang="en-US" sz="1500" dirty="0"/>
-          </a:p>
-        </p:txBody>
-      </p:sp>
-      <p:sp>
-        <p:nvSpPr>
-          <p:cNvPr id="19" name="Text 16"/>
+              <a:rPr lang="en-US" sz="1100" dirty="0">
+                <a:solidFill>
+                  <a:srgbClr val="E4C878"/>
+                </a:solidFill>
+                <a:latin typeface="Consolas" pitchFamily="34" charset="0"/>
+                <a:ea typeface="Consolas" pitchFamily="34" charset="-122"/>
+                <a:cs typeface="Consolas" pitchFamily="34" charset="-120"/>
+              </a:rPr>
+              <a:t>◆ Turns the classroom into a home conversation</a:t>
+            </a:r>
+            <a:endParaRPr lang="en-US" sz="1100" dirty="0"/>
+          </a:p>
+        </p:txBody>
+      </p:sp>
+      <p:sp>
+        <p:nvSpPr>
+          <p:cNvPr id="22" name="Text 19"/>
           <p:cNvSpPr/>
           <p:nvPr/>
         </p:nvSpPr>
@@ -9859,7 +14832,7 @@
       </p:sp>
       <p:sp>
         <p:nvSpPr>
-          <p:cNvPr id="20" name="Text 17"/>
+          <p:cNvPr id="23" name="Text 20"/>
           <p:cNvSpPr/>
           <p:nvPr/>
         </p:nvSpPr>
@@ -9890,7 +14863,7 @@
                 <a:ea typeface="Consolas" pitchFamily="34" charset="-122"/>
                 <a:cs typeface="Consolas" pitchFamily="34" charset="-120"/>
               </a:rPr>
-              <a:t>09 / 10</a:t>
+              <a:t>09 / 15</a:t>
             </a:r>
             <a:endParaRPr lang="en-US" sz="1100" dirty="0"/>
           </a:p>

--- a/pitch/BeHistorical-AndersonLogic-AI.pptx
+++ b/pitch/BeHistorical-AndersonLogic-AI.pptx
@@ -20,9 +20,11 @@
     <p:sldId id="268" r:id="rId14"/>
     <p:sldId id="269" r:id="rId15"/>
     <p:sldId id="270" r:id="rId16"/>
+    <p:sldId id="271" r:id="rId17"/>
+    <p:sldId id="272" r:id="rId18"/>
   </p:sldIdLst>
   <p:notesMasterIdLst>
-    <p:notesMasterId r:id="rId17"/>
+    <p:notesMasterId r:id="rId19"/>
   </p:notesMasterIdLst>
   <p:sldSz cx="12192000" cy="6858000"/>
   <p:notesSz cx="6858000" cy="12192000"/>
@@ -1068,6 +1070,182 @@
             <a:fld id="{F7021451-1387-4CA6-816F-3879F97B5CBC}" type="slidenum">
               <a:rPr lang="en-US"/>
               <a:t>15</a:t>
+            </a:fld>
+            <a:endParaRPr lang="en-US"/>
+          </a:p>
+        </p:txBody>
+      </p:sp>
+    </p:spTree>
+    <p:extLst>
+      <p:ext uri="{BB962C8B-B14F-4D97-AF65-F5344CB8AC3E}">
+        <p14:creationId xmlns:p14="http://schemas.microsoft.com/office/powerpoint/2010/main" val="1024086991"/>
+      </p:ext>
+    </p:extLst>
+  </p:cSld>
+  <p:clrMapOvr>
+    <a:masterClrMapping/>
+  </p:clrMapOvr>
+</p:notes>
+</file>
+
+<file path=ppt/notesSlides/notesSlide16.xml><?xml version="1.0" encoding="utf-8"?>
+<p:notes xmlns:a="http://schemas.openxmlformats.org/drawingml/2006/main" xmlns:r="http://schemas.openxmlformats.org/officeDocument/2006/relationships" xmlns:p="http://schemas.openxmlformats.org/presentationml/2006/main">
+  <p:cSld>
+    <p:spTree>
+      <p:nvGrpSpPr>
+        <p:cNvPr id="1" name=""/>
+        <p:cNvGrpSpPr/>
+        <p:nvPr/>
+      </p:nvGrpSpPr>
+      <p:grpSpPr>
+        <a:xfrm>
+          <a:off x="0" y="0"/>
+          <a:ext cx="0" cy="0"/>
+          <a:chOff x="0" y="0"/>
+          <a:chExt cx="0" cy="0"/>
+        </a:xfrm>
+      </p:grpSpPr>
+      <p:sp>
+        <p:nvSpPr>
+          <p:cNvPr id="2" name="Slide Image Placeholder 1"/>
+          <p:cNvSpPr>
+            <a:spLocks noGrp="1" noRot="1" noChangeAspect="1"/>
+          </p:cNvSpPr>
+          <p:nvPr>
+            <p:ph type="sldImg"/>
+          </p:nvPr>
+        </p:nvSpPr>
+        <p:spPr/>
+      </p:sp>
+      <p:sp>
+        <p:nvSpPr>
+          <p:cNvPr id="3" name="Notes Placeholder 2"/>
+          <p:cNvSpPr>
+            <a:spLocks noGrp="1"/>
+          </p:cNvSpPr>
+          <p:nvPr>
+            <p:ph type="body" idx="1"/>
+          </p:nvPr>
+        </p:nvSpPr>
+        <p:spPr/>
+        <p:txBody>
+          <a:bodyPr/>
+          <a:lstStyle/>
+          <a:p>
+            <a:r>
+              <a:rPr lang="en-US" dirty="0"/>
+              <a:t/>
+            </a:r>
+            <a:endParaRPr lang="en-US" dirty="0"/>
+          </a:p>
+        </p:txBody>
+      </p:sp>
+      <p:sp>
+        <p:nvSpPr>
+          <p:cNvPr id="4" name="Slide Number Placeholder 3"/>
+          <p:cNvSpPr>
+            <a:spLocks noGrp="1"/>
+          </p:cNvSpPr>
+          <p:nvPr>
+            <p:ph type="sldNum" sz="quarter" idx="10"/>
+          </p:nvPr>
+        </p:nvSpPr>
+        <p:spPr/>
+        <p:txBody>
+          <a:bodyPr/>
+          <a:lstStyle/>
+          <a:p>
+            <a:fld id="{F7021451-1387-4CA6-816F-3879F97B5CBC}" type="slidenum">
+              <a:rPr lang="en-US"/>
+              <a:t>16</a:t>
+            </a:fld>
+            <a:endParaRPr lang="en-US"/>
+          </a:p>
+        </p:txBody>
+      </p:sp>
+    </p:spTree>
+    <p:extLst>
+      <p:ext uri="{BB962C8B-B14F-4D97-AF65-F5344CB8AC3E}">
+        <p14:creationId xmlns:p14="http://schemas.microsoft.com/office/powerpoint/2010/main" val="1024086991"/>
+      </p:ext>
+    </p:extLst>
+  </p:cSld>
+  <p:clrMapOvr>
+    <a:masterClrMapping/>
+  </p:clrMapOvr>
+</p:notes>
+</file>
+
+<file path=ppt/notesSlides/notesSlide17.xml><?xml version="1.0" encoding="utf-8"?>
+<p:notes xmlns:a="http://schemas.openxmlformats.org/drawingml/2006/main" xmlns:r="http://schemas.openxmlformats.org/officeDocument/2006/relationships" xmlns:p="http://schemas.openxmlformats.org/presentationml/2006/main">
+  <p:cSld>
+    <p:spTree>
+      <p:nvGrpSpPr>
+        <p:cNvPr id="1" name=""/>
+        <p:cNvGrpSpPr/>
+        <p:nvPr/>
+      </p:nvGrpSpPr>
+      <p:grpSpPr>
+        <a:xfrm>
+          <a:off x="0" y="0"/>
+          <a:ext cx="0" cy="0"/>
+          <a:chOff x="0" y="0"/>
+          <a:chExt cx="0" cy="0"/>
+        </a:xfrm>
+      </p:grpSpPr>
+      <p:sp>
+        <p:nvSpPr>
+          <p:cNvPr id="2" name="Slide Image Placeholder 1"/>
+          <p:cNvSpPr>
+            <a:spLocks noGrp="1" noRot="1" noChangeAspect="1"/>
+          </p:cNvSpPr>
+          <p:nvPr>
+            <p:ph type="sldImg"/>
+          </p:nvPr>
+        </p:nvSpPr>
+        <p:spPr/>
+      </p:sp>
+      <p:sp>
+        <p:nvSpPr>
+          <p:cNvPr id="3" name="Notes Placeholder 2"/>
+          <p:cNvSpPr>
+            <a:spLocks noGrp="1"/>
+          </p:cNvSpPr>
+          <p:nvPr>
+            <p:ph type="body" idx="1"/>
+          </p:nvPr>
+        </p:nvSpPr>
+        <p:spPr/>
+        <p:txBody>
+          <a:bodyPr/>
+          <a:lstStyle/>
+          <a:p>
+            <a:r>
+              <a:rPr lang="en-US" dirty="0"/>
+              <a:t/>
+            </a:r>
+            <a:endParaRPr lang="en-US" dirty="0"/>
+          </a:p>
+        </p:txBody>
+      </p:sp>
+      <p:sp>
+        <p:nvSpPr>
+          <p:cNvPr id="4" name="Slide Number Placeholder 3"/>
+          <p:cNvSpPr>
+            <a:spLocks noGrp="1"/>
+          </p:cNvSpPr>
+          <p:nvPr>
+            <p:ph type="sldNum" sz="quarter" idx="10"/>
+          </p:nvPr>
+        </p:nvSpPr>
+        <p:spPr/>
+        <p:txBody>
+          <a:bodyPr/>
+          <a:lstStyle/>
+          <a:p>
+            <a:fld id="{F7021451-1387-4CA6-816F-3879F97B5CBC}" type="slidenum">
+              <a:rPr lang="en-US"/>
+              <a:t>17</a:t>
             </a:fld>
             <a:endParaRPr lang="en-US"/>
           </a:p>
@@ -2436,7 +2614,7 @@
                 <a:ea typeface="Consolas" pitchFamily="34" charset="-122"/>
                 <a:cs typeface="Consolas" pitchFamily="34" charset="-120"/>
               </a:rPr>
-              <a:t>01 / 15</a:t>
+              <a:t>01 / 17</a:t>
             </a:r>
             <a:endParaRPr lang="en-US" sz="1100" dirty="0"/>
           </a:p>
@@ -3232,7 +3410,7 @@
                 <a:ea typeface="Consolas" pitchFamily="34" charset="-122"/>
                 <a:cs typeface="Consolas" pitchFamily="34" charset="-120"/>
               </a:rPr>
-              <a:t>10 / 15</a:t>
+              <a:t>10 / 17</a:t>
             </a:r>
             <a:endParaRPr lang="en-US" sz="1100" dirty="0"/>
           </a:p>
@@ -4121,7 +4299,7 @@
                 <a:ea typeface="Consolas" pitchFamily="34" charset="-122"/>
                 <a:cs typeface="Consolas" pitchFamily="34" charset="-120"/>
               </a:rPr>
-              <a:t>11 / 15</a:t>
+              <a:t>11 / 17</a:t>
             </a:r>
             <a:endParaRPr lang="en-US" sz="1100" dirty="0"/>
           </a:p>
@@ -4167,7 +4345,7 @@
         </p:nvSpPr>
         <p:spPr>
           <a:xfrm>
-            <a:off x="640080" y="457200"/>
+            <a:off x="640080" y="502920"/>
             <a:ext cx="8229600" cy="274320"/>
           </a:xfrm>
           <a:prstGeom prst="rect">
@@ -4192,7 +4370,7 @@
                 <a:ea typeface="Consolas" pitchFamily="34" charset="-122"/>
                 <a:cs typeface="Consolas" pitchFamily="34" charset="-120"/>
               </a:rPr>
-              <a:t>WHY IT SCALES</a:t>
+              <a:t>STUDENT PRIVACY, BUILT IN</a:t>
             </a:r>
             <a:endParaRPr lang="en-US" sz="1200" dirty="0"/>
           </a:p>
@@ -4206,24 +4384,24 @@
         </p:nvSpPr>
         <p:spPr>
           <a:xfrm>
-            <a:off x="603504" y="777240"/>
-            <a:ext cx="10972800" cy="640080"/>
-          </a:xfrm>
-          <a:prstGeom prst="rect">
-            <a:avLst/>
-          </a:prstGeom>
-          <a:noFill/>
-          <a:ln/>
-        </p:spPr>
-        <p:txBody>
-          <a:bodyPr wrap="square" lIns="0" tIns="0" rIns="0" bIns="0" rtlCol="0" anchor="ctr"/>
-          <a:lstStyle/>
-          <a:p>
-            <a:pPr indent="0" marL="0">
-              <a:buNone/>
-            </a:pPr>
-            <a:r>
-              <a:rPr lang="en-US" sz="2800" b="1" dirty="0">
+            <a:off x="603504" y="822960"/>
+            <a:ext cx="11338560" cy="731520"/>
+          </a:xfrm>
+          <a:prstGeom prst="rect">
+            <a:avLst/>
+          </a:prstGeom>
+          <a:noFill/>
+          <a:ln/>
+        </p:spPr>
+        <p:txBody>
+          <a:bodyPr wrap="square" lIns="0" tIns="0" rIns="0" bIns="0" rtlCol="0" anchor="ctr"/>
+          <a:lstStyle/>
+          <a:p>
+            <a:pPr indent="0" marL="0">
+              <a:buNone/>
+            </a:pPr>
+            <a:r>
+              <a:rPr lang="en-US" sz="2600" b="1" dirty="0">
                 <a:solidFill>
                   <a:srgbClr val="FFFFFF"/>
                 </a:solidFill>
@@ -4231,9 +4409,9 @@
                 <a:ea typeface="Bookman Old Style" pitchFamily="34" charset="-122"/>
                 <a:cs typeface="Bookman Old Style" pitchFamily="34" charset="-120"/>
               </a:rPr>
-              <a:t>Built like software, not a slide folder</a:t>
-            </a:r>
-            <a:endParaRPr lang="en-US" sz="2800" dirty="0"/>
+              <a:t>The AI students use is FERPA-safe — and already district-approved</a:t>
+            </a:r>
+            <a:endParaRPr lang="en-US" sz="2600" dirty="0"/>
           </a:p>
         </p:txBody>
       </p:sp>
@@ -4245,209 +4423,203 @@
         </p:nvSpPr>
         <p:spPr>
           <a:xfrm>
-            <a:off x="594360" y="1554480"/>
-            <a:ext cx="5623560" cy="3805047"/>
+            <a:off x="640080" y="1920240"/>
+            <a:ext cx="5394960" cy="3108960"/>
           </a:xfrm>
           <a:prstGeom prst="roundRect">
             <a:avLst>
-              <a:gd name="adj" fmla="val 1442"/>
+              <a:gd name="adj" fmla="val 3529"/>
             </a:avLst>
           </a:prstGeom>
           <a:solidFill>
-            <a:srgbClr val="0E0F10"/>
+            <a:srgbClr val="24272A"/>
           </a:solidFill>
-          <a:ln w="9525">
+          <a:ln w="12700">
             <a:solidFill>
-              <a:srgbClr val="3A3F45"/>
+              <a:srgbClr val="2E3236"/>
             </a:solidFill>
             <a:prstDash val="solid"/>
           </a:ln>
-          <a:effectLst>
-            <a:outerShdw sx="100000" sy="100000" kx="0" ky="0" algn="bl" rotWithShape="0" blurRad="152400" dist="76200" dir="5400000">
-              <a:srgbClr val="000000">
-                <a:alpha val="45000"/>
-              </a:srgbClr>
-            </a:outerShdw>
-          </a:effectLst>
-        </p:spPr>
-      </p:sp>
-      <p:sp>
-        <p:nvSpPr>
-          <p:cNvPr id="5" name="Shape 3"/>
-          <p:cNvSpPr/>
-          <p:nvPr/>
-        </p:nvSpPr>
-        <p:spPr>
-          <a:xfrm>
-            <a:off x="640080" y="1600200"/>
-            <a:ext cx="5532120" cy="256032"/>
-          </a:xfrm>
-          <a:prstGeom prst="rect">
-            <a:avLst/>
-          </a:prstGeom>
-          <a:solidFill>
-            <a:srgbClr val="191C1F"/>
-          </a:solidFill>
-          <a:ln/>
-        </p:spPr>
-      </p:sp>
-      <p:sp>
-        <p:nvSpPr>
-          <p:cNvPr id="6" name="Shape 4"/>
-          <p:cNvSpPr/>
-          <p:nvPr/>
-        </p:nvSpPr>
-        <p:spPr>
-          <a:xfrm>
-            <a:off x="768096" y="1687068"/>
-            <a:ext cx="82296" cy="82296"/>
-          </a:xfrm>
-          <a:prstGeom prst="ellipse">
-            <a:avLst/>
-          </a:prstGeom>
-          <a:solidFill>
-            <a:srgbClr val="C9564E"/>
-          </a:solidFill>
-          <a:ln/>
-        </p:spPr>
-      </p:sp>
-      <p:sp>
-        <p:nvSpPr>
-          <p:cNvPr id="7" name="Shape 5"/>
-          <p:cNvSpPr/>
-          <p:nvPr/>
-        </p:nvSpPr>
-        <p:spPr>
-          <a:xfrm>
-            <a:off x="896112" y="1687068"/>
-            <a:ext cx="82296" cy="82296"/>
-          </a:xfrm>
-          <a:prstGeom prst="ellipse">
-            <a:avLst/>
-          </a:prstGeom>
-          <a:solidFill>
-            <a:srgbClr val="D8A441"/>
-          </a:solidFill>
-          <a:ln/>
-        </p:spPr>
-      </p:sp>
-      <p:sp>
-        <p:nvSpPr>
-          <p:cNvPr id="8" name="Shape 6"/>
-          <p:cNvSpPr/>
-          <p:nvPr/>
-        </p:nvSpPr>
-        <p:spPr>
-          <a:xfrm>
-            <a:off x="1024128" y="1687068"/>
-            <a:ext cx="82296" cy="82296"/>
-          </a:xfrm>
-          <a:prstGeom prst="ellipse">
-            <a:avLst/>
-          </a:prstGeom>
-          <a:solidFill>
-            <a:srgbClr val="5AA668"/>
-          </a:solidFill>
-          <a:ln/>
-        </p:spPr>
-      </p:sp>
-      <p:sp>
-        <p:nvSpPr>
-          <p:cNvPr id="9" name="Text 7"/>
-          <p:cNvSpPr/>
-          <p:nvPr/>
-        </p:nvSpPr>
-        <p:spPr>
-          <a:xfrm>
-            <a:off x="1207008" y="1600200"/>
-            <a:ext cx="4892040" cy="256032"/>
-          </a:xfrm>
-          <a:prstGeom prst="rect">
-            <a:avLst/>
-          </a:prstGeom>
-          <a:noFill/>
-          <a:ln/>
-        </p:spPr>
-        <p:txBody>
-          <a:bodyPr wrap="square" lIns="0" tIns="0" rIns="0" bIns="0" rtlCol="0" anchor="ctr"/>
-          <a:lstStyle/>
-          <a:p>
-            <a:pPr algn="l" indent="0" marL="0">
-              <a:buNone/>
-            </a:pPr>
-            <a:r>
-              <a:rPr lang="en-US" sz="850" dirty="0">
-                <a:solidFill>
-                  <a:srgbClr val="8B9199"/>
+        </p:spPr>
+      </p:sp>
+      <p:sp>
+        <p:nvSpPr>
+          <p:cNvPr id="5" name="Text 3"/>
+          <p:cNvSpPr/>
+          <p:nvPr/>
+        </p:nvSpPr>
+        <p:spPr>
+          <a:xfrm>
+            <a:off x="960120" y="2212848"/>
+            <a:ext cx="4754880" cy="274320"/>
+          </a:xfrm>
+          <a:prstGeom prst="rect">
+            <a:avLst/>
+          </a:prstGeom>
+          <a:noFill/>
+          <a:ln/>
+        </p:spPr>
+        <p:txBody>
+          <a:bodyPr wrap="square" lIns="0" tIns="0" rIns="0" bIns="0" rtlCol="0" anchor="ctr"/>
+          <a:lstStyle/>
+          <a:p>
+            <a:pPr indent="0" marL="0">
+              <a:buNone/>
+            </a:pPr>
+            <a:r>
+              <a:rPr lang="en-US" sz="1050" b="1" spc="100" kern="0" dirty="0">
+                <a:solidFill>
+                  <a:srgbClr val="C9A24B"/>
                 </a:solidFill>
                 <a:latin typeface="Consolas" pitchFamily="34" charset="0"/>
                 <a:ea typeface="Consolas" pitchFamily="34" charset="-122"/>
                 <a:cs typeface="Consolas" pitchFamily="34" charset="-120"/>
               </a:rPr>
-              <a:t>behistorical · repository command center</a:t>
-            </a:r>
-            <a:endParaRPr lang="en-US" sz="850" dirty="0"/>
-          </a:p>
-        </p:txBody>
-      </p:sp>
-      <p:pic>
-        <p:nvPicPr>
-          <p:cNvPr id="10" name="Image 0" descr="preencoded.png">    </p:cNvPr>
-          <p:cNvPicPr>
-            <a:picLocks noChangeAspect="1"/>
-          </p:cNvPicPr>
-          <p:nvPr/>
-        </p:nvPicPr>
-        <p:blipFill>
-          <a:blip r:embed="rId1"/>
-          <a:stretch>
-            <a:fillRect/>
-          </a:stretch>
-        </p:blipFill>
-        <p:spPr>
-          <a:xfrm>
-            <a:off x="640080" y="1856232"/>
-            <a:ext cx="5532120" cy="3457575"/>
-          </a:xfrm>
-          <a:prstGeom prst="rect">
-            <a:avLst/>
-          </a:prstGeom>
-        </p:spPr>
-      </p:pic>
-      <p:sp>
-        <p:nvSpPr>
-          <p:cNvPr id="11" name="Text 8"/>
-          <p:cNvSpPr/>
-          <p:nvPr/>
-        </p:nvSpPr>
-        <p:spPr>
-          <a:xfrm>
-            <a:off x="640080" y="5423535"/>
-            <a:ext cx="5577840" cy="274320"/>
-          </a:xfrm>
-          <a:prstGeom prst="rect">
-            <a:avLst/>
-          </a:prstGeom>
-          <a:noFill/>
-          <a:ln/>
-        </p:spPr>
-        <p:txBody>
-          <a:bodyPr wrap="square" lIns="0" tIns="0" rIns="0" bIns="0" rtlCol="0" anchor="ctr"/>
-          <a:lstStyle/>
-          <a:p>
-            <a:pPr indent="0" marL="0">
-              <a:buNone/>
-            </a:pPr>
-            <a:r>
-              <a:rPr lang="en-US" sz="950" dirty="0">
-                <a:solidFill>
-                  <a:srgbClr val="9AA0A6"/>
+              <a:t>STUDENT-FACING · DISTRICT-APPROVED</a:t>
+            </a:r>
+            <a:endParaRPr lang="en-US" sz="1050" dirty="0"/>
+          </a:p>
+        </p:txBody>
+      </p:sp>
+      <p:sp>
+        <p:nvSpPr>
+          <p:cNvPr id="6" name="Text 4"/>
+          <p:cNvSpPr/>
+          <p:nvPr/>
+        </p:nvSpPr>
+        <p:spPr>
+          <a:xfrm>
+            <a:off x="960120" y="2523744"/>
+            <a:ext cx="4754880" cy="457200"/>
+          </a:xfrm>
+          <a:prstGeom prst="rect">
+            <a:avLst/>
+          </a:prstGeom>
+          <a:noFill/>
+          <a:ln/>
+        </p:spPr>
+        <p:txBody>
+          <a:bodyPr wrap="square" lIns="0" tIns="0" rIns="0" bIns="0" rtlCol="0" anchor="ctr"/>
+          <a:lstStyle/>
+          <a:p>
+            <a:pPr indent="0" marL="0">
+              <a:buNone/>
+            </a:pPr>
+            <a:r>
+              <a:rPr lang="en-US" sz="2200" b="1" dirty="0">
+                <a:solidFill>
+                  <a:srgbClr val="FFFFFF"/>
+                </a:solidFill>
+                <a:latin typeface="Bookman Old Style" pitchFamily="34" charset="0"/>
+                <a:ea typeface="Bookman Old Style" pitchFamily="34" charset="-122"/>
+                <a:cs typeface="Bookman Old Style" pitchFamily="34" charset="-120"/>
+              </a:rPr>
+              <a:t>MagicSchool AI</a:t>
+            </a:r>
+            <a:endParaRPr lang="en-US" sz="2200" dirty="0"/>
+          </a:p>
+        </p:txBody>
+      </p:sp>
+      <p:sp>
+        <p:nvSpPr>
+          <p:cNvPr id="7" name="Text 5"/>
+          <p:cNvSpPr/>
+          <p:nvPr/>
+        </p:nvSpPr>
+        <p:spPr>
+          <a:xfrm>
+            <a:off x="960120" y="3108960"/>
+            <a:ext cx="4754880" cy="1097280"/>
+          </a:xfrm>
+          <a:prstGeom prst="rect">
+            <a:avLst/>
+          </a:prstGeom>
+          <a:noFill/>
+          <a:ln/>
+        </p:spPr>
+        <p:txBody>
+          <a:bodyPr wrap="square" lIns="0" tIns="0" rIns="0" bIns="0" rtlCol="0" anchor="t"/>
+          <a:lstStyle/>
+          <a:p>
+            <a:pPr indent="0" marL="0">
+              <a:buNone/>
+            </a:pPr>
+            <a:r>
+              <a:rPr lang="en-US" sz="1400" dirty="0">
+                <a:solidFill>
+                  <a:srgbClr val="E9E2D2"/>
+                </a:solidFill>
+                <a:latin typeface="Calibri" pitchFamily="34" charset="0"/>
+                <a:ea typeface="Calibri" pitchFamily="34" charset="-122"/>
+                <a:cs typeface="Calibri" pitchFamily="34" charset="-120"/>
+              </a:rPr>
+              <a:t>Student coaching runs inside MagicSchool — adopted by our district as a FERPA-safe AI tool. Not a personal chatbot, not a consumer account.</a:t>
+            </a:r>
+            <a:endParaRPr lang="en-US" sz="1400" dirty="0"/>
+          </a:p>
+        </p:txBody>
+      </p:sp>
+      <p:sp>
+        <p:nvSpPr>
+          <p:cNvPr id="8" name="Shape 6"/>
+          <p:cNvSpPr/>
+          <p:nvPr/>
+        </p:nvSpPr>
+        <p:spPr>
+          <a:xfrm>
+            <a:off x="960120" y="4370832"/>
+            <a:ext cx="2357323" cy="329184"/>
+          </a:xfrm>
+          <a:prstGeom prst="roundRect">
+            <a:avLst>
+              <a:gd name="adj" fmla="val 50000"/>
+            </a:avLst>
+          </a:prstGeom>
+          <a:solidFill>
+            <a:srgbClr val="21301F"/>
+          </a:solidFill>
+          <a:ln w="12700">
+            <a:solidFill>
+              <a:srgbClr val="5AA668"/>
+            </a:solidFill>
+            <a:prstDash val="solid"/>
+          </a:ln>
+        </p:spPr>
+      </p:sp>
+      <p:sp>
+        <p:nvSpPr>
+          <p:cNvPr id="9" name="Text 7"/>
+          <p:cNvSpPr/>
+          <p:nvPr/>
+        </p:nvSpPr>
+        <p:spPr>
+          <a:xfrm>
+            <a:off x="960120" y="4370832"/>
+            <a:ext cx="2357323" cy="329184"/>
+          </a:xfrm>
+          <a:prstGeom prst="rect">
+            <a:avLst/>
+          </a:prstGeom>
+          <a:noFill/>
+          <a:ln/>
+        </p:spPr>
+        <p:txBody>
+          <a:bodyPr wrap="square" lIns="0" tIns="0" rIns="0" bIns="0" rtlCol="0" anchor="ctr"/>
+          <a:lstStyle/>
+          <a:p>
+            <a:pPr algn="ctr" indent="0" marL="0">
+              <a:buNone/>
+            </a:pPr>
+            <a:r>
+              <a:rPr lang="en-US" sz="950" b="1" dirty="0">
+                <a:solidFill>
+                  <a:srgbClr val="7CC98A"/>
                 </a:solidFill>
                 <a:latin typeface="Consolas" pitchFamily="34" charset="0"/>
                 <a:ea typeface="Consolas" pitchFamily="34" charset="-122"/>
                 <a:cs typeface="Consolas" pitchFamily="34" charset="-120"/>
               </a:rPr>
-              <a:t>The Command Center — audited against what's actually on disk</a:t>
+              <a:t>✓ District-vetted · FERPA-safe</a:t>
             </a:r>
             <a:endParaRPr lang="en-US" sz="950" dirty="0"/>
           </a:p>
@@ -4455,53 +4627,119 @@
       </p:sp>
       <p:sp>
         <p:nvSpPr>
-          <p:cNvPr id="12" name="Text 9"/>
-          <p:cNvSpPr/>
-          <p:nvPr/>
-        </p:nvSpPr>
-        <p:spPr>
-          <a:xfrm>
-            <a:off x="6492240" y="1691640"/>
-            <a:ext cx="5029200" cy="310896"/>
-          </a:xfrm>
-          <a:prstGeom prst="rect">
-            <a:avLst/>
-          </a:prstGeom>
-          <a:noFill/>
-          <a:ln/>
-        </p:spPr>
-        <p:txBody>
-          <a:bodyPr wrap="square" lIns="0" tIns="0" rIns="0" bIns="0" rtlCol="0" anchor="ctr"/>
-          <a:lstStyle/>
-          <a:p>
-            <a:pPr indent="0" marL="0">
-              <a:buNone/>
-            </a:pPr>
-            <a:r>
-              <a:rPr lang="en-US" sz="1700" b="1" dirty="0">
-                <a:solidFill>
-                  <a:srgbClr val="E4C878"/>
+          <p:cNvPr id="10" name="Shape 8"/>
+          <p:cNvSpPr/>
+          <p:nvPr/>
+        </p:nvSpPr>
+        <p:spPr>
+          <a:xfrm>
+            <a:off x="6309360" y="1920240"/>
+            <a:ext cx="5394960" cy="3108960"/>
+          </a:xfrm>
+          <a:prstGeom prst="roundRect">
+            <a:avLst>
+              <a:gd name="adj" fmla="val 3529"/>
+            </a:avLst>
+          </a:prstGeom>
+          <a:solidFill>
+            <a:srgbClr val="24272A"/>
+          </a:solidFill>
+          <a:ln w="12700">
+            <a:solidFill>
+              <a:srgbClr val="2E3236"/>
+            </a:solidFill>
+            <a:prstDash val="solid"/>
+          </a:ln>
+        </p:spPr>
+      </p:sp>
+      <p:sp>
+        <p:nvSpPr>
+          <p:cNvPr id="11" name="Text 9"/>
+          <p:cNvSpPr/>
+          <p:nvPr/>
+        </p:nvSpPr>
+        <p:spPr>
+          <a:xfrm>
+            <a:off x="6629400" y="2212848"/>
+            <a:ext cx="4754880" cy="274320"/>
+          </a:xfrm>
+          <a:prstGeom prst="rect">
+            <a:avLst/>
+          </a:prstGeom>
+          <a:noFill/>
+          <a:ln/>
+        </p:spPr>
+        <p:txBody>
+          <a:bodyPr wrap="square" lIns="0" tIns="0" rIns="0" bIns="0" rtlCol="0" anchor="ctr"/>
+          <a:lstStyle/>
+          <a:p>
+            <a:pPr indent="0" marL="0">
+              <a:buNone/>
+            </a:pPr>
+            <a:r>
+              <a:rPr lang="en-US" sz="1050" b="1" spc="100" kern="0" dirty="0">
+                <a:solidFill>
+                  <a:srgbClr val="C9A24B"/>
+                </a:solidFill>
+                <a:latin typeface="Consolas" pitchFamily="34" charset="0"/>
+                <a:ea typeface="Consolas" pitchFamily="34" charset="-122"/>
+                <a:cs typeface="Consolas" pitchFamily="34" charset="-120"/>
+              </a:rPr>
+              <a:t>TEACHER-FACING · FERPA-ALIGNED</a:t>
+            </a:r>
+            <a:endParaRPr lang="en-US" sz="1050" dirty="0"/>
+          </a:p>
+        </p:txBody>
+      </p:sp>
+      <p:sp>
+        <p:nvSpPr>
+          <p:cNvPr id="12" name="Text 10"/>
+          <p:cNvSpPr/>
+          <p:nvPr/>
+        </p:nvSpPr>
+        <p:spPr>
+          <a:xfrm>
+            <a:off x="6629400" y="2523744"/>
+            <a:ext cx="4754880" cy="457200"/>
+          </a:xfrm>
+          <a:prstGeom prst="rect">
+            <a:avLst/>
+          </a:prstGeom>
+          <a:noFill/>
+          <a:ln/>
+        </p:spPr>
+        <p:txBody>
+          <a:bodyPr wrap="square" lIns="0" tIns="0" rIns="0" bIns="0" rtlCol="0" anchor="ctr"/>
+          <a:lstStyle/>
+          <a:p>
+            <a:pPr indent="0" marL="0">
+              <a:buNone/>
+            </a:pPr>
+            <a:r>
+              <a:rPr lang="en-US" sz="2200" b="1" dirty="0">
+                <a:solidFill>
+                  <a:srgbClr val="FFFFFF"/>
                 </a:solidFill>
                 <a:latin typeface="Bookman Old Style" pitchFamily="34" charset="0"/>
                 <a:ea typeface="Bookman Old Style" pitchFamily="34" charset="-122"/>
                 <a:cs typeface="Bookman Old Style" pitchFamily="34" charset="-120"/>
               </a:rPr>
-              <a:t>Automated validation</a:t>
-            </a:r>
-            <a:endParaRPr lang="en-US" sz="1700" dirty="0"/>
-          </a:p>
-        </p:txBody>
-      </p:sp>
-      <p:sp>
-        <p:nvSpPr>
-          <p:cNvPr id="13" name="Text 10"/>
-          <p:cNvSpPr/>
-          <p:nvPr/>
-        </p:nvSpPr>
-        <p:spPr>
-          <a:xfrm>
-            <a:off x="6492240" y="2002536"/>
-            <a:ext cx="5029200" cy="685800"/>
+              <a:t>Claude for Teachers</a:t>
+            </a:r>
+            <a:endParaRPr lang="en-US" sz="2200" dirty="0"/>
+          </a:p>
+        </p:txBody>
+      </p:sp>
+      <p:sp>
+        <p:nvSpPr>
+          <p:cNvPr id="13" name="Text 11"/>
+          <p:cNvSpPr/>
+          <p:nvPr/>
+        </p:nvSpPr>
+        <p:spPr>
+          <a:xfrm>
+            <a:off x="6629400" y="3108960"/>
+            <a:ext cx="4754880" cy="1097280"/>
           </a:xfrm>
           <a:prstGeom prst="rect">
             <a:avLst/>
@@ -4517,54 +4755,120 @@
               <a:buNone/>
             </a:pPr>
             <a:r>
-              <a:rPr lang="en-US" sz="1300" dirty="0">
-                <a:solidFill>
-                  <a:srgbClr val="F4EEE2"/>
+              <a:rPr lang="en-US" sz="1400" dirty="0">
+                <a:solidFill>
+                  <a:srgbClr val="E9E2D2"/>
                 </a:solidFill>
                 <a:latin typeface="Calibri" pitchFamily="34" charset="0"/>
                 <a:ea typeface="Calibri" pitchFamily="34" charset="-122"/>
                 <a:cs typeface="Calibri" pitchFamily="34" charset="-120"/>
               </a:rPr>
-              <a:t>A 547-file audit runs on every change — module order, form wiring, and simulation quality gates. Zero-error deploys.</a:t>
-            </a:r>
-            <a:endParaRPr lang="en-US" sz="1300" dirty="0"/>
-          </a:p>
-        </p:txBody>
-      </p:sp>
-      <p:sp>
-        <p:nvSpPr>
-          <p:cNvPr id="14" name="Text 11"/>
-          <p:cNvSpPr/>
-          <p:nvPr/>
-        </p:nvSpPr>
-        <p:spPr>
-          <a:xfrm>
-            <a:off x="6492240" y="2788920"/>
-            <a:ext cx="5029200" cy="310896"/>
-          </a:xfrm>
-          <a:prstGeom prst="rect">
-            <a:avLst/>
-          </a:prstGeom>
-          <a:noFill/>
-          <a:ln/>
-        </p:spPr>
-        <p:txBody>
-          <a:bodyPr wrap="square" lIns="0" tIns="0" rIns="0" bIns="0" rtlCol="0" anchor="ctr"/>
-          <a:lstStyle/>
-          <a:p>
-            <a:pPr indent="0" marL="0">
-              <a:buNone/>
-            </a:pPr>
-            <a:r>
-              <a:rPr lang="en-US" sz="1700" b="1" dirty="0">
-                <a:solidFill>
-                  <a:srgbClr val="E4C878"/>
+              <a:t>Teacher-side analysis uses Claude, Anthropic's education AI — built to support FERPA compliance, with student inputs not used to train models.</a:t>
+            </a:r>
+            <a:endParaRPr lang="en-US" sz="1400" dirty="0"/>
+          </a:p>
+        </p:txBody>
+      </p:sp>
+      <p:sp>
+        <p:nvSpPr>
+          <p:cNvPr id="14" name="Shape 12"/>
+          <p:cNvSpPr/>
+          <p:nvPr/>
+        </p:nvSpPr>
+        <p:spPr>
+          <a:xfrm>
+            <a:off x="6629400" y="4370832"/>
+            <a:ext cx="3538728" cy="329184"/>
+          </a:xfrm>
+          <a:prstGeom prst="roundRect">
+            <a:avLst>
+              <a:gd name="adj" fmla="val 50000"/>
+            </a:avLst>
+          </a:prstGeom>
+          <a:solidFill>
+            <a:srgbClr val="21301F"/>
+          </a:solidFill>
+          <a:ln w="12700">
+            <a:solidFill>
+              <a:srgbClr val="5AA668"/>
+            </a:solidFill>
+            <a:prstDash val="solid"/>
+          </a:ln>
+        </p:spPr>
+      </p:sp>
+      <p:sp>
+        <p:nvSpPr>
+          <p:cNvPr id="15" name="Text 13"/>
+          <p:cNvSpPr/>
+          <p:nvPr/>
+        </p:nvSpPr>
+        <p:spPr>
+          <a:xfrm>
+            <a:off x="6629400" y="4370832"/>
+            <a:ext cx="3538728" cy="329184"/>
+          </a:xfrm>
+          <a:prstGeom prst="rect">
+            <a:avLst/>
+          </a:prstGeom>
+          <a:noFill/>
+          <a:ln/>
+        </p:spPr>
+        <p:txBody>
+          <a:bodyPr wrap="square" lIns="0" tIns="0" rIns="0" bIns="0" rtlCol="0" anchor="ctr"/>
+          <a:lstStyle/>
+          <a:p>
+            <a:pPr algn="ctr" indent="0" marL="0">
+              <a:buNone/>
+            </a:pPr>
+            <a:r>
+              <a:rPr lang="en-US" sz="950" b="1" dirty="0">
+                <a:solidFill>
+                  <a:srgbClr val="7CC98A"/>
+                </a:solidFill>
+                <a:latin typeface="Consolas" pitchFamily="34" charset="0"/>
+                <a:ea typeface="Consolas" pitchFamily="34" charset="-122"/>
+                <a:cs typeface="Consolas" pitchFamily="34" charset="-120"/>
+              </a:rPr>
+              <a:t>✓ Education-grade · Not trained on student work</a:t>
+            </a:r>
+            <a:endParaRPr lang="en-US" sz="950" dirty="0"/>
+          </a:p>
+        </p:txBody>
+      </p:sp>
+      <p:sp>
+        <p:nvSpPr>
+          <p:cNvPr id="16" name="Text 14"/>
+          <p:cNvSpPr/>
+          <p:nvPr/>
+        </p:nvSpPr>
+        <p:spPr>
+          <a:xfrm>
+            <a:off x="640080" y="5349240"/>
+            <a:ext cx="10972800" cy="457200"/>
+          </a:xfrm>
+          <a:prstGeom prst="rect">
+            <a:avLst/>
+          </a:prstGeom>
+          <a:noFill/>
+          <a:ln/>
+        </p:spPr>
+        <p:txBody>
+          <a:bodyPr wrap="square" lIns="0" tIns="0" rIns="0" bIns="0" rtlCol="0" anchor="ctr"/>
+          <a:lstStyle/>
+          <a:p>
+            <a:pPr indent="0" marL="0">
+              <a:buNone/>
+            </a:pPr>
+            <a:r>
+              <a:rPr lang="en-US" sz="1700" b="1" i="1" dirty="0">
+                <a:solidFill>
+                  <a:srgbClr val="C9A24B"/>
                 </a:solidFill>
                 <a:latin typeface="Bookman Old Style" pitchFamily="34" charset="0"/>
                 <a:ea typeface="Bookman Old Style" pitchFamily="34" charset="-122"/>
                 <a:cs typeface="Bookman Old Style" pitchFamily="34" charset="-120"/>
               </a:rPr>
-              <a:t>Deterministic builders</a:t>
+              <a:t>Coaches, never completes — and never trains on a student's thinking.</a:t>
             </a:r>
             <a:endParaRPr lang="en-US" sz="1700" dirty="0"/>
           </a:p>
@@ -4572,207 +4876,51 @@
       </p:sp>
       <p:sp>
         <p:nvSpPr>
-          <p:cNvPr id="15" name="Text 12"/>
-          <p:cNvSpPr/>
-          <p:nvPr/>
-        </p:nvSpPr>
-        <p:spPr>
-          <a:xfrm>
-            <a:off x="6492240" y="3099816"/>
-            <a:ext cx="5029200" cy="685800"/>
-          </a:xfrm>
-          <a:prstGeom prst="rect">
-            <a:avLst/>
-          </a:prstGeom>
-          <a:noFill/>
-          <a:ln/>
-        </p:spPr>
-        <p:txBody>
-          <a:bodyPr wrap="square" lIns="0" tIns="0" rIns="0" bIns="0" rtlCol="0" anchor="t"/>
-          <a:lstStyle/>
-          <a:p>
-            <a:pPr indent="0" marL="0">
-              <a:buNone/>
-            </a:pPr>
-            <a:r>
-              <a:rPr lang="en-US" sz="1300" dirty="0">
-                <a:solidFill>
-                  <a:srgbClr val="F4EEE2"/>
+          <p:cNvPr id="17" name="Text 15"/>
+          <p:cNvSpPr/>
+          <p:nvPr/>
+        </p:nvSpPr>
+        <p:spPr>
+          <a:xfrm>
+            <a:off x="502920" y="6400800"/>
+            <a:ext cx="7315200" cy="274320"/>
+          </a:xfrm>
+          <a:prstGeom prst="rect">
+            <a:avLst/>
+          </a:prstGeom>
+          <a:noFill/>
+          <a:ln/>
+        </p:spPr>
+        <p:txBody>
+          <a:bodyPr wrap="square" lIns="0" tIns="0" rIns="0" bIns="0" rtlCol="0" anchor="ctr"/>
+          <a:lstStyle/>
+          <a:p>
+            <a:pPr algn="l" indent="0" marL="0">
+              <a:buNone/>
+            </a:pPr>
+            <a:r>
+              <a:rPr lang="en-US" sz="1000" b="1" dirty="0">
+                <a:solidFill>
+                  <a:srgbClr val="C9A24B"/>
                 </a:solidFill>
                 <a:latin typeface="Calibri" pitchFamily="34" charset="0"/>
                 <a:ea typeface="Calibri" pitchFamily="34" charset="-122"/>
                 <a:cs typeface="Calibri" pitchFamily="34" charset="-120"/>
               </a:rPr>
-              <a:t>Whole units are generated from data by scripts — so a fix rolls out everywhere, consistently, at once.</a:t>
-            </a:r>
-            <a:endParaRPr lang="en-US" sz="1300" dirty="0"/>
-          </a:p>
-        </p:txBody>
-      </p:sp>
-      <p:sp>
-        <p:nvSpPr>
-          <p:cNvPr id="16" name="Text 13"/>
-          <p:cNvSpPr/>
-          <p:nvPr/>
-        </p:nvSpPr>
-        <p:spPr>
-          <a:xfrm>
-            <a:off x="6492240" y="3886200"/>
-            <a:ext cx="5029200" cy="310896"/>
-          </a:xfrm>
-          <a:prstGeom prst="rect">
-            <a:avLst/>
-          </a:prstGeom>
-          <a:noFill/>
-          <a:ln/>
-        </p:spPr>
-        <p:txBody>
-          <a:bodyPr wrap="square" lIns="0" tIns="0" rIns="0" bIns="0" rtlCol="0" anchor="ctr"/>
-          <a:lstStyle/>
-          <a:p>
-            <a:pPr indent="0" marL="0">
-              <a:buNone/>
-            </a:pPr>
-            <a:r>
-              <a:rPr lang="en-US" sz="1700" b="1" dirty="0">
-                <a:solidFill>
-                  <a:srgbClr val="E4C878"/>
-                </a:solidFill>
-                <a:latin typeface="Bookman Old Style" pitchFamily="34" charset="0"/>
-                <a:ea typeface="Bookman Old Style" pitchFamily="34" charset="-122"/>
-                <a:cs typeface="Bookman Old Style" pitchFamily="34" charset="-120"/>
-              </a:rPr>
-              <a:t>Codified quality gates</a:t>
-            </a:r>
-            <a:endParaRPr lang="en-US" sz="1700" dirty="0"/>
-          </a:p>
-        </p:txBody>
-      </p:sp>
-      <p:sp>
-        <p:nvSpPr>
-          <p:cNvPr id="17" name="Text 14"/>
-          <p:cNvSpPr/>
-          <p:nvPr/>
-        </p:nvSpPr>
-        <p:spPr>
-          <a:xfrm>
-            <a:off x="6492240" y="4197096"/>
-            <a:ext cx="5029200" cy="685800"/>
-          </a:xfrm>
-          <a:prstGeom prst="rect">
-            <a:avLst/>
-          </a:prstGeom>
-          <a:noFill/>
-          <a:ln/>
-        </p:spPr>
-        <p:txBody>
-          <a:bodyPr wrap="square" lIns="0" tIns="0" rIns="0" bIns="0" rtlCol="0" anchor="t"/>
-          <a:lstStyle/>
-          <a:p>
-            <a:pPr indent="0" marL="0">
-              <a:buNone/>
-            </a:pPr>
-            <a:r>
-              <a:rPr lang="en-US" sz="1300" dirty="0">
-                <a:solidFill>
-                  <a:srgbClr val="F4EEE2"/>
+              <a:t>AndersonLogic AI</a:t>
+            </a:r>
+            <a:pPr algn="l" indent="0" marL="0">
+              <a:buNone/>
+            </a:pPr>
+            <a:r>
+              <a:rPr lang="en-US" sz="1000" dirty="0">
+                <a:solidFill>
+                  <a:srgbClr val="9AA0A6"/>
                 </a:solidFill>
                 <a:latin typeface="Calibri" pitchFamily="34" charset="0"/>
                 <a:ea typeface="Calibri" pitchFamily="34" charset="-122"/>
                 <a:cs typeface="Calibri" pitchFamily="34" charset="-120"/>
               </a:rPr>
-              <a:t>Design rules live in blueprints and are enforced by machine before anything ships.</a:t>
-            </a:r>
-            <a:endParaRPr lang="en-US" sz="1300" dirty="0"/>
-          </a:p>
-        </p:txBody>
-      </p:sp>
-      <p:sp>
-        <p:nvSpPr>
-          <p:cNvPr id="18" name="Text 15"/>
-          <p:cNvSpPr/>
-          <p:nvPr/>
-        </p:nvSpPr>
-        <p:spPr>
-          <a:xfrm>
-            <a:off x="6492240" y="5029200"/>
-            <a:ext cx="5029200" cy="548640"/>
-          </a:xfrm>
-          <a:prstGeom prst="rect">
-            <a:avLst/>
-          </a:prstGeom>
-          <a:noFill/>
-          <a:ln/>
-        </p:spPr>
-        <p:txBody>
-          <a:bodyPr wrap="square" lIns="0" tIns="0" rIns="0" bIns="0" rtlCol="0" anchor="ctr"/>
-          <a:lstStyle/>
-          <a:p>
-            <a:pPr indent="0" marL="0">
-              <a:buNone/>
-            </a:pPr>
-            <a:r>
-              <a:rPr lang="en-US" sz="1500" b="1" i="1" dirty="0">
-                <a:solidFill>
-                  <a:srgbClr val="C9A24B"/>
-                </a:solidFill>
-                <a:latin typeface="Bookman Old Style" pitchFamily="34" charset="0"/>
-                <a:ea typeface="Bookman Old Style" pitchFamily="34" charset="-122"/>
-                <a:cs typeface="Bookman Old Style" pitchFamily="34" charset="-120"/>
-              </a:rPr>
-              <a:t>The difference between a teacher's materials and a product a district can adopt.</a:t>
-            </a:r>
-            <a:endParaRPr lang="en-US" sz="1500" dirty="0"/>
-          </a:p>
-        </p:txBody>
-      </p:sp>
-      <p:sp>
-        <p:nvSpPr>
-          <p:cNvPr id="19" name="Text 16"/>
-          <p:cNvSpPr/>
-          <p:nvPr/>
-        </p:nvSpPr>
-        <p:spPr>
-          <a:xfrm>
-            <a:off x="502920" y="6400800"/>
-            <a:ext cx="7315200" cy="274320"/>
-          </a:xfrm>
-          <a:prstGeom prst="rect">
-            <a:avLst/>
-          </a:prstGeom>
-          <a:noFill/>
-          <a:ln/>
-        </p:spPr>
-        <p:txBody>
-          <a:bodyPr wrap="square" lIns="0" tIns="0" rIns="0" bIns="0" rtlCol="0" anchor="ctr"/>
-          <a:lstStyle/>
-          <a:p>
-            <a:pPr algn="l" indent="0" marL="0">
-              <a:buNone/>
-            </a:pPr>
-            <a:r>
-              <a:rPr lang="en-US" sz="1000" b="1" dirty="0">
-                <a:solidFill>
-                  <a:srgbClr val="C9A24B"/>
-                </a:solidFill>
-                <a:latin typeface="Calibri" pitchFamily="34" charset="0"/>
-                <a:ea typeface="Calibri" pitchFamily="34" charset="-122"/>
-                <a:cs typeface="Calibri" pitchFamily="34" charset="-120"/>
-              </a:rPr>
-              <a:t>AndersonLogic AI</a:t>
-            </a:r>
-            <a:pPr algn="l" indent="0" marL="0">
-              <a:buNone/>
-            </a:pPr>
-            <a:r>
-              <a:rPr lang="en-US" sz="1000" dirty="0">
-                <a:solidFill>
-                  <a:srgbClr val="9AA0A6"/>
-                </a:solidFill>
-                <a:latin typeface="Calibri" pitchFamily="34" charset="0"/>
-                <a:ea typeface="Calibri" pitchFamily="34" charset="-122"/>
-                <a:cs typeface="Calibri" pitchFamily="34" charset="-120"/>
-              </a:rPr>
               <a:t>   ·   BeHistorical</a:t>
             </a:r>
             <a:endParaRPr lang="en-US" sz="1000" dirty="0"/>
@@ -4781,7 +4929,7 @@
       </p:sp>
       <p:sp>
         <p:nvSpPr>
-          <p:cNvPr id="20" name="Text 17"/>
+          <p:cNvPr id="18" name="Text 16"/>
           <p:cNvSpPr/>
           <p:nvPr/>
         </p:nvSpPr>
@@ -4812,7 +4960,7 @@
                 <a:ea typeface="Consolas" pitchFamily="34" charset="-122"/>
                 <a:cs typeface="Consolas" pitchFamily="34" charset="-120"/>
               </a:rPr>
-              <a:t>12 / 15</a:t>
+              <a:t>12 / 17</a:t>
             </a:r>
             <a:endParaRPr lang="en-US" sz="1100" dirty="0"/>
           </a:p>
@@ -4829,6 +4977,823 @@
 <file path=ppt/slides/slide13.xml><?xml version="1.0" encoding="utf-8"?>
 <p:sld xmlns:a="http://schemas.openxmlformats.org/drawingml/2006/main" xmlns:r="http://schemas.openxmlformats.org/officeDocument/2006/relationships" xmlns:p="http://schemas.openxmlformats.org/presentationml/2006/main">
   <p:cSld name="Slide 13">
+    <p:bg>
+      <p:bgPr>
+        <a:solidFill>
+          <a:srgbClr val="F4EEE2"/>
+        </a:solidFill>
+      </p:bgPr>
+    </p:bg>
+    <p:spTree>
+      <p:nvGrpSpPr>
+        <p:cNvPr id="1" name=""/>
+        <p:cNvGrpSpPr/>
+        <p:nvPr/>
+      </p:nvGrpSpPr>
+      <p:grpSpPr>
+        <a:xfrm>
+          <a:off x="0" y="0"/>
+          <a:ext cx="0" cy="0"/>
+          <a:chOff x="0" y="0"/>
+          <a:chExt cx="0" cy="0"/>
+        </a:xfrm>
+      </p:grpSpPr>
+      <p:sp>
+        <p:nvSpPr>
+          <p:cNvPr id="2" name="Text 0"/>
+          <p:cNvSpPr/>
+          <p:nvPr/>
+        </p:nvSpPr>
+        <p:spPr>
+          <a:xfrm>
+            <a:off x="640080" y="548640"/>
+            <a:ext cx="8229600" cy="274320"/>
+          </a:xfrm>
+          <a:prstGeom prst="rect">
+            <a:avLst/>
+          </a:prstGeom>
+          <a:noFill/>
+          <a:ln/>
+        </p:spPr>
+        <p:txBody>
+          <a:bodyPr wrap="square" lIns="0" tIns="0" rIns="0" bIns="0" rtlCol="0" anchor="ctr"/>
+          <a:lstStyle/>
+          <a:p>
+            <a:pPr algn="l" indent="0" marL="0">
+              <a:buNone/>
+            </a:pPr>
+            <a:r>
+              <a:rPr lang="en-US" sz="1200" b="1" spc="300" kern="0" dirty="0">
+                <a:solidFill>
+                  <a:srgbClr val="9A7A28"/>
+                </a:solidFill>
+                <a:latin typeface="Consolas" pitchFamily="34" charset="0"/>
+                <a:ea typeface="Consolas" pitchFamily="34" charset="-122"/>
+                <a:cs typeface="Consolas" pitchFamily="34" charset="-120"/>
+              </a:rPr>
+              <a:t>HOW STUDENT DATA IS PROTECTED</a:t>
+            </a:r>
+            <a:endParaRPr lang="en-US" sz="1200" dirty="0"/>
+          </a:p>
+        </p:txBody>
+      </p:sp>
+      <p:sp>
+        <p:nvSpPr>
+          <p:cNvPr id="3" name="Text 1"/>
+          <p:cNvSpPr/>
+          <p:nvPr/>
+        </p:nvSpPr>
+        <p:spPr>
+          <a:xfrm>
+            <a:off x="603504" y="868680"/>
+            <a:ext cx="11338560" cy="731520"/>
+          </a:xfrm>
+          <a:prstGeom prst="rect">
+            <a:avLst/>
+          </a:prstGeom>
+          <a:noFill/>
+          <a:ln/>
+        </p:spPr>
+        <p:txBody>
+          <a:bodyPr wrap="square" lIns="0" tIns="0" rIns="0" bIns="0" rtlCol="0" anchor="ctr"/>
+          <a:lstStyle/>
+          <a:p>
+            <a:pPr indent="0" marL="0">
+              <a:buNone/>
+            </a:pPr>
+            <a:r>
+              <a:rPr lang="en-US" sz="3000" b="1" dirty="0">
+                <a:solidFill>
+                  <a:srgbClr val="2B2723"/>
+                </a:solidFill>
+                <a:latin typeface="Bookman Old Style" pitchFamily="34" charset="0"/>
+                <a:ea typeface="Bookman Old Style" pitchFamily="34" charset="-122"/>
+                <a:cs typeface="Bookman Old Style" pitchFamily="34" charset="-120"/>
+              </a:rPr>
+              <a:t>Student data stays inside district-approved systems</a:t>
+            </a:r>
+            <a:endParaRPr lang="en-US" sz="3000" dirty="0"/>
+          </a:p>
+        </p:txBody>
+      </p:sp>
+      <p:sp>
+        <p:nvSpPr>
+          <p:cNvPr id="4" name="Shape 2"/>
+          <p:cNvSpPr/>
+          <p:nvPr/>
+        </p:nvSpPr>
+        <p:spPr>
+          <a:xfrm>
+            <a:off x="640080" y="2103120"/>
+            <a:ext cx="5349240" cy="1572768"/>
+          </a:xfrm>
+          <a:prstGeom prst="roundRect">
+            <a:avLst>
+              <a:gd name="adj" fmla="val 6395"/>
+            </a:avLst>
+          </a:prstGeom>
+          <a:solidFill>
+            <a:srgbClr val="FCF8F0"/>
+          </a:solidFill>
+          <a:ln w="12700">
+            <a:solidFill>
+              <a:srgbClr val="E4DBC9"/>
+            </a:solidFill>
+            <a:prstDash val="solid"/>
+          </a:ln>
+        </p:spPr>
+      </p:sp>
+      <p:sp>
+        <p:nvSpPr>
+          <p:cNvPr id="5" name="Text 3"/>
+          <p:cNvSpPr/>
+          <p:nvPr/>
+        </p:nvSpPr>
+        <p:spPr>
+          <a:xfrm>
+            <a:off x="914400" y="2304288"/>
+            <a:ext cx="4800600" cy="256032"/>
+          </a:xfrm>
+          <a:prstGeom prst="rect">
+            <a:avLst/>
+          </a:prstGeom>
+          <a:noFill/>
+          <a:ln/>
+        </p:spPr>
+        <p:txBody>
+          <a:bodyPr wrap="square" lIns="0" tIns="0" rIns="0" bIns="0" rtlCol="0" anchor="ctr"/>
+          <a:lstStyle/>
+          <a:p>
+            <a:pPr indent="0" marL="0">
+              <a:buNone/>
+            </a:pPr>
+            <a:r>
+              <a:rPr lang="en-US" sz="1000" b="1" spc="100" kern="0" dirty="0">
+                <a:solidFill>
+                  <a:srgbClr val="9A7A28"/>
+                </a:solidFill>
+                <a:latin typeface="Consolas" pitchFamily="34" charset="0"/>
+                <a:ea typeface="Consolas" pitchFamily="34" charset="-122"/>
+                <a:cs typeface="Consolas" pitchFamily="34" charset="-120"/>
+              </a:rPr>
+              <a:t>WHERE IT RUNS</a:t>
+            </a:r>
+            <a:endParaRPr lang="en-US" sz="1000" dirty="0"/>
+          </a:p>
+        </p:txBody>
+      </p:sp>
+      <p:sp>
+        <p:nvSpPr>
+          <p:cNvPr id="6" name="Text 4"/>
+          <p:cNvSpPr/>
+          <p:nvPr/>
+        </p:nvSpPr>
+        <p:spPr>
+          <a:xfrm>
+            <a:off x="914400" y="2560320"/>
+            <a:ext cx="4800600" cy="365760"/>
+          </a:xfrm>
+          <a:prstGeom prst="rect">
+            <a:avLst/>
+          </a:prstGeom>
+          <a:noFill/>
+          <a:ln/>
+        </p:spPr>
+        <p:txBody>
+          <a:bodyPr wrap="square" lIns="0" tIns="0" rIns="0" bIns="0" rtlCol="0" anchor="ctr"/>
+          <a:lstStyle/>
+          <a:p>
+            <a:pPr indent="0" marL="0">
+              <a:buNone/>
+            </a:pPr>
+            <a:r>
+              <a:rPr lang="en-US" sz="1800" b="1" dirty="0">
+                <a:solidFill>
+                  <a:srgbClr val="2B2723"/>
+                </a:solidFill>
+                <a:latin typeface="Bookman Old Style" pitchFamily="34" charset="0"/>
+                <a:ea typeface="Bookman Old Style" pitchFamily="34" charset="-122"/>
+                <a:cs typeface="Bookman Old Style" pitchFamily="34" charset="-120"/>
+              </a:rPr>
+              <a:t>Tools the district already governs</a:t>
+            </a:r>
+            <a:endParaRPr lang="en-US" sz="1800" dirty="0"/>
+          </a:p>
+        </p:txBody>
+      </p:sp>
+      <p:sp>
+        <p:nvSpPr>
+          <p:cNvPr id="7" name="Text 5"/>
+          <p:cNvSpPr/>
+          <p:nvPr/>
+        </p:nvSpPr>
+        <p:spPr>
+          <a:xfrm>
+            <a:off x="914400" y="2971800"/>
+            <a:ext cx="4800600" cy="603504"/>
+          </a:xfrm>
+          <a:prstGeom prst="rect">
+            <a:avLst/>
+          </a:prstGeom>
+          <a:noFill/>
+          <a:ln/>
+        </p:spPr>
+        <p:txBody>
+          <a:bodyPr wrap="square" lIns="0" tIns="0" rIns="0" bIns="0" rtlCol="0" anchor="t"/>
+          <a:lstStyle/>
+          <a:p>
+            <a:pPr indent="0" marL="0">
+              <a:buNone/>
+            </a:pPr>
+            <a:r>
+              <a:rPr lang="en-US" sz="1250" dirty="0">
+                <a:solidFill>
+                  <a:srgbClr val="6E675C"/>
+                </a:solidFill>
+                <a:latin typeface="Calibri" pitchFamily="34" charset="0"/>
+                <a:ea typeface="Calibri" pitchFamily="34" charset="-122"/>
+                <a:cs typeface="Calibri" pitchFamily="34" charset="-120"/>
+              </a:rPr>
+              <a:t>Students draft in BeHistorical, are coached in district-approved MagicSchool, and submit in Canvas — no new data destinations to vet.</a:t>
+            </a:r>
+            <a:endParaRPr lang="en-US" sz="1250" dirty="0"/>
+          </a:p>
+        </p:txBody>
+      </p:sp>
+      <p:sp>
+        <p:nvSpPr>
+          <p:cNvPr id="8" name="Shape 6"/>
+          <p:cNvSpPr/>
+          <p:nvPr/>
+        </p:nvSpPr>
+        <p:spPr>
+          <a:xfrm>
+            <a:off x="6263640" y="2103120"/>
+            <a:ext cx="5349240" cy="1572768"/>
+          </a:xfrm>
+          <a:prstGeom prst="roundRect">
+            <a:avLst>
+              <a:gd name="adj" fmla="val 6395"/>
+            </a:avLst>
+          </a:prstGeom>
+          <a:solidFill>
+            <a:srgbClr val="FCF8F0"/>
+          </a:solidFill>
+          <a:ln w="12700">
+            <a:solidFill>
+              <a:srgbClr val="E4DBC9"/>
+            </a:solidFill>
+            <a:prstDash val="solid"/>
+          </a:ln>
+        </p:spPr>
+      </p:sp>
+      <p:sp>
+        <p:nvSpPr>
+          <p:cNvPr id="9" name="Text 7"/>
+          <p:cNvSpPr/>
+          <p:nvPr/>
+        </p:nvSpPr>
+        <p:spPr>
+          <a:xfrm>
+            <a:off x="6537960" y="2304288"/>
+            <a:ext cx="4800600" cy="256032"/>
+          </a:xfrm>
+          <a:prstGeom prst="rect">
+            <a:avLst/>
+          </a:prstGeom>
+          <a:noFill/>
+          <a:ln/>
+        </p:spPr>
+        <p:txBody>
+          <a:bodyPr wrap="square" lIns="0" tIns="0" rIns="0" bIns="0" rtlCol="0" anchor="ctr"/>
+          <a:lstStyle/>
+          <a:p>
+            <a:pPr indent="0" marL="0">
+              <a:buNone/>
+            </a:pPr>
+            <a:r>
+              <a:rPr lang="en-US" sz="1000" b="1" spc="100" kern="0" dirty="0">
+                <a:solidFill>
+                  <a:srgbClr val="9A7A28"/>
+                </a:solidFill>
+                <a:latin typeface="Consolas" pitchFamily="34" charset="0"/>
+                <a:ea typeface="Consolas" pitchFamily="34" charset="-122"/>
+                <a:cs typeface="Consolas" pitchFamily="34" charset="-120"/>
+              </a:rPr>
+              <a:t>NO TRAINING</a:t>
+            </a:r>
+            <a:endParaRPr lang="en-US" sz="1000" dirty="0"/>
+          </a:p>
+        </p:txBody>
+      </p:sp>
+      <p:sp>
+        <p:nvSpPr>
+          <p:cNvPr id="10" name="Text 8"/>
+          <p:cNvSpPr/>
+          <p:nvPr/>
+        </p:nvSpPr>
+        <p:spPr>
+          <a:xfrm>
+            <a:off x="6537960" y="2560320"/>
+            <a:ext cx="4800600" cy="365760"/>
+          </a:xfrm>
+          <a:prstGeom prst="rect">
+            <a:avLst/>
+          </a:prstGeom>
+          <a:noFill/>
+          <a:ln/>
+        </p:spPr>
+        <p:txBody>
+          <a:bodyPr wrap="square" lIns="0" tIns="0" rIns="0" bIns="0" rtlCol="0" anchor="ctr"/>
+          <a:lstStyle/>
+          <a:p>
+            <a:pPr indent="0" marL="0">
+              <a:buNone/>
+            </a:pPr>
+            <a:r>
+              <a:rPr lang="en-US" sz="1800" b="1" dirty="0">
+                <a:solidFill>
+                  <a:srgbClr val="2B2723"/>
+                </a:solidFill>
+                <a:latin typeface="Bookman Old Style" pitchFamily="34" charset="0"/>
+                <a:ea typeface="Bookman Old Style" pitchFamily="34" charset="-122"/>
+                <a:cs typeface="Bookman Old Style" pitchFamily="34" charset="-120"/>
+              </a:rPr>
+              <a:t>Never used to train an AI</a:t>
+            </a:r>
+            <a:endParaRPr lang="en-US" sz="1800" dirty="0"/>
+          </a:p>
+        </p:txBody>
+      </p:sp>
+      <p:sp>
+        <p:nvSpPr>
+          <p:cNvPr id="11" name="Text 9"/>
+          <p:cNvSpPr/>
+          <p:nvPr/>
+        </p:nvSpPr>
+        <p:spPr>
+          <a:xfrm>
+            <a:off x="6537960" y="2971800"/>
+            <a:ext cx="4800600" cy="603504"/>
+          </a:xfrm>
+          <a:prstGeom prst="rect">
+            <a:avLst/>
+          </a:prstGeom>
+          <a:noFill/>
+          <a:ln/>
+        </p:spPr>
+        <p:txBody>
+          <a:bodyPr wrap="square" lIns="0" tIns="0" rIns="0" bIns="0" rtlCol="0" anchor="t"/>
+          <a:lstStyle/>
+          <a:p>
+            <a:pPr indent="0" marL="0">
+              <a:buNone/>
+            </a:pPr>
+            <a:r>
+              <a:rPr lang="en-US" sz="1250" dirty="0">
+                <a:solidFill>
+                  <a:srgbClr val="6E675C"/>
+                </a:solidFill>
+                <a:latin typeface="Calibri" pitchFamily="34" charset="0"/>
+                <a:ea typeface="Calibri" pitchFamily="34" charset="-122"/>
+                <a:cs typeface="Calibri" pitchFamily="34" charset="-120"/>
+              </a:rPr>
+              <a:t>Both AI tools are education-grade and vetted; a student's work is never used to train or improve an AI model.</a:t>
+            </a:r>
+            <a:endParaRPr lang="en-US" sz="1250" dirty="0"/>
+          </a:p>
+        </p:txBody>
+      </p:sp>
+      <p:sp>
+        <p:nvSpPr>
+          <p:cNvPr id="12" name="Shape 10"/>
+          <p:cNvSpPr/>
+          <p:nvPr/>
+        </p:nvSpPr>
+        <p:spPr>
+          <a:xfrm>
+            <a:off x="640080" y="3877056"/>
+            <a:ext cx="5349240" cy="1572768"/>
+          </a:xfrm>
+          <a:prstGeom prst="roundRect">
+            <a:avLst>
+              <a:gd name="adj" fmla="val 6395"/>
+            </a:avLst>
+          </a:prstGeom>
+          <a:solidFill>
+            <a:srgbClr val="FCF8F0"/>
+          </a:solidFill>
+          <a:ln w="12700">
+            <a:solidFill>
+              <a:srgbClr val="E4DBC9"/>
+            </a:solidFill>
+            <a:prstDash val="solid"/>
+          </a:ln>
+        </p:spPr>
+      </p:sp>
+      <p:sp>
+        <p:nvSpPr>
+          <p:cNvPr id="13" name="Text 11"/>
+          <p:cNvSpPr/>
+          <p:nvPr/>
+        </p:nvSpPr>
+        <p:spPr>
+          <a:xfrm>
+            <a:off x="914400" y="4078224"/>
+            <a:ext cx="4800600" cy="256032"/>
+          </a:xfrm>
+          <a:prstGeom prst="rect">
+            <a:avLst/>
+          </a:prstGeom>
+          <a:noFill/>
+          <a:ln/>
+        </p:spPr>
+        <p:txBody>
+          <a:bodyPr wrap="square" lIns="0" tIns="0" rIns="0" bIns="0" rtlCol="0" anchor="ctr"/>
+          <a:lstStyle/>
+          <a:p>
+            <a:pPr indent="0" marL="0">
+              <a:buNone/>
+            </a:pPr>
+            <a:r>
+              <a:rPr lang="en-US" sz="1000" b="1" spc="100" kern="0" dirty="0">
+                <a:solidFill>
+                  <a:srgbClr val="9A7A28"/>
+                </a:solidFill>
+                <a:latin typeface="Consolas" pitchFamily="34" charset="0"/>
+                <a:ea typeface="Consolas" pitchFamily="34" charset="-122"/>
+                <a:cs typeface="Consolas" pitchFamily="34" charset="-120"/>
+              </a:rPr>
+              <a:t>PATTERNS, NOT EXPOSURE</a:t>
+            </a:r>
+            <a:endParaRPr lang="en-US" sz="1000" dirty="0"/>
+          </a:p>
+        </p:txBody>
+      </p:sp>
+      <p:sp>
+        <p:nvSpPr>
+          <p:cNvPr id="14" name="Text 12"/>
+          <p:cNvSpPr/>
+          <p:nvPr/>
+        </p:nvSpPr>
+        <p:spPr>
+          <a:xfrm>
+            <a:off x="914400" y="4334256"/>
+            <a:ext cx="4800600" cy="365760"/>
+          </a:xfrm>
+          <a:prstGeom prst="rect">
+            <a:avLst/>
+          </a:prstGeom>
+          <a:noFill/>
+          <a:ln/>
+        </p:spPr>
+        <p:txBody>
+          <a:bodyPr wrap="square" lIns="0" tIns="0" rIns="0" bIns="0" rtlCol="0" anchor="ctr"/>
+          <a:lstStyle/>
+          <a:p>
+            <a:pPr indent="0" marL="0">
+              <a:buNone/>
+            </a:pPr>
+            <a:r>
+              <a:rPr lang="en-US" sz="1800" b="1" dirty="0">
+                <a:solidFill>
+                  <a:srgbClr val="2B2723"/>
+                </a:solidFill>
+                <a:latin typeface="Bookman Old Style" pitchFamily="34" charset="0"/>
+                <a:ea typeface="Bookman Old Style" pitchFamily="34" charset="-122"/>
+                <a:cs typeface="Bookman Old Style" pitchFamily="34" charset="-120"/>
+              </a:rPr>
+              <a:t>Aggregate by default</a:t>
+            </a:r>
+            <a:endParaRPr lang="en-US" sz="1800" dirty="0"/>
+          </a:p>
+        </p:txBody>
+      </p:sp>
+      <p:sp>
+        <p:nvSpPr>
+          <p:cNvPr id="15" name="Text 13"/>
+          <p:cNvSpPr/>
+          <p:nvPr/>
+        </p:nvSpPr>
+        <p:spPr>
+          <a:xfrm>
+            <a:off x="914400" y="4745736"/>
+            <a:ext cx="4800600" cy="603504"/>
+          </a:xfrm>
+          <a:prstGeom prst="rect">
+            <a:avLst/>
+          </a:prstGeom>
+          <a:noFill/>
+          <a:ln/>
+        </p:spPr>
+        <p:txBody>
+          <a:bodyPr wrap="square" lIns="0" tIns="0" rIns="0" bIns="0" rtlCol="0" anchor="t"/>
+          <a:lstStyle/>
+          <a:p>
+            <a:pPr indent="0" marL="0">
+              <a:buNone/>
+            </a:pPr>
+            <a:r>
+              <a:rPr lang="en-US" sz="1250" dirty="0">
+                <a:solidFill>
+                  <a:srgbClr val="6E675C"/>
+                </a:solidFill>
+                <a:latin typeface="Calibri" pitchFamily="34" charset="0"/>
+                <a:ea typeface="Calibri" pitchFamily="34" charset="-122"/>
+                <a:cs typeface="Calibri" pitchFamily="34" charset="-120"/>
+              </a:rPr>
+              <a:t>The Teacher Hub summarizes class-level trends; identifiable student data is never published to the public site.</a:t>
+            </a:r>
+            <a:endParaRPr lang="en-US" sz="1250" dirty="0"/>
+          </a:p>
+        </p:txBody>
+      </p:sp>
+      <p:sp>
+        <p:nvSpPr>
+          <p:cNvPr id="16" name="Shape 14"/>
+          <p:cNvSpPr/>
+          <p:nvPr/>
+        </p:nvSpPr>
+        <p:spPr>
+          <a:xfrm>
+            <a:off x="6263640" y="3877056"/>
+            <a:ext cx="5349240" cy="1572768"/>
+          </a:xfrm>
+          <a:prstGeom prst="roundRect">
+            <a:avLst>
+              <a:gd name="adj" fmla="val 6395"/>
+            </a:avLst>
+          </a:prstGeom>
+          <a:solidFill>
+            <a:srgbClr val="FCF8F0"/>
+          </a:solidFill>
+          <a:ln w="12700">
+            <a:solidFill>
+              <a:srgbClr val="E4DBC9"/>
+            </a:solidFill>
+            <a:prstDash val="solid"/>
+          </a:ln>
+        </p:spPr>
+      </p:sp>
+      <p:sp>
+        <p:nvSpPr>
+          <p:cNvPr id="17" name="Text 15"/>
+          <p:cNvSpPr/>
+          <p:nvPr/>
+        </p:nvSpPr>
+        <p:spPr>
+          <a:xfrm>
+            <a:off x="6537960" y="4078224"/>
+            <a:ext cx="4800600" cy="256032"/>
+          </a:xfrm>
+          <a:prstGeom prst="rect">
+            <a:avLst/>
+          </a:prstGeom>
+          <a:noFill/>
+          <a:ln/>
+        </p:spPr>
+        <p:txBody>
+          <a:bodyPr wrap="square" lIns="0" tIns="0" rIns="0" bIns="0" rtlCol="0" anchor="ctr"/>
+          <a:lstStyle/>
+          <a:p>
+            <a:pPr indent="0" marL="0">
+              <a:buNone/>
+            </a:pPr>
+            <a:r>
+              <a:rPr lang="en-US" sz="1000" b="1" spc="100" kern="0" dirty="0">
+                <a:solidFill>
+                  <a:srgbClr val="9A7A28"/>
+                </a:solidFill>
+                <a:latin typeface="Consolas" pitchFamily="34" charset="0"/>
+                <a:ea typeface="Consolas" pitchFamily="34" charset="-122"/>
+                <a:cs typeface="Consolas" pitchFamily="34" charset="-120"/>
+              </a:rPr>
+              <a:t>SECURE BY ROADMAP</a:t>
+            </a:r>
+            <a:endParaRPr lang="en-US" sz="1000" dirty="0"/>
+          </a:p>
+        </p:txBody>
+      </p:sp>
+      <p:sp>
+        <p:nvSpPr>
+          <p:cNvPr id="18" name="Text 16"/>
+          <p:cNvSpPr/>
+          <p:nvPr/>
+        </p:nvSpPr>
+        <p:spPr>
+          <a:xfrm>
+            <a:off x="6537960" y="4334256"/>
+            <a:ext cx="4800600" cy="365760"/>
+          </a:xfrm>
+          <a:prstGeom prst="rect">
+            <a:avLst/>
+          </a:prstGeom>
+          <a:noFill/>
+          <a:ln/>
+        </p:spPr>
+        <p:txBody>
+          <a:bodyPr wrap="square" lIns="0" tIns="0" rIns="0" bIns="0" rtlCol="0" anchor="ctr"/>
+          <a:lstStyle/>
+          <a:p>
+            <a:pPr indent="0" marL="0">
+              <a:buNone/>
+            </a:pPr>
+            <a:r>
+              <a:rPr lang="en-US" sz="1800" b="1" dirty="0">
+                <a:solidFill>
+                  <a:srgbClr val="2B2723"/>
+                </a:solidFill>
+                <a:latin typeface="Bookman Old Style" pitchFamily="34" charset="0"/>
+                <a:ea typeface="Bookman Old Style" pitchFamily="34" charset="-122"/>
+                <a:cs typeface="Bookman Old Style" pitchFamily="34" charset="-120"/>
+              </a:rPr>
+              <a:t>Authenticated access next</a:t>
+            </a:r>
+            <a:endParaRPr lang="en-US" sz="1800" dirty="0"/>
+          </a:p>
+        </p:txBody>
+      </p:sp>
+      <p:sp>
+        <p:nvSpPr>
+          <p:cNvPr id="19" name="Text 17"/>
+          <p:cNvSpPr/>
+          <p:nvPr/>
+        </p:nvSpPr>
+        <p:spPr>
+          <a:xfrm>
+            <a:off x="6537960" y="4745736"/>
+            <a:ext cx="4800600" cy="603504"/>
+          </a:xfrm>
+          <a:prstGeom prst="rect">
+            <a:avLst/>
+          </a:prstGeom>
+          <a:noFill/>
+          <a:ln/>
+        </p:spPr>
+        <p:txBody>
+          <a:bodyPr wrap="square" lIns="0" tIns="0" rIns="0" bIns="0" rtlCol="0" anchor="t"/>
+          <a:lstStyle/>
+          <a:p>
+            <a:pPr indent="0" marL="0">
+              <a:buNone/>
+            </a:pPr>
+            <a:r>
+              <a:rPr lang="en-US" sz="1250" dirty="0">
+                <a:solidFill>
+                  <a:srgbClr val="6E675C"/>
+                </a:solidFill>
+                <a:latin typeface="Calibri" pitchFamily="34" charset="0"/>
+                <a:ea typeface="Calibri" pitchFamily="34" charset="-122"/>
+                <a:cs typeface="Calibri" pitchFamily="34" charset="-120"/>
+              </a:rPr>
+              <a:t>A secure teacher sign-in replaces the prototype access code before any live student data flows through the Hub.</a:t>
+            </a:r>
+            <a:endParaRPr lang="en-US" sz="1250" dirty="0"/>
+          </a:p>
+        </p:txBody>
+      </p:sp>
+      <p:sp>
+        <p:nvSpPr>
+          <p:cNvPr id="20" name="Text 18"/>
+          <p:cNvSpPr/>
+          <p:nvPr/>
+        </p:nvSpPr>
+        <p:spPr>
+          <a:xfrm>
+            <a:off x="640080" y="5559552"/>
+            <a:ext cx="10972800" cy="457200"/>
+          </a:xfrm>
+          <a:prstGeom prst="rect">
+            <a:avLst/>
+          </a:prstGeom>
+          <a:noFill/>
+          <a:ln/>
+        </p:spPr>
+        <p:txBody>
+          <a:bodyPr wrap="square" lIns="0" tIns="0" rIns="0" bIns="0" rtlCol="0" anchor="ctr"/>
+          <a:lstStyle/>
+          <a:p>
+            <a:pPr indent="0" marL="0">
+              <a:buNone/>
+            </a:pPr>
+            <a:r>
+              <a:rPr lang="en-US" sz="1600" b="1" i="1" dirty="0">
+                <a:solidFill>
+                  <a:srgbClr val="9A7A28"/>
+                </a:solidFill>
+                <a:latin typeface="Bookman Old Style" pitchFamily="34" charset="0"/>
+                <a:ea typeface="Bookman Old Style" pitchFamily="34" charset="-122"/>
+                <a:cs typeface="Bookman Old Style" pitchFamily="34" charset="-120"/>
+              </a:rPr>
+              <a:t>Privacy isn't bolted on — it's the boundary the whole system is built around.</a:t>
+            </a:r>
+            <a:endParaRPr lang="en-US" sz="1600" dirty="0"/>
+          </a:p>
+        </p:txBody>
+      </p:sp>
+      <p:sp>
+        <p:nvSpPr>
+          <p:cNvPr id="21" name="Text 19"/>
+          <p:cNvSpPr/>
+          <p:nvPr/>
+        </p:nvSpPr>
+        <p:spPr>
+          <a:xfrm>
+            <a:off x="502920" y="6400800"/>
+            <a:ext cx="7315200" cy="274320"/>
+          </a:xfrm>
+          <a:prstGeom prst="rect">
+            <a:avLst/>
+          </a:prstGeom>
+          <a:noFill/>
+          <a:ln/>
+        </p:spPr>
+        <p:txBody>
+          <a:bodyPr wrap="square" lIns="0" tIns="0" rIns="0" bIns="0" rtlCol="0" anchor="ctr"/>
+          <a:lstStyle/>
+          <a:p>
+            <a:pPr algn="l" indent="0" marL="0">
+              <a:buNone/>
+            </a:pPr>
+            <a:r>
+              <a:rPr lang="en-US" sz="1000" b="1" dirty="0">
+                <a:solidFill>
+                  <a:srgbClr val="C9A24B"/>
+                </a:solidFill>
+                <a:latin typeface="Calibri" pitchFamily="34" charset="0"/>
+                <a:ea typeface="Calibri" pitchFamily="34" charset="-122"/>
+                <a:cs typeface="Calibri" pitchFamily="34" charset="-120"/>
+              </a:rPr>
+              <a:t>AndersonLogic AI</a:t>
+            </a:r>
+            <a:pPr algn="l" indent="0" marL="0">
+              <a:buNone/>
+            </a:pPr>
+            <a:r>
+              <a:rPr lang="en-US" sz="1000" dirty="0">
+                <a:solidFill>
+                  <a:srgbClr val="6E675C"/>
+                </a:solidFill>
+                <a:latin typeface="Calibri" pitchFamily="34" charset="0"/>
+                <a:ea typeface="Calibri" pitchFamily="34" charset="-122"/>
+                <a:cs typeface="Calibri" pitchFamily="34" charset="-120"/>
+              </a:rPr>
+              <a:t>   ·   BeHistorical</a:t>
+            </a:r>
+            <a:endParaRPr lang="en-US" sz="1000" dirty="0"/>
+          </a:p>
+        </p:txBody>
+      </p:sp>
+      <p:sp>
+        <p:nvSpPr>
+          <p:cNvPr id="22" name="Text 20"/>
+          <p:cNvSpPr/>
+          <p:nvPr/>
+        </p:nvSpPr>
+        <p:spPr>
+          <a:xfrm>
+            <a:off x="10607040" y="6355080"/>
+            <a:ext cx="1097280" cy="320040"/>
+          </a:xfrm>
+          <a:prstGeom prst="rect">
+            <a:avLst/>
+          </a:prstGeom>
+          <a:noFill/>
+          <a:ln/>
+        </p:spPr>
+        <p:txBody>
+          <a:bodyPr wrap="square" lIns="0" tIns="0" rIns="0" bIns="0" rtlCol="0" anchor="ctr"/>
+          <a:lstStyle/>
+          <a:p>
+            <a:pPr algn="r" indent="0" marL="0">
+              <a:buNone/>
+            </a:pPr>
+            <a:r>
+              <a:rPr lang="en-US" sz="1100" b="1" dirty="0">
+                <a:solidFill>
+                  <a:srgbClr val="6E675C"/>
+                </a:solidFill>
+                <a:latin typeface="Consolas" pitchFamily="34" charset="0"/>
+                <a:ea typeface="Consolas" pitchFamily="34" charset="-122"/>
+                <a:cs typeface="Consolas" pitchFamily="34" charset="-120"/>
+              </a:rPr>
+              <a:t>13 / 17</a:t>
+            </a:r>
+            <a:endParaRPr lang="en-US" sz="1100" dirty="0"/>
+          </a:p>
+        </p:txBody>
+      </p:sp>
+    </p:spTree>
+  </p:cSld>
+  <p:clrMapOvr>
+    <a:masterClrMapping/>
+  </p:clrMapOvr>
+</p:sld>
+</file>
+
+<file path=ppt/slides/slide14.xml><?xml version="1.0" encoding="utf-8"?>
+<p:sld xmlns:a="http://schemas.openxmlformats.org/drawingml/2006/main" xmlns:r="http://schemas.openxmlformats.org/officeDocument/2006/relationships" xmlns:p="http://schemas.openxmlformats.org/presentationml/2006/main">
+  <p:cSld name="Slide 14">
     <p:bg>
       <p:bgPr>
         <a:solidFill>
@@ -4858,7 +5823,7 @@
         </p:nvSpPr>
         <p:spPr>
           <a:xfrm>
-            <a:off x="640080" y="502920"/>
+            <a:off x="640080" y="457200"/>
             <a:ext cx="8229600" cy="274320"/>
           </a:xfrm>
           <a:prstGeom prst="rect">
@@ -4883,7 +5848,7 @@
                 <a:ea typeface="Consolas" pitchFamily="34" charset="-122"/>
                 <a:cs typeface="Consolas" pitchFamily="34" charset="-120"/>
               </a:rPr>
-              <a:t>HOW IT ALL CONNECTS</a:t>
+              <a:t>WHY IT SCALES</a:t>
             </a:r>
             <a:endParaRPr lang="en-US" sz="1200" dirty="0"/>
           </a:p>
@@ -4897,24 +5862,24 @@
         </p:nvSpPr>
         <p:spPr>
           <a:xfrm>
-            <a:off x="603504" y="822960"/>
-            <a:ext cx="10972800" cy="731520"/>
-          </a:xfrm>
-          <a:prstGeom prst="rect">
-            <a:avLst/>
-          </a:prstGeom>
-          <a:noFill/>
-          <a:ln/>
-        </p:spPr>
-        <p:txBody>
-          <a:bodyPr wrap="square" lIns="0" tIns="0" rIns="0" bIns="0" rtlCol="0" anchor="ctr"/>
-          <a:lstStyle/>
-          <a:p>
-            <a:pPr indent="0" marL="0">
-              <a:buNone/>
-            </a:pPr>
-            <a:r>
-              <a:rPr lang="en-US" sz="3100" b="1" dirty="0">
+            <a:off x="603504" y="777240"/>
+            <a:ext cx="10972800" cy="640080"/>
+          </a:xfrm>
+          <a:prstGeom prst="rect">
+            <a:avLst/>
+          </a:prstGeom>
+          <a:noFill/>
+          <a:ln/>
+        </p:spPr>
+        <p:txBody>
+          <a:bodyPr wrap="square" lIns="0" tIns="0" rIns="0" bIns="0" rtlCol="0" anchor="ctr"/>
+          <a:lstStyle/>
+          <a:p>
+            <a:pPr indent="0" marL="0">
+              <a:buNone/>
+            </a:pPr>
+            <a:r>
+              <a:rPr lang="en-US" sz="2800" b="1" dirty="0">
                 <a:solidFill>
                   <a:srgbClr val="FFFFFF"/>
                 </a:solidFill>
@@ -4922,9 +5887,9 @@
                 <a:ea typeface="Bookman Old Style" pitchFamily="34" charset="-122"/>
                 <a:cs typeface="Bookman Old Style" pitchFamily="34" charset="-120"/>
               </a:rPr>
-              <a:t>One platform, one data layer, three audiences</a:t>
-            </a:r>
-            <a:endParaRPr lang="en-US" sz="3100" dirty="0"/>
+              <a:t>Built like software, not a slide folder</a:t>
+            </a:r>
+            <a:endParaRPr lang="en-US" sz="2800" dirty="0"/>
           </a:p>
         </p:txBody>
       </p:sp>
@@ -4936,113 +5901,263 @@
         </p:nvSpPr>
         <p:spPr>
           <a:xfrm>
-            <a:off x="640080" y="2377440"/>
-            <a:ext cx="3063240" cy="2468880"/>
+            <a:off x="594360" y="1554480"/>
+            <a:ext cx="5623560" cy="3805047"/>
           </a:xfrm>
           <a:prstGeom prst="roundRect">
             <a:avLst>
-              <a:gd name="adj" fmla="val 4444"/>
+              <a:gd name="adj" fmla="val 1442"/>
             </a:avLst>
           </a:prstGeom>
           <a:solidFill>
-            <a:srgbClr val="24272A"/>
+            <a:srgbClr val="0E0F10"/>
           </a:solidFill>
-          <a:ln w="12700">
+          <a:ln w="9525">
             <a:solidFill>
-              <a:srgbClr val="2E3236"/>
+              <a:srgbClr val="3A3F45"/>
             </a:solidFill>
             <a:prstDash val="solid"/>
           </a:ln>
-        </p:spPr>
-      </p:sp>
-      <p:sp>
-        <p:nvSpPr>
-          <p:cNvPr id="5" name="Text 3"/>
-          <p:cNvSpPr/>
-          <p:nvPr/>
-        </p:nvSpPr>
-        <p:spPr>
-          <a:xfrm>
-            <a:off x="896112" y="2633472"/>
-            <a:ext cx="2606040" cy="274320"/>
-          </a:xfrm>
-          <a:prstGeom prst="rect">
-            <a:avLst/>
-          </a:prstGeom>
-          <a:noFill/>
-          <a:ln/>
-        </p:spPr>
-        <p:txBody>
-          <a:bodyPr wrap="square" lIns="0" tIns="0" rIns="0" bIns="0" rtlCol="0" anchor="ctr"/>
-          <a:lstStyle/>
-          <a:p>
-            <a:pPr indent="0" marL="0">
-              <a:buNone/>
-            </a:pPr>
-            <a:r>
-              <a:rPr lang="en-US" sz="1050" b="1" spc="150" kern="0" dirty="0">
-                <a:solidFill>
-                  <a:srgbClr val="C9A24B"/>
+          <a:effectLst>
+            <a:outerShdw sx="100000" sy="100000" kx="0" ky="0" algn="bl" rotWithShape="0" blurRad="152400" dist="76200" dir="5400000">
+              <a:srgbClr val="000000">
+                <a:alpha val="45000"/>
+              </a:srgbClr>
+            </a:outerShdw>
+          </a:effectLst>
+        </p:spPr>
+      </p:sp>
+      <p:sp>
+        <p:nvSpPr>
+          <p:cNvPr id="5" name="Shape 3"/>
+          <p:cNvSpPr/>
+          <p:nvPr/>
+        </p:nvSpPr>
+        <p:spPr>
+          <a:xfrm>
+            <a:off x="640080" y="1600200"/>
+            <a:ext cx="5532120" cy="256032"/>
+          </a:xfrm>
+          <a:prstGeom prst="rect">
+            <a:avLst/>
+          </a:prstGeom>
+          <a:solidFill>
+            <a:srgbClr val="191C1F"/>
+          </a:solidFill>
+          <a:ln/>
+        </p:spPr>
+      </p:sp>
+      <p:sp>
+        <p:nvSpPr>
+          <p:cNvPr id="6" name="Shape 4"/>
+          <p:cNvSpPr/>
+          <p:nvPr/>
+        </p:nvSpPr>
+        <p:spPr>
+          <a:xfrm>
+            <a:off x="768096" y="1687068"/>
+            <a:ext cx="82296" cy="82296"/>
+          </a:xfrm>
+          <a:prstGeom prst="ellipse">
+            <a:avLst/>
+          </a:prstGeom>
+          <a:solidFill>
+            <a:srgbClr val="C9564E"/>
+          </a:solidFill>
+          <a:ln/>
+        </p:spPr>
+      </p:sp>
+      <p:sp>
+        <p:nvSpPr>
+          <p:cNvPr id="7" name="Shape 5"/>
+          <p:cNvSpPr/>
+          <p:nvPr/>
+        </p:nvSpPr>
+        <p:spPr>
+          <a:xfrm>
+            <a:off x="896112" y="1687068"/>
+            <a:ext cx="82296" cy="82296"/>
+          </a:xfrm>
+          <a:prstGeom prst="ellipse">
+            <a:avLst/>
+          </a:prstGeom>
+          <a:solidFill>
+            <a:srgbClr val="D8A441"/>
+          </a:solidFill>
+          <a:ln/>
+        </p:spPr>
+      </p:sp>
+      <p:sp>
+        <p:nvSpPr>
+          <p:cNvPr id="8" name="Shape 6"/>
+          <p:cNvSpPr/>
+          <p:nvPr/>
+        </p:nvSpPr>
+        <p:spPr>
+          <a:xfrm>
+            <a:off x="1024128" y="1687068"/>
+            <a:ext cx="82296" cy="82296"/>
+          </a:xfrm>
+          <a:prstGeom prst="ellipse">
+            <a:avLst/>
+          </a:prstGeom>
+          <a:solidFill>
+            <a:srgbClr val="5AA668"/>
+          </a:solidFill>
+          <a:ln/>
+        </p:spPr>
+      </p:sp>
+      <p:sp>
+        <p:nvSpPr>
+          <p:cNvPr id="9" name="Text 7"/>
+          <p:cNvSpPr/>
+          <p:nvPr/>
+        </p:nvSpPr>
+        <p:spPr>
+          <a:xfrm>
+            <a:off x="1207008" y="1600200"/>
+            <a:ext cx="4892040" cy="256032"/>
+          </a:xfrm>
+          <a:prstGeom prst="rect">
+            <a:avLst/>
+          </a:prstGeom>
+          <a:noFill/>
+          <a:ln/>
+        </p:spPr>
+        <p:txBody>
+          <a:bodyPr wrap="square" lIns="0" tIns="0" rIns="0" bIns="0" rtlCol="0" anchor="ctr"/>
+          <a:lstStyle/>
+          <a:p>
+            <a:pPr algn="l" indent="0" marL="0">
+              <a:buNone/>
+            </a:pPr>
+            <a:r>
+              <a:rPr lang="en-US" sz="850" dirty="0">
+                <a:solidFill>
+                  <a:srgbClr val="8B9199"/>
                 </a:solidFill>
                 <a:latin typeface="Consolas" pitchFamily="34" charset="0"/>
                 <a:ea typeface="Consolas" pitchFamily="34" charset="-122"/>
                 <a:cs typeface="Consolas" pitchFamily="34" charset="-120"/>
               </a:rPr>
-              <a:t>STUDENTS LEARN</a:t>
-            </a:r>
-            <a:endParaRPr lang="en-US" sz="1050" dirty="0"/>
-          </a:p>
-        </p:txBody>
-      </p:sp>
-      <p:sp>
-        <p:nvSpPr>
-          <p:cNvPr id="6" name="Text 4"/>
-          <p:cNvSpPr/>
-          <p:nvPr/>
-        </p:nvSpPr>
-        <p:spPr>
-          <a:xfrm>
-            <a:off x="896112" y="2944368"/>
-            <a:ext cx="2606040" cy="457200"/>
-          </a:xfrm>
-          <a:prstGeom prst="rect">
-            <a:avLst/>
-          </a:prstGeom>
-          <a:noFill/>
-          <a:ln/>
-        </p:spPr>
-        <p:txBody>
-          <a:bodyPr wrap="square" lIns="0" tIns="0" rIns="0" bIns="0" rtlCol="0" anchor="ctr"/>
-          <a:lstStyle/>
-          <a:p>
-            <a:pPr indent="0" marL="0">
-              <a:buNone/>
-            </a:pPr>
-            <a:r>
-              <a:rPr lang="en-US" sz="1900" b="1" dirty="0">
-                <a:solidFill>
-                  <a:srgbClr val="FFFFFF"/>
+              <a:t>behistorical · repository command center</a:t>
+            </a:r>
+            <a:endParaRPr lang="en-US" sz="850" dirty="0"/>
+          </a:p>
+        </p:txBody>
+      </p:sp>
+      <p:pic>
+        <p:nvPicPr>
+          <p:cNvPr id="10" name="Image 0" descr="preencoded.png">    </p:cNvPr>
+          <p:cNvPicPr>
+            <a:picLocks noChangeAspect="1"/>
+          </p:cNvPicPr>
+          <p:nvPr/>
+        </p:nvPicPr>
+        <p:blipFill>
+          <a:blip r:embed="rId1"/>
+          <a:stretch>
+            <a:fillRect/>
+          </a:stretch>
+        </p:blipFill>
+        <p:spPr>
+          <a:xfrm>
+            <a:off x="640080" y="1856232"/>
+            <a:ext cx="5532120" cy="3457575"/>
+          </a:xfrm>
+          <a:prstGeom prst="rect">
+            <a:avLst/>
+          </a:prstGeom>
+        </p:spPr>
+      </p:pic>
+      <p:sp>
+        <p:nvSpPr>
+          <p:cNvPr id="11" name="Text 8"/>
+          <p:cNvSpPr/>
+          <p:nvPr/>
+        </p:nvSpPr>
+        <p:spPr>
+          <a:xfrm>
+            <a:off x="640080" y="5423535"/>
+            <a:ext cx="5577840" cy="274320"/>
+          </a:xfrm>
+          <a:prstGeom prst="rect">
+            <a:avLst/>
+          </a:prstGeom>
+          <a:noFill/>
+          <a:ln/>
+        </p:spPr>
+        <p:txBody>
+          <a:bodyPr wrap="square" lIns="0" tIns="0" rIns="0" bIns="0" rtlCol="0" anchor="ctr"/>
+          <a:lstStyle/>
+          <a:p>
+            <a:pPr indent="0" marL="0">
+              <a:buNone/>
+            </a:pPr>
+            <a:r>
+              <a:rPr lang="en-US" sz="950" dirty="0">
+                <a:solidFill>
+                  <a:srgbClr val="9AA0A6"/>
+                </a:solidFill>
+                <a:latin typeface="Consolas" pitchFamily="34" charset="0"/>
+                <a:ea typeface="Consolas" pitchFamily="34" charset="-122"/>
+                <a:cs typeface="Consolas" pitchFamily="34" charset="-120"/>
+              </a:rPr>
+              <a:t>The Command Center — audited against what's actually on disk</a:t>
+            </a:r>
+            <a:endParaRPr lang="en-US" sz="950" dirty="0"/>
+          </a:p>
+        </p:txBody>
+      </p:sp>
+      <p:sp>
+        <p:nvSpPr>
+          <p:cNvPr id="12" name="Text 9"/>
+          <p:cNvSpPr/>
+          <p:nvPr/>
+        </p:nvSpPr>
+        <p:spPr>
+          <a:xfrm>
+            <a:off x="6492240" y="1691640"/>
+            <a:ext cx="5029200" cy="310896"/>
+          </a:xfrm>
+          <a:prstGeom prst="rect">
+            <a:avLst/>
+          </a:prstGeom>
+          <a:noFill/>
+          <a:ln/>
+        </p:spPr>
+        <p:txBody>
+          <a:bodyPr wrap="square" lIns="0" tIns="0" rIns="0" bIns="0" rtlCol="0" anchor="ctr"/>
+          <a:lstStyle/>
+          <a:p>
+            <a:pPr indent="0" marL="0">
+              <a:buNone/>
+            </a:pPr>
+            <a:r>
+              <a:rPr lang="en-US" sz="1700" b="1" dirty="0">
+                <a:solidFill>
+                  <a:srgbClr val="E4C878"/>
                 </a:solidFill>
                 <a:latin typeface="Bookman Old Style" pitchFamily="34" charset="0"/>
                 <a:ea typeface="Bookman Old Style" pitchFamily="34" charset="-122"/>
                 <a:cs typeface="Bookman Old Style" pitchFamily="34" charset="-120"/>
               </a:rPr>
-              <a:t>The lesson platform</a:t>
-            </a:r>
-            <a:endParaRPr lang="en-US" sz="1900" dirty="0"/>
-          </a:p>
-        </p:txBody>
-      </p:sp>
-      <p:sp>
-        <p:nvSpPr>
-          <p:cNvPr id="7" name="Text 5"/>
-          <p:cNvSpPr/>
-          <p:nvPr/>
-        </p:nvSpPr>
-        <p:spPr>
-          <a:xfrm>
-            <a:off x="896112" y="3474720"/>
-            <a:ext cx="2606040" cy="1280160"/>
+              <a:t>Automated validation</a:t>
+            </a:r>
+            <a:endParaRPr lang="en-US" sz="1700" dirty="0"/>
+          </a:p>
+        </p:txBody>
+      </p:sp>
+      <p:sp>
+        <p:nvSpPr>
+          <p:cNvPr id="13" name="Text 10"/>
+          <p:cNvSpPr/>
+          <p:nvPr/>
+        </p:nvSpPr>
+        <p:spPr>
+          <a:xfrm>
+            <a:off x="6492240" y="2002536"/>
+            <a:ext cx="5029200" cy="685800"/>
           </a:xfrm>
           <a:prstGeom prst="rect">
             <a:avLst/>
@@ -5060,13 +6175,13 @@
             <a:r>
               <a:rPr lang="en-US" sz="1300" dirty="0">
                 <a:solidFill>
-                  <a:srgbClr val="9AA0A6"/>
+                  <a:srgbClr val="F4EEE2"/>
                 </a:solidFill>
                 <a:latin typeface="Calibri" pitchFamily="34" charset="0"/>
                 <a:ea typeface="Calibri" pitchFamily="34" charset="-122"/>
                 <a:cs typeface="Calibri" pitchFamily="34" charset="-120"/>
               </a:rPr>
-              <a:t>10-module lessons, First &amp; 10 readings, BeInTheRoom simulations, and an AI coach that questions rather than answers.</a:t>
+              <a:t>A 547-file audit runs on every change — module order, form wiring, and simulation quality gates. Zero-error deploys.</a:t>
             </a:r>
             <a:endParaRPr lang="en-US" sz="1300" dirty="0"/>
           </a:p>
@@ -5074,1893 +6189,286 @@
       </p:sp>
       <p:sp>
         <p:nvSpPr>
-          <p:cNvPr id="8" name="Text 6"/>
-          <p:cNvSpPr/>
-          <p:nvPr/>
-        </p:nvSpPr>
-        <p:spPr>
-          <a:xfrm>
-            <a:off x="3703320" y="2377440"/>
-            <a:ext cx="457200" cy="2468880"/>
-          </a:xfrm>
-          <a:prstGeom prst="rect">
-            <a:avLst/>
-          </a:prstGeom>
-          <a:noFill/>
-          <a:ln/>
-        </p:spPr>
-        <p:txBody>
-          <a:bodyPr wrap="square" lIns="0" tIns="0" rIns="0" bIns="0" rtlCol="0" anchor="ctr"/>
-          <a:lstStyle/>
-          <a:p>
-            <a:pPr algn="ctr" indent="0" marL="0">
-              <a:buNone/>
-            </a:pPr>
-            <a:r>
-              <a:rPr lang="en-US" sz="2600" b="1" dirty="0">
-                <a:solidFill>
-                  <a:srgbClr val="C9A24B"/>
+          <p:cNvPr id="14" name="Text 11"/>
+          <p:cNvSpPr/>
+          <p:nvPr/>
+        </p:nvSpPr>
+        <p:spPr>
+          <a:xfrm>
+            <a:off x="6492240" y="2788920"/>
+            <a:ext cx="5029200" cy="310896"/>
+          </a:xfrm>
+          <a:prstGeom prst="rect">
+            <a:avLst/>
+          </a:prstGeom>
+          <a:noFill/>
+          <a:ln/>
+        </p:spPr>
+        <p:txBody>
+          <a:bodyPr wrap="square" lIns="0" tIns="0" rIns="0" bIns="0" rtlCol="0" anchor="ctr"/>
+          <a:lstStyle/>
+          <a:p>
+            <a:pPr indent="0" marL="0">
+              <a:buNone/>
+            </a:pPr>
+            <a:r>
+              <a:rPr lang="en-US" sz="1700" b="1" dirty="0">
+                <a:solidFill>
+                  <a:srgbClr val="E4C878"/>
+                </a:solidFill>
+                <a:latin typeface="Bookman Old Style" pitchFamily="34" charset="0"/>
+                <a:ea typeface="Bookman Old Style" pitchFamily="34" charset="-122"/>
+                <a:cs typeface="Bookman Old Style" pitchFamily="34" charset="-120"/>
+              </a:rPr>
+              <a:t>Deterministic builders</a:t>
+            </a:r>
+            <a:endParaRPr lang="en-US" sz="1700" dirty="0"/>
+          </a:p>
+        </p:txBody>
+      </p:sp>
+      <p:sp>
+        <p:nvSpPr>
+          <p:cNvPr id="15" name="Text 12"/>
+          <p:cNvSpPr/>
+          <p:nvPr/>
+        </p:nvSpPr>
+        <p:spPr>
+          <a:xfrm>
+            <a:off x="6492240" y="3099816"/>
+            <a:ext cx="5029200" cy="685800"/>
+          </a:xfrm>
+          <a:prstGeom prst="rect">
+            <a:avLst/>
+          </a:prstGeom>
+          <a:noFill/>
+          <a:ln/>
+        </p:spPr>
+        <p:txBody>
+          <a:bodyPr wrap="square" lIns="0" tIns="0" rIns="0" bIns="0" rtlCol="0" anchor="t"/>
+          <a:lstStyle/>
+          <a:p>
+            <a:pPr indent="0" marL="0">
+              <a:buNone/>
+            </a:pPr>
+            <a:r>
+              <a:rPr lang="en-US" sz="1300" dirty="0">
+                <a:solidFill>
+                  <a:srgbClr val="F4EEE2"/>
                 </a:solidFill>
                 <a:latin typeface="Calibri" pitchFamily="34" charset="0"/>
                 <a:ea typeface="Calibri" pitchFamily="34" charset="-122"/>
                 <a:cs typeface="Calibri" pitchFamily="34" charset="-120"/>
               </a:rPr>
-              <a:t>→</a:t>
-            </a:r>
-            <a:endParaRPr lang="en-US" sz="2600" dirty="0"/>
-          </a:p>
-        </p:txBody>
-      </p:sp>
-      <p:sp>
-        <p:nvSpPr>
-          <p:cNvPr id="9" name="Shape 7"/>
-          <p:cNvSpPr/>
-          <p:nvPr/>
-        </p:nvSpPr>
-        <p:spPr>
-          <a:xfrm>
-            <a:off x="4160520" y="2377440"/>
-            <a:ext cx="2926080" cy="2468880"/>
-          </a:xfrm>
-          <a:prstGeom prst="roundRect">
-            <a:avLst>
-              <a:gd name="adj" fmla="val 4444"/>
-            </a:avLst>
-          </a:prstGeom>
-          <a:solidFill>
-            <a:srgbClr val="24272A"/>
-          </a:solidFill>
-          <a:ln w="12700">
-            <a:solidFill>
-              <a:srgbClr val="2E3236"/>
-            </a:solidFill>
-            <a:prstDash val="solid"/>
-          </a:ln>
-        </p:spPr>
-      </p:sp>
-      <p:sp>
-        <p:nvSpPr>
-          <p:cNvPr id="10" name="Text 8"/>
-          <p:cNvSpPr/>
-          <p:nvPr/>
-        </p:nvSpPr>
-        <p:spPr>
-          <a:xfrm>
-            <a:off x="4416552" y="2633472"/>
-            <a:ext cx="2468880" cy="274320"/>
-          </a:xfrm>
-          <a:prstGeom prst="rect">
-            <a:avLst/>
-          </a:prstGeom>
-          <a:noFill/>
-          <a:ln/>
-        </p:spPr>
-        <p:txBody>
-          <a:bodyPr wrap="square" lIns="0" tIns="0" rIns="0" bIns="0" rtlCol="0" anchor="ctr"/>
-          <a:lstStyle/>
-          <a:p>
-            <a:pPr indent="0" marL="0">
-              <a:buNone/>
-            </a:pPr>
-            <a:r>
-              <a:rPr lang="en-US" sz="1050" b="1" spc="150" kern="0" dirty="0">
+              <a:t>Whole units are generated from data by scripts — so a fix rolls out everywhere, consistently, at once.</a:t>
+            </a:r>
+            <a:endParaRPr lang="en-US" sz="1300" dirty="0"/>
+          </a:p>
+        </p:txBody>
+      </p:sp>
+      <p:sp>
+        <p:nvSpPr>
+          <p:cNvPr id="16" name="Text 13"/>
+          <p:cNvSpPr/>
+          <p:nvPr/>
+        </p:nvSpPr>
+        <p:spPr>
+          <a:xfrm>
+            <a:off x="6492240" y="3886200"/>
+            <a:ext cx="5029200" cy="310896"/>
+          </a:xfrm>
+          <a:prstGeom prst="rect">
+            <a:avLst/>
+          </a:prstGeom>
+          <a:noFill/>
+          <a:ln/>
+        </p:spPr>
+        <p:txBody>
+          <a:bodyPr wrap="square" lIns="0" tIns="0" rIns="0" bIns="0" rtlCol="0" anchor="ctr"/>
+          <a:lstStyle/>
+          <a:p>
+            <a:pPr indent="0" marL="0">
+              <a:buNone/>
+            </a:pPr>
+            <a:r>
+              <a:rPr lang="en-US" sz="1700" b="1" dirty="0">
+                <a:solidFill>
+                  <a:srgbClr val="E4C878"/>
+                </a:solidFill>
+                <a:latin typeface="Bookman Old Style" pitchFamily="34" charset="0"/>
+                <a:ea typeface="Bookman Old Style" pitchFamily="34" charset="-122"/>
+                <a:cs typeface="Bookman Old Style" pitchFamily="34" charset="-120"/>
+              </a:rPr>
+              <a:t>Codified quality gates</a:t>
+            </a:r>
+            <a:endParaRPr lang="en-US" sz="1700" dirty="0"/>
+          </a:p>
+        </p:txBody>
+      </p:sp>
+      <p:sp>
+        <p:nvSpPr>
+          <p:cNvPr id="17" name="Text 14"/>
+          <p:cNvSpPr/>
+          <p:nvPr/>
+        </p:nvSpPr>
+        <p:spPr>
+          <a:xfrm>
+            <a:off x="6492240" y="4197096"/>
+            <a:ext cx="5029200" cy="685800"/>
+          </a:xfrm>
+          <a:prstGeom prst="rect">
+            <a:avLst/>
+          </a:prstGeom>
+          <a:noFill/>
+          <a:ln/>
+        </p:spPr>
+        <p:txBody>
+          <a:bodyPr wrap="square" lIns="0" tIns="0" rIns="0" bIns="0" rtlCol="0" anchor="t"/>
+          <a:lstStyle/>
+          <a:p>
+            <a:pPr indent="0" marL="0">
+              <a:buNone/>
+            </a:pPr>
+            <a:r>
+              <a:rPr lang="en-US" sz="1300" dirty="0">
+                <a:solidFill>
+                  <a:srgbClr val="F4EEE2"/>
+                </a:solidFill>
+                <a:latin typeface="Calibri" pitchFamily="34" charset="0"/>
+                <a:ea typeface="Calibri" pitchFamily="34" charset="-122"/>
+                <a:cs typeface="Calibri" pitchFamily="34" charset="-120"/>
+              </a:rPr>
+              <a:t>Design rules live in blueprints and are enforced by machine before anything ships.</a:t>
+            </a:r>
+            <a:endParaRPr lang="en-US" sz="1300" dirty="0"/>
+          </a:p>
+        </p:txBody>
+      </p:sp>
+      <p:sp>
+        <p:nvSpPr>
+          <p:cNvPr id="18" name="Text 15"/>
+          <p:cNvSpPr/>
+          <p:nvPr/>
+        </p:nvSpPr>
+        <p:spPr>
+          <a:xfrm>
+            <a:off x="6492240" y="5029200"/>
+            <a:ext cx="5029200" cy="548640"/>
+          </a:xfrm>
+          <a:prstGeom prst="rect">
+            <a:avLst/>
+          </a:prstGeom>
+          <a:noFill/>
+          <a:ln/>
+        </p:spPr>
+        <p:txBody>
+          <a:bodyPr wrap="square" lIns="0" tIns="0" rIns="0" bIns="0" rtlCol="0" anchor="ctr"/>
+          <a:lstStyle/>
+          <a:p>
+            <a:pPr indent="0" marL="0">
+              <a:buNone/>
+            </a:pPr>
+            <a:r>
+              <a:rPr lang="en-US" sz="1500" b="1" i="1" dirty="0">
                 <a:solidFill>
                   <a:srgbClr val="C9A24B"/>
+                </a:solidFill>
+                <a:latin typeface="Bookman Old Style" pitchFamily="34" charset="0"/>
+                <a:ea typeface="Bookman Old Style" pitchFamily="34" charset="-122"/>
+                <a:cs typeface="Bookman Old Style" pitchFamily="34" charset="-120"/>
+              </a:rPr>
+              <a:t>The difference between a teacher's materials and a product a district can adopt.</a:t>
+            </a:r>
+            <a:endParaRPr lang="en-US" sz="1500" dirty="0"/>
+          </a:p>
+        </p:txBody>
+      </p:sp>
+      <p:sp>
+        <p:nvSpPr>
+          <p:cNvPr id="19" name="Text 16"/>
+          <p:cNvSpPr/>
+          <p:nvPr/>
+        </p:nvSpPr>
+        <p:spPr>
+          <a:xfrm>
+            <a:off x="502920" y="6400800"/>
+            <a:ext cx="7315200" cy="274320"/>
+          </a:xfrm>
+          <a:prstGeom prst="rect">
+            <a:avLst/>
+          </a:prstGeom>
+          <a:noFill/>
+          <a:ln/>
+        </p:spPr>
+        <p:txBody>
+          <a:bodyPr wrap="square" lIns="0" tIns="0" rIns="0" bIns="0" rtlCol="0" anchor="ctr"/>
+          <a:lstStyle/>
+          <a:p>
+            <a:pPr algn="l" indent="0" marL="0">
+              <a:buNone/>
+            </a:pPr>
+            <a:r>
+              <a:rPr lang="en-US" sz="1000" b="1" dirty="0">
+                <a:solidFill>
+                  <a:srgbClr val="C9A24B"/>
+                </a:solidFill>
+                <a:latin typeface="Calibri" pitchFamily="34" charset="0"/>
+                <a:ea typeface="Calibri" pitchFamily="34" charset="-122"/>
+                <a:cs typeface="Calibri" pitchFamily="34" charset="-120"/>
+              </a:rPr>
+              <a:t>AndersonLogic AI</a:t>
+            </a:r>
+            <a:pPr algn="l" indent="0" marL="0">
+              <a:buNone/>
+            </a:pPr>
+            <a:r>
+              <a:rPr lang="en-US" sz="1000" dirty="0">
+                <a:solidFill>
+                  <a:srgbClr val="9AA0A6"/>
+                </a:solidFill>
+                <a:latin typeface="Calibri" pitchFamily="34" charset="0"/>
+                <a:ea typeface="Calibri" pitchFamily="34" charset="-122"/>
+                <a:cs typeface="Calibri" pitchFamily="34" charset="-120"/>
+              </a:rPr>
+              <a:t>   ·   BeHistorical</a:t>
+            </a:r>
+            <a:endParaRPr lang="en-US" sz="1000" dirty="0"/>
+          </a:p>
+        </p:txBody>
+      </p:sp>
+      <p:sp>
+        <p:nvSpPr>
+          <p:cNvPr id="20" name="Text 17"/>
+          <p:cNvSpPr/>
+          <p:nvPr/>
+        </p:nvSpPr>
+        <p:spPr>
+          <a:xfrm>
+            <a:off x="10607040" y="6355080"/>
+            <a:ext cx="1097280" cy="320040"/>
+          </a:xfrm>
+          <a:prstGeom prst="rect">
+            <a:avLst/>
+          </a:prstGeom>
+          <a:noFill/>
+          <a:ln/>
+        </p:spPr>
+        <p:txBody>
+          <a:bodyPr wrap="square" lIns="0" tIns="0" rIns="0" bIns="0" rtlCol="0" anchor="ctr"/>
+          <a:lstStyle/>
+          <a:p>
+            <a:pPr algn="r" indent="0" marL="0">
+              <a:buNone/>
+            </a:pPr>
+            <a:r>
+              <a:rPr lang="en-US" sz="1100" b="1" dirty="0">
+                <a:solidFill>
+                  <a:srgbClr val="9AA0A6"/>
                 </a:solidFill>
                 <a:latin typeface="Consolas" pitchFamily="34" charset="0"/>
                 <a:ea typeface="Consolas" pitchFamily="34" charset="-122"/>
                 <a:cs typeface="Consolas" pitchFamily="34" charset="-120"/>
               </a:rPr>
-              <a:t>ONE DATA LAYER</a:t>
-            </a:r>
-            <a:endParaRPr lang="en-US" sz="1050" dirty="0"/>
-          </a:p>
-        </p:txBody>
-      </p:sp>
-      <p:sp>
-        <p:nvSpPr>
-          <p:cNvPr id="11" name="Text 9"/>
-          <p:cNvSpPr/>
-          <p:nvPr/>
-        </p:nvSpPr>
-        <p:spPr>
-          <a:xfrm>
-            <a:off x="4416552" y="2944368"/>
-            <a:ext cx="2468880" cy="457200"/>
-          </a:xfrm>
-          <a:prstGeom prst="rect">
-            <a:avLst/>
-          </a:prstGeom>
-          <a:noFill/>
-          <a:ln/>
-        </p:spPr>
-        <p:txBody>
-          <a:bodyPr wrap="square" lIns="0" tIns="0" rIns="0" bIns="0" rtlCol="0" anchor="ctr"/>
-          <a:lstStyle/>
-          <a:p>
-            <a:pPr indent="0" marL="0">
-              <a:buNone/>
-            </a:pPr>
-            <a:r>
-              <a:rPr lang="en-US" sz="1900" b="1" dirty="0">
-                <a:solidFill>
-                  <a:srgbClr val="FFFFFF"/>
-                </a:solidFill>
-                <a:latin typeface="Bookman Old Style" pitchFamily="34" charset="0"/>
-                <a:ea typeface="Bookman Old Style" pitchFamily="34" charset="-122"/>
-                <a:cs typeface="Bookman Old Style" pitchFamily="34" charset="-120"/>
-              </a:rPr>
-              <a:t>Every response, analyzed</a:t>
-            </a:r>
-            <a:endParaRPr lang="en-US" sz="1900" dirty="0"/>
-          </a:p>
-        </p:txBody>
-      </p:sp>
-      <p:sp>
-        <p:nvSpPr>
-          <p:cNvPr id="12" name="Text 10"/>
-          <p:cNvSpPr/>
-          <p:nvPr/>
-        </p:nvSpPr>
-        <p:spPr>
-          <a:xfrm>
-            <a:off x="4416552" y="3474720"/>
-            <a:ext cx="2468880" cy="1280160"/>
-          </a:xfrm>
-          <a:prstGeom prst="rect">
-            <a:avLst/>
-          </a:prstGeom>
-          <a:noFill/>
-          <a:ln/>
-        </p:spPr>
-        <p:txBody>
-          <a:bodyPr wrap="square" lIns="0" tIns="0" rIns="0" bIns="0" rtlCol="0" anchor="t"/>
-          <a:lstStyle/>
-          <a:p>
-            <a:pPr indent="0" marL="0">
-              <a:buNone/>
-            </a:pPr>
-            <a:r>
-              <a:rPr lang="en-US" sz="1300" dirty="0">
-                <a:solidFill>
-                  <a:srgbClr val="9AA0A6"/>
-                </a:solidFill>
-                <a:latin typeface="Calibri" pitchFamily="34" charset="0"/>
-                <a:ea typeface="Calibri" pitchFamily="34" charset="-122"/>
-                <a:cs typeface="Calibri" pitchFamily="34" charset="-120"/>
-              </a:rPr>
-              <a:t>Answers, confidence, evidence, misconceptions, and skill gaps — captured and read by a single engine.</a:t>
-            </a:r>
-            <a:endParaRPr lang="en-US" sz="1300" dirty="0"/>
-          </a:p>
-        </p:txBody>
-      </p:sp>
-      <p:sp>
-        <p:nvSpPr>
-          <p:cNvPr id="13" name="Text 11"/>
-          <p:cNvSpPr/>
-          <p:nvPr/>
-        </p:nvSpPr>
-        <p:spPr>
-          <a:xfrm>
-            <a:off x="7086600" y="2377440"/>
-            <a:ext cx="457200" cy="2468880"/>
-          </a:xfrm>
-          <a:prstGeom prst="rect">
-            <a:avLst/>
-          </a:prstGeom>
-          <a:noFill/>
-          <a:ln/>
-        </p:spPr>
-        <p:txBody>
-          <a:bodyPr wrap="square" lIns="0" tIns="0" rIns="0" bIns="0" rtlCol="0" anchor="ctr"/>
-          <a:lstStyle/>
-          <a:p>
-            <a:pPr algn="ctr" indent="0" marL="0">
-              <a:buNone/>
-            </a:pPr>
-            <a:r>
-              <a:rPr lang="en-US" sz="2600" b="1" dirty="0">
-                <a:solidFill>
-                  <a:srgbClr val="C9A24B"/>
-                </a:solidFill>
-                <a:latin typeface="Calibri" pitchFamily="34" charset="0"/>
-                <a:ea typeface="Calibri" pitchFamily="34" charset="-122"/>
-                <a:cs typeface="Calibri" pitchFamily="34" charset="-120"/>
-              </a:rPr>
-              <a:t>→</a:t>
-            </a:r>
-            <a:endParaRPr lang="en-US" sz="2600" dirty="0"/>
-          </a:p>
-        </p:txBody>
-      </p:sp>
-      <p:sp>
-        <p:nvSpPr>
-          <p:cNvPr id="14" name="Shape 12"/>
-          <p:cNvSpPr/>
-          <p:nvPr/>
-        </p:nvSpPr>
-        <p:spPr>
-          <a:xfrm>
-            <a:off x="7543800" y="2377440"/>
-            <a:ext cx="4069080" cy="713232"/>
-          </a:xfrm>
-          <a:prstGeom prst="roundRect">
-            <a:avLst>
-              <a:gd name="adj" fmla="val 12821"/>
-            </a:avLst>
-          </a:prstGeom>
-          <a:solidFill>
-            <a:srgbClr val="24272A"/>
-          </a:solidFill>
-          <a:ln w="12700">
-            <a:solidFill>
-              <a:srgbClr val="2E3236"/>
-            </a:solidFill>
-            <a:prstDash val="solid"/>
-          </a:ln>
-        </p:spPr>
-      </p:sp>
-      <p:sp>
-        <p:nvSpPr>
-          <p:cNvPr id="15" name="Text 13"/>
-          <p:cNvSpPr/>
-          <p:nvPr/>
-        </p:nvSpPr>
-        <p:spPr>
-          <a:xfrm>
-            <a:off x="7763256" y="2505456"/>
-            <a:ext cx="3703320" cy="292608"/>
-          </a:xfrm>
-          <a:prstGeom prst="rect">
-            <a:avLst/>
-          </a:prstGeom>
-          <a:noFill/>
-          <a:ln/>
-        </p:spPr>
-        <p:txBody>
-          <a:bodyPr wrap="square" lIns="0" tIns="0" rIns="0" bIns="0" rtlCol="0" anchor="ctr"/>
-          <a:lstStyle/>
-          <a:p>
-            <a:pPr indent="0" marL="0">
-              <a:buNone/>
-            </a:pPr>
-            <a:r>
-              <a:rPr lang="en-US" sz="1600" b="1" dirty="0">
-                <a:solidFill>
-                  <a:srgbClr val="E4C878"/>
-                </a:solidFill>
-                <a:latin typeface="Bookman Old Style" pitchFamily="34" charset="0"/>
-                <a:ea typeface="Bookman Old Style" pitchFamily="34" charset="-122"/>
-                <a:cs typeface="Bookman Old Style" pitchFamily="34" charset="-120"/>
-              </a:rPr>
-              <a:t>Teacher Hub</a:t>
-            </a:r>
-            <a:endParaRPr lang="en-US" sz="1600" dirty="0"/>
-          </a:p>
-        </p:txBody>
-      </p:sp>
-      <p:sp>
-        <p:nvSpPr>
-          <p:cNvPr id="16" name="Text 14"/>
-          <p:cNvSpPr/>
-          <p:nvPr/>
-        </p:nvSpPr>
-        <p:spPr>
-          <a:xfrm>
-            <a:off x="7763256" y="2788920"/>
-            <a:ext cx="3703320" cy="256032"/>
-          </a:xfrm>
-          <a:prstGeom prst="rect">
-            <a:avLst/>
-          </a:prstGeom>
-          <a:noFill/>
-          <a:ln/>
-        </p:spPr>
-        <p:txBody>
-          <a:bodyPr wrap="square" lIns="0" tIns="0" rIns="0" bIns="0" rtlCol="0" anchor="ctr"/>
-          <a:lstStyle/>
-          <a:p>
-            <a:pPr indent="0" marL="0">
-              <a:buNone/>
-            </a:pPr>
-            <a:r>
-              <a:rPr lang="en-US" sz="1200" dirty="0">
-                <a:solidFill>
-                  <a:srgbClr val="9AA0A6"/>
-                </a:solidFill>
-                <a:latin typeface="Calibri" pitchFamily="34" charset="0"/>
-                <a:ea typeface="Calibri" pitchFamily="34" charset="-122"/>
-                <a:cs typeface="Calibri" pitchFamily="34" charset="-120"/>
-              </a:rPr>
-              <a:t>→ teachers act in real time</a:t>
-            </a:r>
-            <a:endParaRPr lang="en-US" sz="1200" dirty="0"/>
-          </a:p>
-        </p:txBody>
-      </p:sp>
-      <p:sp>
-        <p:nvSpPr>
-          <p:cNvPr id="17" name="Shape 15"/>
-          <p:cNvSpPr/>
-          <p:nvPr/>
-        </p:nvSpPr>
-        <p:spPr>
-          <a:xfrm>
-            <a:off x="7543800" y="3255264"/>
-            <a:ext cx="4069080" cy="713232"/>
-          </a:xfrm>
-          <a:prstGeom prst="roundRect">
-            <a:avLst>
-              <a:gd name="adj" fmla="val 12821"/>
-            </a:avLst>
-          </a:prstGeom>
-          <a:solidFill>
-            <a:srgbClr val="24272A"/>
-          </a:solidFill>
-          <a:ln w="12700">
-            <a:solidFill>
-              <a:srgbClr val="2E3236"/>
-            </a:solidFill>
-            <a:prstDash val="solid"/>
-          </a:ln>
-        </p:spPr>
-      </p:sp>
-      <p:sp>
-        <p:nvSpPr>
-          <p:cNvPr id="18" name="Text 16"/>
-          <p:cNvSpPr/>
-          <p:nvPr/>
-        </p:nvSpPr>
-        <p:spPr>
-          <a:xfrm>
-            <a:off x="7763256" y="3383280"/>
-            <a:ext cx="3703320" cy="292608"/>
-          </a:xfrm>
-          <a:prstGeom prst="rect">
-            <a:avLst/>
-          </a:prstGeom>
-          <a:noFill/>
-          <a:ln/>
-        </p:spPr>
-        <p:txBody>
-          <a:bodyPr wrap="square" lIns="0" tIns="0" rIns="0" bIns="0" rtlCol="0" anchor="ctr"/>
-          <a:lstStyle/>
-          <a:p>
-            <a:pPr indent="0" marL="0">
-              <a:buNone/>
-            </a:pPr>
-            <a:r>
-              <a:rPr lang="en-US" sz="1600" b="1" dirty="0">
-                <a:solidFill>
-                  <a:srgbClr val="E4C878"/>
-                </a:solidFill>
-                <a:latin typeface="Bookman Old Style" pitchFamily="34" charset="0"/>
-                <a:ea typeface="Bookman Old Style" pitchFamily="34" charset="-122"/>
-                <a:cs typeface="Bookman Old Style" pitchFamily="34" charset="-120"/>
-              </a:rPr>
-              <a:t>Study Guides</a:t>
-            </a:r>
-            <a:endParaRPr lang="en-US" sz="1600" dirty="0"/>
-          </a:p>
-        </p:txBody>
-      </p:sp>
-      <p:sp>
-        <p:nvSpPr>
-          <p:cNvPr id="19" name="Text 17"/>
-          <p:cNvSpPr/>
-          <p:nvPr/>
-        </p:nvSpPr>
-        <p:spPr>
-          <a:xfrm>
-            <a:off x="7763256" y="3666744"/>
-            <a:ext cx="3703320" cy="256032"/>
-          </a:xfrm>
-          <a:prstGeom prst="rect">
-            <a:avLst/>
-          </a:prstGeom>
-          <a:noFill/>
-          <a:ln/>
-        </p:spPr>
-        <p:txBody>
-          <a:bodyPr wrap="square" lIns="0" tIns="0" rIns="0" bIns="0" rtlCol="0" anchor="ctr"/>
-          <a:lstStyle/>
-          <a:p>
-            <a:pPr indent="0" marL="0">
-              <a:buNone/>
-            </a:pPr>
-            <a:r>
-              <a:rPr lang="en-US" sz="1200" dirty="0">
-                <a:solidFill>
-                  <a:srgbClr val="9AA0A6"/>
-                </a:solidFill>
-                <a:latin typeface="Calibri" pitchFamily="34" charset="0"/>
-                <a:ea typeface="Calibri" pitchFamily="34" charset="-122"/>
-                <a:cs typeface="Calibri" pitchFamily="34" charset="-120"/>
-              </a:rPr>
-              <a:t>→ students get a targeted plan</a:t>
-            </a:r>
-            <a:endParaRPr lang="en-US" sz="1200" dirty="0"/>
-          </a:p>
-        </p:txBody>
-      </p:sp>
-      <p:sp>
-        <p:nvSpPr>
-          <p:cNvPr id="20" name="Shape 18"/>
-          <p:cNvSpPr/>
-          <p:nvPr/>
-        </p:nvSpPr>
-        <p:spPr>
-          <a:xfrm>
-            <a:off x="7543800" y="4133088"/>
-            <a:ext cx="4069080" cy="713232"/>
-          </a:xfrm>
-          <a:prstGeom prst="roundRect">
-            <a:avLst>
-              <a:gd name="adj" fmla="val 12821"/>
-            </a:avLst>
-          </a:prstGeom>
-          <a:solidFill>
-            <a:srgbClr val="24272A"/>
-          </a:solidFill>
-          <a:ln w="12700">
-            <a:solidFill>
-              <a:srgbClr val="2E3236"/>
-            </a:solidFill>
-            <a:prstDash val="solid"/>
-          </a:ln>
-        </p:spPr>
-      </p:sp>
-      <p:sp>
-        <p:nvSpPr>
-          <p:cNvPr id="21" name="Text 19"/>
-          <p:cNvSpPr/>
-          <p:nvPr/>
-        </p:nvSpPr>
-        <p:spPr>
-          <a:xfrm>
-            <a:off x="7763256" y="4261104"/>
-            <a:ext cx="3703320" cy="292608"/>
-          </a:xfrm>
-          <a:prstGeom prst="rect">
-            <a:avLst/>
-          </a:prstGeom>
-          <a:noFill/>
-          <a:ln/>
-        </p:spPr>
-        <p:txBody>
-          <a:bodyPr wrap="square" lIns="0" tIns="0" rIns="0" bIns="0" rtlCol="0" anchor="ctr"/>
-          <a:lstStyle/>
-          <a:p>
-            <a:pPr indent="0" marL="0">
-              <a:buNone/>
-            </a:pPr>
-            <a:r>
-              <a:rPr lang="en-US" sz="1600" b="1" dirty="0">
-                <a:solidFill>
-                  <a:srgbClr val="E4C878"/>
-                </a:solidFill>
-                <a:latin typeface="Bookman Old Style" pitchFamily="34" charset="0"/>
-                <a:ea typeface="Bookman Old Style" pitchFamily="34" charset="-122"/>
-                <a:cs typeface="Bookman Old Style" pitchFamily="34" charset="-120"/>
-              </a:rPr>
-              <a:t>The Dispatch</a:t>
-            </a:r>
-            <a:endParaRPr lang="en-US" sz="1600" dirty="0"/>
-          </a:p>
-        </p:txBody>
-      </p:sp>
-      <p:sp>
-        <p:nvSpPr>
-          <p:cNvPr id="22" name="Text 20"/>
-          <p:cNvSpPr/>
-          <p:nvPr/>
-        </p:nvSpPr>
-        <p:spPr>
-          <a:xfrm>
-            <a:off x="7763256" y="4544568"/>
-            <a:ext cx="3703320" cy="256032"/>
-          </a:xfrm>
-          <a:prstGeom prst="rect">
-            <a:avLst/>
-          </a:prstGeom>
-          <a:noFill/>
-          <a:ln/>
-        </p:spPr>
-        <p:txBody>
-          <a:bodyPr wrap="square" lIns="0" tIns="0" rIns="0" bIns="0" rtlCol="0" anchor="ctr"/>
-          <a:lstStyle/>
-          <a:p>
-            <a:pPr indent="0" marL="0">
-              <a:buNone/>
-            </a:pPr>
-            <a:r>
-              <a:rPr lang="en-US" sz="1200" dirty="0">
-                <a:solidFill>
-                  <a:srgbClr val="9AA0A6"/>
-                </a:solidFill>
-                <a:latin typeface="Calibri" pitchFamily="34" charset="0"/>
-                <a:ea typeface="Calibri" pitchFamily="34" charset="-122"/>
-                <a:cs typeface="Calibri" pitchFamily="34" charset="-120"/>
-              </a:rPr>
-              <a:t>→ families stay in the loop</a:t>
-            </a:r>
-            <a:endParaRPr lang="en-US" sz="1200" dirty="0"/>
-          </a:p>
-        </p:txBody>
-      </p:sp>
-      <p:sp>
-        <p:nvSpPr>
-          <p:cNvPr id="23" name="Text 21"/>
-          <p:cNvSpPr/>
-          <p:nvPr/>
-        </p:nvSpPr>
-        <p:spPr>
-          <a:xfrm>
-            <a:off x="640080" y="5212080"/>
-            <a:ext cx="10972800" cy="457200"/>
-          </a:xfrm>
-          <a:prstGeom prst="rect">
-            <a:avLst/>
-          </a:prstGeom>
-          <a:noFill/>
-          <a:ln/>
-        </p:spPr>
-        <p:txBody>
-          <a:bodyPr wrap="square" lIns="0" tIns="0" rIns="0" bIns="0" rtlCol="0" anchor="ctr"/>
-          <a:lstStyle/>
-          <a:p>
-            <a:pPr indent="0" marL="0">
-              <a:buNone/>
-            </a:pPr>
-            <a:r>
-              <a:rPr lang="en-US" sz="1600" b="1" i="1" dirty="0">
-                <a:solidFill>
-                  <a:srgbClr val="C9A24B"/>
-                </a:solidFill>
-                <a:latin typeface="Bookman Old Style" pitchFamily="34" charset="0"/>
-                <a:ea typeface="Bookman Old Style" pitchFamily="34" charset="-122"/>
-                <a:cs typeface="Bookman Old Style" pitchFamily="34" charset="-120"/>
-              </a:rPr>
-              <a:t>Build the lesson once — and everyone around the student is served automatically.</a:t>
-            </a:r>
-            <a:endParaRPr lang="en-US" sz="1600" dirty="0"/>
-          </a:p>
-        </p:txBody>
-      </p:sp>
-      <p:sp>
-        <p:nvSpPr>
-          <p:cNvPr id="24" name="Text 22"/>
-          <p:cNvSpPr/>
-          <p:nvPr/>
-        </p:nvSpPr>
-        <p:spPr>
-          <a:xfrm>
-            <a:off x="502920" y="6400800"/>
-            <a:ext cx="7315200" cy="274320"/>
-          </a:xfrm>
-          <a:prstGeom prst="rect">
-            <a:avLst/>
-          </a:prstGeom>
-          <a:noFill/>
-          <a:ln/>
-        </p:spPr>
-        <p:txBody>
-          <a:bodyPr wrap="square" lIns="0" tIns="0" rIns="0" bIns="0" rtlCol="0" anchor="ctr"/>
-          <a:lstStyle/>
-          <a:p>
-            <a:pPr algn="l" indent="0" marL="0">
-              <a:buNone/>
-            </a:pPr>
-            <a:r>
-              <a:rPr lang="en-US" sz="1000" b="1" dirty="0">
-                <a:solidFill>
-                  <a:srgbClr val="C9A24B"/>
-                </a:solidFill>
-                <a:latin typeface="Calibri" pitchFamily="34" charset="0"/>
-                <a:ea typeface="Calibri" pitchFamily="34" charset="-122"/>
-                <a:cs typeface="Calibri" pitchFamily="34" charset="-120"/>
-              </a:rPr>
-              <a:t>AndersonLogic AI</a:t>
-            </a:r>
-            <a:pPr algn="l" indent="0" marL="0">
-              <a:buNone/>
-            </a:pPr>
-            <a:r>
-              <a:rPr lang="en-US" sz="1000" dirty="0">
-                <a:solidFill>
-                  <a:srgbClr val="9AA0A6"/>
-                </a:solidFill>
-                <a:latin typeface="Calibri" pitchFamily="34" charset="0"/>
-                <a:ea typeface="Calibri" pitchFamily="34" charset="-122"/>
-                <a:cs typeface="Calibri" pitchFamily="34" charset="-120"/>
-              </a:rPr>
-              <a:t>   ·   BeHistorical</a:t>
-            </a:r>
-            <a:endParaRPr lang="en-US" sz="1000" dirty="0"/>
-          </a:p>
-        </p:txBody>
-      </p:sp>
-      <p:sp>
-        <p:nvSpPr>
-          <p:cNvPr id="25" name="Text 23"/>
-          <p:cNvSpPr/>
-          <p:nvPr/>
-        </p:nvSpPr>
-        <p:spPr>
-          <a:xfrm>
-            <a:off x="10607040" y="6355080"/>
-            <a:ext cx="1097280" cy="320040"/>
-          </a:xfrm>
-          <a:prstGeom prst="rect">
-            <a:avLst/>
-          </a:prstGeom>
-          <a:noFill/>
-          <a:ln/>
-        </p:spPr>
-        <p:txBody>
-          <a:bodyPr wrap="square" lIns="0" tIns="0" rIns="0" bIns="0" rtlCol="0" anchor="ctr"/>
-          <a:lstStyle/>
-          <a:p>
-            <a:pPr algn="r" indent="0" marL="0">
-              <a:buNone/>
-            </a:pPr>
-            <a:r>
-              <a:rPr lang="en-US" sz="1100" b="1" dirty="0">
-                <a:solidFill>
-                  <a:srgbClr val="9AA0A6"/>
-                </a:solidFill>
-                <a:latin typeface="Consolas" pitchFamily="34" charset="0"/>
-                <a:ea typeface="Consolas" pitchFamily="34" charset="-122"/>
-                <a:cs typeface="Consolas" pitchFamily="34" charset="-120"/>
-              </a:rPr>
-              <a:t>13 / 15</a:t>
-            </a:r>
-            <a:endParaRPr lang="en-US" sz="1100" dirty="0"/>
-          </a:p>
-        </p:txBody>
-      </p:sp>
-    </p:spTree>
-  </p:cSld>
-  <p:clrMapOvr>
-    <a:masterClrMapping/>
-  </p:clrMapOvr>
-</p:sld>
-</file>
-
-<file path=ppt/slides/slide14.xml><?xml version="1.0" encoding="utf-8"?>
-<p:sld xmlns:a="http://schemas.openxmlformats.org/drawingml/2006/main" xmlns:r="http://schemas.openxmlformats.org/officeDocument/2006/relationships" xmlns:p="http://schemas.openxmlformats.org/presentationml/2006/main">
-  <p:cSld name="Slide 14">
-    <p:bg>
-      <p:bgPr>
-        <a:solidFill>
-          <a:srgbClr val="F4EEE2"/>
-        </a:solidFill>
-      </p:bgPr>
-    </p:bg>
-    <p:spTree>
-      <p:nvGrpSpPr>
-        <p:cNvPr id="1" name=""/>
-        <p:cNvGrpSpPr/>
-        <p:nvPr/>
-      </p:nvGrpSpPr>
-      <p:grpSpPr>
-        <a:xfrm>
-          <a:off x="0" y="0"/>
-          <a:ext cx="0" cy="0"/>
-          <a:chOff x="0" y="0"/>
-          <a:chExt cx="0" cy="0"/>
-        </a:xfrm>
-      </p:grpSpPr>
-      <p:sp>
-        <p:nvSpPr>
-          <p:cNvPr id="2" name="Text 0"/>
-          <p:cNvSpPr/>
-          <p:nvPr/>
-        </p:nvSpPr>
-        <p:spPr>
-          <a:xfrm>
-            <a:off x="640080" y="548640"/>
-            <a:ext cx="8229600" cy="274320"/>
-          </a:xfrm>
-          <a:prstGeom prst="rect">
-            <a:avLst/>
-          </a:prstGeom>
-          <a:noFill/>
-          <a:ln/>
-        </p:spPr>
-        <p:txBody>
-          <a:bodyPr wrap="square" lIns="0" tIns="0" rIns="0" bIns="0" rtlCol="0" anchor="ctr"/>
-          <a:lstStyle/>
-          <a:p>
-            <a:pPr algn="l" indent="0" marL="0">
-              <a:buNone/>
-            </a:pPr>
-            <a:r>
-              <a:rPr lang="en-US" sz="1200" b="1" spc="300" kern="0" dirty="0">
-                <a:solidFill>
-                  <a:srgbClr val="9A7A28"/>
-                </a:solidFill>
-                <a:latin typeface="Consolas" pitchFamily="34" charset="0"/>
-                <a:ea typeface="Consolas" pitchFamily="34" charset="-122"/>
-                <a:cs typeface="Consolas" pitchFamily="34" charset="-120"/>
-              </a:rPr>
-              <a:t>WHERE THE BUILD STANDS</a:t>
-            </a:r>
-            <a:endParaRPr lang="en-US" sz="1200" dirty="0"/>
-          </a:p>
-        </p:txBody>
-      </p:sp>
-      <p:sp>
-        <p:nvSpPr>
-          <p:cNvPr id="3" name="Text 1"/>
-          <p:cNvSpPr/>
-          <p:nvPr/>
-        </p:nvSpPr>
-        <p:spPr>
-          <a:xfrm>
-            <a:off x="603504" y="868680"/>
-            <a:ext cx="10972800" cy="731520"/>
-          </a:xfrm>
-          <a:prstGeom prst="rect">
-            <a:avLst/>
-          </a:prstGeom>
-          <a:noFill/>
-          <a:ln/>
-        </p:spPr>
-        <p:txBody>
-          <a:bodyPr wrap="square" lIns="0" tIns="0" rIns="0" bIns="0" rtlCol="0" anchor="ctr"/>
-          <a:lstStyle/>
-          <a:p>
-            <a:pPr indent="0" marL="0">
-              <a:buNone/>
-            </a:pPr>
-            <a:r>
-              <a:rPr lang="en-US" sz="3200" b="1" dirty="0">
-                <a:solidFill>
-                  <a:srgbClr val="2B2723"/>
-                </a:solidFill>
-                <a:latin typeface="Bookman Old Style" pitchFamily="34" charset="0"/>
-                <a:ea typeface="Bookman Old Style" pitchFamily="34" charset="-122"/>
-                <a:cs typeface="Bookman Old Style" pitchFamily="34" charset="-120"/>
-              </a:rPr>
-              <a:t>What's live, and what's next</a:t>
-            </a:r>
-            <a:endParaRPr lang="en-US" sz="3200" dirty="0"/>
-          </a:p>
-        </p:txBody>
-      </p:sp>
-      <p:sp>
-        <p:nvSpPr>
-          <p:cNvPr id="4" name="Shape 2"/>
-          <p:cNvSpPr/>
-          <p:nvPr/>
-        </p:nvSpPr>
-        <p:spPr>
-          <a:xfrm>
-            <a:off x="640080" y="2103120"/>
-            <a:ext cx="3520440" cy="3383280"/>
-          </a:xfrm>
-          <a:prstGeom prst="roundRect">
-            <a:avLst>
-              <a:gd name="adj" fmla="val 3243"/>
-            </a:avLst>
-          </a:prstGeom>
-          <a:solidFill>
-            <a:srgbClr val="FCF8F0"/>
-          </a:solidFill>
-          <a:ln w="12700">
-            <a:solidFill>
-              <a:srgbClr val="E4DBC9"/>
-            </a:solidFill>
-            <a:prstDash val="solid"/>
-          </a:ln>
-        </p:spPr>
-      </p:sp>
-      <p:sp>
-        <p:nvSpPr>
-          <p:cNvPr id="5" name="Shape 3"/>
-          <p:cNvSpPr/>
-          <p:nvPr/>
-        </p:nvSpPr>
-        <p:spPr>
-          <a:xfrm>
-            <a:off x="914400" y="2377440"/>
-            <a:ext cx="1188720" cy="310896"/>
-          </a:xfrm>
-          <a:prstGeom prst="roundRect">
-            <a:avLst>
-              <a:gd name="adj" fmla="val 50000"/>
-            </a:avLst>
-          </a:prstGeom>
-          <a:solidFill>
-            <a:srgbClr val="DDECE0"/>
-          </a:solidFill>
-          <a:ln w="12700">
-            <a:solidFill>
-              <a:srgbClr val="5AA668"/>
-            </a:solidFill>
-            <a:prstDash val="solid"/>
-          </a:ln>
-        </p:spPr>
-      </p:sp>
-      <p:sp>
-        <p:nvSpPr>
-          <p:cNvPr id="6" name="Text 4"/>
-          <p:cNvSpPr/>
-          <p:nvPr/>
-        </p:nvSpPr>
-        <p:spPr>
-          <a:xfrm>
-            <a:off x="914400" y="2377440"/>
-            <a:ext cx="1188720" cy="310896"/>
-          </a:xfrm>
-          <a:prstGeom prst="rect">
-            <a:avLst/>
-          </a:prstGeom>
-          <a:noFill/>
-          <a:ln/>
-        </p:spPr>
-        <p:txBody>
-          <a:bodyPr wrap="square" lIns="0" tIns="0" rIns="0" bIns="0" rtlCol="0" anchor="ctr"/>
-          <a:lstStyle/>
-          <a:p>
-            <a:pPr algn="ctr" indent="0" marL="0">
-              <a:buNone/>
-            </a:pPr>
-            <a:r>
-              <a:rPr lang="en-US" sz="950" b="1" spc="100" kern="0" dirty="0">
-                <a:solidFill>
-                  <a:srgbClr val="3D7A4D"/>
-                </a:solidFill>
-                <a:latin typeface="Consolas" pitchFamily="34" charset="0"/>
-                <a:ea typeface="Consolas" pitchFamily="34" charset="-122"/>
-                <a:cs typeface="Consolas" pitchFamily="34" charset="-120"/>
-              </a:rPr>
-              <a:t>LIVE NOW</a:t>
-            </a:r>
-            <a:endParaRPr lang="en-US" sz="950" dirty="0"/>
-          </a:p>
-        </p:txBody>
-      </p:sp>
-      <p:sp>
-        <p:nvSpPr>
-          <p:cNvPr id="7" name="Text 5"/>
-          <p:cNvSpPr/>
-          <p:nvPr/>
-        </p:nvSpPr>
-        <p:spPr>
-          <a:xfrm>
-            <a:off x="914400" y="2971800"/>
-            <a:ext cx="3017520" cy="457200"/>
-          </a:xfrm>
-          <a:prstGeom prst="rect">
-            <a:avLst/>
-          </a:prstGeom>
-          <a:noFill/>
-          <a:ln/>
-        </p:spPr>
-        <p:txBody>
-          <a:bodyPr wrap="square" lIns="0" tIns="0" rIns="0" bIns="0" rtlCol="0" anchor="t"/>
-          <a:lstStyle/>
-          <a:p>
-            <a:pPr indent="0" marL="0">
-              <a:buNone/>
-            </a:pPr>
-            <a:r>
-              <a:rPr lang="en-US" sz="1350" b="1" dirty="0">
-                <a:solidFill>
-                  <a:srgbClr val="9A7A28"/>
-                </a:solidFill>
-                <a:latin typeface="Calibri" pitchFamily="34" charset="0"/>
-                <a:ea typeface="Calibri" pitchFamily="34" charset="-122"/>
-                <a:cs typeface="Calibri" pitchFamily="34" charset="-120"/>
-              </a:rPr>
-              <a:t>› </a:t>
-            </a:r>
-            <a:pPr indent="0" marL="0">
-              <a:buNone/>
-            </a:pPr>
-            <a:r>
-              <a:rPr lang="en-US" sz="1350" dirty="0">
-                <a:solidFill>
-                  <a:srgbClr val="2B2723"/>
-                </a:solidFill>
-                <a:latin typeface="Calibri" pitchFamily="34" charset="0"/>
-                <a:ea typeface="Calibri" pitchFamily="34" charset="-122"/>
-                <a:cs typeface="Calibri" pitchFamily="34" charset="-120"/>
-              </a:rPr>
-              <a:t>77 complete lessons</a:t>
-            </a:r>
-            <a:pPr indent="0" marL="0">
-              <a:buNone/>
-            </a:pPr>
-            <a:r>
-              <a:rPr lang="en-US" sz="1150" i="1" dirty="0">
-                <a:solidFill>
-                  <a:srgbClr val="6E675C"/>
-                </a:solidFill>
-                <a:latin typeface="Calibri" pitchFamily="34" charset="0"/>
-                <a:ea typeface="Calibri" pitchFamily="34" charset="-122"/>
-                <a:cs typeface="Calibri" pitchFamily="34" charset="-120"/>
-              </a:rPr>
-              <a:t>  · all 9 units + Foundations</a:t>
-            </a:r>
-            <a:endParaRPr lang="en-US" sz="1350" dirty="0"/>
-          </a:p>
-        </p:txBody>
-      </p:sp>
-      <p:sp>
-        <p:nvSpPr>
-          <p:cNvPr id="8" name="Text 6"/>
-          <p:cNvSpPr/>
-          <p:nvPr/>
-        </p:nvSpPr>
-        <p:spPr>
-          <a:xfrm>
-            <a:off x="914400" y="3483864"/>
-            <a:ext cx="3017520" cy="457200"/>
-          </a:xfrm>
-          <a:prstGeom prst="rect">
-            <a:avLst/>
-          </a:prstGeom>
-          <a:noFill/>
-          <a:ln/>
-        </p:spPr>
-        <p:txBody>
-          <a:bodyPr wrap="square" lIns="0" tIns="0" rIns="0" bIns="0" rtlCol="0" anchor="t"/>
-          <a:lstStyle/>
-          <a:p>
-            <a:pPr indent="0" marL="0">
-              <a:buNone/>
-            </a:pPr>
-            <a:r>
-              <a:rPr lang="en-US" sz="1350" b="1" dirty="0">
-                <a:solidFill>
-                  <a:srgbClr val="9A7A28"/>
-                </a:solidFill>
-                <a:latin typeface="Calibri" pitchFamily="34" charset="0"/>
-                <a:ea typeface="Calibri" pitchFamily="34" charset="-122"/>
-                <a:cs typeface="Calibri" pitchFamily="34" charset="-120"/>
-              </a:rPr>
-              <a:t>› </a:t>
-            </a:r>
-            <a:pPr indent="0" marL="0">
-              <a:buNone/>
-            </a:pPr>
-            <a:r>
-              <a:rPr lang="en-US" sz="1350" dirty="0">
-                <a:solidFill>
-                  <a:srgbClr val="2B2723"/>
-                </a:solidFill>
-                <a:latin typeface="Calibri" pitchFamily="34" charset="0"/>
-                <a:ea typeface="Calibri" pitchFamily="34" charset="-122"/>
-                <a:cs typeface="Calibri" pitchFamily="34" charset="-120"/>
-              </a:rPr>
-              <a:t>61 BeInTheRoom simulations</a:t>
-            </a:r>
-            <a:endParaRPr lang="en-US" sz="1350" dirty="0"/>
-          </a:p>
-        </p:txBody>
-      </p:sp>
-      <p:sp>
-        <p:nvSpPr>
-          <p:cNvPr id="9" name="Text 7"/>
-          <p:cNvSpPr/>
-          <p:nvPr/>
-        </p:nvSpPr>
-        <p:spPr>
-          <a:xfrm>
-            <a:off x="914400" y="3995928"/>
-            <a:ext cx="3017520" cy="457200"/>
-          </a:xfrm>
-          <a:prstGeom prst="rect">
-            <a:avLst/>
-          </a:prstGeom>
-          <a:noFill/>
-          <a:ln/>
-        </p:spPr>
-        <p:txBody>
-          <a:bodyPr wrap="square" lIns="0" tIns="0" rIns="0" bIns="0" rtlCol="0" anchor="t"/>
-          <a:lstStyle/>
-          <a:p>
-            <a:pPr indent="0" marL="0">
-              <a:buNone/>
-            </a:pPr>
-            <a:r>
-              <a:rPr lang="en-US" sz="1350" b="1" dirty="0">
-                <a:solidFill>
-                  <a:srgbClr val="9A7A28"/>
-                </a:solidFill>
-                <a:latin typeface="Calibri" pitchFamily="34" charset="0"/>
-                <a:ea typeface="Calibri" pitchFamily="34" charset="-122"/>
-                <a:cs typeface="Calibri" pitchFamily="34" charset="-120"/>
-              </a:rPr>
-              <a:t>› </a:t>
-            </a:r>
-            <a:pPr indent="0" marL="0">
-              <a:buNone/>
-            </a:pPr>
-            <a:r>
-              <a:rPr lang="en-US" sz="1350" dirty="0">
-                <a:solidFill>
-                  <a:srgbClr val="2B2723"/>
-                </a:solidFill>
-                <a:latin typeface="Calibri" pitchFamily="34" charset="0"/>
-                <a:ea typeface="Calibri" pitchFamily="34" charset="-122"/>
-                <a:cs typeface="Calibri" pitchFamily="34" charset="-120"/>
-              </a:rPr>
-              <a:t>AI coach + MagicSchool workflow</a:t>
-            </a:r>
-            <a:endParaRPr lang="en-US" sz="1350" dirty="0"/>
-          </a:p>
-        </p:txBody>
-      </p:sp>
-      <p:sp>
-        <p:nvSpPr>
-          <p:cNvPr id="10" name="Text 8"/>
-          <p:cNvSpPr/>
-          <p:nvPr/>
-        </p:nvSpPr>
-        <p:spPr>
-          <a:xfrm>
-            <a:off x="914400" y="4507992"/>
-            <a:ext cx="3017520" cy="457200"/>
-          </a:xfrm>
-          <a:prstGeom prst="rect">
-            <a:avLst/>
-          </a:prstGeom>
-          <a:noFill/>
-          <a:ln/>
-        </p:spPr>
-        <p:txBody>
-          <a:bodyPr wrap="square" lIns="0" tIns="0" rIns="0" bIns="0" rtlCol="0" anchor="t"/>
-          <a:lstStyle/>
-          <a:p>
-            <a:pPr indent="0" marL="0">
-              <a:buNone/>
-            </a:pPr>
-            <a:r>
-              <a:rPr lang="en-US" sz="1350" b="1" dirty="0">
-                <a:solidFill>
-                  <a:srgbClr val="9A7A28"/>
-                </a:solidFill>
-                <a:latin typeface="Calibri" pitchFamily="34" charset="0"/>
-                <a:ea typeface="Calibri" pitchFamily="34" charset="-122"/>
-                <a:cs typeface="Calibri" pitchFamily="34" charset="-120"/>
-              </a:rPr>
-              <a:t>› </a:t>
-            </a:r>
-            <a:pPr indent="0" marL="0">
-              <a:buNone/>
-            </a:pPr>
-            <a:r>
-              <a:rPr lang="en-US" sz="1350" dirty="0">
-                <a:solidFill>
-                  <a:srgbClr val="2B2723"/>
-                </a:solidFill>
-                <a:latin typeface="Calibri" pitchFamily="34" charset="0"/>
-                <a:ea typeface="Calibri" pitchFamily="34" charset="-122"/>
-                <a:cs typeface="Calibri" pitchFamily="34" charset="-120"/>
-              </a:rPr>
-              <a:t>Command Center &amp; validation</a:t>
-            </a:r>
-            <a:endParaRPr lang="en-US" sz="1350" dirty="0"/>
-          </a:p>
-        </p:txBody>
-      </p:sp>
-      <p:sp>
-        <p:nvSpPr>
-          <p:cNvPr id="11" name="Text 9"/>
-          <p:cNvSpPr/>
-          <p:nvPr/>
-        </p:nvSpPr>
-        <p:spPr>
-          <a:xfrm>
-            <a:off x="914400" y="5020056"/>
-            <a:ext cx="3017520" cy="457200"/>
-          </a:xfrm>
-          <a:prstGeom prst="rect">
-            <a:avLst/>
-          </a:prstGeom>
-          <a:noFill/>
-          <a:ln/>
-        </p:spPr>
-        <p:txBody>
-          <a:bodyPr wrap="square" lIns="0" tIns="0" rIns="0" bIns="0" rtlCol="0" anchor="t"/>
-          <a:lstStyle/>
-          <a:p>
-            <a:pPr indent="0" marL="0">
-              <a:buNone/>
-            </a:pPr>
-            <a:r>
-              <a:rPr lang="en-US" sz="1350" b="1" dirty="0">
-                <a:solidFill>
-                  <a:srgbClr val="9A7A28"/>
-                </a:solidFill>
-                <a:latin typeface="Calibri" pitchFamily="34" charset="0"/>
-                <a:ea typeface="Calibri" pitchFamily="34" charset="-122"/>
-                <a:cs typeface="Calibri" pitchFamily="34" charset="-120"/>
-              </a:rPr>
-              <a:t>› </a:t>
-            </a:r>
-            <a:pPr indent="0" marL="0">
-              <a:buNone/>
-            </a:pPr>
-            <a:r>
-              <a:rPr lang="en-US" sz="1350" dirty="0">
-                <a:solidFill>
-                  <a:srgbClr val="2B2723"/>
-                </a:solidFill>
-                <a:latin typeface="Calibri" pitchFamily="34" charset="0"/>
-                <a:ea typeface="Calibri" pitchFamily="34" charset="-122"/>
-                <a:cs typeface="Calibri" pitchFamily="34" charset="-120"/>
-              </a:rPr>
-              <a:t>Teacher Hub</a:t>
-            </a:r>
-            <a:pPr indent="0" marL="0">
-              <a:buNone/>
-            </a:pPr>
-            <a:r>
-              <a:rPr lang="en-US" sz="1150" i="1" dirty="0">
-                <a:solidFill>
-                  <a:srgbClr val="6E675C"/>
-                </a:solidFill>
-                <a:latin typeface="Calibri" pitchFamily="34" charset="0"/>
-                <a:ea typeface="Calibri" pitchFamily="34" charset="-122"/>
-                <a:cs typeface="Calibri" pitchFamily="34" charset="-120"/>
-              </a:rPr>
-              <a:t>  · Topic 1.1 prototype</a:t>
-            </a:r>
-            <a:endParaRPr lang="en-US" sz="1350" dirty="0"/>
-          </a:p>
-        </p:txBody>
-      </p:sp>
-      <p:sp>
-        <p:nvSpPr>
-          <p:cNvPr id="12" name="Shape 10"/>
-          <p:cNvSpPr/>
-          <p:nvPr/>
-        </p:nvSpPr>
-        <p:spPr>
-          <a:xfrm>
-            <a:off x="4434840" y="2103120"/>
-            <a:ext cx="3520440" cy="3383280"/>
-          </a:xfrm>
-          <a:prstGeom prst="roundRect">
-            <a:avLst>
-              <a:gd name="adj" fmla="val 3243"/>
-            </a:avLst>
-          </a:prstGeom>
-          <a:solidFill>
-            <a:srgbClr val="FCF8F0"/>
-          </a:solidFill>
-          <a:ln w="12700">
-            <a:solidFill>
-              <a:srgbClr val="E4DBC9"/>
-            </a:solidFill>
-            <a:prstDash val="solid"/>
-          </a:ln>
-        </p:spPr>
-      </p:sp>
-      <p:sp>
-        <p:nvSpPr>
-          <p:cNvPr id="13" name="Shape 11"/>
-          <p:cNvSpPr/>
-          <p:nvPr/>
-        </p:nvSpPr>
-        <p:spPr>
-          <a:xfrm>
-            <a:off x="4709160" y="2377440"/>
-            <a:ext cx="1737360" cy="310896"/>
-          </a:xfrm>
-          <a:prstGeom prst="roundRect">
-            <a:avLst>
-              <a:gd name="adj" fmla="val 50000"/>
-            </a:avLst>
-          </a:prstGeom>
-          <a:solidFill>
-            <a:srgbClr val="F2E6C9"/>
-          </a:solidFill>
-          <a:ln w="12700">
-            <a:solidFill>
-              <a:srgbClr val="C9A24B"/>
-            </a:solidFill>
-            <a:prstDash val="solid"/>
-          </a:ln>
-        </p:spPr>
-      </p:sp>
-      <p:sp>
-        <p:nvSpPr>
-          <p:cNvPr id="14" name="Text 12"/>
-          <p:cNvSpPr/>
-          <p:nvPr/>
-        </p:nvSpPr>
-        <p:spPr>
-          <a:xfrm>
-            <a:off x="4709160" y="2377440"/>
-            <a:ext cx="1737360" cy="310896"/>
-          </a:xfrm>
-          <a:prstGeom prst="rect">
-            <a:avLst/>
-          </a:prstGeom>
-          <a:noFill/>
-          <a:ln/>
-        </p:spPr>
-        <p:txBody>
-          <a:bodyPr wrap="square" lIns="0" tIns="0" rIns="0" bIns="0" rtlCol="0" anchor="ctr"/>
-          <a:lstStyle/>
-          <a:p>
-            <a:pPr algn="ctr" indent="0" marL="0">
-              <a:buNone/>
-            </a:pPr>
-            <a:r>
-              <a:rPr lang="en-US" sz="950" b="1" spc="100" kern="0" dirty="0">
-                <a:solidFill>
-                  <a:srgbClr val="9A7A28"/>
-                </a:solidFill>
-                <a:latin typeface="Consolas" pitchFamily="34" charset="0"/>
-                <a:ea typeface="Consolas" pitchFamily="34" charset="-122"/>
-                <a:cs typeface="Consolas" pitchFamily="34" charset="-120"/>
-              </a:rPr>
-              <a:t>IN DEVELOPMENT</a:t>
-            </a:r>
-            <a:endParaRPr lang="en-US" sz="950" dirty="0"/>
-          </a:p>
-        </p:txBody>
-      </p:sp>
-      <p:sp>
-        <p:nvSpPr>
-          <p:cNvPr id="15" name="Text 13"/>
-          <p:cNvSpPr/>
-          <p:nvPr/>
-        </p:nvSpPr>
-        <p:spPr>
-          <a:xfrm>
-            <a:off x="4709160" y="2971800"/>
-            <a:ext cx="3017520" cy="457200"/>
-          </a:xfrm>
-          <a:prstGeom prst="rect">
-            <a:avLst/>
-          </a:prstGeom>
-          <a:noFill/>
-          <a:ln/>
-        </p:spPr>
-        <p:txBody>
-          <a:bodyPr wrap="square" lIns="0" tIns="0" rIns="0" bIns="0" rtlCol="0" anchor="t"/>
-          <a:lstStyle/>
-          <a:p>
-            <a:pPr indent="0" marL="0">
-              <a:buNone/>
-            </a:pPr>
-            <a:r>
-              <a:rPr lang="en-US" sz="1350" b="1" dirty="0">
-                <a:solidFill>
-                  <a:srgbClr val="9A7A28"/>
-                </a:solidFill>
-                <a:latin typeface="Calibri" pitchFamily="34" charset="0"/>
-                <a:ea typeface="Calibri" pitchFamily="34" charset="-122"/>
-                <a:cs typeface="Calibri" pitchFamily="34" charset="-120"/>
-              </a:rPr>
-              <a:t>› </a:t>
-            </a:r>
-            <a:pPr indent="0" marL="0">
-              <a:buNone/>
-            </a:pPr>
-            <a:r>
-              <a:rPr lang="en-US" sz="1350" dirty="0">
-                <a:solidFill>
-                  <a:srgbClr val="2B2723"/>
-                </a:solidFill>
-                <a:latin typeface="Calibri" pitchFamily="34" charset="0"/>
-                <a:ea typeface="Calibri" pitchFamily="34" charset="-122"/>
-                <a:cs typeface="Calibri" pitchFamily="34" charset="-120"/>
-              </a:rPr>
-              <a:t>Personalized study guides</a:t>
-            </a:r>
-            <a:endParaRPr lang="en-US" sz="1350" dirty="0"/>
-          </a:p>
-        </p:txBody>
-      </p:sp>
-      <p:sp>
-        <p:nvSpPr>
-          <p:cNvPr id="16" name="Text 14"/>
-          <p:cNvSpPr/>
-          <p:nvPr/>
-        </p:nvSpPr>
-        <p:spPr>
-          <a:xfrm>
-            <a:off x="4709160" y="3483864"/>
-            <a:ext cx="3017520" cy="457200"/>
-          </a:xfrm>
-          <a:prstGeom prst="rect">
-            <a:avLst/>
-          </a:prstGeom>
-          <a:noFill/>
-          <a:ln/>
-        </p:spPr>
-        <p:txBody>
-          <a:bodyPr wrap="square" lIns="0" tIns="0" rIns="0" bIns="0" rtlCol="0" anchor="t"/>
-          <a:lstStyle/>
-          <a:p>
-            <a:pPr indent="0" marL="0">
-              <a:buNone/>
-            </a:pPr>
-            <a:r>
-              <a:rPr lang="en-US" sz="1350" b="1" dirty="0">
-                <a:solidFill>
-                  <a:srgbClr val="9A7A28"/>
-                </a:solidFill>
-                <a:latin typeface="Calibri" pitchFamily="34" charset="0"/>
-                <a:ea typeface="Calibri" pitchFamily="34" charset="-122"/>
-                <a:cs typeface="Calibri" pitchFamily="34" charset="-120"/>
-              </a:rPr>
-              <a:t>› </a:t>
-            </a:r>
-            <a:pPr indent="0" marL="0">
-              <a:buNone/>
-            </a:pPr>
-            <a:r>
-              <a:rPr lang="en-US" sz="1350" dirty="0">
-                <a:solidFill>
-                  <a:srgbClr val="2B2723"/>
-                </a:solidFill>
-                <a:latin typeface="Calibri" pitchFamily="34" charset="0"/>
-                <a:ea typeface="Calibri" pitchFamily="34" charset="-122"/>
-                <a:cs typeface="Calibri" pitchFamily="34" charset="-120"/>
-              </a:rPr>
-              <a:t>The Dispatch</a:t>
-            </a:r>
-            <a:pPr indent="0" marL="0">
-              <a:buNone/>
-            </a:pPr>
-            <a:r>
-              <a:rPr lang="en-US" sz="1150" i="1" dirty="0">
-                <a:solidFill>
-                  <a:srgbClr val="6E675C"/>
-                </a:solidFill>
-                <a:latin typeface="Calibri" pitchFamily="34" charset="0"/>
-                <a:ea typeface="Calibri" pitchFamily="34" charset="-122"/>
-                <a:cs typeface="Calibri" pitchFamily="34" charset="-120"/>
-              </a:rPr>
-              <a:t>  · template + Issue 01 built</a:t>
-            </a:r>
-            <a:endParaRPr lang="en-US" sz="1350" dirty="0"/>
-          </a:p>
-        </p:txBody>
-      </p:sp>
-      <p:sp>
-        <p:nvSpPr>
-          <p:cNvPr id="17" name="Text 15"/>
-          <p:cNvSpPr/>
-          <p:nvPr/>
-        </p:nvSpPr>
-        <p:spPr>
-          <a:xfrm>
-            <a:off x="4709160" y="3995928"/>
-            <a:ext cx="3017520" cy="457200"/>
-          </a:xfrm>
-          <a:prstGeom prst="rect">
-            <a:avLst/>
-          </a:prstGeom>
-          <a:noFill/>
-          <a:ln/>
-        </p:spPr>
-        <p:txBody>
-          <a:bodyPr wrap="square" lIns="0" tIns="0" rIns="0" bIns="0" rtlCol="0" anchor="t"/>
-          <a:lstStyle/>
-          <a:p>
-            <a:pPr indent="0" marL="0">
-              <a:buNone/>
-            </a:pPr>
-            <a:r>
-              <a:rPr lang="en-US" sz="1350" b="1" dirty="0">
-                <a:solidFill>
-                  <a:srgbClr val="9A7A28"/>
-                </a:solidFill>
-                <a:latin typeface="Calibri" pitchFamily="34" charset="0"/>
-                <a:ea typeface="Calibri" pitchFamily="34" charset="-122"/>
-                <a:cs typeface="Calibri" pitchFamily="34" charset="-120"/>
-              </a:rPr>
-              <a:t>› </a:t>
-            </a:r>
-            <a:pPr indent="0" marL="0">
-              <a:buNone/>
-            </a:pPr>
-            <a:r>
-              <a:rPr lang="en-US" sz="1350" dirty="0">
-                <a:solidFill>
-                  <a:srgbClr val="2B2723"/>
-                </a:solidFill>
-                <a:latin typeface="Calibri" pitchFamily="34" charset="0"/>
-                <a:ea typeface="Calibri" pitchFamily="34" charset="-122"/>
-                <a:cs typeface="Calibri" pitchFamily="34" charset="-120"/>
-              </a:rPr>
-              <a:t>Teacher Hub across all units</a:t>
-            </a:r>
-            <a:endParaRPr lang="en-US" sz="1350" dirty="0"/>
-          </a:p>
-        </p:txBody>
-      </p:sp>
-      <p:sp>
-        <p:nvSpPr>
-          <p:cNvPr id="18" name="Text 16"/>
-          <p:cNvSpPr/>
-          <p:nvPr/>
-        </p:nvSpPr>
-        <p:spPr>
-          <a:xfrm>
-            <a:off x="4709160" y="4507992"/>
-            <a:ext cx="3017520" cy="457200"/>
-          </a:xfrm>
-          <a:prstGeom prst="rect">
-            <a:avLst/>
-          </a:prstGeom>
-          <a:noFill/>
-          <a:ln/>
-        </p:spPr>
-        <p:txBody>
-          <a:bodyPr wrap="square" lIns="0" tIns="0" rIns="0" bIns="0" rtlCol="0" anchor="t"/>
-          <a:lstStyle/>
-          <a:p>
-            <a:pPr indent="0" marL="0">
-              <a:buNone/>
-            </a:pPr>
-            <a:r>
-              <a:rPr lang="en-US" sz="1350" b="1" dirty="0">
-                <a:solidFill>
-                  <a:srgbClr val="9A7A28"/>
-                </a:solidFill>
-                <a:latin typeface="Calibri" pitchFamily="34" charset="0"/>
-                <a:ea typeface="Calibri" pitchFamily="34" charset="-122"/>
-                <a:cs typeface="Calibri" pitchFamily="34" charset="-120"/>
-              </a:rPr>
-              <a:t>› </a:t>
-            </a:r>
-            <a:pPr indent="0" marL="0">
-              <a:buNone/>
-            </a:pPr>
-            <a:r>
-              <a:rPr lang="en-US" sz="1350" dirty="0">
-                <a:solidFill>
-                  <a:srgbClr val="2B2723"/>
-                </a:solidFill>
-                <a:latin typeface="Calibri" pitchFamily="34" charset="0"/>
-                <a:ea typeface="Calibri" pitchFamily="34" charset="-122"/>
-                <a:cs typeface="Calibri" pitchFamily="34" charset="-120"/>
-              </a:rPr>
-              <a:t>Live data pipeline</a:t>
-            </a:r>
-            <a:pPr indent="0" marL="0">
-              <a:buNone/>
-            </a:pPr>
-            <a:r>
-              <a:rPr lang="en-US" sz="1150" i="1" dirty="0">
-                <a:solidFill>
-                  <a:srgbClr val="6E675C"/>
-                </a:solidFill>
-                <a:latin typeface="Calibri" pitchFamily="34" charset="0"/>
-                <a:ea typeface="Calibri" pitchFamily="34" charset="-122"/>
-                <a:cs typeface="Calibri" pitchFamily="34" charset="-120"/>
-              </a:rPr>
-              <a:t>  · Form → Sheet → Hub</a:t>
-            </a:r>
-            <a:endParaRPr lang="en-US" sz="1350" dirty="0"/>
-          </a:p>
-        </p:txBody>
-      </p:sp>
-      <p:sp>
-        <p:nvSpPr>
-          <p:cNvPr id="19" name="Shape 17"/>
-          <p:cNvSpPr/>
-          <p:nvPr/>
-        </p:nvSpPr>
-        <p:spPr>
-          <a:xfrm>
-            <a:off x="8229600" y="2103120"/>
-            <a:ext cx="3520440" cy="3383280"/>
-          </a:xfrm>
-          <a:prstGeom prst="roundRect">
-            <a:avLst>
-              <a:gd name="adj" fmla="val 3243"/>
-            </a:avLst>
-          </a:prstGeom>
-          <a:solidFill>
-            <a:srgbClr val="FCF8F0"/>
-          </a:solidFill>
-          <a:ln w="12700">
-            <a:solidFill>
-              <a:srgbClr val="E4DBC9"/>
-            </a:solidFill>
-            <a:prstDash val="solid"/>
-          </a:ln>
-        </p:spPr>
-      </p:sp>
-      <p:sp>
-        <p:nvSpPr>
-          <p:cNvPr id="20" name="Shape 18"/>
-          <p:cNvSpPr/>
-          <p:nvPr/>
-        </p:nvSpPr>
-        <p:spPr>
-          <a:xfrm>
-            <a:off x="8503920" y="2377440"/>
-            <a:ext cx="1280160" cy="310896"/>
-          </a:xfrm>
-          <a:prstGeom prst="roundRect">
-            <a:avLst>
-              <a:gd name="adj" fmla="val 50000"/>
-            </a:avLst>
-          </a:prstGeom>
-          <a:solidFill>
-            <a:srgbClr val="DCE9EA"/>
-          </a:solidFill>
-          <a:ln w="12700">
-            <a:solidFill>
-              <a:srgbClr val="3E8E96"/>
-            </a:solidFill>
-            <a:prstDash val="solid"/>
-          </a:ln>
-        </p:spPr>
-      </p:sp>
-      <p:sp>
-        <p:nvSpPr>
-          <p:cNvPr id="21" name="Text 19"/>
-          <p:cNvSpPr/>
-          <p:nvPr/>
-        </p:nvSpPr>
-        <p:spPr>
-          <a:xfrm>
-            <a:off x="8503920" y="2377440"/>
-            <a:ext cx="1280160" cy="310896"/>
-          </a:xfrm>
-          <a:prstGeom prst="rect">
-            <a:avLst/>
-          </a:prstGeom>
-          <a:noFill/>
-          <a:ln/>
-        </p:spPr>
-        <p:txBody>
-          <a:bodyPr wrap="square" lIns="0" tIns="0" rIns="0" bIns="0" rtlCol="0" anchor="ctr"/>
-          <a:lstStyle/>
-          <a:p>
-            <a:pPr algn="ctr" indent="0" marL="0">
-              <a:buNone/>
-            </a:pPr>
-            <a:r>
-              <a:rPr lang="en-US" sz="950" b="1" spc="100" kern="0" dirty="0">
-                <a:solidFill>
-                  <a:srgbClr val="2F6B71"/>
-                </a:solidFill>
-                <a:latin typeface="Consolas" pitchFamily="34" charset="0"/>
-                <a:ea typeface="Consolas" pitchFamily="34" charset="-122"/>
-                <a:cs typeface="Consolas" pitchFamily="34" charset="-120"/>
-              </a:rPr>
-              <a:t>EXPLORING</a:t>
-            </a:r>
-            <a:endParaRPr lang="en-US" sz="950" dirty="0"/>
-          </a:p>
-        </p:txBody>
-      </p:sp>
-      <p:sp>
-        <p:nvSpPr>
-          <p:cNvPr id="22" name="Text 20"/>
-          <p:cNvSpPr/>
-          <p:nvPr/>
-        </p:nvSpPr>
-        <p:spPr>
-          <a:xfrm>
-            <a:off x="8503920" y="2971800"/>
-            <a:ext cx="3017520" cy="457200"/>
-          </a:xfrm>
-          <a:prstGeom prst="rect">
-            <a:avLst/>
-          </a:prstGeom>
-          <a:noFill/>
-          <a:ln/>
-        </p:spPr>
-        <p:txBody>
-          <a:bodyPr wrap="square" lIns="0" tIns="0" rIns="0" bIns="0" rtlCol="0" anchor="t"/>
-          <a:lstStyle/>
-          <a:p>
-            <a:pPr indent="0" marL="0">
-              <a:buNone/>
-            </a:pPr>
-            <a:r>
-              <a:rPr lang="en-US" sz="1350" b="1" dirty="0">
-                <a:solidFill>
-                  <a:srgbClr val="9A7A28"/>
-                </a:solidFill>
-                <a:latin typeface="Calibri" pitchFamily="34" charset="0"/>
-                <a:ea typeface="Calibri" pitchFamily="34" charset="-122"/>
-                <a:cs typeface="Calibri" pitchFamily="34" charset="-120"/>
-              </a:rPr>
-              <a:t>› </a:t>
-            </a:r>
-            <a:pPr indent="0" marL="0">
-              <a:buNone/>
-            </a:pPr>
-            <a:r>
-              <a:rPr lang="en-US" sz="1350" dirty="0">
-                <a:solidFill>
-                  <a:srgbClr val="2B2723"/>
-                </a:solidFill>
-                <a:latin typeface="Calibri" pitchFamily="34" charset="0"/>
-                <a:ea typeface="Calibri" pitchFamily="34" charset="-122"/>
-                <a:cs typeface="Calibri" pitchFamily="34" charset="-120"/>
-              </a:rPr>
-              <a:t>Auto-sent study guides</a:t>
-            </a:r>
-            <a:endParaRPr lang="en-US" sz="1350" dirty="0"/>
-          </a:p>
-        </p:txBody>
-      </p:sp>
-      <p:sp>
-        <p:nvSpPr>
-          <p:cNvPr id="23" name="Text 21"/>
-          <p:cNvSpPr/>
-          <p:nvPr/>
-        </p:nvSpPr>
-        <p:spPr>
-          <a:xfrm>
-            <a:off x="8503920" y="3483864"/>
-            <a:ext cx="3017520" cy="457200"/>
-          </a:xfrm>
-          <a:prstGeom prst="rect">
-            <a:avLst/>
-          </a:prstGeom>
-          <a:noFill/>
-          <a:ln/>
-        </p:spPr>
-        <p:txBody>
-          <a:bodyPr wrap="square" lIns="0" tIns="0" rIns="0" bIns="0" rtlCol="0" anchor="t"/>
-          <a:lstStyle/>
-          <a:p>
-            <a:pPr indent="0" marL="0">
-              <a:buNone/>
-            </a:pPr>
-            <a:r>
-              <a:rPr lang="en-US" sz="1350" b="1" dirty="0">
-                <a:solidFill>
-                  <a:srgbClr val="9A7A28"/>
-                </a:solidFill>
-                <a:latin typeface="Calibri" pitchFamily="34" charset="0"/>
-                <a:ea typeface="Calibri" pitchFamily="34" charset="-122"/>
-                <a:cs typeface="Calibri" pitchFamily="34" charset="-120"/>
-              </a:rPr>
-              <a:t>› </a:t>
-            </a:r>
-            <a:pPr indent="0" marL="0">
-              <a:buNone/>
-            </a:pPr>
-            <a:r>
-              <a:rPr lang="en-US" sz="1350" dirty="0">
-                <a:solidFill>
-                  <a:srgbClr val="2B2723"/>
-                </a:solidFill>
-                <a:latin typeface="Calibri" pitchFamily="34" charset="0"/>
-                <a:ea typeface="Calibri" pitchFamily="34" charset="-122"/>
-                <a:cs typeface="Calibri" pitchFamily="34" charset="-120"/>
-              </a:rPr>
-              <a:t>Other AP courses &amp; subjects</a:t>
-            </a:r>
-            <a:endParaRPr lang="en-US" sz="1350" dirty="0"/>
-          </a:p>
-        </p:txBody>
-      </p:sp>
-      <p:sp>
-        <p:nvSpPr>
-          <p:cNvPr id="24" name="Text 22"/>
-          <p:cNvSpPr/>
-          <p:nvPr/>
-        </p:nvSpPr>
-        <p:spPr>
-          <a:xfrm>
-            <a:off x="8503920" y="3995928"/>
-            <a:ext cx="3017520" cy="457200"/>
-          </a:xfrm>
-          <a:prstGeom prst="rect">
-            <a:avLst/>
-          </a:prstGeom>
-          <a:noFill/>
-          <a:ln/>
-        </p:spPr>
-        <p:txBody>
-          <a:bodyPr wrap="square" lIns="0" tIns="0" rIns="0" bIns="0" rtlCol="0" anchor="t"/>
-          <a:lstStyle/>
-          <a:p>
-            <a:pPr indent="0" marL="0">
-              <a:buNone/>
-            </a:pPr>
-            <a:r>
-              <a:rPr lang="en-US" sz="1350" b="1" dirty="0">
-                <a:solidFill>
-                  <a:srgbClr val="9A7A28"/>
-                </a:solidFill>
-                <a:latin typeface="Calibri" pitchFamily="34" charset="0"/>
-                <a:ea typeface="Calibri" pitchFamily="34" charset="-122"/>
-                <a:cs typeface="Calibri" pitchFamily="34" charset="-120"/>
-              </a:rPr>
-              <a:t>› </a:t>
-            </a:r>
-            <a:pPr indent="0" marL="0">
-              <a:buNone/>
-            </a:pPr>
-            <a:r>
-              <a:rPr lang="en-US" sz="1350" dirty="0">
-                <a:solidFill>
-                  <a:srgbClr val="2B2723"/>
-                </a:solidFill>
-                <a:latin typeface="Calibri" pitchFamily="34" charset="0"/>
-                <a:ea typeface="Calibri" pitchFamily="34" charset="-122"/>
-                <a:cs typeface="Calibri" pitchFamily="34" charset="-120"/>
-              </a:rPr>
-              <a:t>District rollout &amp; PD</a:t>
-            </a:r>
-            <a:endParaRPr lang="en-US" sz="1350" dirty="0"/>
-          </a:p>
-        </p:txBody>
-      </p:sp>
-      <p:sp>
-        <p:nvSpPr>
-          <p:cNvPr id="25" name="Text 23"/>
-          <p:cNvSpPr/>
-          <p:nvPr/>
-        </p:nvSpPr>
-        <p:spPr>
-          <a:xfrm>
-            <a:off x="8503920" y="4507992"/>
-            <a:ext cx="3017520" cy="457200"/>
-          </a:xfrm>
-          <a:prstGeom prst="rect">
-            <a:avLst/>
-          </a:prstGeom>
-          <a:noFill/>
-          <a:ln/>
-        </p:spPr>
-        <p:txBody>
-          <a:bodyPr wrap="square" lIns="0" tIns="0" rIns="0" bIns="0" rtlCol="0" anchor="t"/>
-          <a:lstStyle/>
-          <a:p>
-            <a:pPr indent="0" marL="0">
-              <a:buNone/>
-            </a:pPr>
-            <a:r>
-              <a:rPr lang="en-US" sz="1350" b="1" dirty="0">
-                <a:solidFill>
-                  <a:srgbClr val="9A7A28"/>
-                </a:solidFill>
-                <a:latin typeface="Calibri" pitchFamily="34" charset="0"/>
-                <a:ea typeface="Calibri" pitchFamily="34" charset="-122"/>
-                <a:cs typeface="Calibri" pitchFamily="34" charset="-120"/>
-              </a:rPr>
-              <a:t>› </a:t>
-            </a:r>
-            <a:pPr indent="0" marL="0">
-              <a:buNone/>
-            </a:pPr>
-            <a:r>
-              <a:rPr lang="en-US" sz="1350" dirty="0">
-                <a:solidFill>
-                  <a:srgbClr val="2B2723"/>
-                </a:solidFill>
-                <a:latin typeface="Calibri" pitchFamily="34" charset="0"/>
-                <a:ea typeface="Calibri" pitchFamily="34" charset="-122"/>
-                <a:cs typeface="Calibri" pitchFamily="34" charset="-120"/>
-              </a:rPr>
-              <a:t>Consulting &amp; licensing</a:t>
-            </a:r>
-            <a:endParaRPr lang="en-US" sz="1350" dirty="0"/>
-          </a:p>
-        </p:txBody>
-      </p:sp>
-      <p:sp>
-        <p:nvSpPr>
-          <p:cNvPr id="26" name="Text 24"/>
-          <p:cNvSpPr/>
-          <p:nvPr/>
-        </p:nvSpPr>
-        <p:spPr>
-          <a:xfrm>
-            <a:off x="502920" y="6400800"/>
-            <a:ext cx="7315200" cy="274320"/>
-          </a:xfrm>
-          <a:prstGeom prst="rect">
-            <a:avLst/>
-          </a:prstGeom>
-          <a:noFill/>
-          <a:ln/>
-        </p:spPr>
-        <p:txBody>
-          <a:bodyPr wrap="square" lIns="0" tIns="0" rIns="0" bIns="0" rtlCol="0" anchor="ctr"/>
-          <a:lstStyle/>
-          <a:p>
-            <a:pPr algn="l" indent="0" marL="0">
-              <a:buNone/>
-            </a:pPr>
-            <a:r>
-              <a:rPr lang="en-US" sz="1000" b="1" dirty="0">
-                <a:solidFill>
-                  <a:srgbClr val="C9A24B"/>
-                </a:solidFill>
-                <a:latin typeface="Calibri" pitchFamily="34" charset="0"/>
-                <a:ea typeface="Calibri" pitchFamily="34" charset="-122"/>
-                <a:cs typeface="Calibri" pitchFamily="34" charset="-120"/>
-              </a:rPr>
-              <a:t>AndersonLogic AI</a:t>
-            </a:r>
-            <a:pPr algn="l" indent="0" marL="0">
-              <a:buNone/>
-            </a:pPr>
-            <a:r>
-              <a:rPr lang="en-US" sz="1000" dirty="0">
-                <a:solidFill>
-                  <a:srgbClr val="6E675C"/>
-                </a:solidFill>
-                <a:latin typeface="Calibri" pitchFamily="34" charset="0"/>
-                <a:ea typeface="Calibri" pitchFamily="34" charset="-122"/>
-                <a:cs typeface="Calibri" pitchFamily="34" charset="-120"/>
-              </a:rPr>
-              <a:t>   ·   BeHistorical</a:t>
-            </a:r>
-            <a:endParaRPr lang="en-US" sz="1000" dirty="0"/>
-          </a:p>
-        </p:txBody>
-      </p:sp>
-      <p:sp>
-        <p:nvSpPr>
-          <p:cNvPr id="27" name="Text 25"/>
-          <p:cNvSpPr/>
-          <p:nvPr/>
-        </p:nvSpPr>
-        <p:spPr>
-          <a:xfrm>
-            <a:off x="10607040" y="6355080"/>
-            <a:ext cx="1097280" cy="320040"/>
-          </a:xfrm>
-          <a:prstGeom prst="rect">
-            <a:avLst/>
-          </a:prstGeom>
-          <a:noFill/>
-          <a:ln/>
-        </p:spPr>
-        <p:txBody>
-          <a:bodyPr wrap="square" lIns="0" tIns="0" rIns="0" bIns="0" rtlCol="0" anchor="ctr"/>
-          <a:lstStyle/>
-          <a:p>
-            <a:pPr algn="r" indent="0" marL="0">
-              <a:buNone/>
-            </a:pPr>
-            <a:r>
-              <a:rPr lang="en-US" sz="1100" b="1" dirty="0">
-                <a:solidFill>
-                  <a:srgbClr val="6E675C"/>
-                </a:solidFill>
-                <a:latin typeface="Consolas" pitchFamily="34" charset="0"/>
-                <a:ea typeface="Consolas" pitchFamily="34" charset="-122"/>
-                <a:cs typeface="Consolas" pitchFamily="34" charset="-120"/>
-              </a:rPr>
-              <a:t>14 / 15</a:t>
+              <a:t>14 / 17</a:t>
             </a:r>
             <a:endParaRPr lang="en-US" sz="1100" dirty="0"/>
           </a:p>
@@ -7006,188 +6514,954 @@
         </p:nvSpPr>
         <p:spPr>
           <a:xfrm>
-            <a:off x="8138160" y="1005840"/>
-            <a:ext cx="3840480" cy="822960"/>
-          </a:xfrm>
-          <a:prstGeom prst="rect">
-            <a:avLst/>
-          </a:prstGeom>
-          <a:noFill/>
-          <a:ln/>
-        </p:spPr>
-        <p:txBody>
-          <a:bodyPr wrap="square" lIns="0" tIns="0" rIns="0" bIns="0" rtlCol="0" anchor="ctr"/>
-          <a:lstStyle/>
-          <a:p>
-            <a:pPr algn="r" indent="0" marL="0">
-              <a:buNone/>
-            </a:pPr>
-            <a:r>
-              <a:rPr lang="en-US" sz="2000" i="1" dirty="0">
-                <a:solidFill>
-                  <a:srgbClr val="2E3236"/>
+            <a:off x="640080" y="502920"/>
+            <a:ext cx="8229600" cy="274320"/>
+          </a:xfrm>
+          <a:prstGeom prst="rect">
+            <a:avLst/>
+          </a:prstGeom>
+          <a:noFill/>
+          <a:ln/>
+        </p:spPr>
+        <p:txBody>
+          <a:bodyPr wrap="square" lIns="0" tIns="0" rIns="0" bIns="0" rtlCol="0" anchor="ctr"/>
+          <a:lstStyle/>
+          <a:p>
+            <a:pPr algn="l" indent="0" marL="0">
+              <a:buNone/>
+            </a:pPr>
+            <a:r>
+              <a:rPr lang="en-US" sz="1200" b="1" spc="300" kern="0" dirty="0">
+                <a:solidFill>
+                  <a:srgbClr val="C9A24B"/>
+                </a:solidFill>
+                <a:latin typeface="Consolas" pitchFamily="34" charset="0"/>
+                <a:ea typeface="Consolas" pitchFamily="34" charset="-122"/>
+                <a:cs typeface="Consolas" pitchFamily="34" charset="-120"/>
+              </a:rPr>
+              <a:t>HOW IT ALL CONNECTS</a:t>
+            </a:r>
+            <a:endParaRPr lang="en-US" sz="1200" dirty="0"/>
+          </a:p>
+        </p:txBody>
+      </p:sp>
+      <p:sp>
+        <p:nvSpPr>
+          <p:cNvPr id="3" name="Text 1"/>
+          <p:cNvSpPr/>
+          <p:nvPr/>
+        </p:nvSpPr>
+        <p:spPr>
+          <a:xfrm>
+            <a:off x="603504" y="822960"/>
+            <a:ext cx="10972800" cy="731520"/>
+          </a:xfrm>
+          <a:prstGeom prst="rect">
+            <a:avLst/>
+          </a:prstGeom>
+          <a:noFill/>
+          <a:ln/>
+        </p:spPr>
+        <p:txBody>
+          <a:bodyPr wrap="square" lIns="0" tIns="0" rIns="0" bIns="0" rtlCol="0" anchor="ctr"/>
+          <a:lstStyle/>
+          <a:p>
+            <a:pPr indent="0" marL="0">
+              <a:buNone/>
+            </a:pPr>
+            <a:r>
+              <a:rPr lang="en-US" sz="3100" b="1" dirty="0">
+                <a:solidFill>
+                  <a:srgbClr val="FFFFFF"/>
                 </a:solidFill>
                 <a:latin typeface="Bookman Old Style" pitchFamily="34" charset="0"/>
                 <a:ea typeface="Bookman Old Style" pitchFamily="34" charset="-122"/>
                 <a:cs typeface="Bookman Old Style" pitchFamily="34" charset="-120"/>
               </a:rPr>
-              <a:t>BeReady</a:t>
-            </a:r>
-            <a:endParaRPr lang="en-US" sz="2000" dirty="0"/>
-          </a:p>
-        </p:txBody>
-      </p:sp>
-      <p:sp>
-        <p:nvSpPr>
-          <p:cNvPr id="3" name="Text 1"/>
-          <p:cNvSpPr/>
-          <p:nvPr/>
-        </p:nvSpPr>
-        <p:spPr>
-          <a:xfrm>
-            <a:off x="8138160" y="2194560"/>
-            <a:ext cx="3840480" cy="822960"/>
-          </a:xfrm>
-          <a:prstGeom prst="rect">
-            <a:avLst/>
-          </a:prstGeom>
-          <a:noFill/>
-          <a:ln/>
-        </p:spPr>
-        <p:txBody>
-          <a:bodyPr wrap="square" lIns="0" tIns="0" rIns="0" bIns="0" rtlCol="0" anchor="ctr"/>
-          <a:lstStyle/>
-          <a:p>
-            <a:pPr algn="r" indent="0" marL="0">
-              <a:buNone/>
-            </a:pPr>
-            <a:r>
-              <a:rPr lang="en-US" sz="2000" i="1" dirty="0">
-                <a:solidFill>
-                  <a:srgbClr val="2E3236"/>
+              <a:t>One platform, one data layer, three audiences</a:t>
+            </a:r>
+            <a:endParaRPr lang="en-US" sz="3100" dirty="0"/>
+          </a:p>
+        </p:txBody>
+      </p:sp>
+      <p:sp>
+        <p:nvSpPr>
+          <p:cNvPr id="4" name="Shape 2"/>
+          <p:cNvSpPr/>
+          <p:nvPr/>
+        </p:nvSpPr>
+        <p:spPr>
+          <a:xfrm>
+            <a:off x="640080" y="2377440"/>
+            <a:ext cx="3063240" cy="2468880"/>
+          </a:xfrm>
+          <a:prstGeom prst="roundRect">
+            <a:avLst>
+              <a:gd name="adj" fmla="val 4444"/>
+            </a:avLst>
+          </a:prstGeom>
+          <a:solidFill>
+            <a:srgbClr val="24272A"/>
+          </a:solidFill>
+          <a:ln w="12700">
+            <a:solidFill>
+              <a:srgbClr val="2E3236"/>
+            </a:solidFill>
+            <a:prstDash val="solid"/>
+          </a:ln>
+        </p:spPr>
+      </p:sp>
+      <p:sp>
+        <p:nvSpPr>
+          <p:cNvPr id="5" name="Text 3"/>
+          <p:cNvSpPr/>
+          <p:nvPr/>
+        </p:nvSpPr>
+        <p:spPr>
+          <a:xfrm>
+            <a:off x="896112" y="2633472"/>
+            <a:ext cx="2606040" cy="274320"/>
+          </a:xfrm>
+          <a:prstGeom prst="rect">
+            <a:avLst/>
+          </a:prstGeom>
+          <a:noFill/>
+          <a:ln/>
+        </p:spPr>
+        <p:txBody>
+          <a:bodyPr wrap="square" lIns="0" tIns="0" rIns="0" bIns="0" rtlCol="0" anchor="ctr"/>
+          <a:lstStyle/>
+          <a:p>
+            <a:pPr indent="0" marL="0">
+              <a:buNone/>
+            </a:pPr>
+            <a:r>
+              <a:rPr lang="en-US" sz="1050" b="1" spc="150" kern="0" dirty="0">
+                <a:solidFill>
+                  <a:srgbClr val="C9A24B"/>
+                </a:solidFill>
+                <a:latin typeface="Consolas" pitchFamily="34" charset="0"/>
+                <a:ea typeface="Consolas" pitchFamily="34" charset="-122"/>
+                <a:cs typeface="Consolas" pitchFamily="34" charset="-120"/>
+              </a:rPr>
+              <a:t>STUDENTS LEARN</a:t>
+            </a:r>
+            <a:endParaRPr lang="en-US" sz="1050" dirty="0"/>
+          </a:p>
+        </p:txBody>
+      </p:sp>
+      <p:sp>
+        <p:nvSpPr>
+          <p:cNvPr id="6" name="Text 4"/>
+          <p:cNvSpPr/>
+          <p:nvPr/>
+        </p:nvSpPr>
+        <p:spPr>
+          <a:xfrm>
+            <a:off x="896112" y="2944368"/>
+            <a:ext cx="2606040" cy="457200"/>
+          </a:xfrm>
+          <a:prstGeom prst="rect">
+            <a:avLst/>
+          </a:prstGeom>
+          <a:noFill/>
+          <a:ln/>
+        </p:spPr>
+        <p:txBody>
+          <a:bodyPr wrap="square" lIns="0" tIns="0" rIns="0" bIns="0" rtlCol="0" anchor="ctr"/>
+          <a:lstStyle/>
+          <a:p>
+            <a:pPr indent="0" marL="0">
+              <a:buNone/>
+            </a:pPr>
+            <a:r>
+              <a:rPr lang="en-US" sz="1900" b="1" dirty="0">
+                <a:solidFill>
+                  <a:srgbClr val="FFFFFF"/>
                 </a:solidFill>
                 <a:latin typeface="Bookman Old Style" pitchFamily="34" charset="0"/>
                 <a:ea typeface="Bookman Old Style" pitchFamily="34" charset="-122"/>
                 <a:cs typeface="Bookman Old Style" pitchFamily="34" charset="-120"/>
               </a:rPr>
-              <a:t>BeSurreal</a:t>
-            </a:r>
-            <a:endParaRPr lang="en-US" sz="2000" dirty="0"/>
-          </a:p>
-        </p:txBody>
-      </p:sp>
-      <p:sp>
-        <p:nvSpPr>
-          <p:cNvPr id="4" name="Text 2"/>
-          <p:cNvSpPr/>
-          <p:nvPr/>
-        </p:nvSpPr>
-        <p:spPr>
-          <a:xfrm>
-            <a:off x="8138160" y="3383280"/>
-            <a:ext cx="3840480" cy="822960"/>
-          </a:xfrm>
-          <a:prstGeom prst="rect">
-            <a:avLst/>
-          </a:prstGeom>
-          <a:noFill/>
-          <a:ln/>
-        </p:spPr>
-        <p:txBody>
-          <a:bodyPr wrap="square" lIns="0" tIns="0" rIns="0" bIns="0" rtlCol="0" anchor="ctr"/>
-          <a:lstStyle/>
-          <a:p>
-            <a:pPr algn="r" indent="0" marL="0">
-              <a:buNone/>
-            </a:pPr>
-            <a:r>
-              <a:rPr lang="en-US" sz="2000" i="1" dirty="0">
-                <a:solidFill>
-                  <a:srgbClr val="2E3236"/>
+              <a:t>The lesson platform</a:t>
+            </a:r>
+            <a:endParaRPr lang="en-US" sz="1900" dirty="0"/>
+          </a:p>
+        </p:txBody>
+      </p:sp>
+      <p:sp>
+        <p:nvSpPr>
+          <p:cNvPr id="7" name="Text 5"/>
+          <p:cNvSpPr/>
+          <p:nvPr/>
+        </p:nvSpPr>
+        <p:spPr>
+          <a:xfrm>
+            <a:off x="896112" y="3474720"/>
+            <a:ext cx="2606040" cy="1280160"/>
+          </a:xfrm>
+          <a:prstGeom prst="rect">
+            <a:avLst/>
+          </a:prstGeom>
+          <a:noFill/>
+          <a:ln/>
+        </p:spPr>
+        <p:txBody>
+          <a:bodyPr wrap="square" lIns="0" tIns="0" rIns="0" bIns="0" rtlCol="0" anchor="t"/>
+          <a:lstStyle/>
+          <a:p>
+            <a:pPr indent="0" marL="0">
+              <a:buNone/>
+            </a:pPr>
+            <a:r>
+              <a:rPr lang="en-US" sz="1300" dirty="0">
+                <a:solidFill>
+                  <a:srgbClr val="9AA0A6"/>
+                </a:solidFill>
+                <a:latin typeface="Calibri" pitchFamily="34" charset="0"/>
+                <a:ea typeface="Calibri" pitchFamily="34" charset="-122"/>
+                <a:cs typeface="Calibri" pitchFamily="34" charset="-120"/>
+              </a:rPr>
+              <a:t>10-module lessons, First &amp; 10 readings, BeInTheRoom simulations, and an AI coach that questions rather than answers.</a:t>
+            </a:r>
+            <a:endParaRPr lang="en-US" sz="1300" dirty="0"/>
+          </a:p>
+        </p:txBody>
+      </p:sp>
+      <p:sp>
+        <p:nvSpPr>
+          <p:cNvPr id="8" name="Text 6"/>
+          <p:cNvSpPr/>
+          <p:nvPr/>
+        </p:nvSpPr>
+        <p:spPr>
+          <a:xfrm>
+            <a:off x="3703320" y="2377440"/>
+            <a:ext cx="457200" cy="2468880"/>
+          </a:xfrm>
+          <a:prstGeom prst="rect">
+            <a:avLst/>
+          </a:prstGeom>
+          <a:noFill/>
+          <a:ln/>
+        </p:spPr>
+        <p:txBody>
+          <a:bodyPr wrap="square" lIns="0" tIns="0" rIns="0" bIns="0" rtlCol="0" anchor="ctr"/>
+          <a:lstStyle/>
+          <a:p>
+            <a:pPr algn="ctr" indent="0" marL="0">
+              <a:buNone/>
+            </a:pPr>
+            <a:r>
+              <a:rPr lang="en-US" sz="2600" b="1" dirty="0">
+                <a:solidFill>
+                  <a:srgbClr val="C9A24B"/>
+                </a:solidFill>
+                <a:latin typeface="Calibri" pitchFamily="34" charset="0"/>
+                <a:ea typeface="Calibri" pitchFamily="34" charset="-122"/>
+                <a:cs typeface="Calibri" pitchFamily="34" charset="-120"/>
+              </a:rPr>
+              <a:t>→</a:t>
+            </a:r>
+            <a:endParaRPr lang="en-US" sz="2600" dirty="0"/>
+          </a:p>
+        </p:txBody>
+      </p:sp>
+      <p:sp>
+        <p:nvSpPr>
+          <p:cNvPr id="9" name="Shape 7"/>
+          <p:cNvSpPr/>
+          <p:nvPr/>
+        </p:nvSpPr>
+        <p:spPr>
+          <a:xfrm>
+            <a:off x="4160520" y="2377440"/>
+            <a:ext cx="2926080" cy="2468880"/>
+          </a:xfrm>
+          <a:prstGeom prst="roundRect">
+            <a:avLst>
+              <a:gd name="adj" fmla="val 4444"/>
+            </a:avLst>
+          </a:prstGeom>
+          <a:solidFill>
+            <a:srgbClr val="24272A"/>
+          </a:solidFill>
+          <a:ln w="12700">
+            <a:solidFill>
+              <a:srgbClr val="2E3236"/>
+            </a:solidFill>
+            <a:prstDash val="solid"/>
+          </a:ln>
+        </p:spPr>
+      </p:sp>
+      <p:sp>
+        <p:nvSpPr>
+          <p:cNvPr id="10" name="Text 8"/>
+          <p:cNvSpPr/>
+          <p:nvPr/>
+        </p:nvSpPr>
+        <p:spPr>
+          <a:xfrm>
+            <a:off x="4416552" y="2633472"/>
+            <a:ext cx="2468880" cy="274320"/>
+          </a:xfrm>
+          <a:prstGeom prst="rect">
+            <a:avLst/>
+          </a:prstGeom>
+          <a:noFill/>
+          <a:ln/>
+        </p:spPr>
+        <p:txBody>
+          <a:bodyPr wrap="square" lIns="0" tIns="0" rIns="0" bIns="0" rtlCol="0" anchor="ctr"/>
+          <a:lstStyle/>
+          <a:p>
+            <a:pPr indent="0" marL="0">
+              <a:buNone/>
+            </a:pPr>
+            <a:r>
+              <a:rPr lang="en-US" sz="1050" b="1" spc="150" kern="0" dirty="0">
+                <a:solidFill>
+                  <a:srgbClr val="C9A24B"/>
+                </a:solidFill>
+                <a:latin typeface="Consolas" pitchFamily="34" charset="0"/>
+                <a:ea typeface="Consolas" pitchFamily="34" charset="-122"/>
+                <a:cs typeface="Consolas" pitchFamily="34" charset="-120"/>
+              </a:rPr>
+              <a:t>ONE DATA LAYER</a:t>
+            </a:r>
+            <a:endParaRPr lang="en-US" sz="1050" dirty="0"/>
+          </a:p>
+        </p:txBody>
+      </p:sp>
+      <p:sp>
+        <p:nvSpPr>
+          <p:cNvPr id="11" name="Text 9"/>
+          <p:cNvSpPr/>
+          <p:nvPr/>
+        </p:nvSpPr>
+        <p:spPr>
+          <a:xfrm>
+            <a:off x="4416552" y="2944368"/>
+            <a:ext cx="2468880" cy="457200"/>
+          </a:xfrm>
+          <a:prstGeom prst="rect">
+            <a:avLst/>
+          </a:prstGeom>
+          <a:noFill/>
+          <a:ln/>
+        </p:spPr>
+        <p:txBody>
+          <a:bodyPr wrap="square" lIns="0" tIns="0" rIns="0" bIns="0" rtlCol="0" anchor="ctr"/>
+          <a:lstStyle/>
+          <a:p>
+            <a:pPr indent="0" marL="0">
+              <a:buNone/>
+            </a:pPr>
+            <a:r>
+              <a:rPr lang="en-US" sz="1900" b="1" dirty="0">
+                <a:solidFill>
+                  <a:srgbClr val="FFFFFF"/>
                 </a:solidFill>
                 <a:latin typeface="Bookman Old Style" pitchFamily="34" charset="0"/>
                 <a:ea typeface="Bookman Old Style" pitchFamily="34" charset="-122"/>
                 <a:cs typeface="Bookman Old Style" pitchFamily="34" charset="-120"/>
               </a:rPr>
-              <a:t>BeInTheRoom</a:t>
-            </a:r>
-            <a:endParaRPr lang="en-US" sz="2000" dirty="0"/>
-          </a:p>
-        </p:txBody>
-      </p:sp>
-      <p:sp>
-        <p:nvSpPr>
-          <p:cNvPr id="5" name="Text 3"/>
-          <p:cNvSpPr/>
-          <p:nvPr/>
-        </p:nvSpPr>
-        <p:spPr>
-          <a:xfrm>
-            <a:off x="8138160" y="4572000"/>
-            <a:ext cx="3840480" cy="822960"/>
-          </a:xfrm>
-          <a:prstGeom prst="rect">
-            <a:avLst/>
-          </a:prstGeom>
-          <a:noFill/>
-          <a:ln/>
-        </p:spPr>
-        <p:txBody>
-          <a:bodyPr wrap="square" lIns="0" tIns="0" rIns="0" bIns="0" rtlCol="0" anchor="ctr"/>
-          <a:lstStyle/>
-          <a:p>
-            <a:pPr algn="r" indent="0" marL="0">
-              <a:buNone/>
-            </a:pPr>
-            <a:r>
-              <a:rPr lang="en-US" sz="2000" i="1" dirty="0">
-                <a:solidFill>
-                  <a:srgbClr val="2E3236"/>
+              <a:t>Every response, analyzed</a:t>
+            </a:r>
+            <a:endParaRPr lang="en-US" sz="1900" dirty="0"/>
+          </a:p>
+        </p:txBody>
+      </p:sp>
+      <p:sp>
+        <p:nvSpPr>
+          <p:cNvPr id="12" name="Text 10"/>
+          <p:cNvSpPr/>
+          <p:nvPr/>
+        </p:nvSpPr>
+        <p:spPr>
+          <a:xfrm>
+            <a:off x="4416552" y="3474720"/>
+            <a:ext cx="2468880" cy="1280160"/>
+          </a:xfrm>
+          <a:prstGeom prst="rect">
+            <a:avLst/>
+          </a:prstGeom>
+          <a:noFill/>
+          <a:ln/>
+        </p:spPr>
+        <p:txBody>
+          <a:bodyPr wrap="square" lIns="0" tIns="0" rIns="0" bIns="0" rtlCol="0" anchor="t"/>
+          <a:lstStyle/>
+          <a:p>
+            <a:pPr indent="0" marL="0">
+              <a:buNone/>
+            </a:pPr>
+            <a:r>
+              <a:rPr lang="en-US" sz="1300" dirty="0">
+                <a:solidFill>
+                  <a:srgbClr val="9AA0A6"/>
+                </a:solidFill>
+                <a:latin typeface="Calibri" pitchFamily="34" charset="0"/>
+                <a:ea typeface="Calibri" pitchFamily="34" charset="-122"/>
+                <a:cs typeface="Calibri" pitchFamily="34" charset="-120"/>
+              </a:rPr>
+              <a:t>Answers, confidence, evidence, misconceptions, and skill gaps — captured and read by a single engine.</a:t>
+            </a:r>
+            <a:endParaRPr lang="en-US" sz="1300" dirty="0"/>
+          </a:p>
+        </p:txBody>
+      </p:sp>
+      <p:sp>
+        <p:nvSpPr>
+          <p:cNvPr id="13" name="Text 11"/>
+          <p:cNvSpPr/>
+          <p:nvPr/>
+        </p:nvSpPr>
+        <p:spPr>
+          <a:xfrm>
+            <a:off x="7086600" y="2377440"/>
+            <a:ext cx="457200" cy="2468880"/>
+          </a:xfrm>
+          <a:prstGeom prst="rect">
+            <a:avLst/>
+          </a:prstGeom>
+          <a:noFill/>
+          <a:ln/>
+        </p:spPr>
+        <p:txBody>
+          <a:bodyPr wrap="square" lIns="0" tIns="0" rIns="0" bIns="0" rtlCol="0" anchor="ctr"/>
+          <a:lstStyle/>
+          <a:p>
+            <a:pPr algn="ctr" indent="0" marL="0">
+              <a:buNone/>
+            </a:pPr>
+            <a:r>
+              <a:rPr lang="en-US" sz="2600" b="1" dirty="0">
+                <a:solidFill>
+                  <a:srgbClr val="C9A24B"/>
+                </a:solidFill>
+                <a:latin typeface="Calibri" pitchFamily="34" charset="0"/>
+                <a:ea typeface="Calibri" pitchFamily="34" charset="-122"/>
+                <a:cs typeface="Calibri" pitchFamily="34" charset="-120"/>
+              </a:rPr>
+              <a:t>→</a:t>
+            </a:r>
+            <a:endParaRPr lang="en-US" sz="2600" dirty="0"/>
+          </a:p>
+        </p:txBody>
+      </p:sp>
+      <p:sp>
+        <p:nvSpPr>
+          <p:cNvPr id="14" name="Shape 12"/>
+          <p:cNvSpPr/>
+          <p:nvPr/>
+        </p:nvSpPr>
+        <p:spPr>
+          <a:xfrm>
+            <a:off x="7543800" y="2377440"/>
+            <a:ext cx="4069080" cy="713232"/>
+          </a:xfrm>
+          <a:prstGeom prst="roundRect">
+            <a:avLst>
+              <a:gd name="adj" fmla="val 12821"/>
+            </a:avLst>
+          </a:prstGeom>
+          <a:solidFill>
+            <a:srgbClr val="24272A"/>
+          </a:solidFill>
+          <a:ln w="12700">
+            <a:solidFill>
+              <a:srgbClr val="2E3236"/>
+            </a:solidFill>
+            <a:prstDash val="solid"/>
+          </a:ln>
+        </p:spPr>
+      </p:sp>
+      <p:sp>
+        <p:nvSpPr>
+          <p:cNvPr id="15" name="Text 13"/>
+          <p:cNvSpPr/>
+          <p:nvPr/>
+        </p:nvSpPr>
+        <p:spPr>
+          <a:xfrm>
+            <a:off x="7763256" y="2505456"/>
+            <a:ext cx="3703320" cy="292608"/>
+          </a:xfrm>
+          <a:prstGeom prst="rect">
+            <a:avLst/>
+          </a:prstGeom>
+          <a:noFill/>
+          <a:ln/>
+        </p:spPr>
+        <p:txBody>
+          <a:bodyPr wrap="square" lIns="0" tIns="0" rIns="0" bIns="0" rtlCol="0" anchor="ctr"/>
+          <a:lstStyle/>
+          <a:p>
+            <a:pPr indent="0" marL="0">
+              <a:buNone/>
+            </a:pPr>
+            <a:r>
+              <a:rPr lang="en-US" sz="1600" b="1" dirty="0">
+                <a:solidFill>
+                  <a:srgbClr val="E4C878"/>
                 </a:solidFill>
                 <a:latin typeface="Bookman Old Style" pitchFamily="34" charset="0"/>
                 <a:ea typeface="Bookman Old Style" pitchFamily="34" charset="-122"/>
                 <a:cs typeface="Bookman Old Style" pitchFamily="34" charset="-120"/>
               </a:rPr>
-              <a:t>BeHistorical</a:t>
-            </a:r>
-            <a:endParaRPr lang="en-US" sz="2000" dirty="0"/>
-          </a:p>
-        </p:txBody>
-      </p:sp>
-      <p:sp>
-        <p:nvSpPr>
-          <p:cNvPr id="6" name="Text 4"/>
-          <p:cNvSpPr/>
-          <p:nvPr/>
-        </p:nvSpPr>
-        <p:spPr>
-          <a:xfrm>
-            <a:off x="640080" y="685800"/>
-            <a:ext cx="8229600" cy="365760"/>
-          </a:xfrm>
-          <a:prstGeom prst="rect">
-            <a:avLst/>
-          </a:prstGeom>
-          <a:noFill/>
-          <a:ln/>
-        </p:spPr>
-        <p:txBody>
-          <a:bodyPr wrap="square" lIns="0" tIns="0" rIns="0" bIns="0" rtlCol="0" anchor="ctr"/>
-          <a:lstStyle/>
-          <a:p>
-            <a:pPr indent="0" marL="0">
-              <a:buNone/>
-            </a:pPr>
-            <a:r>
-              <a:rPr lang="en-US" sz="1200" b="1" spc="400" kern="0" dirty="0">
+              <a:t>Teacher Hub</a:t>
+            </a:r>
+            <a:endParaRPr lang="en-US" sz="1600" dirty="0"/>
+          </a:p>
+        </p:txBody>
+      </p:sp>
+      <p:sp>
+        <p:nvSpPr>
+          <p:cNvPr id="16" name="Text 14"/>
+          <p:cNvSpPr/>
+          <p:nvPr/>
+        </p:nvSpPr>
+        <p:spPr>
+          <a:xfrm>
+            <a:off x="7763256" y="2788920"/>
+            <a:ext cx="3703320" cy="256032"/>
+          </a:xfrm>
+          <a:prstGeom prst="rect">
+            <a:avLst/>
+          </a:prstGeom>
+          <a:noFill/>
+          <a:ln/>
+        </p:spPr>
+        <p:txBody>
+          <a:bodyPr wrap="square" lIns="0" tIns="0" rIns="0" bIns="0" rtlCol="0" anchor="ctr"/>
+          <a:lstStyle/>
+          <a:p>
+            <a:pPr indent="0" marL="0">
+              <a:buNone/>
+            </a:pPr>
+            <a:r>
+              <a:rPr lang="en-US" sz="1200" dirty="0">
+                <a:solidFill>
+                  <a:srgbClr val="9AA0A6"/>
+                </a:solidFill>
+                <a:latin typeface="Calibri" pitchFamily="34" charset="0"/>
+                <a:ea typeface="Calibri" pitchFamily="34" charset="-122"/>
+                <a:cs typeface="Calibri" pitchFamily="34" charset="-120"/>
+              </a:rPr>
+              <a:t>→ teachers act in real time</a:t>
+            </a:r>
+            <a:endParaRPr lang="en-US" sz="1200" dirty="0"/>
+          </a:p>
+        </p:txBody>
+      </p:sp>
+      <p:sp>
+        <p:nvSpPr>
+          <p:cNvPr id="17" name="Shape 15"/>
+          <p:cNvSpPr/>
+          <p:nvPr/>
+        </p:nvSpPr>
+        <p:spPr>
+          <a:xfrm>
+            <a:off x="7543800" y="3255264"/>
+            <a:ext cx="4069080" cy="713232"/>
+          </a:xfrm>
+          <a:prstGeom prst="roundRect">
+            <a:avLst>
+              <a:gd name="adj" fmla="val 12821"/>
+            </a:avLst>
+          </a:prstGeom>
+          <a:solidFill>
+            <a:srgbClr val="24272A"/>
+          </a:solidFill>
+          <a:ln w="12700">
+            <a:solidFill>
+              <a:srgbClr val="2E3236"/>
+            </a:solidFill>
+            <a:prstDash val="solid"/>
+          </a:ln>
+        </p:spPr>
+      </p:sp>
+      <p:sp>
+        <p:nvSpPr>
+          <p:cNvPr id="18" name="Text 16"/>
+          <p:cNvSpPr/>
+          <p:nvPr/>
+        </p:nvSpPr>
+        <p:spPr>
+          <a:xfrm>
+            <a:off x="7763256" y="3383280"/>
+            <a:ext cx="3703320" cy="292608"/>
+          </a:xfrm>
+          <a:prstGeom prst="rect">
+            <a:avLst/>
+          </a:prstGeom>
+          <a:noFill/>
+          <a:ln/>
+        </p:spPr>
+        <p:txBody>
+          <a:bodyPr wrap="square" lIns="0" tIns="0" rIns="0" bIns="0" rtlCol="0" anchor="ctr"/>
+          <a:lstStyle/>
+          <a:p>
+            <a:pPr indent="0" marL="0">
+              <a:buNone/>
+            </a:pPr>
+            <a:r>
+              <a:rPr lang="en-US" sz="1600" b="1" dirty="0">
+                <a:solidFill>
+                  <a:srgbClr val="E4C878"/>
+                </a:solidFill>
+                <a:latin typeface="Bookman Old Style" pitchFamily="34" charset="0"/>
+                <a:ea typeface="Bookman Old Style" pitchFamily="34" charset="-122"/>
+                <a:cs typeface="Bookman Old Style" pitchFamily="34" charset="-120"/>
+              </a:rPr>
+              <a:t>Study Guides</a:t>
+            </a:r>
+            <a:endParaRPr lang="en-US" sz="1600" dirty="0"/>
+          </a:p>
+        </p:txBody>
+      </p:sp>
+      <p:sp>
+        <p:nvSpPr>
+          <p:cNvPr id="19" name="Text 17"/>
+          <p:cNvSpPr/>
+          <p:nvPr/>
+        </p:nvSpPr>
+        <p:spPr>
+          <a:xfrm>
+            <a:off x="7763256" y="3666744"/>
+            <a:ext cx="3703320" cy="256032"/>
+          </a:xfrm>
+          <a:prstGeom prst="rect">
+            <a:avLst/>
+          </a:prstGeom>
+          <a:noFill/>
+          <a:ln/>
+        </p:spPr>
+        <p:txBody>
+          <a:bodyPr wrap="square" lIns="0" tIns="0" rIns="0" bIns="0" rtlCol="0" anchor="ctr"/>
+          <a:lstStyle/>
+          <a:p>
+            <a:pPr indent="0" marL="0">
+              <a:buNone/>
+            </a:pPr>
+            <a:r>
+              <a:rPr lang="en-US" sz="1200" dirty="0">
+                <a:solidFill>
+                  <a:srgbClr val="9AA0A6"/>
+                </a:solidFill>
+                <a:latin typeface="Calibri" pitchFamily="34" charset="0"/>
+                <a:ea typeface="Calibri" pitchFamily="34" charset="-122"/>
+                <a:cs typeface="Calibri" pitchFamily="34" charset="-120"/>
+              </a:rPr>
+              <a:t>→ students get a targeted plan</a:t>
+            </a:r>
+            <a:endParaRPr lang="en-US" sz="1200" dirty="0"/>
+          </a:p>
+        </p:txBody>
+      </p:sp>
+      <p:sp>
+        <p:nvSpPr>
+          <p:cNvPr id="20" name="Shape 18"/>
+          <p:cNvSpPr/>
+          <p:nvPr/>
+        </p:nvSpPr>
+        <p:spPr>
+          <a:xfrm>
+            <a:off x="7543800" y="4133088"/>
+            <a:ext cx="4069080" cy="713232"/>
+          </a:xfrm>
+          <a:prstGeom prst="roundRect">
+            <a:avLst>
+              <a:gd name="adj" fmla="val 12821"/>
+            </a:avLst>
+          </a:prstGeom>
+          <a:solidFill>
+            <a:srgbClr val="24272A"/>
+          </a:solidFill>
+          <a:ln w="12700">
+            <a:solidFill>
+              <a:srgbClr val="2E3236"/>
+            </a:solidFill>
+            <a:prstDash val="solid"/>
+          </a:ln>
+        </p:spPr>
+      </p:sp>
+      <p:sp>
+        <p:nvSpPr>
+          <p:cNvPr id="21" name="Text 19"/>
+          <p:cNvSpPr/>
+          <p:nvPr/>
+        </p:nvSpPr>
+        <p:spPr>
+          <a:xfrm>
+            <a:off x="7763256" y="4261104"/>
+            <a:ext cx="3703320" cy="292608"/>
+          </a:xfrm>
+          <a:prstGeom prst="rect">
+            <a:avLst/>
+          </a:prstGeom>
+          <a:noFill/>
+          <a:ln/>
+        </p:spPr>
+        <p:txBody>
+          <a:bodyPr wrap="square" lIns="0" tIns="0" rIns="0" bIns="0" rtlCol="0" anchor="ctr"/>
+          <a:lstStyle/>
+          <a:p>
+            <a:pPr indent="0" marL="0">
+              <a:buNone/>
+            </a:pPr>
+            <a:r>
+              <a:rPr lang="en-US" sz="1600" b="1" dirty="0">
+                <a:solidFill>
+                  <a:srgbClr val="E4C878"/>
+                </a:solidFill>
+                <a:latin typeface="Bookman Old Style" pitchFamily="34" charset="0"/>
+                <a:ea typeface="Bookman Old Style" pitchFamily="34" charset="-122"/>
+                <a:cs typeface="Bookman Old Style" pitchFamily="34" charset="-120"/>
+              </a:rPr>
+              <a:t>The Dispatch</a:t>
+            </a:r>
+            <a:endParaRPr lang="en-US" sz="1600" dirty="0"/>
+          </a:p>
+        </p:txBody>
+      </p:sp>
+      <p:sp>
+        <p:nvSpPr>
+          <p:cNvPr id="22" name="Text 20"/>
+          <p:cNvSpPr/>
+          <p:nvPr/>
+        </p:nvSpPr>
+        <p:spPr>
+          <a:xfrm>
+            <a:off x="7763256" y="4544568"/>
+            <a:ext cx="3703320" cy="256032"/>
+          </a:xfrm>
+          <a:prstGeom prst="rect">
+            <a:avLst/>
+          </a:prstGeom>
+          <a:noFill/>
+          <a:ln/>
+        </p:spPr>
+        <p:txBody>
+          <a:bodyPr wrap="square" lIns="0" tIns="0" rIns="0" bIns="0" rtlCol="0" anchor="ctr"/>
+          <a:lstStyle/>
+          <a:p>
+            <a:pPr indent="0" marL="0">
+              <a:buNone/>
+            </a:pPr>
+            <a:r>
+              <a:rPr lang="en-US" sz="1200" dirty="0">
+                <a:solidFill>
+                  <a:srgbClr val="9AA0A6"/>
+                </a:solidFill>
+                <a:latin typeface="Calibri" pitchFamily="34" charset="0"/>
+                <a:ea typeface="Calibri" pitchFamily="34" charset="-122"/>
+                <a:cs typeface="Calibri" pitchFamily="34" charset="-120"/>
+              </a:rPr>
+              <a:t>→ families stay in the loop</a:t>
+            </a:r>
+            <a:endParaRPr lang="en-US" sz="1200" dirty="0"/>
+          </a:p>
+        </p:txBody>
+      </p:sp>
+      <p:sp>
+        <p:nvSpPr>
+          <p:cNvPr id="23" name="Text 21"/>
+          <p:cNvSpPr/>
+          <p:nvPr/>
+        </p:nvSpPr>
+        <p:spPr>
+          <a:xfrm>
+            <a:off x="640080" y="5212080"/>
+            <a:ext cx="10972800" cy="457200"/>
+          </a:xfrm>
+          <a:prstGeom prst="rect">
+            <a:avLst/>
+          </a:prstGeom>
+          <a:noFill/>
+          <a:ln/>
+        </p:spPr>
+        <p:txBody>
+          <a:bodyPr wrap="square" lIns="0" tIns="0" rIns="0" bIns="0" rtlCol="0" anchor="ctr"/>
+          <a:lstStyle/>
+          <a:p>
+            <a:pPr indent="0" marL="0">
+              <a:buNone/>
+            </a:pPr>
+            <a:r>
+              <a:rPr lang="en-US" sz="1600" b="1" i="1" dirty="0">
                 <a:solidFill>
                   <a:srgbClr val="C9A24B"/>
+                </a:solidFill>
+                <a:latin typeface="Bookman Old Style" pitchFamily="34" charset="0"/>
+                <a:ea typeface="Bookman Old Style" pitchFamily="34" charset="-122"/>
+                <a:cs typeface="Bookman Old Style" pitchFamily="34" charset="-120"/>
+              </a:rPr>
+              <a:t>Build the lesson once — and everyone around the student is served automatically.</a:t>
+            </a:r>
+            <a:endParaRPr lang="en-US" sz="1600" dirty="0"/>
+          </a:p>
+        </p:txBody>
+      </p:sp>
+      <p:sp>
+        <p:nvSpPr>
+          <p:cNvPr id="24" name="Text 22"/>
+          <p:cNvSpPr/>
+          <p:nvPr/>
+        </p:nvSpPr>
+        <p:spPr>
+          <a:xfrm>
+            <a:off x="502920" y="6400800"/>
+            <a:ext cx="7315200" cy="274320"/>
+          </a:xfrm>
+          <a:prstGeom prst="rect">
+            <a:avLst/>
+          </a:prstGeom>
+          <a:noFill/>
+          <a:ln/>
+        </p:spPr>
+        <p:txBody>
+          <a:bodyPr wrap="square" lIns="0" tIns="0" rIns="0" bIns="0" rtlCol="0" anchor="ctr"/>
+          <a:lstStyle/>
+          <a:p>
+            <a:pPr algn="l" indent="0" marL="0">
+              <a:buNone/>
+            </a:pPr>
+            <a:r>
+              <a:rPr lang="en-US" sz="1000" b="1" dirty="0">
+                <a:solidFill>
+                  <a:srgbClr val="C9A24B"/>
+                </a:solidFill>
+                <a:latin typeface="Calibri" pitchFamily="34" charset="0"/>
+                <a:ea typeface="Calibri" pitchFamily="34" charset="-122"/>
+                <a:cs typeface="Calibri" pitchFamily="34" charset="-120"/>
+              </a:rPr>
+              <a:t>AndersonLogic AI</a:t>
+            </a:r>
+            <a:pPr algn="l" indent="0" marL="0">
+              <a:buNone/>
+            </a:pPr>
+            <a:r>
+              <a:rPr lang="en-US" sz="1000" dirty="0">
+                <a:solidFill>
+                  <a:srgbClr val="9AA0A6"/>
+                </a:solidFill>
+                <a:latin typeface="Calibri" pitchFamily="34" charset="0"/>
+                <a:ea typeface="Calibri" pitchFamily="34" charset="-122"/>
+                <a:cs typeface="Calibri" pitchFamily="34" charset="-120"/>
+              </a:rPr>
+              <a:t>   ·   BeHistorical</a:t>
+            </a:r>
+            <a:endParaRPr lang="en-US" sz="1000" dirty="0"/>
+          </a:p>
+        </p:txBody>
+      </p:sp>
+      <p:sp>
+        <p:nvSpPr>
+          <p:cNvPr id="25" name="Text 23"/>
+          <p:cNvSpPr/>
+          <p:nvPr/>
+        </p:nvSpPr>
+        <p:spPr>
+          <a:xfrm>
+            <a:off x="10607040" y="6355080"/>
+            <a:ext cx="1097280" cy="320040"/>
+          </a:xfrm>
+          <a:prstGeom prst="rect">
+            <a:avLst/>
+          </a:prstGeom>
+          <a:noFill/>
+          <a:ln/>
+        </p:spPr>
+        <p:txBody>
+          <a:bodyPr wrap="square" lIns="0" tIns="0" rIns="0" bIns="0" rtlCol="0" anchor="ctr"/>
+          <a:lstStyle/>
+          <a:p>
+            <a:pPr algn="r" indent="0" marL="0">
+              <a:buNone/>
+            </a:pPr>
+            <a:r>
+              <a:rPr lang="en-US" sz="1100" b="1" dirty="0">
+                <a:solidFill>
+                  <a:srgbClr val="9AA0A6"/>
                 </a:solidFill>
                 <a:latin typeface="Consolas" pitchFamily="34" charset="0"/>
                 <a:ea typeface="Consolas" pitchFamily="34" charset="-122"/>
                 <a:cs typeface="Consolas" pitchFamily="34" charset="-120"/>
               </a:rPr>
-              <a:t>WHERE THIS GOES</a:t>
+              <a:t>15 / 17</a:t>
+            </a:r>
+            <a:endParaRPr lang="en-US" sz="1100" dirty="0"/>
+          </a:p>
+        </p:txBody>
+      </p:sp>
+    </p:spTree>
+  </p:cSld>
+  <p:clrMapOvr>
+    <a:masterClrMapping/>
+  </p:clrMapOvr>
+</p:sld>
+</file>
+
+<file path=ppt/slides/slide16.xml><?xml version="1.0" encoding="utf-8"?>
+<p:sld xmlns:a="http://schemas.openxmlformats.org/drawingml/2006/main" xmlns:r="http://schemas.openxmlformats.org/officeDocument/2006/relationships" xmlns:p="http://schemas.openxmlformats.org/presentationml/2006/main">
+  <p:cSld name="Slide 16">
+    <p:bg>
+      <p:bgPr>
+        <a:solidFill>
+          <a:srgbClr val="F4EEE2"/>
+        </a:solidFill>
+      </p:bgPr>
+    </p:bg>
+    <p:spTree>
+      <p:nvGrpSpPr>
+        <p:cNvPr id="1" name=""/>
+        <p:cNvGrpSpPr/>
+        <p:nvPr/>
+      </p:nvGrpSpPr>
+      <p:grpSpPr>
+        <a:xfrm>
+          <a:off x="0" y="0"/>
+          <a:ext cx="0" cy="0"/>
+          <a:chOff x="0" y="0"/>
+          <a:chExt cx="0" cy="0"/>
+        </a:xfrm>
+      </p:grpSpPr>
+      <p:sp>
+        <p:nvSpPr>
+          <p:cNvPr id="2" name="Text 0"/>
+          <p:cNvSpPr/>
+          <p:nvPr/>
+        </p:nvSpPr>
+        <p:spPr>
+          <a:xfrm>
+            <a:off x="640080" y="548640"/>
+            <a:ext cx="8229600" cy="274320"/>
+          </a:xfrm>
+          <a:prstGeom prst="rect">
+            <a:avLst/>
+          </a:prstGeom>
+          <a:noFill/>
+          <a:ln/>
+        </p:spPr>
+        <p:txBody>
+          <a:bodyPr wrap="square" lIns="0" tIns="0" rIns="0" bIns="0" rtlCol="0" anchor="ctr"/>
+          <a:lstStyle/>
+          <a:p>
+            <a:pPr algn="l" indent="0" marL="0">
+              <a:buNone/>
+            </a:pPr>
+            <a:r>
+              <a:rPr lang="en-US" sz="1200" b="1" spc="300" kern="0" dirty="0">
+                <a:solidFill>
+                  <a:srgbClr val="9A7A28"/>
+                </a:solidFill>
+                <a:latin typeface="Consolas" pitchFamily="34" charset="0"/>
+                <a:ea typeface="Consolas" pitchFamily="34" charset="-122"/>
+                <a:cs typeface="Consolas" pitchFamily="34" charset="-120"/>
+              </a:rPr>
+              <a:t>WHERE THE BUILD STANDS</a:t>
             </a:r>
             <a:endParaRPr lang="en-US" sz="1200" dirty="0"/>
           </a:p>
@@ -7195,37 +7469,1419 @@
       </p:sp>
       <p:sp>
         <p:nvSpPr>
-          <p:cNvPr id="7" name="Text 5"/>
-          <p:cNvSpPr/>
-          <p:nvPr/>
-        </p:nvSpPr>
-        <p:spPr>
-          <a:xfrm>
-            <a:off x="566928" y="1143000"/>
-            <a:ext cx="7772400" cy="1280160"/>
-          </a:xfrm>
-          <a:prstGeom prst="rect">
-            <a:avLst/>
-          </a:prstGeom>
-          <a:noFill/>
-          <a:ln/>
-        </p:spPr>
-        <p:txBody>
-          <a:bodyPr wrap="square" lIns="0" tIns="0" rIns="0" bIns="0" rtlCol="0" anchor="ctr"/>
-          <a:lstStyle/>
-          <a:p>
-            <a:pPr indent="0" marL="0">
-              <a:buNone/>
-            </a:pPr>
-            <a:r>
-              <a:rPr lang="en-US" sz="4400" b="1" dirty="0">
-                <a:solidFill>
-                  <a:srgbClr val="FFFFFF"/>
+          <p:cNvPr id="3" name="Text 1"/>
+          <p:cNvSpPr/>
+          <p:nvPr/>
+        </p:nvSpPr>
+        <p:spPr>
+          <a:xfrm>
+            <a:off x="603504" y="868680"/>
+            <a:ext cx="10972800" cy="731520"/>
+          </a:xfrm>
+          <a:prstGeom prst="rect">
+            <a:avLst/>
+          </a:prstGeom>
+          <a:noFill/>
+          <a:ln/>
+        </p:spPr>
+        <p:txBody>
+          <a:bodyPr wrap="square" lIns="0" tIns="0" rIns="0" bIns="0" rtlCol="0" anchor="ctr"/>
+          <a:lstStyle/>
+          <a:p>
+            <a:pPr indent="0" marL="0">
+              <a:buNone/>
+            </a:pPr>
+            <a:r>
+              <a:rPr lang="en-US" sz="3200" b="1" dirty="0">
+                <a:solidFill>
+                  <a:srgbClr val="2B2723"/>
                 </a:solidFill>
                 <a:latin typeface="Bookman Old Style" pitchFamily="34" charset="0"/>
                 <a:ea typeface="Bookman Old Style" pitchFamily="34" charset="-122"/>
                 <a:cs typeface="Bookman Old Style" pitchFamily="34" charset="-120"/>
               </a:rPr>
+              <a:t>What's live, and what's next</a:t>
+            </a:r>
+            <a:endParaRPr lang="en-US" sz="3200" dirty="0"/>
+          </a:p>
+        </p:txBody>
+      </p:sp>
+      <p:sp>
+        <p:nvSpPr>
+          <p:cNvPr id="4" name="Shape 2"/>
+          <p:cNvSpPr/>
+          <p:nvPr/>
+        </p:nvSpPr>
+        <p:spPr>
+          <a:xfrm>
+            <a:off x="640080" y="2103120"/>
+            <a:ext cx="3520440" cy="3383280"/>
+          </a:xfrm>
+          <a:prstGeom prst="roundRect">
+            <a:avLst>
+              <a:gd name="adj" fmla="val 3243"/>
+            </a:avLst>
+          </a:prstGeom>
+          <a:solidFill>
+            <a:srgbClr val="FCF8F0"/>
+          </a:solidFill>
+          <a:ln w="12700">
+            <a:solidFill>
+              <a:srgbClr val="E4DBC9"/>
+            </a:solidFill>
+            <a:prstDash val="solid"/>
+          </a:ln>
+        </p:spPr>
+      </p:sp>
+      <p:sp>
+        <p:nvSpPr>
+          <p:cNvPr id="5" name="Shape 3"/>
+          <p:cNvSpPr/>
+          <p:nvPr/>
+        </p:nvSpPr>
+        <p:spPr>
+          <a:xfrm>
+            <a:off x="914400" y="2377440"/>
+            <a:ext cx="1188720" cy="310896"/>
+          </a:xfrm>
+          <a:prstGeom prst="roundRect">
+            <a:avLst>
+              <a:gd name="adj" fmla="val 50000"/>
+            </a:avLst>
+          </a:prstGeom>
+          <a:solidFill>
+            <a:srgbClr val="DDECE0"/>
+          </a:solidFill>
+          <a:ln w="12700">
+            <a:solidFill>
+              <a:srgbClr val="5AA668"/>
+            </a:solidFill>
+            <a:prstDash val="solid"/>
+          </a:ln>
+        </p:spPr>
+      </p:sp>
+      <p:sp>
+        <p:nvSpPr>
+          <p:cNvPr id="6" name="Text 4"/>
+          <p:cNvSpPr/>
+          <p:nvPr/>
+        </p:nvSpPr>
+        <p:spPr>
+          <a:xfrm>
+            <a:off x="914400" y="2377440"/>
+            <a:ext cx="1188720" cy="310896"/>
+          </a:xfrm>
+          <a:prstGeom prst="rect">
+            <a:avLst/>
+          </a:prstGeom>
+          <a:noFill/>
+          <a:ln/>
+        </p:spPr>
+        <p:txBody>
+          <a:bodyPr wrap="square" lIns="0" tIns="0" rIns="0" bIns="0" rtlCol="0" anchor="ctr"/>
+          <a:lstStyle/>
+          <a:p>
+            <a:pPr algn="ctr" indent="0" marL="0">
+              <a:buNone/>
+            </a:pPr>
+            <a:r>
+              <a:rPr lang="en-US" sz="950" b="1" spc="100" kern="0" dirty="0">
+                <a:solidFill>
+                  <a:srgbClr val="3D7A4D"/>
+                </a:solidFill>
+                <a:latin typeface="Consolas" pitchFamily="34" charset="0"/>
+                <a:ea typeface="Consolas" pitchFamily="34" charset="-122"/>
+                <a:cs typeface="Consolas" pitchFamily="34" charset="-120"/>
+              </a:rPr>
+              <a:t>LIVE NOW</a:t>
+            </a:r>
+            <a:endParaRPr lang="en-US" sz="950" dirty="0"/>
+          </a:p>
+        </p:txBody>
+      </p:sp>
+      <p:sp>
+        <p:nvSpPr>
+          <p:cNvPr id="7" name="Text 5"/>
+          <p:cNvSpPr/>
+          <p:nvPr/>
+        </p:nvSpPr>
+        <p:spPr>
+          <a:xfrm>
+            <a:off x="914400" y="2971800"/>
+            <a:ext cx="3017520" cy="457200"/>
+          </a:xfrm>
+          <a:prstGeom prst="rect">
+            <a:avLst/>
+          </a:prstGeom>
+          <a:noFill/>
+          <a:ln/>
+        </p:spPr>
+        <p:txBody>
+          <a:bodyPr wrap="square" lIns="0" tIns="0" rIns="0" bIns="0" rtlCol="0" anchor="t"/>
+          <a:lstStyle/>
+          <a:p>
+            <a:pPr indent="0" marL="0">
+              <a:buNone/>
+            </a:pPr>
+            <a:r>
+              <a:rPr lang="en-US" sz="1350" b="1" dirty="0">
+                <a:solidFill>
+                  <a:srgbClr val="9A7A28"/>
+                </a:solidFill>
+                <a:latin typeface="Calibri" pitchFamily="34" charset="0"/>
+                <a:ea typeface="Calibri" pitchFamily="34" charset="-122"/>
+                <a:cs typeface="Calibri" pitchFamily="34" charset="-120"/>
+              </a:rPr>
+              <a:t>› </a:t>
+            </a:r>
+            <a:pPr indent="0" marL="0">
+              <a:buNone/>
+            </a:pPr>
+            <a:r>
+              <a:rPr lang="en-US" sz="1350" dirty="0">
+                <a:solidFill>
+                  <a:srgbClr val="2B2723"/>
+                </a:solidFill>
+                <a:latin typeface="Calibri" pitchFamily="34" charset="0"/>
+                <a:ea typeface="Calibri" pitchFamily="34" charset="-122"/>
+                <a:cs typeface="Calibri" pitchFamily="34" charset="-120"/>
+              </a:rPr>
+              <a:t>77 complete lessons</a:t>
+            </a:r>
+            <a:pPr indent="0" marL="0">
+              <a:buNone/>
+            </a:pPr>
+            <a:r>
+              <a:rPr lang="en-US" sz="1150" i="1" dirty="0">
+                <a:solidFill>
+                  <a:srgbClr val="6E675C"/>
+                </a:solidFill>
+                <a:latin typeface="Calibri" pitchFamily="34" charset="0"/>
+                <a:ea typeface="Calibri" pitchFamily="34" charset="-122"/>
+                <a:cs typeface="Calibri" pitchFamily="34" charset="-120"/>
+              </a:rPr>
+              <a:t>  · all 9 units + Foundations</a:t>
+            </a:r>
+            <a:endParaRPr lang="en-US" sz="1350" dirty="0"/>
+          </a:p>
+        </p:txBody>
+      </p:sp>
+      <p:sp>
+        <p:nvSpPr>
+          <p:cNvPr id="8" name="Text 6"/>
+          <p:cNvSpPr/>
+          <p:nvPr/>
+        </p:nvSpPr>
+        <p:spPr>
+          <a:xfrm>
+            <a:off x="914400" y="3483864"/>
+            <a:ext cx="3017520" cy="457200"/>
+          </a:xfrm>
+          <a:prstGeom prst="rect">
+            <a:avLst/>
+          </a:prstGeom>
+          <a:noFill/>
+          <a:ln/>
+        </p:spPr>
+        <p:txBody>
+          <a:bodyPr wrap="square" lIns="0" tIns="0" rIns="0" bIns="0" rtlCol="0" anchor="t"/>
+          <a:lstStyle/>
+          <a:p>
+            <a:pPr indent="0" marL="0">
+              <a:buNone/>
+            </a:pPr>
+            <a:r>
+              <a:rPr lang="en-US" sz="1350" b="1" dirty="0">
+                <a:solidFill>
+                  <a:srgbClr val="9A7A28"/>
+                </a:solidFill>
+                <a:latin typeface="Calibri" pitchFamily="34" charset="0"/>
+                <a:ea typeface="Calibri" pitchFamily="34" charset="-122"/>
+                <a:cs typeface="Calibri" pitchFamily="34" charset="-120"/>
+              </a:rPr>
+              <a:t>› </a:t>
+            </a:r>
+            <a:pPr indent="0" marL="0">
+              <a:buNone/>
+            </a:pPr>
+            <a:r>
+              <a:rPr lang="en-US" sz="1350" dirty="0">
+                <a:solidFill>
+                  <a:srgbClr val="2B2723"/>
+                </a:solidFill>
+                <a:latin typeface="Calibri" pitchFamily="34" charset="0"/>
+                <a:ea typeface="Calibri" pitchFamily="34" charset="-122"/>
+                <a:cs typeface="Calibri" pitchFamily="34" charset="-120"/>
+              </a:rPr>
+              <a:t>61 BeInTheRoom simulations</a:t>
+            </a:r>
+            <a:endParaRPr lang="en-US" sz="1350" dirty="0"/>
+          </a:p>
+        </p:txBody>
+      </p:sp>
+      <p:sp>
+        <p:nvSpPr>
+          <p:cNvPr id="9" name="Text 7"/>
+          <p:cNvSpPr/>
+          <p:nvPr/>
+        </p:nvSpPr>
+        <p:spPr>
+          <a:xfrm>
+            <a:off x="914400" y="3995928"/>
+            <a:ext cx="3017520" cy="457200"/>
+          </a:xfrm>
+          <a:prstGeom prst="rect">
+            <a:avLst/>
+          </a:prstGeom>
+          <a:noFill/>
+          <a:ln/>
+        </p:spPr>
+        <p:txBody>
+          <a:bodyPr wrap="square" lIns="0" tIns="0" rIns="0" bIns="0" rtlCol="0" anchor="t"/>
+          <a:lstStyle/>
+          <a:p>
+            <a:pPr indent="0" marL="0">
+              <a:buNone/>
+            </a:pPr>
+            <a:r>
+              <a:rPr lang="en-US" sz="1350" b="1" dirty="0">
+                <a:solidFill>
+                  <a:srgbClr val="9A7A28"/>
+                </a:solidFill>
+                <a:latin typeface="Calibri" pitchFamily="34" charset="0"/>
+                <a:ea typeface="Calibri" pitchFamily="34" charset="-122"/>
+                <a:cs typeface="Calibri" pitchFamily="34" charset="-120"/>
+              </a:rPr>
+              <a:t>› </a:t>
+            </a:r>
+            <a:pPr indent="0" marL="0">
+              <a:buNone/>
+            </a:pPr>
+            <a:r>
+              <a:rPr lang="en-US" sz="1350" dirty="0">
+                <a:solidFill>
+                  <a:srgbClr val="2B2723"/>
+                </a:solidFill>
+                <a:latin typeface="Calibri" pitchFamily="34" charset="0"/>
+                <a:ea typeface="Calibri" pitchFamily="34" charset="-122"/>
+                <a:cs typeface="Calibri" pitchFamily="34" charset="-120"/>
+              </a:rPr>
+              <a:t>AI coach + MagicSchool workflow</a:t>
+            </a:r>
+            <a:endParaRPr lang="en-US" sz="1350" dirty="0"/>
+          </a:p>
+        </p:txBody>
+      </p:sp>
+      <p:sp>
+        <p:nvSpPr>
+          <p:cNvPr id="10" name="Text 8"/>
+          <p:cNvSpPr/>
+          <p:nvPr/>
+        </p:nvSpPr>
+        <p:spPr>
+          <a:xfrm>
+            <a:off x="914400" y="4507992"/>
+            <a:ext cx="3017520" cy="457200"/>
+          </a:xfrm>
+          <a:prstGeom prst="rect">
+            <a:avLst/>
+          </a:prstGeom>
+          <a:noFill/>
+          <a:ln/>
+        </p:spPr>
+        <p:txBody>
+          <a:bodyPr wrap="square" lIns="0" tIns="0" rIns="0" bIns="0" rtlCol="0" anchor="t"/>
+          <a:lstStyle/>
+          <a:p>
+            <a:pPr indent="0" marL="0">
+              <a:buNone/>
+            </a:pPr>
+            <a:r>
+              <a:rPr lang="en-US" sz="1350" b="1" dirty="0">
+                <a:solidFill>
+                  <a:srgbClr val="9A7A28"/>
+                </a:solidFill>
+                <a:latin typeface="Calibri" pitchFamily="34" charset="0"/>
+                <a:ea typeface="Calibri" pitchFamily="34" charset="-122"/>
+                <a:cs typeface="Calibri" pitchFamily="34" charset="-120"/>
+              </a:rPr>
+              <a:t>› </a:t>
+            </a:r>
+            <a:pPr indent="0" marL="0">
+              <a:buNone/>
+            </a:pPr>
+            <a:r>
+              <a:rPr lang="en-US" sz="1350" dirty="0">
+                <a:solidFill>
+                  <a:srgbClr val="2B2723"/>
+                </a:solidFill>
+                <a:latin typeface="Calibri" pitchFamily="34" charset="0"/>
+                <a:ea typeface="Calibri" pitchFamily="34" charset="-122"/>
+                <a:cs typeface="Calibri" pitchFamily="34" charset="-120"/>
+              </a:rPr>
+              <a:t>Command Center &amp; validation</a:t>
+            </a:r>
+            <a:endParaRPr lang="en-US" sz="1350" dirty="0"/>
+          </a:p>
+        </p:txBody>
+      </p:sp>
+      <p:sp>
+        <p:nvSpPr>
+          <p:cNvPr id="11" name="Text 9"/>
+          <p:cNvSpPr/>
+          <p:nvPr/>
+        </p:nvSpPr>
+        <p:spPr>
+          <a:xfrm>
+            <a:off x="914400" y="5020056"/>
+            <a:ext cx="3017520" cy="457200"/>
+          </a:xfrm>
+          <a:prstGeom prst="rect">
+            <a:avLst/>
+          </a:prstGeom>
+          <a:noFill/>
+          <a:ln/>
+        </p:spPr>
+        <p:txBody>
+          <a:bodyPr wrap="square" lIns="0" tIns="0" rIns="0" bIns="0" rtlCol="0" anchor="t"/>
+          <a:lstStyle/>
+          <a:p>
+            <a:pPr indent="0" marL="0">
+              <a:buNone/>
+            </a:pPr>
+            <a:r>
+              <a:rPr lang="en-US" sz="1350" b="1" dirty="0">
+                <a:solidFill>
+                  <a:srgbClr val="9A7A28"/>
+                </a:solidFill>
+                <a:latin typeface="Calibri" pitchFamily="34" charset="0"/>
+                <a:ea typeface="Calibri" pitchFamily="34" charset="-122"/>
+                <a:cs typeface="Calibri" pitchFamily="34" charset="-120"/>
+              </a:rPr>
+              <a:t>› </a:t>
+            </a:r>
+            <a:pPr indent="0" marL="0">
+              <a:buNone/>
+            </a:pPr>
+            <a:r>
+              <a:rPr lang="en-US" sz="1350" dirty="0">
+                <a:solidFill>
+                  <a:srgbClr val="2B2723"/>
+                </a:solidFill>
+                <a:latin typeface="Calibri" pitchFamily="34" charset="0"/>
+                <a:ea typeface="Calibri" pitchFamily="34" charset="-122"/>
+                <a:cs typeface="Calibri" pitchFamily="34" charset="-120"/>
+              </a:rPr>
+              <a:t>Teacher Hub</a:t>
+            </a:r>
+            <a:pPr indent="0" marL="0">
+              <a:buNone/>
+            </a:pPr>
+            <a:r>
+              <a:rPr lang="en-US" sz="1150" i="1" dirty="0">
+                <a:solidFill>
+                  <a:srgbClr val="6E675C"/>
+                </a:solidFill>
+                <a:latin typeface="Calibri" pitchFamily="34" charset="0"/>
+                <a:ea typeface="Calibri" pitchFamily="34" charset="-122"/>
+                <a:cs typeface="Calibri" pitchFamily="34" charset="-120"/>
+              </a:rPr>
+              <a:t>  · Topic 1.1 prototype</a:t>
+            </a:r>
+            <a:endParaRPr lang="en-US" sz="1350" dirty="0"/>
+          </a:p>
+        </p:txBody>
+      </p:sp>
+      <p:sp>
+        <p:nvSpPr>
+          <p:cNvPr id="12" name="Shape 10"/>
+          <p:cNvSpPr/>
+          <p:nvPr/>
+        </p:nvSpPr>
+        <p:spPr>
+          <a:xfrm>
+            <a:off x="4434840" y="2103120"/>
+            <a:ext cx="3520440" cy="3383280"/>
+          </a:xfrm>
+          <a:prstGeom prst="roundRect">
+            <a:avLst>
+              <a:gd name="adj" fmla="val 3243"/>
+            </a:avLst>
+          </a:prstGeom>
+          <a:solidFill>
+            <a:srgbClr val="FCF8F0"/>
+          </a:solidFill>
+          <a:ln w="12700">
+            <a:solidFill>
+              <a:srgbClr val="E4DBC9"/>
+            </a:solidFill>
+            <a:prstDash val="solid"/>
+          </a:ln>
+        </p:spPr>
+      </p:sp>
+      <p:sp>
+        <p:nvSpPr>
+          <p:cNvPr id="13" name="Shape 11"/>
+          <p:cNvSpPr/>
+          <p:nvPr/>
+        </p:nvSpPr>
+        <p:spPr>
+          <a:xfrm>
+            <a:off x="4709160" y="2377440"/>
+            <a:ext cx="1737360" cy="310896"/>
+          </a:xfrm>
+          <a:prstGeom prst="roundRect">
+            <a:avLst>
+              <a:gd name="adj" fmla="val 50000"/>
+            </a:avLst>
+          </a:prstGeom>
+          <a:solidFill>
+            <a:srgbClr val="F2E6C9"/>
+          </a:solidFill>
+          <a:ln w="12700">
+            <a:solidFill>
+              <a:srgbClr val="C9A24B"/>
+            </a:solidFill>
+            <a:prstDash val="solid"/>
+          </a:ln>
+        </p:spPr>
+      </p:sp>
+      <p:sp>
+        <p:nvSpPr>
+          <p:cNvPr id="14" name="Text 12"/>
+          <p:cNvSpPr/>
+          <p:nvPr/>
+        </p:nvSpPr>
+        <p:spPr>
+          <a:xfrm>
+            <a:off x="4709160" y="2377440"/>
+            <a:ext cx="1737360" cy="310896"/>
+          </a:xfrm>
+          <a:prstGeom prst="rect">
+            <a:avLst/>
+          </a:prstGeom>
+          <a:noFill/>
+          <a:ln/>
+        </p:spPr>
+        <p:txBody>
+          <a:bodyPr wrap="square" lIns="0" tIns="0" rIns="0" bIns="0" rtlCol="0" anchor="ctr"/>
+          <a:lstStyle/>
+          <a:p>
+            <a:pPr algn="ctr" indent="0" marL="0">
+              <a:buNone/>
+            </a:pPr>
+            <a:r>
+              <a:rPr lang="en-US" sz="950" b="1" spc="100" kern="0" dirty="0">
+                <a:solidFill>
+                  <a:srgbClr val="9A7A28"/>
+                </a:solidFill>
+                <a:latin typeface="Consolas" pitchFamily="34" charset="0"/>
+                <a:ea typeface="Consolas" pitchFamily="34" charset="-122"/>
+                <a:cs typeface="Consolas" pitchFamily="34" charset="-120"/>
+              </a:rPr>
+              <a:t>IN DEVELOPMENT</a:t>
+            </a:r>
+            <a:endParaRPr lang="en-US" sz="950" dirty="0"/>
+          </a:p>
+        </p:txBody>
+      </p:sp>
+      <p:sp>
+        <p:nvSpPr>
+          <p:cNvPr id="15" name="Text 13"/>
+          <p:cNvSpPr/>
+          <p:nvPr/>
+        </p:nvSpPr>
+        <p:spPr>
+          <a:xfrm>
+            <a:off x="4709160" y="2971800"/>
+            <a:ext cx="3017520" cy="457200"/>
+          </a:xfrm>
+          <a:prstGeom prst="rect">
+            <a:avLst/>
+          </a:prstGeom>
+          <a:noFill/>
+          <a:ln/>
+        </p:spPr>
+        <p:txBody>
+          <a:bodyPr wrap="square" lIns="0" tIns="0" rIns="0" bIns="0" rtlCol="0" anchor="t"/>
+          <a:lstStyle/>
+          <a:p>
+            <a:pPr indent="0" marL="0">
+              <a:buNone/>
+            </a:pPr>
+            <a:r>
+              <a:rPr lang="en-US" sz="1350" b="1" dirty="0">
+                <a:solidFill>
+                  <a:srgbClr val="9A7A28"/>
+                </a:solidFill>
+                <a:latin typeface="Calibri" pitchFamily="34" charset="0"/>
+                <a:ea typeface="Calibri" pitchFamily="34" charset="-122"/>
+                <a:cs typeface="Calibri" pitchFamily="34" charset="-120"/>
+              </a:rPr>
+              <a:t>› </a:t>
+            </a:r>
+            <a:pPr indent="0" marL="0">
+              <a:buNone/>
+            </a:pPr>
+            <a:r>
+              <a:rPr lang="en-US" sz="1350" dirty="0">
+                <a:solidFill>
+                  <a:srgbClr val="2B2723"/>
+                </a:solidFill>
+                <a:latin typeface="Calibri" pitchFamily="34" charset="0"/>
+                <a:ea typeface="Calibri" pitchFamily="34" charset="-122"/>
+                <a:cs typeface="Calibri" pitchFamily="34" charset="-120"/>
+              </a:rPr>
+              <a:t>Personalized study guides</a:t>
+            </a:r>
+            <a:endParaRPr lang="en-US" sz="1350" dirty="0"/>
+          </a:p>
+        </p:txBody>
+      </p:sp>
+      <p:sp>
+        <p:nvSpPr>
+          <p:cNvPr id="16" name="Text 14"/>
+          <p:cNvSpPr/>
+          <p:nvPr/>
+        </p:nvSpPr>
+        <p:spPr>
+          <a:xfrm>
+            <a:off x="4709160" y="3483864"/>
+            <a:ext cx="3017520" cy="457200"/>
+          </a:xfrm>
+          <a:prstGeom prst="rect">
+            <a:avLst/>
+          </a:prstGeom>
+          <a:noFill/>
+          <a:ln/>
+        </p:spPr>
+        <p:txBody>
+          <a:bodyPr wrap="square" lIns="0" tIns="0" rIns="0" bIns="0" rtlCol="0" anchor="t"/>
+          <a:lstStyle/>
+          <a:p>
+            <a:pPr indent="0" marL="0">
+              <a:buNone/>
+            </a:pPr>
+            <a:r>
+              <a:rPr lang="en-US" sz="1350" b="1" dirty="0">
+                <a:solidFill>
+                  <a:srgbClr val="9A7A28"/>
+                </a:solidFill>
+                <a:latin typeface="Calibri" pitchFamily="34" charset="0"/>
+                <a:ea typeface="Calibri" pitchFamily="34" charset="-122"/>
+                <a:cs typeface="Calibri" pitchFamily="34" charset="-120"/>
+              </a:rPr>
+              <a:t>› </a:t>
+            </a:r>
+            <a:pPr indent="0" marL="0">
+              <a:buNone/>
+            </a:pPr>
+            <a:r>
+              <a:rPr lang="en-US" sz="1350" dirty="0">
+                <a:solidFill>
+                  <a:srgbClr val="2B2723"/>
+                </a:solidFill>
+                <a:latin typeface="Calibri" pitchFamily="34" charset="0"/>
+                <a:ea typeface="Calibri" pitchFamily="34" charset="-122"/>
+                <a:cs typeface="Calibri" pitchFamily="34" charset="-120"/>
+              </a:rPr>
+              <a:t>The Dispatch</a:t>
+            </a:r>
+            <a:pPr indent="0" marL="0">
+              <a:buNone/>
+            </a:pPr>
+            <a:r>
+              <a:rPr lang="en-US" sz="1150" i="1" dirty="0">
+                <a:solidFill>
+                  <a:srgbClr val="6E675C"/>
+                </a:solidFill>
+                <a:latin typeface="Calibri" pitchFamily="34" charset="0"/>
+                <a:ea typeface="Calibri" pitchFamily="34" charset="-122"/>
+                <a:cs typeface="Calibri" pitchFamily="34" charset="-120"/>
+              </a:rPr>
+              <a:t>  · template + Issue 01 built</a:t>
+            </a:r>
+            <a:endParaRPr lang="en-US" sz="1350" dirty="0"/>
+          </a:p>
+        </p:txBody>
+      </p:sp>
+      <p:sp>
+        <p:nvSpPr>
+          <p:cNvPr id="17" name="Text 15"/>
+          <p:cNvSpPr/>
+          <p:nvPr/>
+        </p:nvSpPr>
+        <p:spPr>
+          <a:xfrm>
+            <a:off x="4709160" y="3995928"/>
+            <a:ext cx="3017520" cy="457200"/>
+          </a:xfrm>
+          <a:prstGeom prst="rect">
+            <a:avLst/>
+          </a:prstGeom>
+          <a:noFill/>
+          <a:ln/>
+        </p:spPr>
+        <p:txBody>
+          <a:bodyPr wrap="square" lIns="0" tIns="0" rIns="0" bIns="0" rtlCol="0" anchor="t"/>
+          <a:lstStyle/>
+          <a:p>
+            <a:pPr indent="0" marL="0">
+              <a:buNone/>
+            </a:pPr>
+            <a:r>
+              <a:rPr lang="en-US" sz="1350" b="1" dirty="0">
+                <a:solidFill>
+                  <a:srgbClr val="9A7A28"/>
+                </a:solidFill>
+                <a:latin typeface="Calibri" pitchFamily="34" charset="0"/>
+                <a:ea typeface="Calibri" pitchFamily="34" charset="-122"/>
+                <a:cs typeface="Calibri" pitchFamily="34" charset="-120"/>
+              </a:rPr>
+              <a:t>› </a:t>
+            </a:r>
+            <a:pPr indent="0" marL="0">
+              <a:buNone/>
+            </a:pPr>
+            <a:r>
+              <a:rPr lang="en-US" sz="1350" dirty="0">
+                <a:solidFill>
+                  <a:srgbClr val="2B2723"/>
+                </a:solidFill>
+                <a:latin typeface="Calibri" pitchFamily="34" charset="0"/>
+                <a:ea typeface="Calibri" pitchFamily="34" charset="-122"/>
+                <a:cs typeface="Calibri" pitchFamily="34" charset="-120"/>
+              </a:rPr>
+              <a:t>Teacher Hub across all units</a:t>
+            </a:r>
+            <a:endParaRPr lang="en-US" sz="1350" dirty="0"/>
+          </a:p>
+        </p:txBody>
+      </p:sp>
+      <p:sp>
+        <p:nvSpPr>
+          <p:cNvPr id="18" name="Text 16"/>
+          <p:cNvSpPr/>
+          <p:nvPr/>
+        </p:nvSpPr>
+        <p:spPr>
+          <a:xfrm>
+            <a:off x="4709160" y="4507992"/>
+            <a:ext cx="3017520" cy="457200"/>
+          </a:xfrm>
+          <a:prstGeom prst="rect">
+            <a:avLst/>
+          </a:prstGeom>
+          <a:noFill/>
+          <a:ln/>
+        </p:spPr>
+        <p:txBody>
+          <a:bodyPr wrap="square" lIns="0" tIns="0" rIns="0" bIns="0" rtlCol="0" anchor="t"/>
+          <a:lstStyle/>
+          <a:p>
+            <a:pPr indent="0" marL="0">
+              <a:buNone/>
+            </a:pPr>
+            <a:r>
+              <a:rPr lang="en-US" sz="1350" b="1" dirty="0">
+                <a:solidFill>
+                  <a:srgbClr val="9A7A28"/>
+                </a:solidFill>
+                <a:latin typeface="Calibri" pitchFamily="34" charset="0"/>
+                <a:ea typeface="Calibri" pitchFamily="34" charset="-122"/>
+                <a:cs typeface="Calibri" pitchFamily="34" charset="-120"/>
+              </a:rPr>
+              <a:t>› </a:t>
+            </a:r>
+            <a:pPr indent="0" marL="0">
+              <a:buNone/>
+            </a:pPr>
+            <a:r>
+              <a:rPr lang="en-US" sz="1350" dirty="0">
+                <a:solidFill>
+                  <a:srgbClr val="2B2723"/>
+                </a:solidFill>
+                <a:latin typeface="Calibri" pitchFamily="34" charset="0"/>
+                <a:ea typeface="Calibri" pitchFamily="34" charset="-122"/>
+                <a:cs typeface="Calibri" pitchFamily="34" charset="-120"/>
+              </a:rPr>
+              <a:t>Live data pipeline</a:t>
+            </a:r>
+            <a:pPr indent="0" marL="0">
+              <a:buNone/>
+            </a:pPr>
+            <a:r>
+              <a:rPr lang="en-US" sz="1150" i="1" dirty="0">
+                <a:solidFill>
+                  <a:srgbClr val="6E675C"/>
+                </a:solidFill>
+                <a:latin typeface="Calibri" pitchFamily="34" charset="0"/>
+                <a:ea typeface="Calibri" pitchFamily="34" charset="-122"/>
+                <a:cs typeface="Calibri" pitchFamily="34" charset="-120"/>
+              </a:rPr>
+              <a:t>  · Form → Sheet → Hub</a:t>
+            </a:r>
+            <a:endParaRPr lang="en-US" sz="1350" dirty="0"/>
+          </a:p>
+        </p:txBody>
+      </p:sp>
+      <p:sp>
+        <p:nvSpPr>
+          <p:cNvPr id="19" name="Shape 17"/>
+          <p:cNvSpPr/>
+          <p:nvPr/>
+        </p:nvSpPr>
+        <p:spPr>
+          <a:xfrm>
+            <a:off x="8229600" y="2103120"/>
+            <a:ext cx="3520440" cy="3383280"/>
+          </a:xfrm>
+          <a:prstGeom prst="roundRect">
+            <a:avLst>
+              <a:gd name="adj" fmla="val 3243"/>
+            </a:avLst>
+          </a:prstGeom>
+          <a:solidFill>
+            <a:srgbClr val="FCF8F0"/>
+          </a:solidFill>
+          <a:ln w="12700">
+            <a:solidFill>
+              <a:srgbClr val="E4DBC9"/>
+            </a:solidFill>
+            <a:prstDash val="solid"/>
+          </a:ln>
+        </p:spPr>
+      </p:sp>
+      <p:sp>
+        <p:nvSpPr>
+          <p:cNvPr id="20" name="Shape 18"/>
+          <p:cNvSpPr/>
+          <p:nvPr/>
+        </p:nvSpPr>
+        <p:spPr>
+          <a:xfrm>
+            <a:off x="8503920" y="2377440"/>
+            <a:ext cx="1280160" cy="310896"/>
+          </a:xfrm>
+          <a:prstGeom prst="roundRect">
+            <a:avLst>
+              <a:gd name="adj" fmla="val 50000"/>
+            </a:avLst>
+          </a:prstGeom>
+          <a:solidFill>
+            <a:srgbClr val="DCE9EA"/>
+          </a:solidFill>
+          <a:ln w="12700">
+            <a:solidFill>
+              <a:srgbClr val="3E8E96"/>
+            </a:solidFill>
+            <a:prstDash val="solid"/>
+          </a:ln>
+        </p:spPr>
+      </p:sp>
+      <p:sp>
+        <p:nvSpPr>
+          <p:cNvPr id="21" name="Text 19"/>
+          <p:cNvSpPr/>
+          <p:nvPr/>
+        </p:nvSpPr>
+        <p:spPr>
+          <a:xfrm>
+            <a:off x="8503920" y="2377440"/>
+            <a:ext cx="1280160" cy="310896"/>
+          </a:xfrm>
+          <a:prstGeom prst="rect">
+            <a:avLst/>
+          </a:prstGeom>
+          <a:noFill/>
+          <a:ln/>
+        </p:spPr>
+        <p:txBody>
+          <a:bodyPr wrap="square" lIns="0" tIns="0" rIns="0" bIns="0" rtlCol="0" anchor="ctr"/>
+          <a:lstStyle/>
+          <a:p>
+            <a:pPr algn="ctr" indent="0" marL="0">
+              <a:buNone/>
+            </a:pPr>
+            <a:r>
+              <a:rPr lang="en-US" sz="950" b="1" spc="100" kern="0" dirty="0">
+                <a:solidFill>
+                  <a:srgbClr val="2F6B71"/>
+                </a:solidFill>
+                <a:latin typeface="Consolas" pitchFamily="34" charset="0"/>
+                <a:ea typeface="Consolas" pitchFamily="34" charset="-122"/>
+                <a:cs typeface="Consolas" pitchFamily="34" charset="-120"/>
+              </a:rPr>
+              <a:t>EXPLORING</a:t>
+            </a:r>
+            <a:endParaRPr lang="en-US" sz="950" dirty="0"/>
+          </a:p>
+        </p:txBody>
+      </p:sp>
+      <p:sp>
+        <p:nvSpPr>
+          <p:cNvPr id="22" name="Text 20"/>
+          <p:cNvSpPr/>
+          <p:nvPr/>
+        </p:nvSpPr>
+        <p:spPr>
+          <a:xfrm>
+            <a:off x="8503920" y="2971800"/>
+            <a:ext cx="3017520" cy="457200"/>
+          </a:xfrm>
+          <a:prstGeom prst="rect">
+            <a:avLst/>
+          </a:prstGeom>
+          <a:noFill/>
+          <a:ln/>
+        </p:spPr>
+        <p:txBody>
+          <a:bodyPr wrap="square" lIns="0" tIns="0" rIns="0" bIns="0" rtlCol="0" anchor="t"/>
+          <a:lstStyle/>
+          <a:p>
+            <a:pPr indent="0" marL="0">
+              <a:buNone/>
+            </a:pPr>
+            <a:r>
+              <a:rPr lang="en-US" sz="1350" b="1" dirty="0">
+                <a:solidFill>
+                  <a:srgbClr val="9A7A28"/>
+                </a:solidFill>
+                <a:latin typeface="Calibri" pitchFamily="34" charset="0"/>
+                <a:ea typeface="Calibri" pitchFamily="34" charset="-122"/>
+                <a:cs typeface="Calibri" pitchFamily="34" charset="-120"/>
+              </a:rPr>
+              <a:t>› </a:t>
+            </a:r>
+            <a:pPr indent="0" marL="0">
+              <a:buNone/>
+            </a:pPr>
+            <a:r>
+              <a:rPr lang="en-US" sz="1350" dirty="0">
+                <a:solidFill>
+                  <a:srgbClr val="2B2723"/>
+                </a:solidFill>
+                <a:latin typeface="Calibri" pitchFamily="34" charset="0"/>
+                <a:ea typeface="Calibri" pitchFamily="34" charset="-122"/>
+                <a:cs typeface="Calibri" pitchFamily="34" charset="-120"/>
+              </a:rPr>
+              <a:t>Auto-sent study guides</a:t>
+            </a:r>
+            <a:endParaRPr lang="en-US" sz="1350" dirty="0"/>
+          </a:p>
+        </p:txBody>
+      </p:sp>
+      <p:sp>
+        <p:nvSpPr>
+          <p:cNvPr id="23" name="Text 21"/>
+          <p:cNvSpPr/>
+          <p:nvPr/>
+        </p:nvSpPr>
+        <p:spPr>
+          <a:xfrm>
+            <a:off x="8503920" y="3483864"/>
+            <a:ext cx="3017520" cy="457200"/>
+          </a:xfrm>
+          <a:prstGeom prst="rect">
+            <a:avLst/>
+          </a:prstGeom>
+          <a:noFill/>
+          <a:ln/>
+        </p:spPr>
+        <p:txBody>
+          <a:bodyPr wrap="square" lIns="0" tIns="0" rIns="0" bIns="0" rtlCol="0" anchor="t"/>
+          <a:lstStyle/>
+          <a:p>
+            <a:pPr indent="0" marL="0">
+              <a:buNone/>
+            </a:pPr>
+            <a:r>
+              <a:rPr lang="en-US" sz="1350" b="1" dirty="0">
+                <a:solidFill>
+                  <a:srgbClr val="9A7A28"/>
+                </a:solidFill>
+                <a:latin typeface="Calibri" pitchFamily="34" charset="0"/>
+                <a:ea typeface="Calibri" pitchFamily="34" charset="-122"/>
+                <a:cs typeface="Calibri" pitchFamily="34" charset="-120"/>
+              </a:rPr>
+              <a:t>› </a:t>
+            </a:r>
+            <a:pPr indent="0" marL="0">
+              <a:buNone/>
+            </a:pPr>
+            <a:r>
+              <a:rPr lang="en-US" sz="1350" dirty="0">
+                <a:solidFill>
+                  <a:srgbClr val="2B2723"/>
+                </a:solidFill>
+                <a:latin typeface="Calibri" pitchFamily="34" charset="0"/>
+                <a:ea typeface="Calibri" pitchFamily="34" charset="-122"/>
+                <a:cs typeface="Calibri" pitchFamily="34" charset="-120"/>
+              </a:rPr>
+              <a:t>Other AP courses &amp; subjects</a:t>
+            </a:r>
+            <a:endParaRPr lang="en-US" sz="1350" dirty="0"/>
+          </a:p>
+        </p:txBody>
+      </p:sp>
+      <p:sp>
+        <p:nvSpPr>
+          <p:cNvPr id="24" name="Text 22"/>
+          <p:cNvSpPr/>
+          <p:nvPr/>
+        </p:nvSpPr>
+        <p:spPr>
+          <a:xfrm>
+            <a:off x="8503920" y="3995928"/>
+            <a:ext cx="3017520" cy="457200"/>
+          </a:xfrm>
+          <a:prstGeom prst="rect">
+            <a:avLst/>
+          </a:prstGeom>
+          <a:noFill/>
+          <a:ln/>
+        </p:spPr>
+        <p:txBody>
+          <a:bodyPr wrap="square" lIns="0" tIns="0" rIns="0" bIns="0" rtlCol="0" anchor="t"/>
+          <a:lstStyle/>
+          <a:p>
+            <a:pPr indent="0" marL="0">
+              <a:buNone/>
+            </a:pPr>
+            <a:r>
+              <a:rPr lang="en-US" sz="1350" b="1" dirty="0">
+                <a:solidFill>
+                  <a:srgbClr val="9A7A28"/>
+                </a:solidFill>
+                <a:latin typeface="Calibri" pitchFamily="34" charset="0"/>
+                <a:ea typeface="Calibri" pitchFamily="34" charset="-122"/>
+                <a:cs typeface="Calibri" pitchFamily="34" charset="-120"/>
+              </a:rPr>
+              <a:t>› </a:t>
+            </a:r>
+            <a:pPr indent="0" marL="0">
+              <a:buNone/>
+            </a:pPr>
+            <a:r>
+              <a:rPr lang="en-US" sz="1350" dirty="0">
+                <a:solidFill>
+                  <a:srgbClr val="2B2723"/>
+                </a:solidFill>
+                <a:latin typeface="Calibri" pitchFamily="34" charset="0"/>
+                <a:ea typeface="Calibri" pitchFamily="34" charset="-122"/>
+                <a:cs typeface="Calibri" pitchFamily="34" charset="-120"/>
+              </a:rPr>
+              <a:t>District rollout &amp; PD</a:t>
+            </a:r>
+            <a:endParaRPr lang="en-US" sz="1350" dirty="0"/>
+          </a:p>
+        </p:txBody>
+      </p:sp>
+      <p:sp>
+        <p:nvSpPr>
+          <p:cNvPr id="25" name="Text 23"/>
+          <p:cNvSpPr/>
+          <p:nvPr/>
+        </p:nvSpPr>
+        <p:spPr>
+          <a:xfrm>
+            <a:off x="8503920" y="4507992"/>
+            <a:ext cx="3017520" cy="457200"/>
+          </a:xfrm>
+          <a:prstGeom prst="rect">
+            <a:avLst/>
+          </a:prstGeom>
+          <a:noFill/>
+          <a:ln/>
+        </p:spPr>
+        <p:txBody>
+          <a:bodyPr wrap="square" lIns="0" tIns="0" rIns="0" bIns="0" rtlCol="0" anchor="t"/>
+          <a:lstStyle/>
+          <a:p>
+            <a:pPr indent="0" marL="0">
+              <a:buNone/>
+            </a:pPr>
+            <a:r>
+              <a:rPr lang="en-US" sz="1350" b="1" dirty="0">
+                <a:solidFill>
+                  <a:srgbClr val="9A7A28"/>
+                </a:solidFill>
+                <a:latin typeface="Calibri" pitchFamily="34" charset="0"/>
+                <a:ea typeface="Calibri" pitchFamily="34" charset="-122"/>
+                <a:cs typeface="Calibri" pitchFamily="34" charset="-120"/>
+              </a:rPr>
+              <a:t>› </a:t>
+            </a:r>
+            <a:pPr indent="0" marL="0">
+              <a:buNone/>
+            </a:pPr>
+            <a:r>
+              <a:rPr lang="en-US" sz="1350" dirty="0">
+                <a:solidFill>
+                  <a:srgbClr val="2B2723"/>
+                </a:solidFill>
+                <a:latin typeface="Calibri" pitchFamily="34" charset="0"/>
+                <a:ea typeface="Calibri" pitchFamily="34" charset="-122"/>
+                <a:cs typeface="Calibri" pitchFamily="34" charset="-120"/>
+              </a:rPr>
+              <a:t>Consulting &amp; licensing</a:t>
+            </a:r>
+            <a:endParaRPr lang="en-US" sz="1350" dirty="0"/>
+          </a:p>
+        </p:txBody>
+      </p:sp>
+      <p:sp>
+        <p:nvSpPr>
+          <p:cNvPr id="26" name="Text 24"/>
+          <p:cNvSpPr/>
+          <p:nvPr/>
+        </p:nvSpPr>
+        <p:spPr>
+          <a:xfrm>
+            <a:off x="502920" y="6400800"/>
+            <a:ext cx="7315200" cy="274320"/>
+          </a:xfrm>
+          <a:prstGeom prst="rect">
+            <a:avLst/>
+          </a:prstGeom>
+          <a:noFill/>
+          <a:ln/>
+        </p:spPr>
+        <p:txBody>
+          <a:bodyPr wrap="square" lIns="0" tIns="0" rIns="0" bIns="0" rtlCol="0" anchor="ctr"/>
+          <a:lstStyle/>
+          <a:p>
+            <a:pPr algn="l" indent="0" marL="0">
+              <a:buNone/>
+            </a:pPr>
+            <a:r>
+              <a:rPr lang="en-US" sz="1000" b="1" dirty="0">
+                <a:solidFill>
+                  <a:srgbClr val="C9A24B"/>
+                </a:solidFill>
+                <a:latin typeface="Calibri" pitchFamily="34" charset="0"/>
+                <a:ea typeface="Calibri" pitchFamily="34" charset="-122"/>
+                <a:cs typeface="Calibri" pitchFamily="34" charset="-120"/>
+              </a:rPr>
+              <a:t>AndersonLogic AI</a:t>
+            </a:r>
+            <a:pPr algn="l" indent="0" marL="0">
+              <a:buNone/>
+            </a:pPr>
+            <a:r>
+              <a:rPr lang="en-US" sz="1000" dirty="0">
+                <a:solidFill>
+                  <a:srgbClr val="6E675C"/>
+                </a:solidFill>
+                <a:latin typeface="Calibri" pitchFamily="34" charset="0"/>
+                <a:ea typeface="Calibri" pitchFamily="34" charset="-122"/>
+                <a:cs typeface="Calibri" pitchFamily="34" charset="-120"/>
+              </a:rPr>
+              <a:t>   ·   BeHistorical</a:t>
+            </a:r>
+            <a:endParaRPr lang="en-US" sz="1000" dirty="0"/>
+          </a:p>
+        </p:txBody>
+      </p:sp>
+      <p:sp>
+        <p:nvSpPr>
+          <p:cNvPr id="27" name="Text 25"/>
+          <p:cNvSpPr/>
+          <p:nvPr/>
+        </p:nvSpPr>
+        <p:spPr>
+          <a:xfrm>
+            <a:off x="10607040" y="6355080"/>
+            <a:ext cx="1097280" cy="320040"/>
+          </a:xfrm>
+          <a:prstGeom prst="rect">
+            <a:avLst/>
+          </a:prstGeom>
+          <a:noFill/>
+          <a:ln/>
+        </p:spPr>
+        <p:txBody>
+          <a:bodyPr wrap="square" lIns="0" tIns="0" rIns="0" bIns="0" rtlCol="0" anchor="ctr"/>
+          <a:lstStyle/>
+          <a:p>
+            <a:pPr algn="r" indent="0" marL="0">
+              <a:buNone/>
+            </a:pPr>
+            <a:r>
+              <a:rPr lang="en-US" sz="1100" b="1" dirty="0">
+                <a:solidFill>
+                  <a:srgbClr val="6E675C"/>
+                </a:solidFill>
+                <a:latin typeface="Consolas" pitchFamily="34" charset="0"/>
+                <a:ea typeface="Consolas" pitchFamily="34" charset="-122"/>
+                <a:cs typeface="Consolas" pitchFamily="34" charset="-120"/>
+              </a:rPr>
+              <a:t>16 / 17</a:t>
+            </a:r>
+            <a:endParaRPr lang="en-US" sz="1100" dirty="0"/>
+          </a:p>
+        </p:txBody>
+      </p:sp>
+    </p:spTree>
+  </p:cSld>
+  <p:clrMapOvr>
+    <a:masterClrMapping/>
+  </p:clrMapOvr>
+</p:sld>
+</file>
+
+<file path=ppt/slides/slide17.xml><?xml version="1.0" encoding="utf-8"?>
+<p:sld xmlns:a="http://schemas.openxmlformats.org/drawingml/2006/main" xmlns:r="http://schemas.openxmlformats.org/officeDocument/2006/relationships" xmlns:p="http://schemas.openxmlformats.org/presentationml/2006/main">
+  <p:cSld name="Slide 17">
+    <p:bg>
+      <p:bgPr>
+        <a:solidFill>
+          <a:srgbClr val="1A1C1D"/>
+        </a:solidFill>
+      </p:bgPr>
+    </p:bg>
+    <p:spTree>
+      <p:nvGrpSpPr>
+        <p:cNvPr id="1" name=""/>
+        <p:cNvGrpSpPr/>
+        <p:nvPr/>
+      </p:nvGrpSpPr>
+      <p:grpSpPr>
+        <a:xfrm>
+          <a:off x="0" y="0"/>
+          <a:ext cx="0" cy="0"/>
+          <a:chOff x="0" y="0"/>
+          <a:chExt cx="0" cy="0"/>
+        </a:xfrm>
+      </p:grpSpPr>
+      <p:sp>
+        <p:nvSpPr>
+          <p:cNvPr id="2" name="Text 0"/>
+          <p:cNvSpPr/>
+          <p:nvPr/>
+        </p:nvSpPr>
+        <p:spPr>
+          <a:xfrm>
+            <a:off x="8138160" y="1005840"/>
+            <a:ext cx="3840480" cy="822960"/>
+          </a:xfrm>
+          <a:prstGeom prst="rect">
+            <a:avLst/>
+          </a:prstGeom>
+          <a:noFill/>
+          <a:ln/>
+        </p:spPr>
+        <p:txBody>
+          <a:bodyPr wrap="square" lIns="0" tIns="0" rIns="0" bIns="0" rtlCol="0" anchor="ctr"/>
+          <a:lstStyle/>
+          <a:p>
+            <a:pPr algn="r" indent="0" marL="0">
+              <a:buNone/>
+            </a:pPr>
+            <a:r>
+              <a:rPr lang="en-US" sz="2000" i="1" dirty="0">
+                <a:solidFill>
+                  <a:srgbClr val="2E3236"/>
+                </a:solidFill>
+                <a:latin typeface="Bookman Old Style" pitchFamily="34" charset="0"/>
+                <a:ea typeface="Bookman Old Style" pitchFamily="34" charset="-122"/>
+                <a:cs typeface="Bookman Old Style" pitchFamily="34" charset="-120"/>
+              </a:rPr>
+              <a:t>BeReady</a:t>
+            </a:r>
+            <a:endParaRPr lang="en-US" sz="2000" dirty="0"/>
+          </a:p>
+        </p:txBody>
+      </p:sp>
+      <p:sp>
+        <p:nvSpPr>
+          <p:cNvPr id="3" name="Text 1"/>
+          <p:cNvSpPr/>
+          <p:nvPr/>
+        </p:nvSpPr>
+        <p:spPr>
+          <a:xfrm>
+            <a:off x="8138160" y="2194560"/>
+            <a:ext cx="3840480" cy="822960"/>
+          </a:xfrm>
+          <a:prstGeom prst="rect">
+            <a:avLst/>
+          </a:prstGeom>
+          <a:noFill/>
+          <a:ln/>
+        </p:spPr>
+        <p:txBody>
+          <a:bodyPr wrap="square" lIns="0" tIns="0" rIns="0" bIns="0" rtlCol="0" anchor="ctr"/>
+          <a:lstStyle/>
+          <a:p>
+            <a:pPr algn="r" indent="0" marL="0">
+              <a:buNone/>
+            </a:pPr>
+            <a:r>
+              <a:rPr lang="en-US" sz="2000" i="1" dirty="0">
+                <a:solidFill>
+                  <a:srgbClr val="2E3236"/>
+                </a:solidFill>
+                <a:latin typeface="Bookman Old Style" pitchFamily="34" charset="0"/>
+                <a:ea typeface="Bookman Old Style" pitchFamily="34" charset="-122"/>
+                <a:cs typeface="Bookman Old Style" pitchFamily="34" charset="-120"/>
+              </a:rPr>
+              <a:t>BeSurreal</a:t>
+            </a:r>
+            <a:endParaRPr lang="en-US" sz="2000" dirty="0"/>
+          </a:p>
+        </p:txBody>
+      </p:sp>
+      <p:sp>
+        <p:nvSpPr>
+          <p:cNvPr id="4" name="Text 2"/>
+          <p:cNvSpPr/>
+          <p:nvPr/>
+        </p:nvSpPr>
+        <p:spPr>
+          <a:xfrm>
+            <a:off x="8138160" y="3383280"/>
+            <a:ext cx="3840480" cy="822960"/>
+          </a:xfrm>
+          <a:prstGeom prst="rect">
+            <a:avLst/>
+          </a:prstGeom>
+          <a:noFill/>
+          <a:ln/>
+        </p:spPr>
+        <p:txBody>
+          <a:bodyPr wrap="square" lIns="0" tIns="0" rIns="0" bIns="0" rtlCol="0" anchor="ctr"/>
+          <a:lstStyle/>
+          <a:p>
+            <a:pPr algn="r" indent="0" marL="0">
+              <a:buNone/>
+            </a:pPr>
+            <a:r>
+              <a:rPr lang="en-US" sz="2000" i="1" dirty="0">
+                <a:solidFill>
+                  <a:srgbClr val="2E3236"/>
+                </a:solidFill>
+                <a:latin typeface="Bookman Old Style" pitchFamily="34" charset="0"/>
+                <a:ea typeface="Bookman Old Style" pitchFamily="34" charset="-122"/>
+                <a:cs typeface="Bookman Old Style" pitchFamily="34" charset="-120"/>
+              </a:rPr>
+              <a:t>BeInTheRoom</a:t>
+            </a:r>
+            <a:endParaRPr lang="en-US" sz="2000" dirty="0"/>
+          </a:p>
+        </p:txBody>
+      </p:sp>
+      <p:sp>
+        <p:nvSpPr>
+          <p:cNvPr id="5" name="Text 3"/>
+          <p:cNvSpPr/>
+          <p:nvPr/>
+        </p:nvSpPr>
+        <p:spPr>
+          <a:xfrm>
+            <a:off x="8138160" y="4572000"/>
+            <a:ext cx="3840480" cy="822960"/>
+          </a:xfrm>
+          <a:prstGeom prst="rect">
+            <a:avLst/>
+          </a:prstGeom>
+          <a:noFill/>
+          <a:ln/>
+        </p:spPr>
+        <p:txBody>
+          <a:bodyPr wrap="square" lIns="0" tIns="0" rIns="0" bIns="0" rtlCol="0" anchor="ctr"/>
+          <a:lstStyle/>
+          <a:p>
+            <a:pPr algn="r" indent="0" marL="0">
+              <a:buNone/>
+            </a:pPr>
+            <a:r>
+              <a:rPr lang="en-US" sz="2000" i="1" dirty="0">
+                <a:solidFill>
+                  <a:srgbClr val="2E3236"/>
+                </a:solidFill>
+                <a:latin typeface="Bookman Old Style" pitchFamily="34" charset="0"/>
+                <a:ea typeface="Bookman Old Style" pitchFamily="34" charset="-122"/>
+                <a:cs typeface="Bookman Old Style" pitchFamily="34" charset="-120"/>
+              </a:rPr>
+              <a:t>BeHistorical</a:t>
+            </a:r>
+            <a:endParaRPr lang="en-US" sz="2000" dirty="0"/>
+          </a:p>
+        </p:txBody>
+      </p:sp>
+      <p:sp>
+        <p:nvSpPr>
+          <p:cNvPr id="6" name="Text 4"/>
+          <p:cNvSpPr/>
+          <p:nvPr/>
+        </p:nvSpPr>
+        <p:spPr>
+          <a:xfrm>
+            <a:off x="640080" y="685800"/>
+            <a:ext cx="8229600" cy="365760"/>
+          </a:xfrm>
+          <a:prstGeom prst="rect">
+            <a:avLst/>
+          </a:prstGeom>
+          <a:noFill/>
+          <a:ln/>
+        </p:spPr>
+        <p:txBody>
+          <a:bodyPr wrap="square" lIns="0" tIns="0" rIns="0" bIns="0" rtlCol="0" anchor="ctr"/>
+          <a:lstStyle/>
+          <a:p>
+            <a:pPr indent="0" marL="0">
+              <a:buNone/>
+            </a:pPr>
+            <a:r>
+              <a:rPr lang="en-US" sz="1200" b="1" spc="400" kern="0" dirty="0">
+                <a:solidFill>
+                  <a:srgbClr val="C9A24B"/>
+                </a:solidFill>
+                <a:latin typeface="Consolas" pitchFamily="34" charset="0"/>
+                <a:ea typeface="Consolas" pitchFamily="34" charset="-122"/>
+                <a:cs typeface="Consolas" pitchFamily="34" charset="-120"/>
+              </a:rPr>
+              <a:t>WHERE THIS GOES</a:t>
+            </a:r>
+            <a:endParaRPr lang="en-US" sz="1200" dirty="0"/>
+          </a:p>
+        </p:txBody>
+      </p:sp>
+      <p:sp>
+        <p:nvSpPr>
+          <p:cNvPr id="7" name="Text 5"/>
+          <p:cNvSpPr/>
+          <p:nvPr/>
+        </p:nvSpPr>
+        <p:spPr>
+          <a:xfrm>
+            <a:off x="566928" y="1143000"/>
+            <a:ext cx="7772400" cy="1280160"/>
+          </a:xfrm>
+          <a:prstGeom prst="rect">
+            <a:avLst/>
+          </a:prstGeom>
+          <a:noFill/>
+          <a:ln/>
+        </p:spPr>
+        <p:txBody>
+          <a:bodyPr wrap="square" lIns="0" tIns="0" rIns="0" bIns="0" rtlCol="0" anchor="ctr"/>
+          <a:lstStyle/>
+          <a:p>
+            <a:pPr indent="0" marL="0">
+              <a:buNone/>
+            </a:pPr>
+            <a:r>
+              <a:rPr lang="en-US" sz="4400" b="1" dirty="0">
+                <a:solidFill>
+                  <a:srgbClr val="FFFFFF"/>
+                </a:solidFill>
+                <a:latin typeface="Bookman Old Style" pitchFamily="34" charset="0"/>
+                <a:ea typeface="Bookman Old Style" pitchFamily="34" charset="-122"/>
+                <a:cs typeface="Bookman Old Style" pitchFamily="34" charset="-120"/>
+              </a:rPr>
               <a:t>A method — not just a course</a:t>
             </a:r>
             <a:endParaRPr lang="en-US" sz="4400" dirty="0"/>
@@ -7612,7 +9268,7 @@
                 <a:ea typeface="Consolas" pitchFamily="34" charset="-122"/>
                 <a:cs typeface="Consolas" pitchFamily="34" charset="-120"/>
               </a:rPr>
-              <a:t>15 / 15</a:t>
+              <a:t>17 / 17</a:t>
             </a:r>
             <a:endParaRPr lang="en-US" sz="1100" dirty="0"/>
           </a:p>
@@ -8264,7 +9920,7 @@
                 <a:ea typeface="Consolas" pitchFamily="34" charset="-122"/>
                 <a:cs typeface="Consolas" pitchFamily="34" charset="-120"/>
               </a:rPr>
-              <a:t>02 / 15</a:t>
+              <a:t>02 / 17</a:t>
             </a:r>
             <a:endParaRPr lang="en-US" sz="1100" dirty="0"/>
           </a:p>
@@ -9120,7 +10776,7 @@
                 <a:ea typeface="Consolas" pitchFamily="34" charset="-122"/>
                 <a:cs typeface="Consolas" pitchFamily="34" charset="-120"/>
               </a:rPr>
-              <a:t>03 / 15</a:t>
+              <a:t>03 / 17</a:t>
             </a:r>
             <a:endParaRPr lang="en-US" sz="1100" dirty="0"/>
           </a:p>
@@ -9814,7 +11470,7 @@
                 <a:ea typeface="Consolas" pitchFamily="34" charset="-122"/>
                 <a:cs typeface="Consolas" pitchFamily="34" charset="-120"/>
               </a:rPr>
-              <a:t>04 / 15</a:t>
+              <a:t>04 / 17</a:t>
             </a:r>
             <a:endParaRPr lang="en-US" sz="1100" dirty="0"/>
           </a:p>
@@ -10700,7 +12356,7 @@
                 <a:ea typeface="Consolas" pitchFamily="34" charset="-122"/>
                 <a:cs typeface="Consolas" pitchFamily="34" charset="-120"/>
               </a:rPr>
-              <a:t>05 / 15</a:t>
+              <a:t>05 / 17</a:t>
             </a:r>
             <a:endParaRPr lang="en-US" sz="1100" dirty="0"/>
           </a:p>
@@ -11942,7 +13598,7 @@
                 <a:ea typeface="Consolas" pitchFamily="34" charset="-122"/>
                 <a:cs typeface="Consolas" pitchFamily="34" charset="-120"/>
               </a:rPr>
-              <a:t>06 / 15</a:t>
+              <a:t>06 / 17</a:t>
             </a:r>
             <a:endParaRPr lang="en-US" sz="1100" dirty="0"/>
           </a:p>
@@ -13271,7 +14927,7 @@
                 <a:ea typeface="Consolas" pitchFamily="34" charset="-122"/>
                 <a:cs typeface="Consolas" pitchFamily="34" charset="-120"/>
               </a:rPr>
-              <a:t>07 / 15</a:t>
+              <a:t>07 / 17</a:t>
             </a:r>
             <a:endParaRPr lang="en-US" sz="1100" dirty="0"/>
           </a:p>
@@ -14067,7 +15723,7 @@
                 <a:ea typeface="Consolas" pitchFamily="34" charset="-122"/>
                 <a:cs typeface="Consolas" pitchFamily="34" charset="-120"/>
               </a:rPr>
-              <a:t>08 / 15</a:t>
+              <a:t>08 / 17</a:t>
             </a:r>
             <a:endParaRPr lang="en-US" sz="1100" dirty="0"/>
           </a:p>
@@ -14863,7 +16519,7 @@
                 <a:ea typeface="Consolas" pitchFamily="34" charset="-122"/>
                 <a:cs typeface="Consolas" pitchFamily="34" charset="-120"/>
               </a:rPr>
-              <a:t>09 / 15</a:t>
+              <a:t>09 / 17</a:t>
             </a:r>
             <a:endParaRPr lang="en-US" sz="1100" dirty="0"/>
           </a:p>

--- a/pitch/BeHistorical-AndersonLogic-AI.pptx
+++ b/pitch/BeHistorical-AndersonLogic-AI.pptx
@@ -22,9 +22,10 @@
     <p:sldId id="270" r:id="rId16"/>
     <p:sldId id="271" r:id="rId17"/>
     <p:sldId id="272" r:id="rId18"/>
+    <p:sldId id="273" r:id="rId19"/>
   </p:sldIdLst>
   <p:notesMasterIdLst>
-    <p:notesMasterId r:id="rId19"/>
+    <p:notesMasterId r:id="rId20"/>
   </p:notesMasterIdLst>
   <p:sldSz cx="12192000" cy="6858000"/>
   <p:notesSz cx="6858000" cy="12192000"/>
@@ -1246,6 +1247,94 @@
             <a:fld id="{F7021451-1387-4CA6-816F-3879F97B5CBC}" type="slidenum">
               <a:rPr lang="en-US"/>
               <a:t>17</a:t>
+            </a:fld>
+            <a:endParaRPr lang="en-US"/>
+          </a:p>
+        </p:txBody>
+      </p:sp>
+    </p:spTree>
+    <p:extLst>
+      <p:ext uri="{BB962C8B-B14F-4D97-AF65-F5344CB8AC3E}">
+        <p14:creationId xmlns:p14="http://schemas.microsoft.com/office/powerpoint/2010/main" val="1024086991"/>
+      </p:ext>
+    </p:extLst>
+  </p:cSld>
+  <p:clrMapOvr>
+    <a:masterClrMapping/>
+  </p:clrMapOvr>
+</p:notes>
+</file>
+
+<file path=ppt/notesSlides/notesSlide18.xml><?xml version="1.0" encoding="utf-8"?>
+<p:notes xmlns:a="http://schemas.openxmlformats.org/drawingml/2006/main" xmlns:r="http://schemas.openxmlformats.org/officeDocument/2006/relationships" xmlns:p="http://schemas.openxmlformats.org/presentationml/2006/main">
+  <p:cSld>
+    <p:spTree>
+      <p:nvGrpSpPr>
+        <p:cNvPr id="1" name=""/>
+        <p:cNvGrpSpPr/>
+        <p:nvPr/>
+      </p:nvGrpSpPr>
+      <p:grpSpPr>
+        <a:xfrm>
+          <a:off x="0" y="0"/>
+          <a:ext cx="0" cy="0"/>
+          <a:chOff x="0" y="0"/>
+          <a:chExt cx="0" cy="0"/>
+        </a:xfrm>
+      </p:grpSpPr>
+      <p:sp>
+        <p:nvSpPr>
+          <p:cNvPr id="2" name="Slide Image Placeholder 1"/>
+          <p:cNvSpPr>
+            <a:spLocks noGrp="1" noRot="1" noChangeAspect="1"/>
+          </p:cNvSpPr>
+          <p:nvPr>
+            <p:ph type="sldImg"/>
+          </p:nvPr>
+        </p:nvSpPr>
+        <p:spPr/>
+      </p:sp>
+      <p:sp>
+        <p:nvSpPr>
+          <p:cNvPr id="3" name="Notes Placeholder 2"/>
+          <p:cNvSpPr>
+            <a:spLocks noGrp="1"/>
+          </p:cNvSpPr>
+          <p:nvPr>
+            <p:ph type="body" idx="1"/>
+          </p:nvPr>
+        </p:nvSpPr>
+        <p:spPr/>
+        <p:txBody>
+          <a:bodyPr/>
+          <a:lstStyle/>
+          <a:p>
+            <a:r>
+              <a:rPr lang="en-US" dirty="0"/>
+              <a:t/>
+            </a:r>
+            <a:endParaRPr lang="en-US" dirty="0"/>
+          </a:p>
+        </p:txBody>
+      </p:sp>
+      <p:sp>
+        <p:nvSpPr>
+          <p:cNvPr id="4" name="Slide Number Placeholder 3"/>
+          <p:cNvSpPr>
+            <a:spLocks noGrp="1"/>
+          </p:cNvSpPr>
+          <p:nvPr>
+            <p:ph type="sldNum" sz="quarter" idx="10"/>
+          </p:nvPr>
+        </p:nvSpPr>
+        <p:spPr/>
+        <p:txBody>
+          <a:bodyPr/>
+          <a:lstStyle/>
+          <a:p>
+            <a:fld id="{F7021451-1387-4CA6-816F-3879F97B5CBC}" type="slidenum">
+              <a:rPr lang="en-US"/>
+              <a:t>18</a:t>
             </a:fld>
             <a:endParaRPr lang="en-US"/>
           </a:p>
@@ -2614,7 +2703,7 @@
                 <a:ea typeface="Consolas" pitchFamily="34" charset="-122"/>
                 <a:cs typeface="Consolas" pitchFamily="34" charset="-120"/>
               </a:rPr>
-              <a:t>01 / 17</a:t>
+              <a:t>01 / 18</a:t>
             </a:r>
             <a:endParaRPr lang="en-US" sz="1100" dirty="0"/>
           </a:p>
@@ -3410,7 +3499,7 @@
                 <a:ea typeface="Consolas" pitchFamily="34" charset="-122"/>
                 <a:cs typeface="Consolas" pitchFamily="34" charset="-120"/>
               </a:rPr>
-              <a:t>10 / 17</a:t>
+              <a:t>10 / 18</a:t>
             </a:r>
             <a:endParaRPr lang="en-US" sz="1100" dirty="0"/>
           </a:p>
@@ -4299,7 +4388,7 @@
                 <a:ea typeface="Consolas" pitchFamily="34" charset="-122"/>
                 <a:cs typeface="Consolas" pitchFamily="34" charset="-120"/>
               </a:rPr>
-              <a:t>11 / 17</a:t>
+              <a:t>11 / 18</a:t>
             </a:r>
             <a:endParaRPr lang="en-US" sz="1100" dirty="0"/>
           </a:p>
@@ -4960,7 +5049,7 @@
                 <a:ea typeface="Consolas" pitchFamily="34" charset="-122"/>
                 <a:cs typeface="Consolas" pitchFamily="34" charset="-120"/>
               </a:rPr>
-              <a:t>12 / 17</a:t>
+              <a:t>12 / 18</a:t>
             </a:r>
             <a:endParaRPr lang="en-US" sz="1100" dirty="0"/>
           </a:p>
@@ -5777,7 +5866,7 @@
                 <a:ea typeface="Consolas" pitchFamily="34" charset="-122"/>
                 <a:cs typeface="Consolas" pitchFamily="34" charset="-120"/>
               </a:rPr>
-              <a:t>13 / 17</a:t>
+              <a:t>13 / 18</a:t>
             </a:r>
             <a:endParaRPr lang="en-US" sz="1100" dirty="0"/>
           </a:p>
@@ -6468,7 +6557,7 @@
                 <a:ea typeface="Consolas" pitchFamily="34" charset="-122"/>
                 <a:cs typeface="Consolas" pitchFamily="34" charset="-120"/>
               </a:rPr>
-              <a:t>14 / 17</a:t>
+              <a:t>14 / 18</a:t>
             </a:r>
             <a:endParaRPr lang="en-US" sz="1100" dirty="0"/>
           </a:p>
@@ -7390,7 +7479,7 @@
                 <a:ea typeface="Consolas" pitchFamily="34" charset="-122"/>
                 <a:cs typeface="Consolas" pitchFamily="34" charset="-120"/>
               </a:rPr>
-              <a:t>15 / 17</a:t>
+              <a:t>15 / 18</a:t>
             </a:r>
             <a:endParaRPr lang="en-US" sz="1100" dirty="0"/>
           </a:p>
@@ -8616,7 +8705,7 @@
                 <a:ea typeface="Consolas" pitchFamily="34" charset="-122"/>
                 <a:cs typeface="Consolas" pitchFamily="34" charset="-120"/>
               </a:rPr>
-              <a:t>16 / 17</a:t>
+              <a:t>17 / 18</a:t>
             </a:r>
             <a:endParaRPr lang="en-US" sz="1100" dirty="0"/>
           </a:p>
@@ -8633,6 +8722,630 @@
 <file path=ppt/slides/slide17.xml><?xml version="1.0" encoding="utf-8"?>
 <p:sld xmlns:a="http://schemas.openxmlformats.org/drawingml/2006/main" xmlns:r="http://schemas.openxmlformats.org/officeDocument/2006/relationships" xmlns:p="http://schemas.openxmlformats.org/presentationml/2006/main">
   <p:cSld name="Slide 17">
+    <p:bg>
+      <p:bgPr>
+        <a:solidFill>
+          <a:srgbClr val="F4EEE2"/>
+        </a:solidFill>
+      </p:bgPr>
+    </p:bg>
+    <p:spTree>
+      <p:nvGrpSpPr>
+        <p:cNvPr id="1" name=""/>
+        <p:cNvGrpSpPr/>
+        <p:nvPr/>
+      </p:nvGrpSpPr>
+      <p:grpSpPr>
+        <a:xfrm>
+          <a:off x="0" y="0"/>
+          <a:ext cx="0" cy="0"/>
+          <a:chOff x="0" y="0"/>
+          <a:chExt cx="0" cy="0"/>
+        </a:xfrm>
+      </p:grpSpPr>
+      <p:sp>
+        <p:nvSpPr>
+          <p:cNvPr id="2" name="Text 0"/>
+          <p:cNvSpPr/>
+          <p:nvPr/>
+        </p:nvSpPr>
+        <p:spPr>
+          <a:xfrm>
+            <a:off x="640080" y="548640"/>
+            <a:ext cx="8229600" cy="274320"/>
+          </a:xfrm>
+          <a:prstGeom prst="rect">
+            <a:avLst/>
+          </a:prstGeom>
+          <a:noFill/>
+          <a:ln/>
+        </p:spPr>
+        <p:txBody>
+          <a:bodyPr wrap="square" lIns="0" tIns="0" rIns="0" bIns="0" rtlCol="0" anchor="ctr"/>
+          <a:lstStyle/>
+          <a:p>
+            <a:pPr algn="l" indent="0" marL="0">
+              <a:buNone/>
+            </a:pPr>
+            <a:r>
+              <a:rPr lang="en-US" sz="1200" b="1" spc="300" kern="0" dirty="0">
+                <a:solidFill>
+                  <a:srgbClr val="9A7A28"/>
+                </a:solidFill>
+                <a:latin typeface="Consolas" pitchFamily="34" charset="0"/>
+                <a:ea typeface="Consolas" pitchFamily="34" charset="-122"/>
+                <a:cs typeface="Consolas" pitchFamily="34" charset="-120"/>
+              </a:rPr>
+              <a:t>MEASURING IMPACT</a:t>
+            </a:r>
+            <a:endParaRPr lang="en-US" sz="1200" dirty="0"/>
+          </a:p>
+        </p:txBody>
+      </p:sp>
+      <p:sp>
+        <p:nvSpPr>
+          <p:cNvPr id="3" name="Text 1"/>
+          <p:cNvSpPr/>
+          <p:nvPr/>
+        </p:nvSpPr>
+        <p:spPr>
+          <a:xfrm>
+            <a:off x="603504" y="868680"/>
+            <a:ext cx="10972800" cy="731520"/>
+          </a:xfrm>
+          <a:prstGeom prst="rect">
+            <a:avLst/>
+          </a:prstGeom>
+          <a:noFill/>
+          <a:ln/>
+        </p:spPr>
+        <p:txBody>
+          <a:bodyPr wrap="square" lIns="0" tIns="0" rIns="0" bIns="0" rtlCol="0" anchor="ctr"/>
+          <a:lstStyle/>
+          <a:p>
+            <a:pPr indent="0" marL="0">
+              <a:buNone/>
+            </a:pPr>
+            <a:r>
+              <a:rPr lang="en-US" sz="3200" b="1" dirty="0">
+                <a:solidFill>
+                  <a:srgbClr val="2B2723"/>
+                </a:solidFill>
+                <a:latin typeface="Bookman Old Style" pitchFamily="34" charset="0"/>
+                <a:ea typeface="Bookman Old Style" pitchFamily="34" charset="-122"/>
+                <a:cs typeface="Bookman Old Style" pitchFamily="34" charset="-120"/>
+              </a:rPr>
+              <a:t>How we'll know it's working</a:t>
+            </a:r>
+            <a:endParaRPr lang="en-US" sz="3200" dirty="0"/>
+          </a:p>
+        </p:txBody>
+      </p:sp>
+      <p:sp>
+        <p:nvSpPr>
+          <p:cNvPr id="4" name="Text 2"/>
+          <p:cNvSpPr/>
+          <p:nvPr/>
+        </p:nvSpPr>
+        <p:spPr>
+          <a:xfrm>
+            <a:off x="640080" y="1691640"/>
+            <a:ext cx="10972800" cy="548640"/>
+          </a:xfrm>
+          <a:prstGeom prst="rect">
+            <a:avLst/>
+          </a:prstGeom>
+          <a:noFill/>
+          <a:ln/>
+        </p:spPr>
+        <p:txBody>
+          <a:bodyPr wrap="square" lIns="0" tIns="0" rIns="0" bIns="0" rtlCol="0" anchor="ctr"/>
+          <a:lstStyle/>
+          <a:p>
+            <a:pPr indent="0" marL="0">
+              <a:buNone/>
+            </a:pPr>
+            <a:r>
+              <a:rPr lang="en-US" sz="1500" dirty="0">
+                <a:solidFill>
+                  <a:srgbClr val="6E675C"/>
+                </a:solidFill>
+                <a:latin typeface="Calibri" pitchFamily="34" charset="0"/>
+                <a:ea typeface="Calibri" pitchFamily="34" charset="-122"/>
+                <a:cs typeface="Calibri" pitchFamily="34" charset="-120"/>
+              </a:rPr>
+              <a:t>Year one is the baseline. Here's what BeHistorical already lets us see — and the outcomes we'll measure against it.</a:t>
+            </a:r>
+            <a:endParaRPr lang="en-US" sz="1500" dirty="0"/>
+          </a:p>
+        </p:txBody>
+      </p:sp>
+      <p:sp>
+        <p:nvSpPr>
+          <p:cNvPr id="5" name="Shape 3"/>
+          <p:cNvSpPr/>
+          <p:nvPr/>
+        </p:nvSpPr>
+        <p:spPr>
+          <a:xfrm>
+            <a:off x="640080" y="2377440"/>
+            <a:ext cx="5394960" cy="2880360"/>
+          </a:xfrm>
+          <a:prstGeom prst="roundRect">
+            <a:avLst>
+              <a:gd name="adj" fmla="val 3810"/>
+            </a:avLst>
+          </a:prstGeom>
+          <a:solidFill>
+            <a:srgbClr val="FCF8F0"/>
+          </a:solidFill>
+          <a:ln w="12700">
+            <a:solidFill>
+              <a:srgbClr val="E4DBC9"/>
+            </a:solidFill>
+            <a:prstDash val="solid"/>
+          </a:ln>
+        </p:spPr>
+      </p:sp>
+      <p:sp>
+        <p:nvSpPr>
+          <p:cNvPr id="6" name="Text 4"/>
+          <p:cNvSpPr/>
+          <p:nvPr/>
+        </p:nvSpPr>
+        <p:spPr>
+          <a:xfrm>
+            <a:off x="960120" y="2651760"/>
+            <a:ext cx="4754880" cy="274320"/>
+          </a:xfrm>
+          <a:prstGeom prst="rect">
+            <a:avLst/>
+          </a:prstGeom>
+          <a:noFill/>
+          <a:ln/>
+        </p:spPr>
+        <p:txBody>
+          <a:bodyPr wrap="square" lIns="0" tIns="0" rIns="0" bIns="0" rtlCol="0" anchor="ctr"/>
+          <a:lstStyle/>
+          <a:p>
+            <a:pPr indent="0" marL="0">
+              <a:buNone/>
+            </a:pPr>
+            <a:r>
+              <a:rPr lang="en-US" sz="1100" b="1" spc="100" kern="0" dirty="0">
+                <a:solidFill>
+                  <a:srgbClr val="3D7A4D"/>
+                </a:solidFill>
+                <a:latin typeface="Consolas" pitchFamily="34" charset="0"/>
+                <a:ea typeface="Consolas" pitchFamily="34" charset="-122"/>
+                <a:cs typeface="Consolas" pitchFamily="34" charset="-120"/>
+              </a:rPr>
+              <a:t>✓ WHAT WE CAN ALREADY SEE</a:t>
+            </a:r>
+            <a:endParaRPr lang="en-US" sz="1100" dirty="0"/>
+          </a:p>
+        </p:txBody>
+      </p:sp>
+      <p:sp>
+        <p:nvSpPr>
+          <p:cNvPr id="7" name="Text 5"/>
+          <p:cNvSpPr/>
+          <p:nvPr/>
+        </p:nvSpPr>
+        <p:spPr>
+          <a:xfrm>
+            <a:off x="960120" y="3090672"/>
+            <a:ext cx="4709160" cy="2011680"/>
+          </a:xfrm>
+          <a:prstGeom prst="rect">
+            <a:avLst/>
+          </a:prstGeom>
+          <a:noFill/>
+          <a:ln/>
+        </p:spPr>
+        <p:txBody>
+          <a:bodyPr wrap="square" lIns="0" tIns="0" rIns="0" bIns="0" rtlCol="0" anchor="t"/>
+          <a:lstStyle/>
+          <a:p>
+            <a:pPr marL="177800" indent="-177800">
+              <a:spcAft>
+                <a:spcPts val="1000"/>
+              </a:spcAft>
+              <a:buSzPct val="100000"/>
+              <a:buChar char="•"/>
+            </a:pPr>
+            <a:r>
+              <a:rPr lang="en-US" sz="1350" dirty="0">
+                <a:solidFill>
+                  <a:srgbClr val="6E675C"/>
+                </a:solidFill>
+                <a:latin typeface="Calibri" pitchFamily="34" charset="0"/>
+                <a:ea typeface="Calibri" pitchFamily="34" charset="-122"/>
+                <a:cs typeface="Calibri" pitchFamily="34" charset="-120"/>
+              </a:rPr>
+              <a:t>Participation &amp; completion, per lesson and module</a:t>
+            </a:r>
+            <a:endParaRPr lang="en-US" sz="1350" dirty="0"/>
+          </a:p>
+          <a:p>
+            <a:pPr marL="177800" indent="-177800">
+              <a:spcAft>
+                <a:spcPts val="1000"/>
+              </a:spcAft>
+              <a:buSzPct val="100000"/>
+              <a:buChar char="•"/>
+            </a:pPr>
+            <a:r>
+              <a:rPr lang="en-US" sz="1350" dirty="0">
+                <a:solidFill>
+                  <a:srgbClr val="6E675C"/>
+                </a:solidFill>
+                <a:latin typeface="Calibri" pitchFamily="34" charset="0"/>
+                <a:ea typeface="Calibri" pitchFamily="34" charset="-122"/>
+                <a:cs typeface="Calibri" pitchFamily="34" charset="-120"/>
+              </a:rPr>
+              <a:t>Confidence trends across a unit (1–5 self-ratings)</a:t>
+            </a:r>
+            <a:endParaRPr lang="en-US" sz="1350" dirty="0"/>
+          </a:p>
+          <a:p>
+            <a:pPr marL="177800" indent="-177800">
+              <a:spcAft>
+                <a:spcPts val="1000"/>
+              </a:spcAft>
+              <a:buSzPct val="100000"/>
+              <a:buChar char="•"/>
+            </a:pPr>
+            <a:r>
+              <a:rPr lang="en-US" sz="1350" dirty="0">
+                <a:solidFill>
+                  <a:srgbClr val="6E675C"/>
+                </a:solidFill>
+                <a:latin typeface="Calibri" pitchFamily="34" charset="0"/>
+                <a:ea typeface="Calibri" pitchFamily="34" charset="-122"/>
+                <a:cs typeface="Calibri" pitchFamily="34" charset="-120"/>
+              </a:rPr>
+              <a:t>AI-coaching engagement — coaching rounds per student</a:t>
+            </a:r>
+            <a:endParaRPr lang="en-US" sz="1350" dirty="0"/>
+          </a:p>
+          <a:p>
+            <a:pPr marL="177800" indent="-177800">
+              <a:spcAft>
+                <a:spcPts val="1000"/>
+              </a:spcAft>
+              <a:buSzPct val="100000"/>
+              <a:buChar char="•"/>
+            </a:pPr>
+            <a:r>
+              <a:rPr lang="en-US" sz="1350" dirty="0">
+                <a:solidFill>
+                  <a:srgbClr val="6E675C"/>
+                </a:solidFill>
+                <a:latin typeface="Calibri" pitchFamily="34" charset="0"/>
+                <a:ea typeface="Calibri" pitchFamily="34" charset="-122"/>
+                <a:cs typeface="Calibri" pitchFamily="34" charset="-120"/>
+              </a:rPr>
+              <a:t>Response-quality signals — evidence use &amp; reasoning language</a:t>
+            </a:r>
+            <a:endParaRPr lang="en-US" sz="1350" dirty="0"/>
+          </a:p>
+        </p:txBody>
+      </p:sp>
+      <p:sp>
+        <p:nvSpPr>
+          <p:cNvPr id="8" name="Shape 6"/>
+          <p:cNvSpPr/>
+          <p:nvPr/>
+        </p:nvSpPr>
+        <p:spPr>
+          <a:xfrm>
+            <a:off x="6126480" y="2377440"/>
+            <a:ext cx="5394960" cy="2880360"/>
+          </a:xfrm>
+          <a:prstGeom prst="roundRect">
+            <a:avLst>
+              <a:gd name="adj" fmla="val 3810"/>
+            </a:avLst>
+          </a:prstGeom>
+          <a:solidFill>
+            <a:srgbClr val="FCF8F0"/>
+          </a:solidFill>
+          <a:ln w="12700">
+            <a:solidFill>
+              <a:srgbClr val="E4DBC9"/>
+            </a:solidFill>
+            <a:prstDash val="solid"/>
+          </a:ln>
+        </p:spPr>
+      </p:sp>
+      <p:sp>
+        <p:nvSpPr>
+          <p:cNvPr id="9" name="Text 7"/>
+          <p:cNvSpPr/>
+          <p:nvPr/>
+        </p:nvSpPr>
+        <p:spPr>
+          <a:xfrm>
+            <a:off x="6446520" y="2651760"/>
+            <a:ext cx="4754880" cy="274320"/>
+          </a:xfrm>
+          <a:prstGeom prst="rect">
+            <a:avLst/>
+          </a:prstGeom>
+          <a:noFill/>
+          <a:ln/>
+        </p:spPr>
+        <p:txBody>
+          <a:bodyPr wrap="square" lIns="0" tIns="0" rIns="0" bIns="0" rtlCol="0" anchor="ctr"/>
+          <a:lstStyle/>
+          <a:p>
+            <a:pPr indent="0" marL="0">
+              <a:buNone/>
+            </a:pPr>
+            <a:r>
+              <a:rPr lang="en-US" sz="1100" b="1" spc="100" kern="0" dirty="0">
+                <a:solidFill>
+                  <a:srgbClr val="9A7A28"/>
+                </a:solidFill>
+                <a:latin typeface="Consolas" pitchFamily="34" charset="0"/>
+                <a:ea typeface="Consolas" pitchFamily="34" charset="-122"/>
+                <a:cs typeface="Consolas" pitchFamily="34" charset="-120"/>
+              </a:rPr>
+              <a:t>◎ WHAT WE'LL PROVE</a:t>
+            </a:r>
+            <a:endParaRPr lang="en-US" sz="1100" dirty="0"/>
+          </a:p>
+        </p:txBody>
+      </p:sp>
+      <p:sp>
+        <p:nvSpPr>
+          <p:cNvPr id="10" name="Text 8"/>
+          <p:cNvSpPr/>
+          <p:nvPr/>
+        </p:nvSpPr>
+        <p:spPr>
+          <a:xfrm>
+            <a:off x="6446520" y="3090672"/>
+            <a:ext cx="4709160" cy="2011680"/>
+          </a:xfrm>
+          <a:prstGeom prst="rect">
+            <a:avLst/>
+          </a:prstGeom>
+          <a:noFill/>
+          <a:ln/>
+        </p:spPr>
+        <p:txBody>
+          <a:bodyPr wrap="square" lIns="0" tIns="0" rIns="0" bIns="0" rtlCol="0" anchor="t"/>
+          <a:lstStyle/>
+          <a:p>
+            <a:pPr marL="177800" indent="-177800">
+              <a:spcAft>
+                <a:spcPts val="1000"/>
+              </a:spcAft>
+              <a:buSzPct val="100000"/>
+              <a:buChar char="•"/>
+            </a:pPr>
+            <a:r>
+              <a:rPr lang="en-US" sz="1350" dirty="0">
+                <a:solidFill>
+                  <a:srgbClr val="6E675C"/>
+                </a:solidFill>
+                <a:latin typeface="Calibri" pitchFamily="34" charset="0"/>
+                <a:ea typeface="Calibri" pitchFamily="34" charset="-122"/>
+                <a:cs typeface="Calibri" pitchFamily="34" charset="-120"/>
+              </a:rPr>
+              <a:t>AP exam 3+ rate vs. prior years</a:t>
+            </a:r>
+            <a:endParaRPr lang="en-US" sz="1350" dirty="0"/>
+          </a:p>
+          <a:p>
+            <a:pPr marL="177800" indent="-177800">
+              <a:spcAft>
+                <a:spcPts val="1000"/>
+              </a:spcAft>
+              <a:buSzPct val="100000"/>
+              <a:buChar char="•"/>
+            </a:pPr>
+            <a:r>
+              <a:rPr lang="en-US" sz="1350" dirty="0">
+                <a:solidFill>
+                  <a:srgbClr val="6E675C"/>
+                </a:solidFill>
+                <a:latin typeface="Calibri" pitchFamily="34" charset="0"/>
+                <a:ea typeface="Calibri" pitchFamily="34" charset="-122"/>
+                <a:cs typeface="Calibri" pitchFamily="34" charset="-120"/>
+              </a:rPr>
+              <a:t>SAQ / DBQ rubric growth, pre → post</a:t>
+            </a:r>
+            <a:endParaRPr lang="en-US" sz="1350" dirty="0"/>
+          </a:p>
+          <a:p>
+            <a:pPr marL="177800" indent="-177800">
+              <a:spcAft>
+                <a:spcPts val="1000"/>
+              </a:spcAft>
+              <a:buSzPct val="100000"/>
+              <a:buChar char="•"/>
+            </a:pPr>
+            <a:r>
+              <a:rPr lang="en-US" sz="1350" dirty="0">
+                <a:solidFill>
+                  <a:srgbClr val="6E675C"/>
+                </a:solidFill>
+                <a:latin typeface="Calibri" pitchFamily="34" charset="0"/>
+                <a:ea typeface="Calibri" pitchFamily="34" charset="-122"/>
+                <a:cs typeface="Calibri" pitchFamily="34" charset="-120"/>
+              </a:rPr>
+              <a:t>MCQ mastery by Key Concept</a:t>
+            </a:r>
+            <a:endParaRPr lang="en-US" sz="1350" dirty="0"/>
+          </a:p>
+          <a:p>
+            <a:pPr marL="177800" indent="-177800">
+              <a:spcAft>
+                <a:spcPts val="1000"/>
+              </a:spcAft>
+              <a:buSzPct val="100000"/>
+              <a:buChar char="•"/>
+            </a:pPr>
+            <a:r>
+              <a:rPr lang="en-US" sz="1350" dirty="0">
+                <a:solidFill>
+                  <a:srgbClr val="6E675C"/>
+                </a:solidFill>
+                <a:latin typeface="Calibri" pitchFamily="34" charset="0"/>
+                <a:ea typeface="Calibri" pitchFamily="34" charset="-122"/>
+                <a:cs typeface="Calibri" pitchFamily="34" charset="-120"/>
+              </a:rPr>
+              <a:t>Family engagement — Dispatch open &amp; click rates</a:t>
+            </a:r>
+            <a:endParaRPr lang="en-US" sz="1350" dirty="0"/>
+          </a:p>
+        </p:txBody>
+      </p:sp>
+      <p:sp>
+        <p:nvSpPr>
+          <p:cNvPr id="11" name="Text 9"/>
+          <p:cNvSpPr/>
+          <p:nvPr/>
+        </p:nvSpPr>
+        <p:spPr>
+          <a:xfrm>
+            <a:off x="640080" y="5486400"/>
+            <a:ext cx="10972800" cy="365760"/>
+          </a:xfrm>
+          <a:prstGeom prst="rect">
+            <a:avLst/>
+          </a:prstGeom>
+          <a:noFill/>
+          <a:ln/>
+        </p:spPr>
+        <p:txBody>
+          <a:bodyPr wrap="square" lIns="0" tIns="0" rIns="0" bIns="0" rtlCol="0" anchor="ctr"/>
+          <a:lstStyle/>
+          <a:p>
+            <a:pPr indent="0" marL="0">
+              <a:buNone/>
+            </a:pPr>
+            <a:r>
+              <a:rPr lang="en-US" sz="1100" dirty="0">
+                <a:solidFill>
+                  <a:srgbClr val="6E675C"/>
+                </a:solidFill>
+                <a:latin typeface="Consolas" pitchFamily="34" charset="0"/>
+                <a:ea typeface="Consolas" pitchFamily="34" charset="-122"/>
+                <a:cs typeface="Consolas" pitchFamily="34" charset="-120"/>
+              </a:rPr>
+              <a:t>Method: pre/post on CED-aligned items · section-to-section comparison · tracked in the Teacher Hub · baseline year 2026–27</a:t>
+            </a:r>
+            <a:endParaRPr lang="en-US" sz="1100" dirty="0"/>
+          </a:p>
+        </p:txBody>
+      </p:sp>
+      <p:sp>
+        <p:nvSpPr>
+          <p:cNvPr id="12" name="Text 10"/>
+          <p:cNvSpPr/>
+          <p:nvPr/>
+        </p:nvSpPr>
+        <p:spPr>
+          <a:xfrm>
+            <a:off x="502920" y="6400800"/>
+            <a:ext cx="7315200" cy="274320"/>
+          </a:xfrm>
+          <a:prstGeom prst="rect">
+            <a:avLst/>
+          </a:prstGeom>
+          <a:noFill/>
+          <a:ln/>
+        </p:spPr>
+        <p:txBody>
+          <a:bodyPr wrap="square" lIns="0" tIns="0" rIns="0" bIns="0" rtlCol="0" anchor="ctr"/>
+          <a:lstStyle/>
+          <a:p>
+            <a:pPr algn="l" indent="0" marL="0">
+              <a:buNone/>
+            </a:pPr>
+            <a:r>
+              <a:rPr lang="en-US" sz="1000" b="1" dirty="0">
+                <a:solidFill>
+                  <a:srgbClr val="C9A24B"/>
+                </a:solidFill>
+                <a:latin typeface="Calibri" pitchFamily="34" charset="0"/>
+                <a:ea typeface="Calibri" pitchFamily="34" charset="-122"/>
+                <a:cs typeface="Calibri" pitchFamily="34" charset="-120"/>
+              </a:rPr>
+              <a:t>AndersonLogic AI</a:t>
+            </a:r>
+            <a:pPr algn="l" indent="0" marL="0">
+              <a:buNone/>
+            </a:pPr>
+            <a:r>
+              <a:rPr lang="en-US" sz="1000" dirty="0">
+                <a:solidFill>
+                  <a:srgbClr val="6E675C"/>
+                </a:solidFill>
+                <a:latin typeface="Calibri" pitchFamily="34" charset="0"/>
+                <a:ea typeface="Calibri" pitchFamily="34" charset="-122"/>
+                <a:cs typeface="Calibri" pitchFamily="34" charset="-120"/>
+              </a:rPr>
+              <a:t>   ·   BeHistorical</a:t>
+            </a:r>
+            <a:endParaRPr lang="en-US" sz="1000" dirty="0"/>
+          </a:p>
+        </p:txBody>
+      </p:sp>
+      <p:sp>
+        <p:nvSpPr>
+          <p:cNvPr id="13" name="Text 11"/>
+          <p:cNvSpPr/>
+          <p:nvPr/>
+        </p:nvSpPr>
+        <p:spPr>
+          <a:xfrm>
+            <a:off x="10607040" y="6355080"/>
+            <a:ext cx="1097280" cy="320040"/>
+          </a:xfrm>
+          <a:prstGeom prst="rect">
+            <a:avLst/>
+          </a:prstGeom>
+          <a:noFill/>
+          <a:ln/>
+        </p:spPr>
+        <p:txBody>
+          <a:bodyPr wrap="square" lIns="0" tIns="0" rIns="0" bIns="0" rtlCol="0" anchor="ctr"/>
+          <a:lstStyle/>
+          <a:p>
+            <a:pPr algn="r" indent="0" marL="0">
+              <a:buNone/>
+            </a:pPr>
+            <a:r>
+              <a:rPr lang="en-US" sz="1100" b="1" dirty="0">
+                <a:solidFill>
+                  <a:srgbClr val="6E675C"/>
+                </a:solidFill>
+                <a:latin typeface="Consolas" pitchFamily="34" charset="0"/>
+                <a:ea typeface="Consolas" pitchFamily="34" charset="-122"/>
+                <a:cs typeface="Consolas" pitchFamily="34" charset="-120"/>
+              </a:rPr>
+              <a:t>16 / 18</a:t>
+            </a:r>
+            <a:endParaRPr lang="en-US" sz="1100" dirty="0"/>
+          </a:p>
+        </p:txBody>
+      </p:sp>
+    </p:spTree>
+  </p:cSld>
+  <p:clrMapOvr>
+    <a:masterClrMapping/>
+  </p:clrMapOvr>
+</p:sld>
+</file>
+
+<file path=ppt/slides/slide18.xml><?xml version="1.0" encoding="utf-8"?>
+<p:sld xmlns:a="http://schemas.openxmlformats.org/drawingml/2006/main" xmlns:r="http://schemas.openxmlformats.org/officeDocument/2006/relationships" xmlns:p="http://schemas.openxmlformats.org/presentationml/2006/main">
+  <p:cSld name="Slide 18">
     <p:bg>
       <p:bgPr>
         <a:solidFill>
@@ -9268,7 +9981,7 @@
                 <a:ea typeface="Consolas" pitchFamily="34" charset="-122"/>
                 <a:cs typeface="Consolas" pitchFamily="34" charset="-120"/>
               </a:rPr>
-              <a:t>17 / 17</a:t>
+              <a:t>18 / 18</a:t>
             </a:r>
             <a:endParaRPr lang="en-US" sz="1100" dirty="0"/>
           </a:p>
@@ -9920,7 +10633,7 @@
                 <a:ea typeface="Consolas" pitchFamily="34" charset="-122"/>
                 <a:cs typeface="Consolas" pitchFamily="34" charset="-120"/>
               </a:rPr>
-              <a:t>02 / 17</a:t>
+              <a:t>02 / 18</a:t>
             </a:r>
             <a:endParaRPr lang="en-US" sz="1100" dirty="0"/>
           </a:p>
@@ -10776,7 +11489,7 @@
                 <a:ea typeface="Consolas" pitchFamily="34" charset="-122"/>
                 <a:cs typeface="Consolas" pitchFamily="34" charset="-120"/>
               </a:rPr>
-              <a:t>03 / 17</a:t>
+              <a:t>03 / 18</a:t>
             </a:r>
             <a:endParaRPr lang="en-US" sz="1100" dirty="0"/>
           </a:p>
@@ -11470,7 +12183,7 @@
                 <a:ea typeface="Consolas" pitchFamily="34" charset="-122"/>
                 <a:cs typeface="Consolas" pitchFamily="34" charset="-120"/>
               </a:rPr>
-              <a:t>04 / 17</a:t>
+              <a:t>04 / 18</a:t>
             </a:r>
             <a:endParaRPr lang="en-US" sz="1100" dirty="0"/>
           </a:p>
@@ -12356,7 +13069,7 @@
                 <a:ea typeface="Consolas" pitchFamily="34" charset="-122"/>
                 <a:cs typeface="Consolas" pitchFamily="34" charset="-120"/>
               </a:rPr>
-              <a:t>05 / 17</a:t>
+              <a:t>05 / 18</a:t>
             </a:r>
             <a:endParaRPr lang="en-US" sz="1100" dirty="0"/>
           </a:p>
@@ -13598,7 +14311,7 @@
                 <a:ea typeface="Consolas" pitchFamily="34" charset="-122"/>
                 <a:cs typeface="Consolas" pitchFamily="34" charset="-120"/>
               </a:rPr>
-              <a:t>06 / 17</a:t>
+              <a:t>06 / 18</a:t>
             </a:r>
             <a:endParaRPr lang="en-US" sz="1100" dirty="0"/>
           </a:p>
@@ -14927,7 +15640,7 @@
                 <a:ea typeface="Consolas" pitchFamily="34" charset="-122"/>
                 <a:cs typeface="Consolas" pitchFamily="34" charset="-120"/>
               </a:rPr>
-              <a:t>07 / 17</a:t>
+              <a:t>07 / 18</a:t>
             </a:r>
             <a:endParaRPr lang="en-US" sz="1100" dirty="0"/>
           </a:p>
@@ -15723,7 +16436,7 @@
                 <a:ea typeface="Consolas" pitchFamily="34" charset="-122"/>
                 <a:cs typeface="Consolas" pitchFamily="34" charset="-120"/>
               </a:rPr>
-              <a:t>08 / 17</a:t>
+              <a:t>08 / 18</a:t>
             </a:r>
             <a:endParaRPr lang="en-US" sz="1100" dirty="0"/>
           </a:p>
@@ -16519,7 +17232,7 @@
                 <a:ea typeface="Consolas" pitchFamily="34" charset="-122"/>
                 <a:cs typeface="Consolas" pitchFamily="34" charset="-120"/>
               </a:rPr>
-              <a:t>09 / 17</a:t>
+              <a:t>09 / 18</a:t>
             </a:r>
             <a:endParaRPr lang="en-US" sz="1100" dirty="0"/>
           </a:p>
